--- a/pp/Presentation.pptx
+++ b/pp/Presentation.pptx
@@ -6,6 +6,10 @@
   </p:sldMasterIdLst>
   <p:sldIdLst>
     <p:sldId id="256" r:id="rId2"/>
+    <p:sldId id="257" r:id="rId3"/>
+    <p:sldId id="258" r:id="rId4"/>
+    <p:sldId id="259" r:id="rId5"/>
+    <p:sldId id="260" r:id="rId6"/>
   </p:sldIdLst>
   <p:sldSz cx="12192000" cy="6858000"/>
   <p:notesSz cx="6858000" cy="9144000"/>
@@ -104,6 +108,11 @@
       </a:defRPr>
     </a:lvl9pPr>
   </p:defaultTextStyle>
+  <p:extLst>
+    <p:ext uri="{EFAFB233-063F-42B5-8137-9DF3F51BA10A}">
+      <p15:sldGuideLst xmlns:p15="http://schemas.microsoft.com/office/powerpoint/2012/main"/>
+    </p:ext>
+  </p:extLst>
 </p:presentation>
 </file>
 
@@ -3307,6 +3316,14 @@
 <file path=ppt/slides/slide1.xml><?xml version="1.0" encoding="utf-8"?>
 <p:sld xmlns:a="http://schemas.openxmlformats.org/drawingml/2006/main" xmlns:r="http://schemas.openxmlformats.org/officeDocument/2006/relationships" xmlns:p="http://schemas.openxmlformats.org/presentationml/2006/main">
   <p:cSld>
+    <p:bg>
+      <p:bgPr>
+        <a:solidFill>
+          <a:schemeClr val="bg1"/>
+        </a:solidFill>
+        <a:effectLst/>
+      </p:bgPr>
+    </p:bg>
     <p:spTree>
       <p:nvGrpSpPr>
         <p:cNvPr id="1" name=""/>
@@ -3321,6 +3338,66 @@
           <a:chExt cx="0" cy="0"/>
         </a:xfrm>
       </p:grpSpPr>
+      <p:sp useBgFill="1">
+        <p:nvSpPr>
+          <p:cNvPr id="1053" name="Rectangle 1041">
+            <a:extLst>
+              <a:ext uri="{FF2B5EF4-FFF2-40B4-BE49-F238E27FC236}">
+                <a16:creationId xmlns:a16="http://schemas.microsoft.com/office/drawing/2014/main" id="{362D44EE-C852-4460-B8B5-C4F2BC20510C}"/>
+              </a:ext>
+              <a:ext uri="{C183D7F6-B498-43B3-948B-1728B52AA6E4}">
+                <adec:decorative xmlns:adec="http://schemas.microsoft.com/office/drawing/2017/decorative" val="1"/>
+              </a:ext>
+            </a:extLst>
+          </p:cNvPr>
+          <p:cNvSpPr>
+            <a:spLocks noGrp="1" noRot="1" noChangeAspect="1" noMove="1" noResize="1" noEditPoints="1" noAdjustHandles="1" noChangeArrowheads="1" noChangeShapeType="1" noTextEdit="1"/>
+          </p:cNvSpPr>
+          <p:nvPr>
+            <p:extLst>
+              <p:ext uri="{386F3935-93C4-4BCD-93E2-E3B085C9AB24}">
+                <p16:designElem xmlns:p16="http://schemas.microsoft.com/office/powerpoint/2015/main" val="1"/>
+              </p:ext>
+            </p:extLst>
+          </p:nvPr>
+        </p:nvSpPr>
+        <p:spPr>
+          <a:xfrm>
+            <a:off x="0" y="0"/>
+            <a:ext cx="12192000" cy="6858000"/>
+          </a:xfrm>
+          <a:prstGeom prst="rect">
+            <a:avLst/>
+          </a:prstGeom>
+          <a:ln>
+            <a:noFill/>
+          </a:ln>
+        </p:spPr>
+        <p:style>
+          <a:lnRef idx="2">
+            <a:schemeClr val="accent1">
+              <a:shade val="50000"/>
+            </a:schemeClr>
+          </a:lnRef>
+          <a:fillRef idx="1">
+            <a:schemeClr val="accent1"/>
+          </a:fillRef>
+          <a:effectRef idx="0">
+            <a:schemeClr val="accent1"/>
+          </a:effectRef>
+          <a:fontRef idx="minor">
+            <a:schemeClr val="lt1"/>
+          </a:fontRef>
+        </p:style>
+        <p:txBody>
+          <a:bodyPr rtlCol="0" anchor="ctr"/>
+          <a:lstStyle/>
+          <a:p>
+            <a:pPr algn="ctr"/>
+            <a:endParaRPr lang="en-US"/>
+          </a:p>
+        </p:txBody>
+      </p:sp>
       <p:sp>
         <p:nvSpPr>
           <p:cNvPr id="2" name="Titel 1">
@@ -3337,13 +3414,20 @@
             <p:ph type="ctrTitle"/>
           </p:nvPr>
         </p:nvSpPr>
-        <p:spPr/>
-        <p:txBody>
-          <a:bodyPr/>
-          <a:lstStyle/>
-          <a:p>
-            <a:r>
-              <a:rPr lang="de-DE" dirty="0"/>
+        <p:spPr>
+          <a:xfrm>
+            <a:off x="6194716" y="739978"/>
+            <a:ext cx="5334930" cy="3004145"/>
+          </a:xfrm>
+        </p:spPr>
+        <p:txBody>
+          <a:bodyPr>
+            <a:normAutofit/>
+          </a:bodyPr>
+          <a:lstStyle/>
+          <a:p>
+            <a:r>
+              <a:rPr lang="de-DE" sz="5100"/>
               <a:t>Passwortmanager</a:t>
             </a:r>
           </a:p>
@@ -3365,13 +3449,20 @@
             <p:ph type="subTitle" idx="1"/>
           </p:nvPr>
         </p:nvSpPr>
-        <p:spPr/>
-        <p:txBody>
-          <a:bodyPr/>
-          <a:lstStyle/>
-          <a:p>
-            <a:r>
-              <a:rPr lang="de-DE" dirty="0"/>
+        <p:spPr>
+          <a:xfrm>
+            <a:off x="6194715" y="3836197"/>
+            <a:ext cx="5334931" cy="2189214"/>
+          </a:xfrm>
+        </p:spPr>
+        <p:txBody>
+          <a:bodyPr>
+            <a:normAutofit/>
+          </a:bodyPr>
+          <a:lstStyle/>
+          <a:p>
+            <a:r>
+              <a:rPr lang="de-DE"/>
               <a:t>In JAVA</a:t>
             </a:r>
           </a:p>
@@ -3380,7 +3471,1040 @@
               <a:rPr lang="de-DE"/>
               <a:t>von Martin &amp; Niklas</a:t>
             </a:r>
-            <a:endParaRPr lang="de-DE" dirty="0"/>
+          </a:p>
+        </p:txBody>
+      </p:sp>
+      <p:sp>
+        <p:nvSpPr>
+          <p:cNvPr id="1055" name="Freeform: Shape 1043">
+            <a:extLst>
+              <a:ext uri="{FF2B5EF4-FFF2-40B4-BE49-F238E27FC236}">
+                <a16:creationId xmlns:a16="http://schemas.microsoft.com/office/drawing/2014/main" id="{658970D8-8D1D-4B5C-894B-E871CC86543D}"/>
+              </a:ext>
+              <a:ext uri="{C183D7F6-B498-43B3-948B-1728B52AA6E4}">
+                <adec:decorative xmlns:adec="http://schemas.microsoft.com/office/drawing/2017/decorative" val="1"/>
+              </a:ext>
+            </a:extLst>
+          </p:cNvPr>
+          <p:cNvSpPr>
+            <a:spLocks noGrp="1" noRot="1" noChangeAspect="1" noMove="1" noResize="1" noEditPoints="1" noAdjustHandles="1" noChangeArrowheads="1" noChangeShapeType="1" noTextEdit="1"/>
+          </p:cNvSpPr>
+          <p:nvPr>
+            <p:extLst>
+              <p:ext uri="{386F3935-93C4-4BCD-93E2-E3B085C9AB24}">
+                <p16:designElem xmlns:p16="http://schemas.microsoft.com/office/powerpoint/2015/main" val="1"/>
+              </p:ext>
+            </p:extLst>
+          </p:nvPr>
+        </p:nvSpPr>
+        <p:spPr>
+          <a:xfrm flipH="1">
+            <a:off x="530529" y="1"/>
+            <a:ext cx="1155142" cy="591009"/>
+          </a:xfrm>
+          <a:custGeom>
+            <a:avLst/>
+            <a:gdLst>
+              <a:gd name="connsiteX0" fmla="*/ 1355 w 1155142"/>
+              <a:gd name="connsiteY0" fmla="*/ 0 h 591009"/>
+              <a:gd name="connsiteX1" fmla="*/ 1153787 w 1155142"/>
+              <a:gd name="connsiteY1" fmla="*/ 0 h 591009"/>
+              <a:gd name="connsiteX2" fmla="*/ 1155142 w 1155142"/>
+              <a:gd name="connsiteY2" fmla="*/ 13438 h 591009"/>
+              <a:gd name="connsiteX3" fmla="*/ 577571 w 1155142"/>
+              <a:gd name="connsiteY3" fmla="*/ 591009 h 591009"/>
+              <a:gd name="connsiteX4" fmla="*/ 0 w 1155142"/>
+              <a:gd name="connsiteY4" fmla="*/ 13438 h 591009"/>
+            </a:gdLst>
+            <a:ahLst/>
+            <a:cxnLst>
+              <a:cxn ang="0">
+                <a:pos x="connsiteX0" y="connsiteY0"/>
+              </a:cxn>
+              <a:cxn ang="0">
+                <a:pos x="connsiteX1" y="connsiteY1"/>
+              </a:cxn>
+              <a:cxn ang="0">
+                <a:pos x="connsiteX2" y="connsiteY2"/>
+              </a:cxn>
+              <a:cxn ang="0">
+                <a:pos x="connsiteX3" y="connsiteY3"/>
+              </a:cxn>
+              <a:cxn ang="0">
+                <a:pos x="connsiteX4" y="connsiteY4"/>
+              </a:cxn>
+            </a:cxnLst>
+            <a:rect l="l" t="t" r="r" b="b"/>
+            <a:pathLst>
+              <a:path w="1155142" h="591009">
+                <a:moveTo>
+                  <a:pt x="1355" y="0"/>
+                </a:moveTo>
+                <a:lnTo>
+                  <a:pt x="1153787" y="0"/>
+                </a:lnTo>
+                <a:lnTo>
+                  <a:pt x="1155142" y="13438"/>
+                </a:lnTo>
+                <a:cubicBezTo>
+                  <a:pt x="1155142" y="332422"/>
+                  <a:pt x="896555" y="591009"/>
+                  <a:pt x="577571" y="591009"/>
+                </a:cubicBezTo>
+                <a:cubicBezTo>
+                  <a:pt x="258587" y="591009"/>
+                  <a:pt x="0" y="332422"/>
+                  <a:pt x="0" y="13438"/>
+                </a:cubicBezTo>
+                <a:close/>
+              </a:path>
+            </a:pathLst>
+          </a:custGeom>
+          <a:solidFill>
+            <a:schemeClr val="accent5"/>
+          </a:solidFill>
+          <a:ln>
+            <a:noFill/>
+          </a:ln>
+        </p:spPr>
+        <p:style>
+          <a:lnRef idx="2">
+            <a:schemeClr val="accent1">
+              <a:shade val="50000"/>
+            </a:schemeClr>
+          </a:lnRef>
+          <a:fillRef idx="1">
+            <a:schemeClr val="accent1"/>
+          </a:fillRef>
+          <a:effectRef idx="0">
+            <a:schemeClr val="accent1"/>
+          </a:effectRef>
+          <a:fontRef idx="minor">
+            <a:schemeClr val="lt1"/>
+          </a:fontRef>
+        </p:style>
+        <p:txBody>
+          <a:bodyPr wrap="square" rtlCol="0" anchor="ctr">
+            <a:noAutofit/>
+          </a:bodyPr>
+          <a:lstStyle/>
+          <a:p>
+            <a:pPr algn="ctr"/>
+            <a:endParaRPr lang="en-US"/>
+          </a:p>
+        </p:txBody>
+      </p:sp>
+      <p:sp>
+        <p:nvSpPr>
+          <p:cNvPr id="1056" name="Freeform: Shape 1045">
+            <a:extLst>
+              <a:ext uri="{FF2B5EF4-FFF2-40B4-BE49-F238E27FC236}">
+                <a16:creationId xmlns:a16="http://schemas.microsoft.com/office/drawing/2014/main" id="{F227E5B6-9132-43CA-B503-37A18562ADF2}"/>
+              </a:ext>
+              <a:ext uri="{C183D7F6-B498-43B3-948B-1728B52AA6E4}">
+                <adec:decorative xmlns:adec="http://schemas.microsoft.com/office/drawing/2017/decorative" val="1"/>
+              </a:ext>
+            </a:extLst>
+          </p:cNvPr>
+          <p:cNvSpPr>
+            <a:spLocks noGrp="1" noRot="1" noChangeAspect="1" noMove="1" noResize="1" noEditPoints="1" noAdjustHandles="1" noChangeArrowheads="1" noChangeShapeType="1" noTextEdit="1"/>
+          </p:cNvSpPr>
+          <p:nvPr>
+            <p:extLst>
+              <p:ext uri="{386F3935-93C4-4BCD-93E2-E3B085C9AB24}">
+                <p16:designElem xmlns:p16="http://schemas.microsoft.com/office/powerpoint/2015/main" val="1"/>
+              </p:ext>
+            </p:extLst>
+          </p:nvPr>
+        </p:nvSpPr>
+        <p:spPr>
+          <a:xfrm flipH="1">
+            <a:off x="4349052" y="0"/>
+            <a:ext cx="1737401" cy="959536"/>
+          </a:xfrm>
+          <a:custGeom>
+            <a:avLst/>
+            <a:gdLst>
+              <a:gd name="connsiteX0" fmla="*/ 0 w 1737401"/>
+              <a:gd name="connsiteY0" fmla="*/ 0 h 959536"/>
+              <a:gd name="connsiteX1" fmla="*/ 123825 w 1737401"/>
+              <a:gd name="connsiteY1" fmla="*/ 0 h 959536"/>
+              <a:gd name="connsiteX2" fmla="*/ 123825 w 1737401"/>
+              <a:gd name="connsiteY2" fmla="*/ 790277 h 959536"/>
+              <a:gd name="connsiteX3" fmla="*/ 1490095 w 1737401"/>
+              <a:gd name="connsiteY3" fmla="*/ 0 h 959536"/>
+              <a:gd name="connsiteX4" fmla="*/ 1737401 w 1737401"/>
+              <a:gd name="connsiteY4" fmla="*/ 0 h 959536"/>
+              <a:gd name="connsiteX5" fmla="*/ 92869 w 1737401"/>
+              <a:gd name="connsiteY5" fmla="*/ 951249 h 959536"/>
+              <a:gd name="connsiteX6" fmla="*/ 61913 w 1737401"/>
+              <a:gd name="connsiteY6" fmla="*/ 959536 h 959536"/>
+              <a:gd name="connsiteX7" fmla="*/ 0 w 1737401"/>
+              <a:gd name="connsiteY7" fmla="*/ 897624 h 959536"/>
+            </a:gdLst>
+            <a:ahLst/>
+            <a:cxnLst>
+              <a:cxn ang="0">
+                <a:pos x="connsiteX0" y="connsiteY0"/>
+              </a:cxn>
+              <a:cxn ang="0">
+                <a:pos x="connsiteX1" y="connsiteY1"/>
+              </a:cxn>
+              <a:cxn ang="0">
+                <a:pos x="connsiteX2" y="connsiteY2"/>
+              </a:cxn>
+              <a:cxn ang="0">
+                <a:pos x="connsiteX3" y="connsiteY3"/>
+              </a:cxn>
+              <a:cxn ang="0">
+                <a:pos x="connsiteX4" y="connsiteY4"/>
+              </a:cxn>
+              <a:cxn ang="0">
+                <a:pos x="connsiteX5" y="connsiteY5"/>
+              </a:cxn>
+              <a:cxn ang="0">
+                <a:pos x="connsiteX6" y="connsiteY6"/>
+              </a:cxn>
+              <a:cxn ang="0">
+                <a:pos x="connsiteX7" y="connsiteY7"/>
+              </a:cxn>
+            </a:cxnLst>
+            <a:rect l="l" t="t" r="r" b="b"/>
+            <a:pathLst>
+              <a:path w="1737401" h="959536">
+                <a:moveTo>
+                  <a:pt x="0" y="0"/>
+                </a:moveTo>
+                <a:lnTo>
+                  <a:pt x="123825" y="0"/>
+                </a:lnTo>
+                <a:lnTo>
+                  <a:pt x="123825" y="790277"/>
+                </a:lnTo>
+                <a:lnTo>
+                  <a:pt x="1490095" y="0"/>
+                </a:lnTo>
+                <a:lnTo>
+                  <a:pt x="1737401" y="0"/>
+                </a:lnTo>
+                <a:lnTo>
+                  <a:pt x="92869" y="951249"/>
+                </a:lnTo>
+                <a:cubicBezTo>
+                  <a:pt x="83458" y="956688"/>
+                  <a:pt x="72780" y="959546"/>
+                  <a:pt x="61913" y="959536"/>
+                </a:cubicBezTo>
+                <a:cubicBezTo>
+                  <a:pt x="27719" y="959536"/>
+                  <a:pt x="0" y="931818"/>
+                  <a:pt x="0" y="897624"/>
+                </a:cubicBezTo>
+                <a:close/>
+              </a:path>
+            </a:pathLst>
+          </a:custGeom>
+          <a:solidFill>
+            <a:schemeClr val="accent6"/>
+          </a:solidFill>
+          <a:ln w="9525" cap="flat">
+            <a:noFill/>
+            <a:prstDash val="solid"/>
+            <a:miter/>
+          </a:ln>
+        </p:spPr>
+        <p:txBody>
+          <a:bodyPr rtlCol="0" anchor="ctr"/>
+          <a:lstStyle/>
+          <a:p>
+            <a:endParaRPr lang="en-US"/>
+          </a:p>
+        </p:txBody>
+      </p:sp>
+      <p:sp>
+        <p:nvSpPr>
+          <p:cNvPr id="1048" name="Freeform: Shape 1047">
+            <a:extLst>
+              <a:ext uri="{FF2B5EF4-FFF2-40B4-BE49-F238E27FC236}">
+                <a16:creationId xmlns:a16="http://schemas.microsoft.com/office/drawing/2014/main" id="{03C2051E-A88D-48E5-BACF-AAED17892722}"/>
+              </a:ext>
+              <a:ext uri="{C183D7F6-B498-43B3-948B-1728B52AA6E4}">
+                <adec:decorative xmlns:adec="http://schemas.microsoft.com/office/drawing/2017/decorative" val="1"/>
+              </a:ext>
+            </a:extLst>
+          </p:cNvPr>
+          <p:cNvSpPr>
+            <a:spLocks noGrp="1" noRot="1" noChangeAspect="1" noMove="1" noResize="1" noEditPoints="1" noAdjustHandles="1" noChangeArrowheads="1" noChangeShapeType="1" noTextEdit="1"/>
+          </p:cNvSpPr>
+          <p:nvPr>
+            <p:extLst>
+              <p:ext uri="{386F3935-93C4-4BCD-93E2-E3B085C9AB24}">
+                <p16:designElem xmlns:p16="http://schemas.microsoft.com/office/powerpoint/2015/main" val="1"/>
+              </p:ext>
+            </p:extLst>
+          </p:nvPr>
+        </p:nvSpPr>
+        <p:spPr>
+          <a:xfrm flipH="1">
+            <a:off x="0" y="2916245"/>
+            <a:ext cx="159741" cy="552996"/>
+          </a:xfrm>
+          <a:custGeom>
+            <a:avLst/>
+            <a:gdLst>
+              <a:gd name="connsiteX0" fmla="*/ 159741 w 159741"/>
+              <a:gd name="connsiteY0" fmla="*/ 0 h 552996"/>
+              <a:gd name="connsiteX1" fmla="*/ 159741 w 159741"/>
+              <a:gd name="connsiteY1" fmla="*/ 552996 h 552996"/>
+              <a:gd name="connsiteX2" fmla="*/ 141849 w 159741"/>
+              <a:gd name="connsiteY2" fmla="*/ 543285 h 552996"/>
+              <a:gd name="connsiteX3" fmla="*/ 0 w 159741"/>
+              <a:gd name="connsiteY3" fmla="*/ 276498 h 552996"/>
+              <a:gd name="connsiteX4" fmla="*/ 141849 w 159741"/>
+              <a:gd name="connsiteY4" fmla="*/ 9711 h 552996"/>
+            </a:gdLst>
+            <a:ahLst/>
+            <a:cxnLst>
+              <a:cxn ang="0">
+                <a:pos x="connsiteX0" y="connsiteY0"/>
+              </a:cxn>
+              <a:cxn ang="0">
+                <a:pos x="connsiteX1" y="connsiteY1"/>
+              </a:cxn>
+              <a:cxn ang="0">
+                <a:pos x="connsiteX2" y="connsiteY2"/>
+              </a:cxn>
+              <a:cxn ang="0">
+                <a:pos x="connsiteX3" y="connsiteY3"/>
+              </a:cxn>
+              <a:cxn ang="0">
+                <a:pos x="connsiteX4" y="connsiteY4"/>
+              </a:cxn>
+            </a:cxnLst>
+            <a:rect l="l" t="t" r="r" b="b"/>
+            <a:pathLst>
+              <a:path w="159741" h="552996">
+                <a:moveTo>
+                  <a:pt x="159741" y="0"/>
+                </a:moveTo>
+                <a:lnTo>
+                  <a:pt x="159741" y="552996"/>
+                </a:lnTo>
+                <a:lnTo>
+                  <a:pt x="141849" y="543285"/>
+                </a:lnTo>
+                <a:cubicBezTo>
+                  <a:pt x="56268" y="485467"/>
+                  <a:pt x="0" y="387554"/>
+                  <a:pt x="0" y="276498"/>
+                </a:cubicBezTo>
+                <a:cubicBezTo>
+                  <a:pt x="0" y="165443"/>
+                  <a:pt x="56268" y="67529"/>
+                  <a:pt x="141849" y="9711"/>
+                </a:cubicBezTo>
+                <a:close/>
+              </a:path>
+            </a:pathLst>
+          </a:custGeom>
+          <a:solidFill>
+            <a:schemeClr val="accent2"/>
+          </a:solidFill>
+          <a:ln w="127000">
+            <a:noFill/>
+          </a:ln>
+        </p:spPr>
+        <p:style>
+          <a:lnRef idx="2">
+            <a:schemeClr val="accent1">
+              <a:shade val="50000"/>
+            </a:schemeClr>
+          </a:lnRef>
+          <a:fillRef idx="1">
+            <a:schemeClr val="accent1"/>
+          </a:fillRef>
+          <a:effectRef idx="0">
+            <a:schemeClr val="accent1"/>
+          </a:effectRef>
+          <a:fontRef idx="minor">
+            <a:schemeClr val="lt1"/>
+          </a:fontRef>
+        </p:style>
+        <p:txBody>
+          <a:bodyPr wrap="square" rtlCol="0" anchor="ctr">
+            <a:noAutofit/>
+          </a:bodyPr>
+          <a:lstStyle/>
+          <a:p>
+            <a:pPr algn="ctr"/>
+            <a:endParaRPr lang="en-US"/>
+          </a:p>
+        </p:txBody>
+      </p:sp>
+      <p:sp>
+        <p:nvSpPr>
+          <p:cNvPr id="1050" name="Freeform: Shape 1049">
+            <a:extLst>
+              <a:ext uri="{FF2B5EF4-FFF2-40B4-BE49-F238E27FC236}">
+                <a16:creationId xmlns:a16="http://schemas.microsoft.com/office/drawing/2014/main" id="{7821A508-2985-4905-874A-527429BAABFA}"/>
+              </a:ext>
+              <a:ext uri="{C183D7F6-B498-43B3-948B-1728B52AA6E4}">
+                <adec:decorative xmlns:adec="http://schemas.microsoft.com/office/drawing/2017/decorative" val="1"/>
+              </a:ext>
+            </a:extLst>
+          </p:cNvPr>
+          <p:cNvSpPr>
+            <a:spLocks noGrp="1" noRot="1" noChangeAspect="1" noMove="1" noResize="1" noEditPoints="1" noAdjustHandles="1" noChangeArrowheads="1" noChangeShapeType="1" noTextEdit="1"/>
+          </p:cNvSpPr>
+          <p:nvPr>
+            <p:extLst>
+              <p:ext uri="{386F3935-93C4-4BCD-93E2-E3B085C9AB24}">
+                <p16:designElem xmlns:p16="http://schemas.microsoft.com/office/powerpoint/2015/main" val="1"/>
+              </p:ext>
+            </p:extLst>
+          </p:nvPr>
+        </p:nvSpPr>
+        <p:spPr>
+          <a:xfrm flipH="1">
+            <a:off x="0" y="5835649"/>
+            <a:ext cx="1548180" cy="1022351"/>
+          </a:xfrm>
+          <a:custGeom>
+            <a:avLst/>
+            <a:gdLst>
+              <a:gd name="connsiteX0" fmla="*/ 61913 w 1548180"/>
+              <a:gd name="connsiteY0" fmla="*/ 0 h 1022351"/>
+              <a:gd name="connsiteX1" fmla="*/ 1548180 w 1548180"/>
+              <a:gd name="connsiteY1" fmla="*/ 0 h 1022351"/>
+              <a:gd name="connsiteX2" fmla="*/ 1548180 w 1548180"/>
+              <a:gd name="connsiteY2" fmla="*/ 123825 h 1022351"/>
+              <a:gd name="connsiteX3" fmla="*/ 123825 w 1548180"/>
+              <a:gd name="connsiteY3" fmla="*/ 123825 h 1022351"/>
+              <a:gd name="connsiteX4" fmla="*/ 123825 w 1548180"/>
+              <a:gd name="connsiteY4" fmla="*/ 1022351 h 1022351"/>
+              <a:gd name="connsiteX5" fmla="*/ 0 w 1548180"/>
+              <a:gd name="connsiteY5" fmla="*/ 1022351 h 1022351"/>
+              <a:gd name="connsiteX6" fmla="*/ 0 w 1548180"/>
+              <a:gd name="connsiteY6" fmla="*/ 61913 h 1022351"/>
+              <a:gd name="connsiteX7" fmla="*/ 61913 w 1548180"/>
+              <a:gd name="connsiteY7" fmla="*/ 0 h 1022351"/>
+            </a:gdLst>
+            <a:ahLst/>
+            <a:cxnLst>
+              <a:cxn ang="0">
+                <a:pos x="connsiteX0" y="connsiteY0"/>
+              </a:cxn>
+              <a:cxn ang="0">
+                <a:pos x="connsiteX1" y="connsiteY1"/>
+              </a:cxn>
+              <a:cxn ang="0">
+                <a:pos x="connsiteX2" y="connsiteY2"/>
+              </a:cxn>
+              <a:cxn ang="0">
+                <a:pos x="connsiteX3" y="connsiteY3"/>
+              </a:cxn>
+              <a:cxn ang="0">
+                <a:pos x="connsiteX4" y="connsiteY4"/>
+              </a:cxn>
+              <a:cxn ang="0">
+                <a:pos x="connsiteX5" y="connsiteY5"/>
+              </a:cxn>
+              <a:cxn ang="0">
+                <a:pos x="connsiteX6" y="connsiteY6"/>
+              </a:cxn>
+              <a:cxn ang="0">
+                <a:pos x="connsiteX7" y="connsiteY7"/>
+              </a:cxn>
+            </a:cxnLst>
+            <a:rect l="l" t="t" r="r" b="b"/>
+            <a:pathLst>
+              <a:path w="1548180" h="1022351">
+                <a:moveTo>
+                  <a:pt x="61913" y="0"/>
+                </a:moveTo>
+                <a:lnTo>
+                  <a:pt x="1548180" y="0"/>
+                </a:lnTo>
+                <a:lnTo>
+                  <a:pt x="1548180" y="123825"/>
+                </a:lnTo>
+                <a:lnTo>
+                  <a:pt x="123825" y="123825"/>
+                </a:lnTo>
+                <a:lnTo>
+                  <a:pt x="123825" y="1022351"/>
+                </a:lnTo>
+                <a:lnTo>
+                  <a:pt x="0" y="1022351"/>
+                </a:lnTo>
+                <a:lnTo>
+                  <a:pt x="0" y="61913"/>
+                </a:lnTo>
+                <a:cubicBezTo>
+                  <a:pt x="0" y="27719"/>
+                  <a:pt x="27719" y="0"/>
+                  <a:pt x="61913" y="0"/>
+                </a:cubicBezTo>
+                <a:close/>
+              </a:path>
+            </a:pathLst>
+          </a:custGeom>
+          <a:solidFill>
+            <a:schemeClr val="accent6"/>
+          </a:solidFill>
+          <a:ln w="9525" cap="flat">
+            <a:noFill/>
+            <a:prstDash val="solid"/>
+            <a:miter/>
+          </a:ln>
+        </p:spPr>
+        <p:txBody>
+          <a:bodyPr rtlCol="0" anchor="ctr"/>
+          <a:lstStyle/>
+          <a:p>
+            <a:endParaRPr lang="en-US"/>
+          </a:p>
+        </p:txBody>
+      </p:sp>
+      <p:sp>
+        <p:nvSpPr>
+          <p:cNvPr id="1052" name="Freeform: Shape 1051">
+            <a:extLst>
+              <a:ext uri="{FF2B5EF4-FFF2-40B4-BE49-F238E27FC236}">
+                <a16:creationId xmlns:a16="http://schemas.microsoft.com/office/drawing/2014/main" id="{D2929CB1-0E3C-4B2D-ADC5-0154FB33BA44}"/>
+              </a:ext>
+              <a:ext uri="{C183D7F6-B498-43B3-948B-1728B52AA6E4}">
+                <adec:decorative xmlns:adec="http://schemas.microsoft.com/office/drawing/2017/decorative" val="1"/>
+              </a:ext>
+            </a:extLst>
+          </p:cNvPr>
+          <p:cNvSpPr>
+            <a:spLocks noGrp="1" noRot="1" noChangeAspect="1" noMove="1" noResize="1" noEditPoints="1" noAdjustHandles="1" noChangeArrowheads="1" noChangeShapeType="1" noTextEdit="1"/>
+          </p:cNvSpPr>
+          <p:nvPr>
+            <p:extLst>
+              <p:ext uri="{386F3935-93C4-4BCD-93E2-E3B085C9AB24}">
+                <p16:designElem xmlns:p16="http://schemas.microsoft.com/office/powerpoint/2015/main" val="1"/>
+              </p:ext>
+            </p:extLst>
+          </p:nvPr>
+        </p:nvSpPr>
+        <p:spPr>
+          <a:xfrm flipH="1">
+            <a:off x="3697761" y="5717906"/>
+            <a:ext cx="1771609" cy="1140095"/>
+          </a:xfrm>
+          <a:custGeom>
+            <a:avLst/>
+            <a:gdLst>
+              <a:gd name="connsiteX0" fmla="*/ 1561721 w 1771609"/>
+              <a:gd name="connsiteY0" fmla="*/ 763041 h 1140095"/>
+              <a:gd name="connsiteX1" fmla="*/ 1623024 w 1771609"/>
+              <a:gd name="connsiteY1" fmla="*/ 792810 h 1140095"/>
+              <a:gd name="connsiteX2" fmla="*/ 1711735 w 1771609"/>
+              <a:gd name="connsiteY2" fmla="*/ 970132 h 1140095"/>
+              <a:gd name="connsiteX3" fmla="*/ 1771609 w 1771609"/>
+              <a:gd name="connsiteY3" fmla="*/ 1140095 h 1140095"/>
+              <a:gd name="connsiteX4" fmla="*/ 1637225 w 1771609"/>
+              <a:gd name="connsiteY4" fmla="*/ 1140095 h 1140095"/>
+              <a:gd name="connsiteX5" fmla="*/ 1594820 w 1771609"/>
+              <a:gd name="connsiteY5" fmla="*/ 1019711 h 1140095"/>
+              <a:gd name="connsiteX6" fmla="*/ 1513200 w 1771609"/>
+              <a:gd name="connsiteY6" fmla="*/ 856627 h 1140095"/>
+              <a:gd name="connsiteX7" fmla="*/ 1538499 w 1771609"/>
+              <a:gd name="connsiteY7" fmla="*/ 770415 h 1140095"/>
+              <a:gd name="connsiteX8" fmla="*/ 1561721 w 1771609"/>
+              <a:gd name="connsiteY8" fmla="*/ 763041 h 1140095"/>
+              <a:gd name="connsiteX9" fmla="*/ 933455 w 1771609"/>
+              <a:gd name="connsiteY9" fmla="*/ 161309 h 1140095"/>
+              <a:gd name="connsiteX10" fmla="*/ 957797 w 1771609"/>
+              <a:gd name="connsiteY10" fmla="*/ 167970 h 1140095"/>
+              <a:gd name="connsiteX11" fmla="*/ 1286982 w 1771609"/>
+              <a:gd name="connsiteY11" fmla="*/ 387616 h 1140095"/>
+              <a:gd name="connsiteX12" fmla="*/ 1293725 w 1771609"/>
+              <a:gd name="connsiteY12" fmla="*/ 477075 h 1140095"/>
+              <a:gd name="connsiteX13" fmla="*/ 1245453 w 1771609"/>
+              <a:gd name="connsiteY13" fmla="*/ 499154 h 1140095"/>
+              <a:gd name="connsiteX14" fmla="*/ 1245167 w 1771609"/>
+              <a:gd name="connsiteY14" fmla="*/ 499154 h 1140095"/>
+              <a:gd name="connsiteX15" fmla="*/ 1203638 w 1771609"/>
+              <a:gd name="connsiteY15" fmla="*/ 484104 h 1140095"/>
+              <a:gd name="connsiteX16" fmla="*/ 900647 w 1771609"/>
+              <a:gd name="connsiteY16" fmla="*/ 281508 h 1140095"/>
+              <a:gd name="connsiteX17" fmla="*/ 872454 w 1771609"/>
+              <a:gd name="connsiteY17" fmla="*/ 196164 h 1140095"/>
+              <a:gd name="connsiteX18" fmla="*/ 933455 w 1771609"/>
+              <a:gd name="connsiteY18" fmla="*/ 161309 h 1140095"/>
+              <a:gd name="connsiteX19" fmla="*/ 256260 w 1771609"/>
+              <a:gd name="connsiteY19" fmla="*/ 29 h 1140095"/>
+              <a:gd name="connsiteX20" fmla="*/ 454020 w 1771609"/>
+              <a:gd name="connsiteY20" fmla="*/ 13474 h 1140095"/>
+              <a:gd name="connsiteX21" fmla="*/ 509236 w 1771609"/>
+              <a:gd name="connsiteY21" fmla="*/ 84182 h 1140095"/>
+              <a:gd name="connsiteX22" fmla="*/ 445829 w 1771609"/>
+              <a:gd name="connsiteY22" fmla="*/ 139871 h 1140095"/>
+              <a:gd name="connsiteX23" fmla="*/ 437447 w 1771609"/>
+              <a:gd name="connsiteY23" fmla="*/ 139395 h 1140095"/>
+              <a:gd name="connsiteX24" fmla="*/ 73211 w 1771609"/>
+              <a:gd name="connsiteY24" fmla="*/ 137204 h 1140095"/>
+              <a:gd name="connsiteX25" fmla="*/ 749 w 1771609"/>
+              <a:gd name="connsiteY25" fmla="*/ 84082 h 1140095"/>
+              <a:gd name="connsiteX26" fmla="*/ 53871 w 1771609"/>
+              <a:gd name="connsiteY26" fmla="*/ 11621 h 1140095"/>
+              <a:gd name="connsiteX27" fmla="*/ 58352 w 1771609"/>
+              <a:gd name="connsiteY27" fmla="*/ 11093 h 1140095"/>
+              <a:gd name="connsiteX28" fmla="*/ 256260 w 1771609"/>
+              <a:gd name="connsiteY28" fmla="*/ 29 h 1140095"/>
+            </a:gdLst>
+            <a:ahLst/>
+            <a:cxnLst>
+              <a:cxn ang="0">
+                <a:pos x="connsiteX0" y="connsiteY0"/>
+              </a:cxn>
+              <a:cxn ang="0">
+                <a:pos x="connsiteX1" y="connsiteY1"/>
+              </a:cxn>
+              <a:cxn ang="0">
+                <a:pos x="connsiteX2" y="connsiteY2"/>
+              </a:cxn>
+              <a:cxn ang="0">
+                <a:pos x="connsiteX3" y="connsiteY3"/>
+              </a:cxn>
+              <a:cxn ang="0">
+                <a:pos x="connsiteX4" y="connsiteY4"/>
+              </a:cxn>
+              <a:cxn ang="0">
+                <a:pos x="connsiteX5" y="connsiteY5"/>
+              </a:cxn>
+              <a:cxn ang="0">
+                <a:pos x="connsiteX6" y="connsiteY6"/>
+              </a:cxn>
+              <a:cxn ang="0">
+                <a:pos x="connsiteX7" y="connsiteY7"/>
+              </a:cxn>
+              <a:cxn ang="0">
+                <a:pos x="connsiteX8" y="connsiteY8"/>
+              </a:cxn>
+              <a:cxn ang="0">
+                <a:pos x="connsiteX9" y="connsiteY9"/>
+              </a:cxn>
+              <a:cxn ang="0">
+                <a:pos x="connsiteX10" y="connsiteY10"/>
+              </a:cxn>
+              <a:cxn ang="0">
+                <a:pos x="connsiteX11" y="connsiteY11"/>
+              </a:cxn>
+              <a:cxn ang="0">
+                <a:pos x="connsiteX12" y="connsiteY12"/>
+              </a:cxn>
+              <a:cxn ang="0">
+                <a:pos x="connsiteX13" y="connsiteY13"/>
+              </a:cxn>
+              <a:cxn ang="0">
+                <a:pos x="connsiteX14" y="connsiteY14"/>
+              </a:cxn>
+              <a:cxn ang="0">
+                <a:pos x="connsiteX15" y="connsiteY15"/>
+              </a:cxn>
+              <a:cxn ang="0">
+                <a:pos x="connsiteX16" y="connsiteY16"/>
+              </a:cxn>
+              <a:cxn ang="0">
+                <a:pos x="connsiteX17" y="connsiteY17"/>
+              </a:cxn>
+              <a:cxn ang="0">
+                <a:pos x="connsiteX18" y="connsiteY18"/>
+              </a:cxn>
+              <a:cxn ang="0">
+                <a:pos x="connsiteX19" y="connsiteY19"/>
+              </a:cxn>
+              <a:cxn ang="0">
+                <a:pos x="connsiteX20" y="connsiteY20"/>
+              </a:cxn>
+              <a:cxn ang="0">
+                <a:pos x="connsiteX21" y="connsiteY21"/>
+              </a:cxn>
+              <a:cxn ang="0">
+                <a:pos x="connsiteX22" y="connsiteY22"/>
+              </a:cxn>
+              <a:cxn ang="0">
+                <a:pos x="connsiteX23" y="connsiteY23"/>
+              </a:cxn>
+              <a:cxn ang="0">
+                <a:pos x="connsiteX24" y="connsiteY24"/>
+              </a:cxn>
+              <a:cxn ang="0">
+                <a:pos x="connsiteX25" y="connsiteY25"/>
+              </a:cxn>
+              <a:cxn ang="0">
+                <a:pos x="connsiteX26" y="connsiteY26"/>
+              </a:cxn>
+              <a:cxn ang="0">
+                <a:pos x="connsiteX27" y="connsiteY27"/>
+              </a:cxn>
+              <a:cxn ang="0">
+                <a:pos x="connsiteX28" y="connsiteY28"/>
+              </a:cxn>
+            </a:cxnLst>
+            <a:rect l="l" t="t" r="r" b="b"/>
+            <a:pathLst>
+              <a:path w="1771609" h="1140095">
+                <a:moveTo>
+                  <a:pt x="1561721" y="763041"/>
+                </a:moveTo>
+                <a:cubicBezTo>
+                  <a:pt x="1585506" y="760324"/>
+                  <a:pt x="1609722" y="771249"/>
+                  <a:pt x="1623024" y="792810"/>
+                </a:cubicBezTo>
+                <a:cubicBezTo>
+                  <a:pt x="1656300" y="850065"/>
+                  <a:pt x="1685920" y="909291"/>
+                  <a:pt x="1711735" y="970132"/>
+                </a:cubicBezTo>
+                <a:lnTo>
+                  <a:pt x="1771609" y="1140095"/>
+                </a:lnTo>
+                <a:lnTo>
+                  <a:pt x="1637225" y="1140095"/>
+                </a:lnTo>
+                <a:lnTo>
+                  <a:pt x="1594820" y="1019711"/>
+                </a:lnTo>
+                <a:cubicBezTo>
+                  <a:pt x="1571072" y="963753"/>
+                  <a:pt x="1543818" y="909282"/>
+                  <a:pt x="1513200" y="856627"/>
+                </a:cubicBezTo>
+                <a:cubicBezTo>
+                  <a:pt x="1496379" y="825834"/>
+                  <a:pt x="1507704" y="787236"/>
+                  <a:pt x="1538499" y="770415"/>
+                </a:cubicBezTo>
+                <a:cubicBezTo>
+                  <a:pt x="1545912" y="766367"/>
+                  <a:pt x="1553792" y="763946"/>
+                  <a:pt x="1561721" y="763041"/>
+                </a:cubicBezTo>
+                <a:close/>
+                <a:moveTo>
+                  <a:pt x="933455" y="161309"/>
+                </a:moveTo>
+                <a:cubicBezTo>
+                  <a:pt x="941693" y="161855"/>
+                  <a:pt x="949959" y="164025"/>
+                  <a:pt x="957797" y="167970"/>
+                </a:cubicBezTo>
+                <a:cubicBezTo>
+                  <a:pt x="1076184" y="227289"/>
+                  <a:pt x="1186759" y="301068"/>
+                  <a:pt x="1286982" y="387616"/>
+                </a:cubicBezTo>
+                <a:cubicBezTo>
+                  <a:pt x="1313547" y="410457"/>
+                  <a:pt x="1316566" y="450510"/>
+                  <a:pt x="1293725" y="477075"/>
+                </a:cubicBezTo>
+                <a:cubicBezTo>
+                  <a:pt x="1281638" y="491137"/>
+                  <a:pt x="1263998" y="499204"/>
+                  <a:pt x="1245453" y="499154"/>
+                </a:cubicBezTo>
+                <a:lnTo>
+                  <a:pt x="1245167" y="499154"/>
+                </a:lnTo>
+                <a:cubicBezTo>
+                  <a:pt x="1229965" y="499301"/>
+                  <a:pt x="1215220" y="493956"/>
+                  <a:pt x="1203638" y="484104"/>
+                </a:cubicBezTo>
+                <a:cubicBezTo>
+                  <a:pt x="1111407" y="404300"/>
+                  <a:pt x="1009633" y="336248"/>
+                  <a:pt x="900647" y="281508"/>
+                </a:cubicBezTo>
+                <a:cubicBezTo>
+                  <a:pt x="869295" y="265726"/>
+                  <a:pt x="856672" y="227516"/>
+                  <a:pt x="872454" y="196164"/>
+                </a:cubicBezTo>
+                <a:cubicBezTo>
+                  <a:pt x="884290" y="172650"/>
+                  <a:pt x="908742" y="159670"/>
+                  <a:pt x="933455" y="161309"/>
+                </a:cubicBezTo>
+                <a:close/>
+                <a:moveTo>
+                  <a:pt x="256260" y="29"/>
+                </a:moveTo>
+                <a:cubicBezTo>
+                  <a:pt x="322331" y="427"/>
+                  <a:pt x="388378" y="4909"/>
+                  <a:pt x="454020" y="13474"/>
+                </a:cubicBezTo>
+                <a:cubicBezTo>
+                  <a:pt x="488793" y="17752"/>
+                  <a:pt x="513514" y="49409"/>
+                  <a:pt x="509236" y="84182"/>
+                </a:cubicBezTo>
+                <a:cubicBezTo>
+                  <a:pt x="505303" y="116151"/>
+                  <a:pt x="478038" y="140098"/>
+                  <a:pt x="445829" y="139871"/>
+                </a:cubicBezTo>
+                <a:cubicBezTo>
+                  <a:pt x="443027" y="139899"/>
+                  <a:pt x="440227" y="139740"/>
+                  <a:pt x="437447" y="139395"/>
+                </a:cubicBezTo>
+                <a:cubicBezTo>
+                  <a:pt x="316592" y="123615"/>
+                  <a:pt x="194247" y="122878"/>
+                  <a:pt x="73211" y="137204"/>
+                </a:cubicBezTo>
+                <a:cubicBezTo>
+                  <a:pt x="38532" y="142545"/>
+                  <a:pt x="6090" y="118762"/>
+                  <a:pt x="749" y="84082"/>
+                </a:cubicBezTo>
+                <a:cubicBezTo>
+                  <a:pt x="-4591" y="49403"/>
+                  <a:pt x="19192" y="16961"/>
+                  <a:pt x="53871" y="11621"/>
+                </a:cubicBezTo>
+                <a:cubicBezTo>
+                  <a:pt x="55358" y="11392"/>
+                  <a:pt x="56852" y="11216"/>
+                  <a:pt x="58352" y="11093"/>
+                </a:cubicBezTo>
+                <a:cubicBezTo>
+                  <a:pt x="124093" y="3319"/>
+                  <a:pt x="190189" y="-369"/>
+                  <a:pt x="256260" y="29"/>
+                </a:cubicBezTo>
+                <a:close/>
+              </a:path>
+            </a:pathLst>
+          </a:custGeom>
+          <a:solidFill>
+            <a:schemeClr val="accent4"/>
+          </a:solidFill>
+          <a:ln w="9525" cap="flat">
+            <a:noFill/>
+            <a:prstDash val="solid"/>
+            <a:miter/>
+          </a:ln>
+        </p:spPr>
+        <p:txBody>
+          <a:bodyPr rtlCol="0" anchor="ctr"/>
+          <a:lstStyle/>
+          <a:p>
+            <a:endParaRPr lang="en-US"/>
+          </a:p>
+        </p:txBody>
+      </p:sp>
+      <p:pic>
+        <p:nvPicPr>
+          <p:cNvPr id="1026" name="Picture 2" descr="Java - Soziale Medien und Logos Symbole">
+            <a:extLst>
+              <a:ext uri="{FF2B5EF4-FFF2-40B4-BE49-F238E27FC236}">
+                <a16:creationId xmlns:a16="http://schemas.microsoft.com/office/drawing/2014/main" id="{BDD48621-7511-C44E-CC6C-91B263343FD7}"/>
+              </a:ext>
+            </a:extLst>
+          </p:cNvPr>
+          <p:cNvPicPr>
+            <a:picLocks noChangeAspect="1" noChangeArrowheads="1"/>
+          </p:cNvPicPr>
+          <p:nvPr/>
+        </p:nvPicPr>
+        <p:blipFill>
+          <a:blip r:embed="rId2">
+            <a:extLst>
+              <a:ext uri="{28A0092B-C50C-407E-A947-70E740481C1C}">
+                <a14:useLocalDpi xmlns:a14="http://schemas.microsoft.com/office/drawing/2010/main" val="0"/>
+              </a:ext>
+            </a:extLst>
+          </a:blip>
+          <a:srcRect r="2" b="2"/>
+          <a:stretch/>
+        </p:blipFill>
+        <p:spPr bwMode="auto">
+          <a:xfrm>
+            <a:off x="631840" y="598720"/>
+            <a:ext cx="5178249" cy="5178249"/>
+          </a:xfrm>
+          <a:custGeom>
+            <a:avLst/>
+            <a:gdLst/>
+            <a:ahLst/>
+            <a:cxnLst/>
+            <a:rect l="l" t="t" r="r" b="b"/>
+            <a:pathLst>
+              <a:path w="3741748" h="3741748">
+                <a:moveTo>
+                  <a:pt x="1870874" y="0"/>
+                </a:moveTo>
+                <a:cubicBezTo>
+                  <a:pt x="2904129" y="0"/>
+                  <a:pt x="3741748" y="837619"/>
+                  <a:pt x="3741748" y="1870874"/>
+                </a:cubicBezTo>
+                <a:cubicBezTo>
+                  <a:pt x="3741748" y="2904129"/>
+                  <a:pt x="2904129" y="3741748"/>
+                  <a:pt x="1870874" y="3741748"/>
+                </a:cubicBezTo>
+                <a:cubicBezTo>
+                  <a:pt x="837619" y="3741748"/>
+                  <a:pt x="0" y="2904129"/>
+                  <a:pt x="0" y="1870874"/>
+                </a:cubicBezTo>
+                <a:cubicBezTo>
+                  <a:pt x="0" y="837619"/>
+                  <a:pt x="837619" y="0"/>
+                  <a:pt x="1870874" y="0"/>
+                </a:cubicBezTo>
+                <a:close/>
+              </a:path>
+            </a:pathLst>
+          </a:custGeom>
+          <a:noFill/>
+          <a:extLst>
+            <a:ext uri="{909E8E84-426E-40DD-AFC4-6F175D3DCCD1}">
+              <a14:hiddenFill xmlns:a14="http://schemas.microsoft.com/office/drawing/2010/main">
+                <a:solidFill>
+                  <a:srgbClr val="FFFFFF"/>
+                </a:solidFill>
+              </a14:hiddenFill>
+            </a:ext>
+          </a:extLst>
+        </p:spPr>
+      </p:pic>
+      <p:sp>
+        <p:nvSpPr>
+          <p:cNvPr id="1054" name="Freeform: Shape 1053">
+            <a:extLst>
+              <a:ext uri="{FF2B5EF4-FFF2-40B4-BE49-F238E27FC236}">
+                <a16:creationId xmlns:a16="http://schemas.microsoft.com/office/drawing/2014/main" id="{5F2F0C84-BE8C-4DC2-A6D3-30349A801D5C}"/>
+              </a:ext>
+              <a:ext uri="{C183D7F6-B498-43B3-948B-1728B52AA6E4}">
+                <adec:decorative xmlns:adec="http://schemas.microsoft.com/office/drawing/2017/decorative" val="1"/>
+              </a:ext>
+            </a:extLst>
+          </p:cNvPr>
+          <p:cNvSpPr>
+            <a:spLocks noGrp="1" noRot="1" noChangeAspect="1" noMove="1" noResize="1" noEditPoints="1" noAdjustHandles="1" noChangeArrowheads="1" noChangeShapeType="1" noTextEdit="1"/>
+          </p:cNvSpPr>
+          <p:nvPr>
+            <p:extLst>
+              <p:ext uri="{386F3935-93C4-4BCD-93E2-E3B085C9AB24}">
+                <p16:designElem xmlns:p16="http://schemas.microsoft.com/office/powerpoint/2015/main" val="1"/>
+              </p:ext>
+            </p:extLst>
+          </p:nvPr>
+        </p:nvSpPr>
+        <p:spPr>
+          <a:xfrm flipH="1">
+            <a:off x="4520513" y="6258756"/>
+            <a:ext cx="1565940" cy="599245"/>
+          </a:xfrm>
+          <a:custGeom>
+            <a:avLst/>
+            <a:gdLst>
+              <a:gd name="connsiteX0" fmla="*/ 782970 w 1565940"/>
+              <a:gd name="connsiteY0" fmla="*/ 0 h 599245"/>
+              <a:gd name="connsiteX1" fmla="*/ 1528042 w 1565940"/>
+              <a:gd name="connsiteY1" fmla="*/ 480469 h 599245"/>
+              <a:gd name="connsiteX2" fmla="*/ 1565940 w 1565940"/>
+              <a:gd name="connsiteY2" fmla="*/ 599245 h 599245"/>
+              <a:gd name="connsiteX3" fmla="*/ 0 w 1565940"/>
+              <a:gd name="connsiteY3" fmla="*/ 599245 h 599245"/>
+              <a:gd name="connsiteX4" fmla="*/ 37898 w 1565940"/>
+              <a:gd name="connsiteY4" fmla="*/ 480469 h 599245"/>
+              <a:gd name="connsiteX5" fmla="*/ 782970 w 1565940"/>
+              <a:gd name="connsiteY5" fmla="*/ 0 h 599245"/>
+            </a:gdLst>
+            <a:ahLst/>
+            <a:cxnLst>
+              <a:cxn ang="0">
+                <a:pos x="connsiteX0" y="connsiteY0"/>
+              </a:cxn>
+              <a:cxn ang="0">
+                <a:pos x="connsiteX1" y="connsiteY1"/>
+              </a:cxn>
+              <a:cxn ang="0">
+                <a:pos x="connsiteX2" y="connsiteY2"/>
+              </a:cxn>
+              <a:cxn ang="0">
+                <a:pos x="connsiteX3" y="connsiteY3"/>
+              </a:cxn>
+              <a:cxn ang="0">
+                <a:pos x="connsiteX4" y="connsiteY4"/>
+              </a:cxn>
+              <a:cxn ang="0">
+                <a:pos x="connsiteX5" y="connsiteY5"/>
+              </a:cxn>
+            </a:cxnLst>
+            <a:rect l="l" t="t" r="r" b="b"/>
+            <a:pathLst>
+              <a:path w="1565940" h="599245">
+                <a:moveTo>
+                  <a:pt x="782970" y="0"/>
+                </a:moveTo>
+                <a:cubicBezTo>
+                  <a:pt x="1117910" y="0"/>
+                  <a:pt x="1405287" y="198118"/>
+                  <a:pt x="1528042" y="480469"/>
+                </a:cubicBezTo>
+                <a:lnTo>
+                  <a:pt x="1565940" y="599245"/>
+                </a:lnTo>
+                <a:lnTo>
+                  <a:pt x="0" y="599245"/>
+                </a:lnTo>
+                <a:lnTo>
+                  <a:pt x="37898" y="480469"/>
+                </a:lnTo>
+                <a:cubicBezTo>
+                  <a:pt x="160653" y="198118"/>
+                  <a:pt x="448030" y="0"/>
+                  <a:pt x="782970" y="0"/>
+                </a:cubicBezTo>
+                <a:close/>
+              </a:path>
+            </a:pathLst>
+          </a:custGeom>
+          <a:solidFill>
+            <a:schemeClr val="accent2"/>
+          </a:solidFill>
+          <a:ln>
+            <a:noFill/>
+          </a:ln>
+        </p:spPr>
+        <p:style>
+          <a:lnRef idx="2">
+            <a:schemeClr val="accent1">
+              <a:shade val="50000"/>
+            </a:schemeClr>
+          </a:lnRef>
+          <a:fillRef idx="1">
+            <a:schemeClr val="accent1"/>
+          </a:fillRef>
+          <a:effectRef idx="0">
+            <a:schemeClr val="accent1"/>
+          </a:effectRef>
+          <a:fontRef idx="minor">
+            <a:schemeClr val="lt1"/>
+          </a:fontRef>
+        </p:style>
+        <p:txBody>
+          <a:bodyPr wrap="square" rtlCol="0" anchor="ctr">
+            <a:noAutofit/>
+          </a:bodyPr>
+          <a:lstStyle/>
+          <a:p>
+            <a:pPr algn="ctr"/>
+            <a:endParaRPr lang="en-US" dirty="0"/>
           </a:p>
         </p:txBody>
       </p:sp>
@@ -3388,6 +4512,347 @@
     <p:extLst>
       <p:ext uri="{BB962C8B-B14F-4D97-AF65-F5344CB8AC3E}">
         <p14:creationId xmlns:p14="http://schemas.microsoft.com/office/powerpoint/2010/main" val="666173197"/>
+      </p:ext>
+    </p:extLst>
+  </p:cSld>
+  <p:clrMapOvr>
+    <a:masterClrMapping/>
+  </p:clrMapOvr>
+</p:sld>
+</file>
+
+<file path=ppt/slides/slide2.xml><?xml version="1.0" encoding="utf-8"?>
+<p:sld xmlns:a="http://schemas.openxmlformats.org/drawingml/2006/main" xmlns:r="http://schemas.openxmlformats.org/officeDocument/2006/relationships" xmlns:p="http://schemas.openxmlformats.org/presentationml/2006/main">
+  <p:cSld>
+    <p:spTree>
+      <p:nvGrpSpPr>
+        <p:cNvPr id="1" name=""/>
+        <p:cNvGrpSpPr/>
+        <p:nvPr/>
+      </p:nvGrpSpPr>
+      <p:grpSpPr>
+        <a:xfrm>
+          <a:off x="0" y="0"/>
+          <a:ext cx="0" cy="0"/>
+          <a:chOff x="0" y="0"/>
+          <a:chExt cx="0" cy="0"/>
+        </a:xfrm>
+      </p:grpSpPr>
+      <p:sp>
+        <p:nvSpPr>
+          <p:cNvPr id="2" name="Titel 1">
+            <a:extLst>
+              <a:ext uri="{FF2B5EF4-FFF2-40B4-BE49-F238E27FC236}">
+                <a16:creationId xmlns:a16="http://schemas.microsoft.com/office/drawing/2014/main" id="{B6DFF170-3071-5173-9F09-40F84F10475A}"/>
+              </a:ext>
+            </a:extLst>
+          </p:cNvPr>
+          <p:cNvSpPr>
+            <a:spLocks noGrp="1"/>
+          </p:cNvSpPr>
+          <p:nvPr>
+            <p:ph type="title"/>
+          </p:nvPr>
+        </p:nvSpPr>
+        <p:spPr/>
+        <p:txBody>
+          <a:bodyPr/>
+          <a:lstStyle/>
+          <a:p>
+            <a:r>
+              <a:rPr lang="de-DE" dirty="0"/>
+              <a:t>Verwendete Technologien</a:t>
+            </a:r>
+          </a:p>
+        </p:txBody>
+      </p:sp>
+      <p:sp>
+        <p:nvSpPr>
+          <p:cNvPr id="3" name="Inhaltsplatzhalter 2">
+            <a:extLst>
+              <a:ext uri="{FF2B5EF4-FFF2-40B4-BE49-F238E27FC236}">
+                <a16:creationId xmlns:a16="http://schemas.microsoft.com/office/drawing/2014/main" id="{5FBE8B52-E3A3-85D1-350C-8B5D563DCA0D}"/>
+              </a:ext>
+            </a:extLst>
+          </p:cNvPr>
+          <p:cNvSpPr>
+            <a:spLocks noGrp="1"/>
+          </p:cNvSpPr>
+          <p:nvPr>
+            <p:ph idx="1"/>
+          </p:nvPr>
+        </p:nvSpPr>
+        <p:spPr/>
+        <p:txBody>
+          <a:bodyPr/>
+          <a:lstStyle/>
+          <a:p>
+            <a:endParaRPr lang="de-DE"/>
+          </a:p>
+        </p:txBody>
+      </p:sp>
+    </p:spTree>
+    <p:extLst>
+      <p:ext uri="{BB962C8B-B14F-4D97-AF65-F5344CB8AC3E}">
+        <p14:creationId xmlns:p14="http://schemas.microsoft.com/office/powerpoint/2010/main" val="2632948518"/>
+      </p:ext>
+    </p:extLst>
+  </p:cSld>
+  <p:clrMapOvr>
+    <a:masterClrMapping/>
+  </p:clrMapOvr>
+</p:sld>
+</file>
+
+<file path=ppt/slides/slide3.xml><?xml version="1.0" encoding="utf-8"?>
+<p:sld xmlns:a="http://schemas.openxmlformats.org/drawingml/2006/main" xmlns:r="http://schemas.openxmlformats.org/officeDocument/2006/relationships" xmlns:p="http://schemas.openxmlformats.org/presentationml/2006/main">
+  <p:cSld>
+    <p:spTree>
+      <p:nvGrpSpPr>
+        <p:cNvPr id="1" name=""/>
+        <p:cNvGrpSpPr/>
+        <p:nvPr/>
+      </p:nvGrpSpPr>
+      <p:grpSpPr>
+        <a:xfrm>
+          <a:off x="0" y="0"/>
+          <a:ext cx="0" cy="0"/>
+          <a:chOff x="0" y="0"/>
+          <a:chExt cx="0" cy="0"/>
+        </a:xfrm>
+      </p:grpSpPr>
+      <p:sp>
+        <p:nvSpPr>
+          <p:cNvPr id="2" name="Titel 1">
+            <a:extLst>
+              <a:ext uri="{FF2B5EF4-FFF2-40B4-BE49-F238E27FC236}">
+                <a16:creationId xmlns:a16="http://schemas.microsoft.com/office/drawing/2014/main" id="{7EA0D1DA-378D-202D-A0E0-57A2F7D3CEB7}"/>
+              </a:ext>
+            </a:extLst>
+          </p:cNvPr>
+          <p:cNvSpPr>
+            <a:spLocks noGrp="1"/>
+          </p:cNvSpPr>
+          <p:nvPr>
+            <p:ph type="title"/>
+          </p:nvPr>
+        </p:nvSpPr>
+        <p:spPr/>
+        <p:txBody>
+          <a:bodyPr/>
+          <a:lstStyle/>
+          <a:p>
+            <a:r>
+              <a:rPr lang="de-DE" dirty="0"/>
+              <a:t>Technischer Hintergrund</a:t>
+            </a:r>
+          </a:p>
+        </p:txBody>
+      </p:sp>
+      <p:sp>
+        <p:nvSpPr>
+          <p:cNvPr id="3" name="Inhaltsplatzhalter 2">
+            <a:extLst>
+              <a:ext uri="{FF2B5EF4-FFF2-40B4-BE49-F238E27FC236}">
+                <a16:creationId xmlns:a16="http://schemas.microsoft.com/office/drawing/2014/main" id="{FF873ED8-0668-62AF-967F-7D83EDF53375}"/>
+              </a:ext>
+            </a:extLst>
+          </p:cNvPr>
+          <p:cNvSpPr>
+            <a:spLocks noGrp="1"/>
+          </p:cNvSpPr>
+          <p:nvPr>
+            <p:ph idx="1"/>
+          </p:nvPr>
+        </p:nvSpPr>
+        <p:spPr/>
+        <p:txBody>
+          <a:bodyPr/>
+          <a:lstStyle/>
+          <a:p>
+            <a:endParaRPr lang="de-DE"/>
+          </a:p>
+        </p:txBody>
+      </p:sp>
+    </p:spTree>
+    <p:extLst>
+      <p:ext uri="{BB962C8B-B14F-4D97-AF65-F5344CB8AC3E}">
+        <p14:creationId xmlns:p14="http://schemas.microsoft.com/office/powerpoint/2010/main" val="1213491594"/>
+      </p:ext>
+    </p:extLst>
+  </p:cSld>
+  <p:clrMapOvr>
+    <a:masterClrMapping/>
+  </p:clrMapOvr>
+</p:sld>
+</file>
+
+<file path=ppt/slides/slide4.xml><?xml version="1.0" encoding="utf-8"?>
+<p:sld xmlns:a="http://schemas.openxmlformats.org/drawingml/2006/main" xmlns:r="http://schemas.openxmlformats.org/officeDocument/2006/relationships" xmlns:p="http://schemas.openxmlformats.org/presentationml/2006/main">
+  <p:cSld>
+    <p:spTree>
+      <p:nvGrpSpPr>
+        <p:cNvPr id="1" name=""/>
+        <p:cNvGrpSpPr/>
+        <p:nvPr/>
+      </p:nvGrpSpPr>
+      <p:grpSpPr>
+        <a:xfrm>
+          <a:off x="0" y="0"/>
+          <a:ext cx="0" cy="0"/>
+          <a:chOff x="0" y="0"/>
+          <a:chExt cx="0" cy="0"/>
+        </a:xfrm>
+      </p:grpSpPr>
+      <p:sp>
+        <p:nvSpPr>
+          <p:cNvPr id="2" name="Titel 1">
+            <a:extLst>
+              <a:ext uri="{FF2B5EF4-FFF2-40B4-BE49-F238E27FC236}">
+                <a16:creationId xmlns:a16="http://schemas.microsoft.com/office/drawing/2014/main" id="{E798F738-6748-F9A3-D910-5F118C75696C}"/>
+              </a:ext>
+            </a:extLst>
+          </p:cNvPr>
+          <p:cNvSpPr>
+            <a:spLocks noGrp="1"/>
+          </p:cNvSpPr>
+          <p:nvPr>
+            <p:ph type="title"/>
+          </p:nvPr>
+        </p:nvSpPr>
+        <p:spPr/>
+        <p:txBody>
+          <a:bodyPr/>
+          <a:lstStyle/>
+          <a:p>
+            <a:r>
+              <a:rPr lang="de-DE" dirty="0"/>
+              <a:t>Umsetzung</a:t>
+            </a:r>
+          </a:p>
+        </p:txBody>
+      </p:sp>
+      <p:sp>
+        <p:nvSpPr>
+          <p:cNvPr id="3" name="Inhaltsplatzhalter 2">
+            <a:extLst>
+              <a:ext uri="{FF2B5EF4-FFF2-40B4-BE49-F238E27FC236}">
+                <a16:creationId xmlns:a16="http://schemas.microsoft.com/office/drawing/2014/main" id="{9814F278-5A46-11EE-4BA2-1C4D52255852}"/>
+              </a:ext>
+            </a:extLst>
+          </p:cNvPr>
+          <p:cNvSpPr>
+            <a:spLocks noGrp="1"/>
+          </p:cNvSpPr>
+          <p:nvPr>
+            <p:ph idx="1"/>
+          </p:nvPr>
+        </p:nvSpPr>
+        <p:spPr/>
+        <p:txBody>
+          <a:bodyPr/>
+          <a:lstStyle/>
+          <a:p>
+            <a:endParaRPr lang="de-DE"/>
+          </a:p>
+        </p:txBody>
+      </p:sp>
+    </p:spTree>
+    <p:extLst>
+      <p:ext uri="{BB962C8B-B14F-4D97-AF65-F5344CB8AC3E}">
+        <p14:creationId xmlns:p14="http://schemas.microsoft.com/office/powerpoint/2010/main" val="2293322086"/>
+      </p:ext>
+    </p:extLst>
+  </p:cSld>
+  <p:clrMapOvr>
+    <a:masterClrMapping/>
+  </p:clrMapOvr>
+</p:sld>
+</file>
+
+<file path=ppt/slides/slide5.xml><?xml version="1.0" encoding="utf-8"?>
+<p:sld xmlns:a="http://schemas.openxmlformats.org/drawingml/2006/main" xmlns:r="http://schemas.openxmlformats.org/officeDocument/2006/relationships" xmlns:p="http://schemas.openxmlformats.org/presentationml/2006/main">
+  <p:cSld>
+    <p:spTree>
+      <p:nvGrpSpPr>
+        <p:cNvPr id="1" name=""/>
+        <p:cNvGrpSpPr/>
+        <p:nvPr/>
+      </p:nvGrpSpPr>
+      <p:grpSpPr>
+        <a:xfrm>
+          <a:off x="0" y="0"/>
+          <a:ext cx="0" cy="0"/>
+          <a:chOff x="0" y="0"/>
+          <a:chExt cx="0" cy="0"/>
+        </a:xfrm>
+      </p:grpSpPr>
+      <p:sp>
+        <p:nvSpPr>
+          <p:cNvPr id="2" name="Titel 1">
+            <a:extLst>
+              <a:ext uri="{FF2B5EF4-FFF2-40B4-BE49-F238E27FC236}">
+                <a16:creationId xmlns:a16="http://schemas.microsoft.com/office/drawing/2014/main" id="{4777BA2B-6314-C13E-8020-90F8CA35B0C6}"/>
+              </a:ext>
+            </a:extLst>
+          </p:cNvPr>
+          <p:cNvSpPr>
+            <a:spLocks noGrp="1"/>
+          </p:cNvSpPr>
+          <p:nvPr>
+            <p:ph type="title"/>
+          </p:nvPr>
+        </p:nvSpPr>
+        <p:spPr/>
+        <p:txBody>
+          <a:bodyPr/>
+          <a:lstStyle/>
+          <a:p>
+            <a:r>
+              <a:rPr lang="de-DE" dirty="0" err="1"/>
+              <a:t>Lessions</a:t>
+            </a:r>
+            <a:r>
+              <a:rPr lang="de-DE" dirty="0"/>
+              <a:t> </a:t>
+            </a:r>
+            <a:r>
+              <a:rPr lang="de-DE" dirty="0" err="1"/>
+              <a:t>Learned</a:t>
+            </a:r>
+            <a:endParaRPr lang="de-DE" dirty="0"/>
+          </a:p>
+        </p:txBody>
+      </p:sp>
+      <p:sp>
+        <p:nvSpPr>
+          <p:cNvPr id="3" name="Inhaltsplatzhalter 2">
+            <a:extLst>
+              <a:ext uri="{FF2B5EF4-FFF2-40B4-BE49-F238E27FC236}">
+                <a16:creationId xmlns:a16="http://schemas.microsoft.com/office/drawing/2014/main" id="{70B24FDD-F401-C7A6-98F6-6469FF9DFDB2}"/>
+              </a:ext>
+            </a:extLst>
+          </p:cNvPr>
+          <p:cNvSpPr>
+            <a:spLocks noGrp="1"/>
+          </p:cNvSpPr>
+          <p:nvPr>
+            <p:ph idx="1"/>
+          </p:nvPr>
+        </p:nvSpPr>
+        <p:spPr/>
+        <p:txBody>
+          <a:bodyPr/>
+          <a:lstStyle/>
+          <a:p>
+            <a:endParaRPr lang="de-DE"/>
+          </a:p>
+        </p:txBody>
+      </p:sp>
+    </p:spTree>
+    <p:extLst>
+      <p:ext uri="{BB962C8B-B14F-4D97-AF65-F5344CB8AC3E}">
+        <p14:creationId xmlns:p14="http://schemas.microsoft.com/office/powerpoint/2010/main" val="3553515808"/>
       </p:ext>
     </p:extLst>
   </p:cSld>

--- a/pp/Presentation.pptx
+++ b/pp/Presentation.pptx
@@ -263,7 +263,7 @@
           <a:p>
             <a:fld id="{F5C0AC7C-E257-4BDA-94CB-CB11724BB9D3}" type="datetimeFigureOut">
               <a:rPr lang="de-DE" smtClean="0"/>
-              <a:t>14.04.2025</a:t>
+              <a:t>26.04.2025</a:t>
             </a:fld>
             <a:endParaRPr lang="de-DE"/>
           </a:p>
@@ -461,7 +461,7 @@
           <a:p>
             <a:fld id="{F5C0AC7C-E257-4BDA-94CB-CB11724BB9D3}" type="datetimeFigureOut">
               <a:rPr lang="de-DE" smtClean="0"/>
-              <a:t>14.04.2025</a:t>
+              <a:t>26.04.2025</a:t>
             </a:fld>
             <a:endParaRPr lang="de-DE"/>
           </a:p>
@@ -669,7 +669,7 @@
           <a:p>
             <a:fld id="{F5C0AC7C-E257-4BDA-94CB-CB11724BB9D3}" type="datetimeFigureOut">
               <a:rPr lang="de-DE" smtClean="0"/>
-              <a:t>14.04.2025</a:t>
+              <a:t>26.04.2025</a:t>
             </a:fld>
             <a:endParaRPr lang="de-DE"/>
           </a:p>
@@ -867,7 +867,7 @@
           <a:p>
             <a:fld id="{F5C0AC7C-E257-4BDA-94CB-CB11724BB9D3}" type="datetimeFigureOut">
               <a:rPr lang="de-DE" smtClean="0"/>
-              <a:t>14.04.2025</a:t>
+              <a:t>26.04.2025</a:t>
             </a:fld>
             <a:endParaRPr lang="de-DE"/>
           </a:p>
@@ -1142,7 +1142,7 @@
           <a:p>
             <a:fld id="{F5C0AC7C-E257-4BDA-94CB-CB11724BB9D3}" type="datetimeFigureOut">
               <a:rPr lang="de-DE" smtClean="0"/>
-              <a:t>14.04.2025</a:t>
+              <a:t>26.04.2025</a:t>
             </a:fld>
             <a:endParaRPr lang="de-DE"/>
           </a:p>
@@ -1407,7 +1407,7 @@
           <a:p>
             <a:fld id="{F5C0AC7C-E257-4BDA-94CB-CB11724BB9D3}" type="datetimeFigureOut">
               <a:rPr lang="de-DE" smtClean="0"/>
-              <a:t>14.04.2025</a:t>
+              <a:t>26.04.2025</a:t>
             </a:fld>
             <a:endParaRPr lang="de-DE"/>
           </a:p>
@@ -1819,7 +1819,7 @@
           <a:p>
             <a:fld id="{F5C0AC7C-E257-4BDA-94CB-CB11724BB9D3}" type="datetimeFigureOut">
               <a:rPr lang="de-DE" smtClean="0"/>
-              <a:t>14.04.2025</a:t>
+              <a:t>26.04.2025</a:t>
             </a:fld>
             <a:endParaRPr lang="de-DE"/>
           </a:p>
@@ -1960,7 +1960,7 @@
           <a:p>
             <a:fld id="{F5C0AC7C-E257-4BDA-94CB-CB11724BB9D3}" type="datetimeFigureOut">
               <a:rPr lang="de-DE" smtClean="0"/>
-              <a:t>14.04.2025</a:t>
+              <a:t>26.04.2025</a:t>
             </a:fld>
             <a:endParaRPr lang="de-DE"/>
           </a:p>
@@ -2073,7 +2073,7 @@
           <a:p>
             <a:fld id="{F5C0AC7C-E257-4BDA-94CB-CB11724BB9D3}" type="datetimeFigureOut">
               <a:rPr lang="de-DE" smtClean="0"/>
-              <a:t>14.04.2025</a:t>
+              <a:t>26.04.2025</a:t>
             </a:fld>
             <a:endParaRPr lang="de-DE"/>
           </a:p>
@@ -2384,7 +2384,7 @@
           <a:p>
             <a:fld id="{F5C0AC7C-E257-4BDA-94CB-CB11724BB9D3}" type="datetimeFigureOut">
               <a:rPr lang="de-DE" smtClean="0"/>
-              <a:t>14.04.2025</a:t>
+              <a:t>26.04.2025</a:t>
             </a:fld>
             <a:endParaRPr lang="de-DE"/>
           </a:p>
@@ -2672,7 +2672,7 @@
           <a:p>
             <a:fld id="{F5C0AC7C-E257-4BDA-94CB-CB11724BB9D3}" type="datetimeFigureOut">
               <a:rPr lang="de-DE" smtClean="0"/>
-              <a:t>14.04.2025</a:t>
+              <a:t>26.04.2025</a:t>
             </a:fld>
             <a:endParaRPr lang="de-DE"/>
           </a:p>
@@ -2913,7 +2913,7 @@
           <a:p>
             <a:fld id="{F5C0AC7C-E257-4BDA-94CB-CB11724BB9D3}" type="datetimeFigureOut">
               <a:rPr lang="de-DE" smtClean="0"/>
-              <a:t>14.04.2025</a:t>
+              <a:t>26.04.2025</a:t>
             </a:fld>
             <a:endParaRPr lang="de-DE"/>
           </a:p>
@@ -4584,10 +4584,77 @@
         </p:nvSpPr>
         <p:spPr/>
         <p:txBody>
-          <a:bodyPr/>
-          <a:lstStyle/>
-          <a:p>
-            <a:endParaRPr lang="de-DE"/>
+          <a:bodyPr>
+            <a:normAutofit/>
+          </a:bodyPr>
+          <a:lstStyle/>
+          <a:p>
+            <a:pPr marL="0" indent="0">
+              <a:buNone/>
+            </a:pPr>
+            <a:r>
+              <a:rPr lang="de-DE" sz="2400" b="1" u="sng" dirty="0"/>
+              <a:t>Client:</a:t>
+            </a:r>
+          </a:p>
+          <a:p>
+            <a:r>
+              <a:rPr lang="de-DE" sz="2000" dirty="0"/>
+              <a:t>AES-256 (für Verschlüsselung der Passwörter)</a:t>
+            </a:r>
+          </a:p>
+          <a:p>
+            <a:r>
+              <a:rPr lang="de-DE" sz="2000" dirty="0"/>
+              <a:t>JSON (zum Speichern der Settings)</a:t>
+            </a:r>
+          </a:p>
+          <a:p>
+            <a:r>
+              <a:rPr lang="de-DE" sz="2000" dirty="0"/>
+              <a:t>Swing UI Designer</a:t>
+            </a:r>
+          </a:p>
+          <a:p>
+            <a:r>
+              <a:rPr lang="de-DE" sz="2000" dirty="0"/>
+              <a:t>Lombok Getter/Setter</a:t>
+            </a:r>
+          </a:p>
+          <a:p>
+            <a:endParaRPr lang="de-DE" sz="2000" dirty="0"/>
+          </a:p>
+          <a:p>
+            <a:pPr marL="0" indent="0">
+              <a:buNone/>
+            </a:pPr>
+            <a:r>
+              <a:rPr lang="de-DE" sz="2400" b="1" u="sng" dirty="0"/>
+              <a:t>Server:</a:t>
+            </a:r>
+          </a:p>
+          <a:p>
+            <a:r>
+              <a:rPr lang="de-DE" sz="2000" dirty="0"/>
+              <a:t>MySQL Datenbank</a:t>
+            </a:r>
+          </a:p>
+          <a:p>
+            <a:r>
+              <a:rPr lang="de-DE" sz="2000" dirty="0"/>
+              <a:t>Docker </a:t>
+            </a:r>
+            <a:r>
+              <a:rPr lang="de-DE" sz="2000" dirty="0" err="1"/>
+              <a:t>Compose</a:t>
+            </a:r>
+            <a:endParaRPr lang="de-DE" sz="2000" dirty="0"/>
+          </a:p>
+          <a:p>
+            <a:r>
+              <a:rPr lang="de-DE" sz="2000" dirty="0"/>
+              <a:t>phpMyAdmin (optional)</a:t>
+            </a:r>
           </a:p>
         </p:txBody>
       </p:sp>

--- a/pp/Presentation.pptx
+++ b/pp/Presentation.pptx
@@ -8,8 +8,9 @@
     <p:sldId id="256" r:id="rId2"/>
     <p:sldId id="257" r:id="rId3"/>
     <p:sldId id="258" r:id="rId4"/>
-    <p:sldId id="259" r:id="rId5"/>
-    <p:sldId id="260" r:id="rId6"/>
+    <p:sldId id="261" r:id="rId5"/>
+    <p:sldId id="259" r:id="rId6"/>
+    <p:sldId id="260" r:id="rId7"/>
   </p:sldIdLst>
   <p:sldSz cx="12192000" cy="6858000"/>
   <p:notesSz cx="6858000" cy="9144000"/>
@@ -4734,10 +4735,285 @@
         </p:nvSpPr>
         <p:spPr/>
         <p:txBody>
-          <a:bodyPr/>
-          <a:lstStyle/>
-          <a:p>
+          <a:bodyPr>
+            <a:normAutofit/>
+          </a:bodyPr>
+          <a:lstStyle/>
+          <a:p>
+            <a:r>
+              <a:rPr lang="de-DE" sz="2000" dirty="0"/>
+              <a:t>Anmelde Maske:</a:t>
+            </a:r>
+          </a:p>
+        </p:txBody>
+      </p:sp>
+      <p:pic>
+        <p:nvPicPr>
+          <p:cNvPr id="8" name="Inhaltsplatzhalter 6">
+            <a:extLst>
+              <a:ext uri="{FF2B5EF4-FFF2-40B4-BE49-F238E27FC236}">
+                <a16:creationId xmlns:a16="http://schemas.microsoft.com/office/drawing/2014/main" id="{90AADBD4-0B5D-76CF-3B6C-1E4D6CD01AC6}"/>
+              </a:ext>
+            </a:extLst>
+          </p:cNvPr>
+          <p:cNvPicPr>
+            <a:picLocks noChangeAspect="1"/>
+          </p:cNvPicPr>
+          <p:nvPr/>
+        </p:nvPicPr>
+        <p:blipFill>
+          <a:blip r:embed="rId2"/>
+          <a:stretch>
+            <a:fillRect/>
+          </a:stretch>
+        </p:blipFill>
+        <p:spPr>
+          <a:xfrm>
+            <a:off x="7423575" y="2143863"/>
+            <a:ext cx="2729652" cy="3405727"/>
+          </a:xfrm>
+          <a:prstGeom prst="rect">
+            <a:avLst/>
+          </a:prstGeom>
+        </p:spPr>
+      </p:pic>
+      <p:sp>
+        <p:nvSpPr>
+          <p:cNvPr id="9" name="Rechteck 8">
+            <a:extLst>
+              <a:ext uri="{FF2B5EF4-FFF2-40B4-BE49-F238E27FC236}">
+                <a16:creationId xmlns:a16="http://schemas.microsoft.com/office/drawing/2014/main" id="{C00654F4-C22C-0574-E318-6BF8FAF95321}"/>
+              </a:ext>
+            </a:extLst>
+          </p:cNvPr>
+          <p:cNvSpPr/>
+          <p:nvPr/>
+        </p:nvSpPr>
+        <p:spPr>
+          <a:xfrm>
+            <a:off x="8477250" y="4654550"/>
+            <a:ext cx="635000" cy="273050"/>
+          </a:xfrm>
+          <a:prstGeom prst="rect">
+            <a:avLst/>
+          </a:prstGeom>
+          <a:noFill/>
+        </p:spPr>
+        <p:style>
+          <a:lnRef idx="2">
+            <a:schemeClr val="accent1">
+              <a:shade val="15000"/>
+            </a:schemeClr>
+          </a:lnRef>
+          <a:fillRef idx="1">
+            <a:schemeClr val="accent1"/>
+          </a:fillRef>
+          <a:effectRef idx="0">
+            <a:schemeClr val="accent1"/>
+          </a:effectRef>
+          <a:fontRef idx="minor">
+            <a:schemeClr val="lt1"/>
+          </a:fontRef>
+        </p:style>
+        <p:txBody>
+          <a:bodyPr rtlCol="0" anchor="ctr"/>
+          <a:lstStyle/>
+          <a:p>
+            <a:pPr algn="ctr"/>
             <a:endParaRPr lang="de-DE"/>
+          </a:p>
+        </p:txBody>
+      </p:sp>
+      <p:sp>
+        <p:nvSpPr>
+          <p:cNvPr id="10" name="Rechteck 9">
+            <a:extLst>
+              <a:ext uri="{FF2B5EF4-FFF2-40B4-BE49-F238E27FC236}">
+                <a16:creationId xmlns:a16="http://schemas.microsoft.com/office/drawing/2014/main" id="{614AC57B-680C-140C-3C19-47CEF706AD6D}"/>
+              </a:ext>
+            </a:extLst>
+          </p:cNvPr>
+          <p:cNvSpPr/>
+          <p:nvPr/>
+        </p:nvSpPr>
+        <p:spPr>
+          <a:xfrm>
+            <a:off x="8420100" y="4960088"/>
+            <a:ext cx="742949" cy="273050"/>
+          </a:xfrm>
+          <a:prstGeom prst="rect">
+            <a:avLst/>
+          </a:prstGeom>
+          <a:noFill/>
+        </p:spPr>
+        <p:style>
+          <a:lnRef idx="2">
+            <a:schemeClr val="accent1">
+              <a:shade val="15000"/>
+            </a:schemeClr>
+          </a:lnRef>
+          <a:fillRef idx="1">
+            <a:schemeClr val="accent1"/>
+          </a:fillRef>
+          <a:effectRef idx="0">
+            <a:schemeClr val="accent1"/>
+          </a:effectRef>
+          <a:fontRef idx="minor">
+            <a:schemeClr val="lt1"/>
+          </a:fontRef>
+        </p:style>
+        <p:txBody>
+          <a:bodyPr rtlCol="0" anchor="ctr"/>
+          <a:lstStyle/>
+          <a:p>
+            <a:pPr algn="ctr"/>
+            <a:endParaRPr lang="de-DE"/>
+          </a:p>
+        </p:txBody>
+      </p:sp>
+      <p:cxnSp>
+        <p:nvCxnSpPr>
+          <p:cNvPr id="12" name="Gerader Verbinder 11">
+            <a:extLst>
+              <a:ext uri="{FF2B5EF4-FFF2-40B4-BE49-F238E27FC236}">
+                <a16:creationId xmlns:a16="http://schemas.microsoft.com/office/drawing/2014/main" id="{AD84E114-D08B-6591-398C-AFE033C665E3}"/>
+              </a:ext>
+            </a:extLst>
+          </p:cNvPr>
+          <p:cNvCxnSpPr>
+            <a:cxnSpLocks/>
+            <a:stCxn id="9" idx="1"/>
+          </p:cNvCxnSpPr>
+          <p:nvPr/>
+        </p:nvCxnSpPr>
+        <p:spPr>
+          <a:xfrm flipH="1">
+            <a:off x="6800850" y="4791075"/>
+            <a:ext cx="1676400" cy="0"/>
+          </a:xfrm>
+          <a:prstGeom prst="line">
+            <a:avLst/>
+          </a:prstGeom>
+        </p:spPr>
+        <p:style>
+          <a:lnRef idx="2">
+            <a:schemeClr val="dk1"/>
+          </a:lnRef>
+          <a:fillRef idx="0">
+            <a:schemeClr val="dk1"/>
+          </a:fillRef>
+          <a:effectRef idx="1">
+            <a:schemeClr val="dk1"/>
+          </a:effectRef>
+          <a:fontRef idx="minor">
+            <a:schemeClr val="tx1"/>
+          </a:fontRef>
+        </p:style>
+      </p:cxnSp>
+      <p:cxnSp>
+        <p:nvCxnSpPr>
+          <p:cNvPr id="13" name="Gerader Verbinder 12">
+            <a:extLst>
+              <a:ext uri="{FF2B5EF4-FFF2-40B4-BE49-F238E27FC236}">
+                <a16:creationId xmlns:a16="http://schemas.microsoft.com/office/drawing/2014/main" id="{14E2C50C-4AFD-B05F-F87C-09E06ED85648}"/>
+              </a:ext>
+            </a:extLst>
+          </p:cNvPr>
+          <p:cNvCxnSpPr/>
+          <p:nvPr/>
+        </p:nvCxnSpPr>
+        <p:spPr>
+          <a:xfrm flipH="1" flipV="1">
+            <a:off x="6800850" y="5093438"/>
+            <a:ext cx="1619250" cy="3175"/>
+          </a:xfrm>
+          <a:prstGeom prst="line">
+            <a:avLst/>
+          </a:prstGeom>
+        </p:spPr>
+        <p:style>
+          <a:lnRef idx="2">
+            <a:schemeClr val="dk1"/>
+          </a:lnRef>
+          <a:fillRef idx="0">
+            <a:schemeClr val="dk1"/>
+          </a:fillRef>
+          <a:effectRef idx="1">
+            <a:schemeClr val="dk1"/>
+          </a:effectRef>
+          <a:fontRef idx="minor">
+            <a:schemeClr val="tx1"/>
+          </a:fontRef>
+        </p:style>
+      </p:cxnSp>
+      <p:sp>
+        <p:nvSpPr>
+          <p:cNvPr id="15" name="Textfeld 14">
+            <a:extLst>
+              <a:ext uri="{FF2B5EF4-FFF2-40B4-BE49-F238E27FC236}">
+                <a16:creationId xmlns:a16="http://schemas.microsoft.com/office/drawing/2014/main" id="{183A5621-B4F1-F978-DCB6-2C867D4868F7}"/>
+              </a:ext>
+            </a:extLst>
+          </p:cNvPr>
+          <p:cNvSpPr txBox="1"/>
+          <p:nvPr/>
+        </p:nvSpPr>
+        <p:spPr>
+          <a:xfrm>
+            <a:off x="5943601" y="4672709"/>
+            <a:ext cx="857250" cy="261610"/>
+          </a:xfrm>
+          <a:prstGeom prst="rect">
+            <a:avLst/>
+          </a:prstGeom>
+          <a:noFill/>
+        </p:spPr>
+        <p:txBody>
+          <a:bodyPr wrap="square" rtlCol="0">
+            <a:spAutoFit/>
+          </a:bodyPr>
+          <a:lstStyle/>
+          <a:p>
+            <a:r>
+              <a:rPr lang="de-DE" sz="1100" b="1" dirty="0"/>
+              <a:t>Anmelden</a:t>
+            </a:r>
+            <a:endParaRPr lang="de-DE" sz="1100" dirty="0"/>
+          </a:p>
+        </p:txBody>
+      </p:sp>
+      <p:sp>
+        <p:nvSpPr>
+          <p:cNvPr id="16" name="Textfeld 15">
+            <a:extLst>
+              <a:ext uri="{FF2B5EF4-FFF2-40B4-BE49-F238E27FC236}">
+                <a16:creationId xmlns:a16="http://schemas.microsoft.com/office/drawing/2014/main" id="{138885D9-1569-BF58-DA51-9E0E1C04FCF4}"/>
+              </a:ext>
+            </a:extLst>
+          </p:cNvPr>
+          <p:cNvSpPr txBox="1"/>
+          <p:nvPr/>
+        </p:nvSpPr>
+        <p:spPr>
+          <a:xfrm>
+            <a:off x="5816600" y="4971528"/>
+            <a:ext cx="984250" cy="261610"/>
+          </a:xfrm>
+          <a:prstGeom prst="rect">
+            <a:avLst/>
+          </a:prstGeom>
+          <a:noFill/>
+        </p:spPr>
+        <p:txBody>
+          <a:bodyPr wrap="square" rtlCol="0">
+            <a:spAutoFit/>
+          </a:bodyPr>
+          <a:lstStyle/>
+          <a:p>
+            <a:r>
+              <a:rPr lang="de-DE" sz="1100" b="1" dirty="0"/>
+              <a:t>Registrieren</a:t>
+            </a:r>
           </a:p>
         </p:txBody>
       </p:sp>
@@ -4759,6 +5035,1262 @@
   <p:cSld>
     <p:spTree>
       <p:nvGrpSpPr>
+        <p:cNvPr id="1" name="">
+          <a:extLst>
+            <a:ext uri="{FF2B5EF4-FFF2-40B4-BE49-F238E27FC236}">
+              <a16:creationId xmlns:a16="http://schemas.microsoft.com/office/drawing/2014/main" id="{606236BE-5340-42D0-57D6-379B335A7D62}"/>
+            </a:ext>
+          </a:extLst>
+        </p:cNvPr>
+        <p:cNvGrpSpPr/>
+        <p:nvPr/>
+      </p:nvGrpSpPr>
+      <p:grpSpPr>
+        <a:xfrm>
+          <a:off x="0" y="0"/>
+          <a:ext cx="0" cy="0"/>
+          <a:chOff x="0" y="0"/>
+          <a:chExt cx="0" cy="0"/>
+        </a:xfrm>
+      </p:grpSpPr>
+      <p:sp>
+        <p:nvSpPr>
+          <p:cNvPr id="2" name="Titel 1">
+            <a:extLst>
+              <a:ext uri="{FF2B5EF4-FFF2-40B4-BE49-F238E27FC236}">
+                <a16:creationId xmlns:a16="http://schemas.microsoft.com/office/drawing/2014/main" id="{94C68866-945E-E942-2163-4C4015646B9C}"/>
+              </a:ext>
+            </a:extLst>
+          </p:cNvPr>
+          <p:cNvSpPr>
+            <a:spLocks noGrp="1"/>
+          </p:cNvSpPr>
+          <p:nvPr>
+            <p:ph type="title"/>
+          </p:nvPr>
+        </p:nvSpPr>
+        <p:spPr/>
+        <p:txBody>
+          <a:bodyPr/>
+          <a:lstStyle/>
+          <a:p>
+            <a:r>
+              <a:rPr lang="de-DE" dirty="0"/>
+              <a:t>Technischer Hintergrund</a:t>
+            </a:r>
+          </a:p>
+        </p:txBody>
+      </p:sp>
+      <p:sp>
+        <p:nvSpPr>
+          <p:cNvPr id="3" name="Inhaltsplatzhalter 2">
+            <a:extLst>
+              <a:ext uri="{FF2B5EF4-FFF2-40B4-BE49-F238E27FC236}">
+                <a16:creationId xmlns:a16="http://schemas.microsoft.com/office/drawing/2014/main" id="{6CAEF4E8-7BDB-6C56-2CB7-358AF35A975E}"/>
+              </a:ext>
+            </a:extLst>
+          </p:cNvPr>
+          <p:cNvSpPr>
+            <a:spLocks noGrp="1"/>
+          </p:cNvSpPr>
+          <p:nvPr>
+            <p:ph idx="1"/>
+          </p:nvPr>
+        </p:nvSpPr>
+        <p:spPr/>
+        <p:txBody>
+          <a:bodyPr>
+            <a:normAutofit/>
+          </a:bodyPr>
+          <a:lstStyle/>
+          <a:p>
+            <a:r>
+              <a:rPr lang="de-DE" sz="2000" dirty="0"/>
+              <a:t>Hauptfenster:</a:t>
+            </a:r>
+          </a:p>
+        </p:txBody>
+      </p:sp>
+      <p:pic>
+        <p:nvPicPr>
+          <p:cNvPr id="7" name="Grafik 6">
+            <a:extLst>
+              <a:ext uri="{FF2B5EF4-FFF2-40B4-BE49-F238E27FC236}">
+                <a16:creationId xmlns:a16="http://schemas.microsoft.com/office/drawing/2014/main" id="{A412E9BC-BB5C-5053-870C-F48350CCC04C}"/>
+              </a:ext>
+            </a:extLst>
+          </p:cNvPr>
+          <p:cNvPicPr>
+            <a:picLocks noChangeAspect="1"/>
+          </p:cNvPicPr>
+          <p:nvPr/>
+        </p:nvPicPr>
+        <p:blipFill>
+          <a:blip r:embed="rId2"/>
+          <a:stretch>
+            <a:fillRect/>
+          </a:stretch>
+        </p:blipFill>
+        <p:spPr>
+          <a:xfrm>
+            <a:off x="5665047" y="1515977"/>
+            <a:ext cx="3712634" cy="4970634"/>
+          </a:xfrm>
+          <a:prstGeom prst="rect">
+            <a:avLst/>
+          </a:prstGeom>
+        </p:spPr>
+      </p:pic>
+      <p:grpSp>
+        <p:nvGrpSpPr>
+          <p:cNvPr id="18" name="Gruppieren 17">
+            <a:extLst>
+              <a:ext uri="{FF2B5EF4-FFF2-40B4-BE49-F238E27FC236}">
+                <a16:creationId xmlns:a16="http://schemas.microsoft.com/office/drawing/2014/main" id="{AE239735-4A51-75B1-8C2A-EAB34587FAFD}"/>
+              </a:ext>
+            </a:extLst>
+          </p:cNvPr>
+          <p:cNvGrpSpPr/>
+          <p:nvPr/>
+        </p:nvGrpSpPr>
+        <p:grpSpPr>
+          <a:xfrm>
+            <a:off x="4977553" y="2757488"/>
+            <a:ext cx="2699597" cy="277812"/>
+            <a:chOff x="6349153" y="2411307"/>
+            <a:chExt cx="2699597" cy="331893"/>
+          </a:xfrm>
+        </p:grpSpPr>
+        <p:sp>
+          <p:nvSpPr>
+            <p:cNvPr id="19" name="Rechteck 18">
+              <a:extLst>
+                <a:ext uri="{FF2B5EF4-FFF2-40B4-BE49-F238E27FC236}">
+                  <a16:creationId xmlns:a16="http://schemas.microsoft.com/office/drawing/2014/main" id="{6148E599-BFB3-5B7F-67C2-F7CA944B598E}"/>
+                </a:ext>
+              </a:extLst>
+            </p:cNvPr>
+            <p:cNvSpPr/>
+            <p:nvPr/>
+          </p:nvSpPr>
+          <p:spPr>
+            <a:xfrm>
+              <a:off x="7124700" y="2411307"/>
+              <a:ext cx="1924050" cy="331893"/>
+            </a:xfrm>
+            <a:prstGeom prst="rect">
+              <a:avLst/>
+            </a:prstGeom>
+            <a:noFill/>
+            <a:ln>
+              <a:solidFill>
+                <a:schemeClr val="tx1"/>
+              </a:solidFill>
+            </a:ln>
+          </p:spPr>
+          <p:style>
+            <a:lnRef idx="2">
+              <a:schemeClr val="accent1">
+                <a:shade val="15000"/>
+              </a:schemeClr>
+            </a:lnRef>
+            <a:fillRef idx="1">
+              <a:schemeClr val="accent1"/>
+            </a:fillRef>
+            <a:effectRef idx="0">
+              <a:schemeClr val="accent1"/>
+            </a:effectRef>
+            <a:fontRef idx="minor">
+              <a:schemeClr val="lt1"/>
+            </a:fontRef>
+          </p:style>
+          <p:txBody>
+            <a:bodyPr rtlCol="0" anchor="ctr"/>
+            <a:lstStyle/>
+            <a:p>
+              <a:pPr algn="ctr"/>
+              <a:endParaRPr lang="de-DE"/>
+            </a:p>
+          </p:txBody>
+        </p:sp>
+        <p:cxnSp>
+          <p:nvCxnSpPr>
+            <p:cNvPr id="20" name="Gerader Verbinder 19">
+              <a:extLst>
+                <a:ext uri="{FF2B5EF4-FFF2-40B4-BE49-F238E27FC236}">
+                  <a16:creationId xmlns:a16="http://schemas.microsoft.com/office/drawing/2014/main" id="{442868B0-4560-01A6-08DB-151CDB4A983E}"/>
+                </a:ext>
+              </a:extLst>
+            </p:cNvPr>
+            <p:cNvCxnSpPr>
+              <a:cxnSpLocks/>
+            </p:cNvCxnSpPr>
+            <p:nvPr/>
+          </p:nvCxnSpPr>
+          <p:spPr>
+            <a:xfrm>
+              <a:off x="6349153" y="2590800"/>
+              <a:ext cx="775547" cy="0"/>
+            </a:xfrm>
+            <a:prstGeom prst="line">
+              <a:avLst/>
+            </a:prstGeom>
+            <a:ln>
+              <a:solidFill>
+                <a:schemeClr val="tx1"/>
+              </a:solidFill>
+            </a:ln>
+          </p:spPr>
+          <p:style>
+            <a:lnRef idx="2">
+              <a:schemeClr val="accent1"/>
+            </a:lnRef>
+            <a:fillRef idx="0">
+              <a:schemeClr val="accent1"/>
+            </a:fillRef>
+            <a:effectRef idx="1">
+              <a:schemeClr val="accent1"/>
+            </a:effectRef>
+            <a:fontRef idx="minor">
+              <a:schemeClr val="tx1"/>
+            </a:fontRef>
+          </p:style>
+        </p:cxnSp>
+      </p:grpSp>
+      <p:grpSp>
+        <p:nvGrpSpPr>
+          <p:cNvPr id="21" name="Gruppieren 20">
+            <a:extLst>
+              <a:ext uri="{FF2B5EF4-FFF2-40B4-BE49-F238E27FC236}">
+                <a16:creationId xmlns:a16="http://schemas.microsoft.com/office/drawing/2014/main" id="{1787C08C-75D7-182E-A452-E7757B49BBF2}"/>
+              </a:ext>
+            </a:extLst>
+          </p:cNvPr>
+          <p:cNvGrpSpPr/>
+          <p:nvPr/>
+        </p:nvGrpSpPr>
+        <p:grpSpPr>
+          <a:xfrm>
+            <a:off x="4977553" y="2446479"/>
+            <a:ext cx="2699597" cy="277812"/>
+            <a:chOff x="6349153" y="2411307"/>
+            <a:chExt cx="2699597" cy="331893"/>
+          </a:xfrm>
+        </p:grpSpPr>
+        <p:sp>
+          <p:nvSpPr>
+            <p:cNvPr id="22" name="Rechteck 21">
+              <a:extLst>
+                <a:ext uri="{FF2B5EF4-FFF2-40B4-BE49-F238E27FC236}">
+                  <a16:creationId xmlns:a16="http://schemas.microsoft.com/office/drawing/2014/main" id="{9033A0C7-D642-3E36-7EA2-701791B9B689}"/>
+                </a:ext>
+              </a:extLst>
+            </p:cNvPr>
+            <p:cNvSpPr/>
+            <p:nvPr/>
+          </p:nvSpPr>
+          <p:spPr>
+            <a:xfrm>
+              <a:off x="7124700" y="2411307"/>
+              <a:ext cx="1924050" cy="331893"/>
+            </a:xfrm>
+            <a:prstGeom prst="rect">
+              <a:avLst/>
+            </a:prstGeom>
+            <a:noFill/>
+            <a:ln>
+              <a:solidFill>
+                <a:schemeClr val="tx1"/>
+              </a:solidFill>
+            </a:ln>
+          </p:spPr>
+          <p:style>
+            <a:lnRef idx="2">
+              <a:schemeClr val="accent1">
+                <a:shade val="15000"/>
+              </a:schemeClr>
+            </a:lnRef>
+            <a:fillRef idx="1">
+              <a:schemeClr val="accent1"/>
+            </a:fillRef>
+            <a:effectRef idx="0">
+              <a:schemeClr val="accent1"/>
+            </a:effectRef>
+            <a:fontRef idx="minor">
+              <a:schemeClr val="lt1"/>
+            </a:fontRef>
+          </p:style>
+          <p:txBody>
+            <a:bodyPr rtlCol="0" anchor="ctr"/>
+            <a:lstStyle/>
+            <a:p>
+              <a:pPr algn="ctr"/>
+              <a:endParaRPr lang="de-DE"/>
+            </a:p>
+          </p:txBody>
+        </p:sp>
+        <p:cxnSp>
+          <p:nvCxnSpPr>
+            <p:cNvPr id="23" name="Gerader Verbinder 22">
+              <a:extLst>
+                <a:ext uri="{FF2B5EF4-FFF2-40B4-BE49-F238E27FC236}">
+                  <a16:creationId xmlns:a16="http://schemas.microsoft.com/office/drawing/2014/main" id="{4971A83A-05D4-F292-C1C6-592781D65503}"/>
+                </a:ext>
+              </a:extLst>
+            </p:cNvPr>
+            <p:cNvCxnSpPr>
+              <a:cxnSpLocks/>
+            </p:cNvCxnSpPr>
+            <p:nvPr/>
+          </p:nvCxnSpPr>
+          <p:spPr>
+            <a:xfrm>
+              <a:off x="6349153" y="2590800"/>
+              <a:ext cx="775547" cy="0"/>
+            </a:xfrm>
+            <a:prstGeom prst="line">
+              <a:avLst/>
+            </a:prstGeom>
+            <a:ln>
+              <a:solidFill>
+                <a:schemeClr val="tx1"/>
+              </a:solidFill>
+            </a:ln>
+          </p:spPr>
+          <p:style>
+            <a:lnRef idx="2">
+              <a:schemeClr val="accent1"/>
+            </a:lnRef>
+            <a:fillRef idx="0">
+              <a:schemeClr val="accent1"/>
+            </a:fillRef>
+            <a:effectRef idx="1">
+              <a:schemeClr val="accent1"/>
+            </a:effectRef>
+            <a:fontRef idx="minor">
+              <a:schemeClr val="tx1"/>
+            </a:fontRef>
+          </p:style>
+        </p:cxnSp>
+      </p:grpSp>
+      <p:grpSp>
+        <p:nvGrpSpPr>
+          <p:cNvPr id="24" name="Gruppieren 23">
+            <a:extLst>
+              <a:ext uri="{FF2B5EF4-FFF2-40B4-BE49-F238E27FC236}">
+                <a16:creationId xmlns:a16="http://schemas.microsoft.com/office/drawing/2014/main" id="{C888E67D-DC3E-309E-4B57-5765B1561E62}"/>
+              </a:ext>
+            </a:extLst>
+          </p:cNvPr>
+          <p:cNvGrpSpPr/>
+          <p:nvPr/>
+        </p:nvGrpSpPr>
+        <p:grpSpPr>
+          <a:xfrm>
+            <a:off x="4977553" y="3060983"/>
+            <a:ext cx="2699597" cy="277812"/>
+            <a:chOff x="6349153" y="2411307"/>
+            <a:chExt cx="2699597" cy="331893"/>
+          </a:xfrm>
+        </p:grpSpPr>
+        <p:sp>
+          <p:nvSpPr>
+            <p:cNvPr id="25" name="Rechteck 24">
+              <a:extLst>
+                <a:ext uri="{FF2B5EF4-FFF2-40B4-BE49-F238E27FC236}">
+                  <a16:creationId xmlns:a16="http://schemas.microsoft.com/office/drawing/2014/main" id="{6B2A247B-52DE-98CA-EFFD-38176E664542}"/>
+                </a:ext>
+              </a:extLst>
+            </p:cNvPr>
+            <p:cNvSpPr/>
+            <p:nvPr/>
+          </p:nvSpPr>
+          <p:spPr>
+            <a:xfrm>
+              <a:off x="7124700" y="2411307"/>
+              <a:ext cx="1924050" cy="331893"/>
+            </a:xfrm>
+            <a:prstGeom prst="rect">
+              <a:avLst/>
+            </a:prstGeom>
+            <a:noFill/>
+            <a:ln>
+              <a:solidFill>
+                <a:schemeClr val="tx1"/>
+              </a:solidFill>
+            </a:ln>
+          </p:spPr>
+          <p:style>
+            <a:lnRef idx="2">
+              <a:schemeClr val="accent1">
+                <a:shade val="15000"/>
+              </a:schemeClr>
+            </a:lnRef>
+            <a:fillRef idx="1">
+              <a:schemeClr val="accent1"/>
+            </a:fillRef>
+            <a:effectRef idx="0">
+              <a:schemeClr val="accent1"/>
+            </a:effectRef>
+            <a:fontRef idx="minor">
+              <a:schemeClr val="lt1"/>
+            </a:fontRef>
+          </p:style>
+          <p:txBody>
+            <a:bodyPr rtlCol="0" anchor="ctr"/>
+            <a:lstStyle/>
+            <a:p>
+              <a:pPr algn="ctr"/>
+              <a:endParaRPr lang="de-DE"/>
+            </a:p>
+          </p:txBody>
+        </p:sp>
+        <p:cxnSp>
+          <p:nvCxnSpPr>
+            <p:cNvPr id="26" name="Gerader Verbinder 25">
+              <a:extLst>
+                <a:ext uri="{FF2B5EF4-FFF2-40B4-BE49-F238E27FC236}">
+                  <a16:creationId xmlns:a16="http://schemas.microsoft.com/office/drawing/2014/main" id="{0C3FE2A6-0A4E-A4BD-B9E2-355F5D9E1ED6}"/>
+                </a:ext>
+              </a:extLst>
+            </p:cNvPr>
+            <p:cNvCxnSpPr>
+              <a:cxnSpLocks/>
+            </p:cNvCxnSpPr>
+            <p:nvPr/>
+          </p:nvCxnSpPr>
+          <p:spPr>
+            <a:xfrm>
+              <a:off x="6349153" y="2590800"/>
+              <a:ext cx="775547" cy="0"/>
+            </a:xfrm>
+            <a:prstGeom prst="line">
+              <a:avLst/>
+            </a:prstGeom>
+            <a:ln>
+              <a:solidFill>
+                <a:schemeClr val="tx1"/>
+              </a:solidFill>
+            </a:ln>
+          </p:spPr>
+          <p:style>
+            <a:lnRef idx="2">
+              <a:schemeClr val="accent1"/>
+            </a:lnRef>
+            <a:fillRef idx="0">
+              <a:schemeClr val="accent1"/>
+            </a:fillRef>
+            <a:effectRef idx="1">
+              <a:schemeClr val="accent1"/>
+            </a:effectRef>
+            <a:fontRef idx="minor">
+              <a:schemeClr val="tx1"/>
+            </a:fontRef>
+          </p:style>
+        </p:cxnSp>
+      </p:grpSp>
+      <p:sp>
+        <p:nvSpPr>
+          <p:cNvPr id="27" name="Textfeld 26">
+            <a:extLst>
+              <a:ext uri="{FF2B5EF4-FFF2-40B4-BE49-F238E27FC236}">
+                <a16:creationId xmlns:a16="http://schemas.microsoft.com/office/drawing/2014/main" id="{05D17127-7C74-E0CC-33DA-F8B2800390A2}"/>
+              </a:ext>
+            </a:extLst>
+          </p:cNvPr>
+          <p:cNvSpPr txBox="1"/>
+          <p:nvPr/>
+        </p:nvSpPr>
+        <p:spPr>
+          <a:xfrm>
+            <a:off x="3008419" y="2318913"/>
+            <a:ext cx="2052109" cy="430887"/>
+          </a:xfrm>
+          <a:prstGeom prst="rect">
+            <a:avLst/>
+          </a:prstGeom>
+          <a:noFill/>
+        </p:spPr>
+        <p:txBody>
+          <a:bodyPr wrap="square" rtlCol="0">
+            <a:spAutoFit/>
+          </a:bodyPr>
+          <a:lstStyle/>
+          <a:p>
+            <a:r>
+              <a:rPr lang="de-DE" sz="1100" b="1" dirty="0"/>
+              <a:t>Name des Eintrags </a:t>
+            </a:r>
+            <a:r>
+              <a:rPr lang="de-DE" sz="1100" dirty="0">
+                <a:sym typeface="Wingdings" panose="05000000000000000000" pitchFamily="2" charset="2"/>
+              </a:rPr>
+              <a:t> z.B. </a:t>
+            </a:r>
+          </a:p>
+          <a:p>
+            <a:r>
+              <a:rPr lang="de-DE" sz="1100" dirty="0">
+                <a:sym typeface="Wingdings" panose="05000000000000000000" pitchFamily="2" charset="2"/>
+              </a:rPr>
+              <a:t>Google Account</a:t>
+            </a:r>
+            <a:endParaRPr lang="de-DE" sz="1100" dirty="0"/>
+          </a:p>
+        </p:txBody>
+      </p:sp>
+      <p:sp>
+        <p:nvSpPr>
+          <p:cNvPr id="28" name="Textfeld 27">
+            <a:extLst>
+              <a:ext uri="{FF2B5EF4-FFF2-40B4-BE49-F238E27FC236}">
+                <a16:creationId xmlns:a16="http://schemas.microsoft.com/office/drawing/2014/main" id="{490C1C90-55A7-4B19-A886-6D8CBA5E20FE}"/>
+              </a:ext>
+            </a:extLst>
+          </p:cNvPr>
+          <p:cNvSpPr txBox="1"/>
+          <p:nvPr/>
+        </p:nvSpPr>
+        <p:spPr>
+          <a:xfrm>
+            <a:off x="3008419" y="2705241"/>
+            <a:ext cx="2102484" cy="430887"/>
+          </a:xfrm>
+          <a:prstGeom prst="rect">
+            <a:avLst/>
+          </a:prstGeom>
+          <a:noFill/>
+        </p:spPr>
+        <p:txBody>
+          <a:bodyPr wrap="square" rtlCol="0">
+            <a:spAutoFit/>
+          </a:bodyPr>
+          <a:lstStyle/>
+          <a:p>
+            <a:r>
+              <a:rPr lang="de-DE" sz="1100" b="1" dirty="0"/>
+              <a:t>Nutzername</a:t>
+            </a:r>
+            <a:r>
+              <a:rPr lang="de-DE" sz="1100" dirty="0"/>
+              <a:t> </a:t>
+            </a:r>
+            <a:r>
+              <a:rPr lang="de-DE" sz="1100" dirty="0">
+                <a:sym typeface="Wingdings" panose="05000000000000000000" pitchFamily="2" charset="2"/>
+              </a:rPr>
+              <a:t>z.B. </a:t>
+            </a:r>
+          </a:p>
+          <a:p>
+            <a:r>
+              <a:rPr lang="de-DE" sz="1100" dirty="0">
+                <a:sym typeface="Wingdings" panose="05000000000000000000" pitchFamily="2" charset="2"/>
+              </a:rPr>
+              <a:t>max.mustermann@email.com</a:t>
+            </a:r>
+          </a:p>
+        </p:txBody>
+      </p:sp>
+      <p:sp>
+        <p:nvSpPr>
+          <p:cNvPr id="29" name="Textfeld 28">
+            <a:extLst>
+              <a:ext uri="{FF2B5EF4-FFF2-40B4-BE49-F238E27FC236}">
+                <a16:creationId xmlns:a16="http://schemas.microsoft.com/office/drawing/2014/main" id="{F9EAC7FD-589E-DBAD-0D11-67A92A705FEF}"/>
+              </a:ext>
+            </a:extLst>
+          </p:cNvPr>
+          <p:cNvSpPr txBox="1"/>
+          <p:nvPr/>
+        </p:nvSpPr>
+        <p:spPr>
+          <a:xfrm>
+            <a:off x="3008419" y="3060133"/>
+            <a:ext cx="2102484" cy="430887"/>
+          </a:xfrm>
+          <a:prstGeom prst="rect">
+            <a:avLst/>
+          </a:prstGeom>
+          <a:noFill/>
+        </p:spPr>
+        <p:txBody>
+          <a:bodyPr wrap="square" rtlCol="0">
+            <a:spAutoFit/>
+          </a:bodyPr>
+          <a:lstStyle/>
+          <a:p>
+            <a:r>
+              <a:rPr lang="de-DE" sz="1100" b="1" dirty="0"/>
+              <a:t>Passwort</a:t>
+            </a:r>
+            <a:r>
+              <a:rPr lang="de-DE" sz="1100" dirty="0"/>
+              <a:t> </a:t>
+            </a:r>
+            <a:r>
+              <a:rPr lang="de-DE" sz="1100" dirty="0">
+                <a:sym typeface="Wingdings" panose="05000000000000000000" pitchFamily="2" charset="2"/>
+              </a:rPr>
+              <a:t>z.B. </a:t>
+            </a:r>
+          </a:p>
+          <a:p>
+            <a:r>
+              <a:rPr lang="de-DE" sz="1100" dirty="0">
+                <a:sym typeface="Wingdings" panose="05000000000000000000" pitchFamily="2" charset="2"/>
+              </a:rPr>
+              <a:t>max1234</a:t>
+            </a:r>
+          </a:p>
+        </p:txBody>
+      </p:sp>
+      <p:sp>
+        <p:nvSpPr>
+          <p:cNvPr id="30" name="Rechteck 29">
+            <a:extLst>
+              <a:ext uri="{FF2B5EF4-FFF2-40B4-BE49-F238E27FC236}">
+                <a16:creationId xmlns:a16="http://schemas.microsoft.com/office/drawing/2014/main" id="{3235D844-1836-39E1-7252-326073FC96EF}"/>
+              </a:ext>
+            </a:extLst>
+          </p:cNvPr>
+          <p:cNvSpPr/>
+          <p:nvPr/>
+        </p:nvSpPr>
+        <p:spPr>
+          <a:xfrm>
+            <a:off x="5753100" y="3368107"/>
+            <a:ext cx="533400" cy="373120"/>
+          </a:xfrm>
+          <a:prstGeom prst="rect">
+            <a:avLst/>
+          </a:prstGeom>
+          <a:noFill/>
+          <a:ln>
+            <a:solidFill>
+              <a:schemeClr val="tx1"/>
+            </a:solidFill>
+          </a:ln>
+        </p:spPr>
+        <p:style>
+          <a:lnRef idx="2">
+            <a:schemeClr val="accent1">
+              <a:shade val="15000"/>
+            </a:schemeClr>
+          </a:lnRef>
+          <a:fillRef idx="1">
+            <a:schemeClr val="accent1"/>
+          </a:fillRef>
+          <a:effectRef idx="0">
+            <a:schemeClr val="accent1"/>
+          </a:effectRef>
+          <a:fontRef idx="minor">
+            <a:schemeClr val="lt1"/>
+          </a:fontRef>
+        </p:style>
+        <p:txBody>
+          <a:bodyPr rtlCol="0" anchor="ctr"/>
+          <a:lstStyle/>
+          <a:p>
+            <a:pPr algn="ctr"/>
+            <a:endParaRPr lang="de-DE"/>
+          </a:p>
+        </p:txBody>
+      </p:sp>
+      <p:cxnSp>
+        <p:nvCxnSpPr>
+          <p:cNvPr id="34" name="Verbinder: gewinkelt 33">
+            <a:extLst>
+              <a:ext uri="{FF2B5EF4-FFF2-40B4-BE49-F238E27FC236}">
+                <a16:creationId xmlns:a16="http://schemas.microsoft.com/office/drawing/2014/main" id="{840FC459-2ECA-280E-4EFF-DF2AE09B8C7A}"/>
+              </a:ext>
+            </a:extLst>
+          </p:cNvPr>
+          <p:cNvCxnSpPr>
+            <a:stCxn id="30" idx="1"/>
+          </p:cNvCxnSpPr>
+          <p:nvPr/>
+        </p:nvCxnSpPr>
+        <p:spPr>
+          <a:xfrm rot="10800000" flipV="1">
+            <a:off x="4229100" y="3554666"/>
+            <a:ext cx="1524000" cy="687133"/>
+          </a:xfrm>
+          <a:prstGeom prst="bentConnector3">
+            <a:avLst/>
+          </a:prstGeom>
+        </p:spPr>
+        <p:style>
+          <a:lnRef idx="2">
+            <a:schemeClr val="dk1"/>
+          </a:lnRef>
+          <a:fillRef idx="0">
+            <a:schemeClr val="dk1"/>
+          </a:fillRef>
+          <a:effectRef idx="1">
+            <a:schemeClr val="dk1"/>
+          </a:effectRef>
+          <a:fontRef idx="minor">
+            <a:schemeClr val="tx1"/>
+          </a:fontRef>
+        </p:style>
+      </p:cxnSp>
+      <p:sp>
+        <p:nvSpPr>
+          <p:cNvPr id="35" name="Textfeld 34">
+            <a:extLst>
+              <a:ext uri="{FF2B5EF4-FFF2-40B4-BE49-F238E27FC236}">
+                <a16:creationId xmlns:a16="http://schemas.microsoft.com/office/drawing/2014/main" id="{3DF263DE-56A9-9FFD-86FE-6DBB54FEF719}"/>
+              </a:ext>
+            </a:extLst>
+          </p:cNvPr>
+          <p:cNvSpPr txBox="1"/>
+          <p:nvPr/>
+        </p:nvSpPr>
+        <p:spPr>
+          <a:xfrm>
+            <a:off x="2762247" y="4108776"/>
+            <a:ext cx="1524002" cy="261610"/>
+          </a:xfrm>
+          <a:prstGeom prst="rect">
+            <a:avLst/>
+          </a:prstGeom>
+          <a:noFill/>
+        </p:spPr>
+        <p:txBody>
+          <a:bodyPr wrap="square" rtlCol="0">
+            <a:spAutoFit/>
+          </a:bodyPr>
+          <a:lstStyle/>
+          <a:p>
+            <a:r>
+              <a:rPr lang="de-DE" sz="1100" b="1" dirty="0"/>
+              <a:t>Passwort generieren</a:t>
+            </a:r>
+            <a:endParaRPr lang="de-DE" sz="1100" dirty="0"/>
+          </a:p>
+        </p:txBody>
+      </p:sp>
+      <p:sp>
+        <p:nvSpPr>
+          <p:cNvPr id="36" name="Rechteck 35">
+            <a:extLst>
+              <a:ext uri="{FF2B5EF4-FFF2-40B4-BE49-F238E27FC236}">
+                <a16:creationId xmlns:a16="http://schemas.microsoft.com/office/drawing/2014/main" id="{65F1E123-D841-A3BF-C805-C3DE5659E5DD}"/>
+              </a:ext>
+            </a:extLst>
+          </p:cNvPr>
+          <p:cNvSpPr/>
+          <p:nvPr/>
+        </p:nvSpPr>
+        <p:spPr>
+          <a:xfrm>
+            <a:off x="6922348" y="3367439"/>
+            <a:ext cx="533400" cy="373120"/>
+          </a:xfrm>
+          <a:prstGeom prst="rect">
+            <a:avLst/>
+          </a:prstGeom>
+          <a:noFill/>
+          <a:ln>
+            <a:solidFill>
+              <a:schemeClr val="tx1"/>
+            </a:solidFill>
+          </a:ln>
+        </p:spPr>
+        <p:style>
+          <a:lnRef idx="2">
+            <a:schemeClr val="accent1">
+              <a:shade val="15000"/>
+            </a:schemeClr>
+          </a:lnRef>
+          <a:fillRef idx="1">
+            <a:schemeClr val="accent1"/>
+          </a:fillRef>
+          <a:effectRef idx="0">
+            <a:schemeClr val="accent1"/>
+          </a:effectRef>
+          <a:fontRef idx="minor">
+            <a:schemeClr val="lt1"/>
+          </a:fontRef>
+        </p:style>
+        <p:txBody>
+          <a:bodyPr rtlCol="0" anchor="ctr"/>
+          <a:lstStyle/>
+          <a:p>
+            <a:pPr algn="ctr"/>
+            <a:endParaRPr lang="de-DE"/>
+          </a:p>
+        </p:txBody>
+      </p:sp>
+      <p:cxnSp>
+        <p:nvCxnSpPr>
+          <p:cNvPr id="38" name="Verbinder: gewinkelt 37">
+            <a:extLst>
+              <a:ext uri="{FF2B5EF4-FFF2-40B4-BE49-F238E27FC236}">
+                <a16:creationId xmlns:a16="http://schemas.microsoft.com/office/drawing/2014/main" id="{0C79A98A-1CB1-CCE5-1DCF-C619A70D08DB}"/>
+              </a:ext>
+            </a:extLst>
+          </p:cNvPr>
+          <p:cNvCxnSpPr>
+            <a:stCxn id="36" idx="2"/>
+          </p:cNvCxnSpPr>
+          <p:nvPr/>
+        </p:nvCxnSpPr>
+        <p:spPr>
+          <a:xfrm rot="5400000">
+            <a:off x="5217154" y="2752505"/>
+            <a:ext cx="983841" cy="2959949"/>
+          </a:xfrm>
+          <a:prstGeom prst="bentConnector2">
+            <a:avLst/>
+          </a:prstGeom>
+        </p:spPr>
+        <p:style>
+          <a:lnRef idx="2">
+            <a:schemeClr val="dk1"/>
+          </a:lnRef>
+          <a:fillRef idx="0">
+            <a:schemeClr val="dk1"/>
+          </a:fillRef>
+          <a:effectRef idx="1">
+            <a:schemeClr val="dk1"/>
+          </a:effectRef>
+          <a:fontRef idx="minor">
+            <a:schemeClr val="tx1"/>
+          </a:fontRef>
+        </p:style>
+      </p:cxnSp>
+      <p:sp>
+        <p:nvSpPr>
+          <p:cNvPr id="39" name="Textfeld 38">
+            <a:extLst>
+              <a:ext uri="{FF2B5EF4-FFF2-40B4-BE49-F238E27FC236}">
+                <a16:creationId xmlns:a16="http://schemas.microsoft.com/office/drawing/2014/main" id="{A393AB46-661A-289D-DE8B-108792BFC456}"/>
+              </a:ext>
+            </a:extLst>
+          </p:cNvPr>
+          <p:cNvSpPr txBox="1"/>
+          <p:nvPr/>
+        </p:nvSpPr>
+        <p:spPr>
+          <a:xfrm>
+            <a:off x="2762247" y="4523159"/>
+            <a:ext cx="1524002" cy="430887"/>
+          </a:xfrm>
+          <a:prstGeom prst="rect">
+            <a:avLst/>
+          </a:prstGeom>
+          <a:noFill/>
+        </p:spPr>
+        <p:txBody>
+          <a:bodyPr wrap="square" rtlCol="0">
+            <a:spAutoFit/>
+          </a:bodyPr>
+          <a:lstStyle/>
+          <a:p>
+            <a:r>
+              <a:rPr lang="de-DE" sz="1100" b="1" dirty="0"/>
+              <a:t>Eintrag zur Tabelle hinzufügen</a:t>
+            </a:r>
+          </a:p>
+        </p:txBody>
+      </p:sp>
+      <p:sp>
+        <p:nvSpPr>
+          <p:cNvPr id="40" name="Rechteck 39">
+            <a:extLst>
+              <a:ext uri="{FF2B5EF4-FFF2-40B4-BE49-F238E27FC236}">
+                <a16:creationId xmlns:a16="http://schemas.microsoft.com/office/drawing/2014/main" id="{F91FDF8E-FA3B-5B83-63F6-1789A9DDFD22}"/>
+              </a:ext>
+            </a:extLst>
+          </p:cNvPr>
+          <p:cNvSpPr/>
+          <p:nvPr/>
+        </p:nvSpPr>
+        <p:spPr>
+          <a:xfrm>
+            <a:off x="8100910" y="3367439"/>
+            <a:ext cx="533400" cy="373120"/>
+          </a:xfrm>
+          <a:prstGeom prst="rect">
+            <a:avLst/>
+          </a:prstGeom>
+          <a:noFill/>
+          <a:ln>
+            <a:solidFill>
+              <a:schemeClr val="tx1"/>
+            </a:solidFill>
+          </a:ln>
+        </p:spPr>
+        <p:style>
+          <a:lnRef idx="2">
+            <a:schemeClr val="accent1">
+              <a:shade val="15000"/>
+            </a:schemeClr>
+          </a:lnRef>
+          <a:fillRef idx="1">
+            <a:schemeClr val="accent1"/>
+          </a:fillRef>
+          <a:effectRef idx="0">
+            <a:schemeClr val="accent1"/>
+          </a:effectRef>
+          <a:fontRef idx="minor">
+            <a:schemeClr val="lt1"/>
+          </a:fontRef>
+        </p:style>
+        <p:txBody>
+          <a:bodyPr rtlCol="0" anchor="ctr"/>
+          <a:lstStyle/>
+          <a:p>
+            <a:pPr algn="ctr"/>
+            <a:endParaRPr lang="de-DE"/>
+          </a:p>
+        </p:txBody>
+      </p:sp>
+      <p:cxnSp>
+        <p:nvCxnSpPr>
+          <p:cNvPr id="42" name="Verbinder: gewinkelt 41">
+            <a:extLst>
+              <a:ext uri="{FF2B5EF4-FFF2-40B4-BE49-F238E27FC236}">
+                <a16:creationId xmlns:a16="http://schemas.microsoft.com/office/drawing/2014/main" id="{655A7CAB-F8C7-4DB5-5370-2CCDA5068410}"/>
+              </a:ext>
+            </a:extLst>
+          </p:cNvPr>
+          <p:cNvCxnSpPr>
+            <a:stCxn id="40" idx="2"/>
+          </p:cNvCxnSpPr>
+          <p:nvPr/>
+        </p:nvCxnSpPr>
+        <p:spPr>
+          <a:xfrm rot="5400000">
+            <a:off x="5460359" y="2509298"/>
+            <a:ext cx="1675991" cy="4138512"/>
+          </a:xfrm>
+          <a:prstGeom prst="bentConnector2">
+            <a:avLst/>
+          </a:prstGeom>
+        </p:spPr>
+        <p:style>
+          <a:lnRef idx="2">
+            <a:schemeClr val="dk1"/>
+          </a:lnRef>
+          <a:fillRef idx="0">
+            <a:schemeClr val="dk1"/>
+          </a:fillRef>
+          <a:effectRef idx="1">
+            <a:schemeClr val="dk1"/>
+          </a:effectRef>
+          <a:fontRef idx="minor">
+            <a:schemeClr val="tx1"/>
+          </a:fontRef>
+        </p:style>
+      </p:cxnSp>
+      <p:sp>
+        <p:nvSpPr>
+          <p:cNvPr id="43" name="Textfeld 42">
+            <a:extLst>
+              <a:ext uri="{FF2B5EF4-FFF2-40B4-BE49-F238E27FC236}">
+                <a16:creationId xmlns:a16="http://schemas.microsoft.com/office/drawing/2014/main" id="{A8CDFBDF-F4FB-5185-6870-1C3667393DCA}"/>
+              </a:ext>
+            </a:extLst>
+          </p:cNvPr>
+          <p:cNvSpPr txBox="1"/>
+          <p:nvPr/>
+        </p:nvSpPr>
+        <p:spPr>
+          <a:xfrm>
+            <a:off x="2762247" y="5269763"/>
+            <a:ext cx="1524002" cy="261610"/>
+          </a:xfrm>
+          <a:prstGeom prst="rect">
+            <a:avLst/>
+          </a:prstGeom>
+          <a:noFill/>
+        </p:spPr>
+        <p:txBody>
+          <a:bodyPr wrap="square" rtlCol="0">
+            <a:spAutoFit/>
+          </a:bodyPr>
+          <a:lstStyle/>
+          <a:p>
+            <a:r>
+              <a:rPr lang="de-DE" sz="1100" b="1" dirty="0"/>
+              <a:t>Speichern</a:t>
+            </a:r>
+          </a:p>
+        </p:txBody>
+      </p:sp>
+      <p:sp>
+        <p:nvSpPr>
+          <p:cNvPr id="44" name="Rechteck 43">
+            <a:extLst>
+              <a:ext uri="{FF2B5EF4-FFF2-40B4-BE49-F238E27FC236}">
+                <a16:creationId xmlns:a16="http://schemas.microsoft.com/office/drawing/2014/main" id="{B2B8115E-0953-E051-9875-D05B6E82449E}"/>
+              </a:ext>
+            </a:extLst>
+          </p:cNvPr>
+          <p:cNvSpPr/>
+          <p:nvPr/>
+        </p:nvSpPr>
+        <p:spPr>
+          <a:xfrm>
+            <a:off x="8754960" y="1781555"/>
+            <a:ext cx="533400" cy="373120"/>
+          </a:xfrm>
+          <a:prstGeom prst="rect">
+            <a:avLst/>
+          </a:prstGeom>
+          <a:noFill/>
+          <a:ln>
+            <a:solidFill>
+              <a:schemeClr val="tx1"/>
+            </a:solidFill>
+          </a:ln>
+        </p:spPr>
+        <p:style>
+          <a:lnRef idx="2">
+            <a:schemeClr val="accent1">
+              <a:shade val="15000"/>
+            </a:schemeClr>
+          </a:lnRef>
+          <a:fillRef idx="1">
+            <a:schemeClr val="accent1"/>
+          </a:fillRef>
+          <a:effectRef idx="0">
+            <a:schemeClr val="accent1"/>
+          </a:effectRef>
+          <a:fontRef idx="minor">
+            <a:schemeClr val="lt1"/>
+          </a:fontRef>
+        </p:style>
+        <p:txBody>
+          <a:bodyPr rtlCol="0" anchor="ctr"/>
+          <a:lstStyle/>
+          <a:p>
+            <a:pPr algn="ctr"/>
+            <a:endParaRPr lang="de-DE"/>
+          </a:p>
+        </p:txBody>
+      </p:sp>
+      <p:cxnSp>
+        <p:nvCxnSpPr>
+          <p:cNvPr id="46" name="Gerader Verbinder 45">
+            <a:extLst>
+              <a:ext uri="{FF2B5EF4-FFF2-40B4-BE49-F238E27FC236}">
+                <a16:creationId xmlns:a16="http://schemas.microsoft.com/office/drawing/2014/main" id="{E8113F61-9816-8E62-E320-9BFC369EAE19}"/>
+              </a:ext>
+            </a:extLst>
+          </p:cNvPr>
+          <p:cNvCxnSpPr>
+            <a:stCxn id="44" idx="3"/>
+          </p:cNvCxnSpPr>
+          <p:nvPr/>
+        </p:nvCxnSpPr>
+        <p:spPr>
+          <a:xfrm>
+            <a:off x="9288360" y="1968115"/>
+            <a:ext cx="630340" cy="1823"/>
+          </a:xfrm>
+          <a:prstGeom prst="line">
+            <a:avLst/>
+          </a:prstGeom>
+        </p:spPr>
+        <p:style>
+          <a:lnRef idx="2">
+            <a:schemeClr val="dk1"/>
+          </a:lnRef>
+          <a:fillRef idx="0">
+            <a:schemeClr val="dk1"/>
+          </a:fillRef>
+          <a:effectRef idx="1">
+            <a:schemeClr val="dk1"/>
+          </a:effectRef>
+          <a:fontRef idx="minor">
+            <a:schemeClr val="tx1"/>
+          </a:fontRef>
+        </p:style>
+      </p:cxnSp>
+      <p:sp>
+        <p:nvSpPr>
+          <p:cNvPr id="47" name="Textfeld 46">
+            <a:extLst>
+              <a:ext uri="{FF2B5EF4-FFF2-40B4-BE49-F238E27FC236}">
+                <a16:creationId xmlns:a16="http://schemas.microsoft.com/office/drawing/2014/main" id="{998C608F-4EC4-4354-B46A-637DF474582D}"/>
+              </a:ext>
+            </a:extLst>
+          </p:cNvPr>
+          <p:cNvSpPr txBox="1"/>
+          <p:nvPr/>
+        </p:nvSpPr>
+        <p:spPr>
+          <a:xfrm>
+            <a:off x="9906210" y="1828871"/>
+            <a:ext cx="2052109" cy="261610"/>
+          </a:xfrm>
+          <a:prstGeom prst="rect">
+            <a:avLst/>
+          </a:prstGeom>
+          <a:noFill/>
+        </p:spPr>
+        <p:txBody>
+          <a:bodyPr wrap="square" rtlCol="0">
+            <a:spAutoFit/>
+          </a:bodyPr>
+          <a:lstStyle/>
+          <a:p>
+            <a:r>
+              <a:rPr lang="de-DE" sz="1100" b="1" dirty="0"/>
+              <a:t>Abmelden</a:t>
+            </a:r>
+            <a:endParaRPr lang="de-DE" sz="1100" dirty="0"/>
+          </a:p>
+        </p:txBody>
+      </p:sp>
+      <p:sp>
+        <p:nvSpPr>
+          <p:cNvPr id="48" name="Rechteck 47">
+            <a:extLst>
+              <a:ext uri="{FF2B5EF4-FFF2-40B4-BE49-F238E27FC236}">
+                <a16:creationId xmlns:a16="http://schemas.microsoft.com/office/drawing/2014/main" id="{5D5362C9-BC8C-5B4E-27BF-38A0E4D9A0A6}"/>
+              </a:ext>
+            </a:extLst>
+          </p:cNvPr>
+          <p:cNvSpPr/>
+          <p:nvPr/>
+        </p:nvSpPr>
+        <p:spPr>
+          <a:xfrm>
+            <a:off x="8754960" y="2145865"/>
+            <a:ext cx="533400" cy="220862"/>
+          </a:xfrm>
+          <a:prstGeom prst="rect">
+            <a:avLst/>
+          </a:prstGeom>
+          <a:noFill/>
+          <a:ln>
+            <a:solidFill>
+              <a:schemeClr val="tx1"/>
+            </a:solidFill>
+          </a:ln>
+        </p:spPr>
+        <p:style>
+          <a:lnRef idx="2">
+            <a:schemeClr val="accent1">
+              <a:shade val="15000"/>
+            </a:schemeClr>
+          </a:lnRef>
+          <a:fillRef idx="1">
+            <a:schemeClr val="accent1"/>
+          </a:fillRef>
+          <a:effectRef idx="0">
+            <a:schemeClr val="accent1"/>
+          </a:effectRef>
+          <a:fontRef idx="minor">
+            <a:schemeClr val="lt1"/>
+          </a:fontRef>
+        </p:style>
+        <p:txBody>
+          <a:bodyPr rtlCol="0" anchor="ctr"/>
+          <a:lstStyle/>
+          <a:p>
+            <a:pPr algn="ctr"/>
+            <a:endParaRPr lang="de-DE"/>
+          </a:p>
+        </p:txBody>
+      </p:sp>
+      <p:cxnSp>
+        <p:nvCxnSpPr>
+          <p:cNvPr id="50" name="Gerader Verbinder 49">
+            <a:extLst>
+              <a:ext uri="{FF2B5EF4-FFF2-40B4-BE49-F238E27FC236}">
+                <a16:creationId xmlns:a16="http://schemas.microsoft.com/office/drawing/2014/main" id="{DC41DFC2-515B-93CA-D780-67804947BF3B}"/>
+              </a:ext>
+            </a:extLst>
+          </p:cNvPr>
+          <p:cNvCxnSpPr>
+            <a:stCxn id="48" idx="3"/>
+          </p:cNvCxnSpPr>
+          <p:nvPr/>
+        </p:nvCxnSpPr>
+        <p:spPr>
+          <a:xfrm flipV="1">
+            <a:off x="9288360" y="2254250"/>
+            <a:ext cx="630340" cy="2046"/>
+          </a:xfrm>
+          <a:prstGeom prst="line">
+            <a:avLst/>
+          </a:prstGeom>
+        </p:spPr>
+        <p:style>
+          <a:lnRef idx="2">
+            <a:schemeClr val="dk1"/>
+          </a:lnRef>
+          <a:fillRef idx="0">
+            <a:schemeClr val="dk1"/>
+          </a:fillRef>
+          <a:effectRef idx="1">
+            <a:schemeClr val="dk1"/>
+          </a:effectRef>
+          <a:fontRef idx="minor">
+            <a:schemeClr val="tx1"/>
+          </a:fontRef>
+        </p:style>
+      </p:cxnSp>
+      <p:sp>
+        <p:nvSpPr>
+          <p:cNvPr id="51" name="Textfeld 50">
+            <a:extLst>
+              <a:ext uri="{FF2B5EF4-FFF2-40B4-BE49-F238E27FC236}">
+                <a16:creationId xmlns:a16="http://schemas.microsoft.com/office/drawing/2014/main" id="{9C4DE44E-8EA1-FC25-84C5-96E10F5F5C6C}"/>
+              </a:ext>
+            </a:extLst>
+          </p:cNvPr>
+          <p:cNvSpPr txBox="1"/>
+          <p:nvPr/>
+        </p:nvSpPr>
+        <p:spPr>
+          <a:xfrm>
+            <a:off x="9918700" y="2109253"/>
+            <a:ext cx="2052109" cy="261610"/>
+          </a:xfrm>
+          <a:prstGeom prst="rect">
+            <a:avLst/>
+          </a:prstGeom>
+          <a:noFill/>
+        </p:spPr>
+        <p:txBody>
+          <a:bodyPr wrap="square" rtlCol="0">
+            <a:spAutoFit/>
+          </a:bodyPr>
+          <a:lstStyle/>
+          <a:p>
+            <a:r>
+              <a:rPr lang="de-DE" sz="1100" b="1" dirty="0"/>
+              <a:t>Einstellungen</a:t>
+            </a:r>
+            <a:endParaRPr lang="de-DE" sz="1100" dirty="0"/>
+          </a:p>
+        </p:txBody>
+      </p:sp>
+    </p:spTree>
+    <p:extLst>
+      <p:ext uri="{BB962C8B-B14F-4D97-AF65-F5344CB8AC3E}">
+        <p14:creationId xmlns:p14="http://schemas.microsoft.com/office/powerpoint/2010/main" val="1103527043"/>
+      </p:ext>
+    </p:extLst>
+  </p:cSld>
+  <p:clrMapOvr>
+    <a:masterClrMapping/>
+  </p:clrMapOvr>
+</p:sld>
+</file>
+
+<file path=ppt/slides/slide5.xml><?xml version="1.0" encoding="utf-8"?>
+<p:sld xmlns:a="http://schemas.openxmlformats.org/drawingml/2006/main" xmlns:r="http://schemas.openxmlformats.org/officeDocument/2006/relationships" xmlns:p="http://schemas.openxmlformats.org/presentationml/2006/main">
+  <p:cSld>
+    <p:spTree>
+      <p:nvGrpSpPr>
         <p:cNvPr id="1" name=""/>
         <p:cNvGrpSpPr/>
         <p:nvPr/>
@@ -4837,7 +6369,7 @@
 </p:sld>
 </file>
 
-<file path=ppt/slides/slide5.xml><?xml version="1.0" encoding="utf-8"?>
+<file path=ppt/slides/slide6.xml><?xml version="1.0" encoding="utf-8"?>
 <p:sld xmlns:a="http://schemas.openxmlformats.org/drawingml/2006/main" xmlns:r="http://schemas.openxmlformats.org/officeDocument/2006/relationships" xmlns:p="http://schemas.openxmlformats.org/presentationml/2006/main">
   <p:cSld>
     <p:spTree>

--- a/pp/Presentation.pptx
+++ b/pp/Presentation.pptx
@@ -10,7 +10,9 @@
     <p:sldId id="258" r:id="rId4"/>
     <p:sldId id="261" r:id="rId5"/>
     <p:sldId id="259" r:id="rId6"/>
-    <p:sldId id="260" r:id="rId7"/>
+    <p:sldId id="263" r:id="rId7"/>
+    <p:sldId id="262" r:id="rId8"/>
+    <p:sldId id="260" r:id="rId9"/>
   </p:sldIdLst>
   <p:sldSz cx="12192000" cy="6858000"/>
   <p:notesSz cx="6858000" cy="9144000"/>
@@ -3428,7 +3430,15 @@
           <a:lstStyle/>
           <a:p>
             <a:r>
-              <a:rPr lang="de-DE" sz="5100"/>
+              <a:rPr lang="de-DE" sz="5100" b="1" u="sng" dirty="0">
+                <a:effectLst>
+                  <a:outerShdw blurRad="38100" dist="38100" dir="2700000" algn="tl">
+                    <a:srgbClr val="000000">
+                      <a:alpha val="43137"/>
+                    </a:srgbClr>
+                  </a:outerShdw>
+                </a:effectLst>
+              </a:rPr>
               <a:t>Passwortmanager</a:t>
             </a:r>
           </a:p>
@@ -4561,7 +4571,15 @@
           <a:lstStyle/>
           <a:p>
             <a:r>
-              <a:rPr lang="de-DE" dirty="0"/>
+              <a:rPr lang="de-DE" b="1" dirty="0">
+                <a:effectLst>
+                  <a:outerShdw blurRad="38100" dist="38100" dir="2700000" algn="tl">
+                    <a:srgbClr val="000000">
+                      <a:alpha val="43137"/>
+                    </a:srgbClr>
+                  </a:outerShdw>
+                </a:effectLst>
+              </a:rPr>
               <a:t>Verwendete Technologien</a:t>
             </a:r>
           </a:p>
@@ -4643,18 +4661,23 @@
           <a:p>
             <a:r>
               <a:rPr lang="de-DE" sz="2000" dirty="0"/>
-              <a:t>Docker </a:t>
-            </a:r>
-            <a:r>
-              <a:rPr lang="de-DE" sz="2000" dirty="0" err="1"/>
-              <a:t>Compose</a:t>
-            </a:r>
-            <a:endParaRPr lang="de-DE" sz="2000" dirty="0"/>
+              <a:t>Docker Compose</a:t>
+            </a:r>
           </a:p>
           <a:p>
             <a:r>
               <a:rPr lang="de-DE" sz="2000" dirty="0"/>
-              <a:t>phpMyAdmin (optional)</a:t>
+              <a:t>phpMyAdmin (optional </a:t>
+            </a:r>
+            <a:r>
+              <a:rPr lang="de-DE" sz="2000" dirty="0">
+                <a:sym typeface="Wingdings" panose="05000000000000000000" pitchFamily="2" charset="2"/>
+              </a:rPr>
+              <a:t> verwendet zum Debuggen</a:t>
+            </a:r>
+            <a:r>
+              <a:rPr lang="de-DE" sz="2000" dirty="0"/>
+              <a:t>)</a:t>
             </a:r>
           </a:p>
         </p:txBody>
@@ -4711,7 +4734,15 @@
           <a:lstStyle/>
           <a:p>
             <a:r>
-              <a:rPr lang="de-DE" dirty="0"/>
+              <a:rPr lang="de-DE" b="1" dirty="0">
+                <a:effectLst>
+                  <a:outerShdw blurRad="38100" dist="38100" dir="2700000" algn="tl">
+                    <a:srgbClr val="000000">
+                      <a:alpha val="43137"/>
+                    </a:srgbClr>
+                  </a:outerShdw>
+                </a:effectLst>
+              </a:rPr>
               <a:t>Technischer Hintergrund</a:t>
             </a:r>
           </a:p>
@@ -5075,7 +5106,15 @@
           <a:lstStyle/>
           <a:p>
             <a:r>
-              <a:rPr lang="de-DE" dirty="0"/>
+              <a:rPr lang="de-DE" b="1" dirty="0">
+                <a:effectLst>
+                  <a:outerShdw blurRad="38100" dist="38100" dir="2700000" algn="tl">
+                    <a:srgbClr val="000000">
+                      <a:alpha val="43137"/>
+                    </a:srgbClr>
+                  </a:outerShdw>
+                </a:effectLst>
+              </a:rPr>
               <a:t>Technischer Hintergrund</a:t>
             </a:r>
           </a:p>
@@ -6325,9 +6364,38 @@
           <a:lstStyle/>
           <a:p>
             <a:r>
-              <a:rPr lang="de-DE" dirty="0"/>
-              <a:t>Umsetzung</a:t>
-            </a:r>
+              <a:rPr lang="de-DE" b="1" dirty="0">
+                <a:effectLst>
+                  <a:outerShdw blurRad="38100" dist="38100" dir="2700000" algn="tl">
+                    <a:srgbClr val="000000">
+                      <a:alpha val="43137"/>
+                    </a:srgbClr>
+                  </a:outerShdw>
+                </a:effectLst>
+              </a:rPr>
+              <a:t>Umsetzung </a:t>
+            </a:r>
+            <a:r>
+              <a:rPr lang="de-DE" dirty="0">
+                <a:effectLst>
+                  <a:outerShdw blurRad="38100" dist="38100" dir="2700000" algn="tl">
+                    <a:srgbClr val="000000">
+                      <a:alpha val="43137"/>
+                    </a:srgbClr>
+                  </a:outerShdw>
+                </a:effectLst>
+              </a:rPr>
+              <a:t>- </a:t>
+            </a:r>
+            <a:endParaRPr lang="de-DE" b="1" dirty="0">
+              <a:effectLst>
+                <a:outerShdw blurRad="38100" dist="38100" dir="2700000" algn="tl">
+                  <a:srgbClr val="000000">
+                    <a:alpha val="43137"/>
+                  </a:srgbClr>
+                </a:outerShdw>
+              </a:effectLst>
+            </a:endParaRPr>
           </a:p>
         </p:txBody>
       </p:sp>
@@ -6352,7 +6420,7 @@
           <a:bodyPr/>
           <a:lstStyle/>
           <a:p>
-            <a:endParaRPr lang="de-DE"/>
+            <a:endParaRPr lang="de-DE" dirty="0"/>
           </a:p>
         </p:txBody>
       </p:sp>
@@ -6374,6 +6442,672 @@
   <p:cSld>
     <p:spTree>
       <p:nvGrpSpPr>
+        <p:cNvPr id="1" name="">
+          <a:extLst>
+            <a:ext uri="{FF2B5EF4-FFF2-40B4-BE49-F238E27FC236}">
+              <a16:creationId xmlns:a16="http://schemas.microsoft.com/office/drawing/2014/main" id="{D47F335A-FDF6-4F22-13CA-08ED29DA569C}"/>
+            </a:ext>
+          </a:extLst>
+        </p:cNvPr>
+        <p:cNvGrpSpPr/>
+        <p:nvPr/>
+      </p:nvGrpSpPr>
+      <p:grpSpPr>
+        <a:xfrm>
+          <a:off x="0" y="0"/>
+          <a:ext cx="0" cy="0"/>
+          <a:chOff x="0" y="0"/>
+          <a:chExt cx="0" cy="0"/>
+        </a:xfrm>
+      </p:grpSpPr>
+      <p:sp>
+        <p:nvSpPr>
+          <p:cNvPr id="2" name="Titel 1">
+            <a:extLst>
+              <a:ext uri="{FF2B5EF4-FFF2-40B4-BE49-F238E27FC236}">
+                <a16:creationId xmlns:a16="http://schemas.microsoft.com/office/drawing/2014/main" id="{6C3531C2-260F-3E4A-71D3-613883B29F3F}"/>
+              </a:ext>
+            </a:extLst>
+          </p:cNvPr>
+          <p:cNvSpPr>
+            <a:spLocks noGrp="1"/>
+          </p:cNvSpPr>
+          <p:nvPr>
+            <p:ph type="title"/>
+          </p:nvPr>
+        </p:nvSpPr>
+        <p:spPr/>
+        <p:txBody>
+          <a:bodyPr/>
+          <a:lstStyle/>
+          <a:p>
+            <a:r>
+              <a:rPr lang="de-DE" b="1" dirty="0">
+                <a:effectLst>
+                  <a:outerShdw blurRad="38100" dist="38100" dir="2700000" algn="tl">
+                    <a:srgbClr val="000000">
+                      <a:alpha val="43137"/>
+                    </a:srgbClr>
+                  </a:outerShdw>
+                </a:effectLst>
+              </a:rPr>
+              <a:t>Umsetzung</a:t>
+            </a:r>
+            <a:r>
+              <a:rPr lang="de-DE" dirty="0">
+                <a:effectLst>
+                  <a:outerShdw blurRad="38100" dist="38100" dir="2700000" algn="tl">
+                    <a:srgbClr val="000000">
+                      <a:alpha val="43137"/>
+                    </a:srgbClr>
+                  </a:outerShdw>
+                </a:effectLst>
+              </a:rPr>
+              <a:t> - Verschlüsselung</a:t>
+            </a:r>
+          </a:p>
+        </p:txBody>
+      </p:sp>
+      <p:sp>
+        <p:nvSpPr>
+          <p:cNvPr id="3" name="Inhaltsplatzhalter 2">
+            <a:extLst>
+              <a:ext uri="{FF2B5EF4-FFF2-40B4-BE49-F238E27FC236}">
+                <a16:creationId xmlns:a16="http://schemas.microsoft.com/office/drawing/2014/main" id="{68F71C22-1CEE-7C61-96C3-081EEC5F2B92}"/>
+              </a:ext>
+            </a:extLst>
+          </p:cNvPr>
+          <p:cNvSpPr>
+            <a:spLocks noGrp="1"/>
+          </p:cNvSpPr>
+          <p:nvPr>
+            <p:ph idx="1"/>
+          </p:nvPr>
+        </p:nvSpPr>
+        <p:spPr/>
+        <p:txBody>
+          <a:bodyPr>
+            <a:normAutofit/>
+          </a:bodyPr>
+          <a:lstStyle/>
+          <a:p>
+            <a:r>
+              <a:rPr lang="de-DE" sz="1800" b="1" dirty="0"/>
+              <a:t>Allgemein:</a:t>
+            </a:r>
+            <a:endParaRPr lang="de-DE" sz="2000" b="1" dirty="0"/>
+          </a:p>
+        </p:txBody>
+      </p:sp>
+    </p:spTree>
+    <p:extLst>
+      <p:ext uri="{BB962C8B-B14F-4D97-AF65-F5344CB8AC3E}">
+        <p14:creationId xmlns:p14="http://schemas.microsoft.com/office/powerpoint/2010/main" val="2950061998"/>
+      </p:ext>
+    </p:extLst>
+  </p:cSld>
+  <p:clrMapOvr>
+    <a:masterClrMapping/>
+  </p:clrMapOvr>
+</p:sld>
+</file>
+
+<file path=ppt/slides/slide7.xml><?xml version="1.0" encoding="utf-8"?>
+<p:sld xmlns:a="http://schemas.openxmlformats.org/drawingml/2006/main" xmlns:r="http://schemas.openxmlformats.org/officeDocument/2006/relationships" xmlns:p="http://schemas.openxmlformats.org/presentationml/2006/main">
+  <p:cSld>
+    <p:spTree>
+      <p:nvGrpSpPr>
+        <p:cNvPr id="1" name="">
+          <a:extLst>
+            <a:ext uri="{FF2B5EF4-FFF2-40B4-BE49-F238E27FC236}">
+              <a16:creationId xmlns:a16="http://schemas.microsoft.com/office/drawing/2014/main" id="{64007FDD-F578-96F3-717C-B2F13D303536}"/>
+            </a:ext>
+          </a:extLst>
+        </p:cNvPr>
+        <p:cNvGrpSpPr/>
+        <p:nvPr/>
+      </p:nvGrpSpPr>
+      <p:grpSpPr>
+        <a:xfrm>
+          <a:off x="0" y="0"/>
+          <a:ext cx="0" cy="0"/>
+          <a:chOff x="0" y="0"/>
+          <a:chExt cx="0" cy="0"/>
+        </a:xfrm>
+      </p:grpSpPr>
+      <p:sp>
+        <p:nvSpPr>
+          <p:cNvPr id="2" name="Titel 1">
+            <a:extLst>
+              <a:ext uri="{FF2B5EF4-FFF2-40B4-BE49-F238E27FC236}">
+                <a16:creationId xmlns:a16="http://schemas.microsoft.com/office/drawing/2014/main" id="{2A3703A7-369E-1A90-7ABC-1FDCE42AF615}"/>
+              </a:ext>
+            </a:extLst>
+          </p:cNvPr>
+          <p:cNvSpPr>
+            <a:spLocks noGrp="1"/>
+          </p:cNvSpPr>
+          <p:nvPr>
+            <p:ph type="title"/>
+          </p:nvPr>
+        </p:nvSpPr>
+        <p:spPr/>
+        <p:txBody>
+          <a:bodyPr/>
+          <a:lstStyle/>
+          <a:p>
+            <a:r>
+              <a:rPr lang="de-DE" b="1" dirty="0">
+                <a:effectLst>
+                  <a:outerShdw blurRad="38100" dist="38100" dir="2700000" algn="tl">
+                    <a:srgbClr val="000000">
+                      <a:alpha val="43137"/>
+                    </a:srgbClr>
+                  </a:outerShdw>
+                </a:effectLst>
+              </a:rPr>
+              <a:t>Umsetzung</a:t>
+            </a:r>
+            <a:r>
+              <a:rPr lang="de-DE" dirty="0">
+                <a:effectLst>
+                  <a:outerShdw blurRad="38100" dist="38100" dir="2700000" algn="tl">
+                    <a:srgbClr val="000000">
+                      <a:alpha val="43137"/>
+                    </a:srgbClr>
+                  </a:outerShdw>
+                </a:effectLst>
+              </a:rPr>
+              <a:t> - Speicherung der Passwörter</a:t>
+            </a:r>
+            <a:endParaRPr lang="de-DE" u="sng" dirty="0">
+              <a:effectLst>
+                <a:outerShdw blurRad="38100" dist="38100" dir="2700000" algn="tl">
+                  <a:srgbClr val="000000">
+                    <a:alpha val="43137"/>
+                  </a:srgbClr>
+                </a:outerShdw>
+              </a:effectLst>
+            </a:endParaRPr>
+          </a:p>
+        </p:txBody>
+      </p:sp>
+      <p:sp>
+        <p:nvSpPr>
+          <p:cNvPr id="3" name="Inhaltsplatzhalter 2">
+            <a:extLst>
+              <a:ext uri="{FF2B5EF4-FFF2-40B4-BE49-F238E27FC236}">
+                <a16:creationId xmlns:a16="http://schemas.microsoft.com/office/drawing/2014/main" id="{99E85B5E-D0BE-DD00-27B5-D23F7A822FFA}"/>
+              </a:ext>
+            </a:extLst>
+          </p:cNvPr>
+          <p:cNvSpPr>
+            <a:spLocks noGrp="1"/>
+          </p:cNvSpPr>
+          <p:nvPr>
+            <p:ph idx="1"/>
+          </p:nvPr>
+        </p:nvSpPr>
+        <p:spPr/>
+        <p:txBody>
+          <a:bodyPr/>
+          <a:lstStyle/>
+          <a:p>
+            <a:r>
+              <a:rPr lang="de-DE" sz="1800" b="1" dirty="0"/>
+              <a:t>Allgemein:</a:t>
+            </a:r>
+          </a:p>
+          <a:p>
+            <a:pPr lvl="1"/>
+            <a:r>
+              <a:rPr lang="de-DE" sz="1400" b="1" dirty="0"/>
+              <a:t>Passwörter werden als Binär Datei abgespeichert</a:t>
+            </a:r>
+          </a:p>
+          <a:p>
+            <a:pPr lvl="1"/>
+            <a:r>
+              <a:rPr lang="de-DE" sz="1400" b="1" dirty="0"/>
+              <a:t>Ersten 16 Byte = Salt</a:t>
+            </a:r>
+          </a:p>
+          <a:p>
+            <a:pPr lvl="1"/>
+            <a:r>
+              <a:rPr lang="de-DE" sz="1400" b="1" dirty="0"/>
+              <a:t>Zweiten 16 Byte = IV (Initialisierungsvektor)</a:t>
+            </a:r>
+          </a:p>
+          <a:p>
+            <a:pPr lvl="1"/>
+            <a:r>
+              <a:rPr lang="de-DE" sz="1400" b="1" dirty="0"/>
+              <a:t>Rest = Daten (Passwörter)</a:t>
+            </a:r>
+          </a:p>
+        </p:txBody>
+      </p:sp>
+      <p:pic>
+        <p:nvPicPr>
+          <p:cNvPr id="31" name="Grafik 30" descr="Ein Bild, das Text, Screenshot, Schrift, Software enthält.&#10;&#10;KI-generierte Inhalte können fehlerhaft sein.">
+            <a:extLst>
+              <a:ext uri="{FF2B5EF4-FFF2-40B4-BE49-F238E27FC236}">
+                <a16:creationId xmlns:a16="http://schemas.microsoft.com/office/drawing/2014/main" id="{0CF0FEA1-D368-CF83-65CD-110854CC019E}"/>
+              </a:ext>
+            </a:extLst>
+          </p:cNvPr>
+          <p:cNvPicPr>
+            <a:picLocks noChangeAspect="1"/>
+          </p:cNvPicPr>
+          <p:nvPr/>
+        </p:nvPicPr>
+        <p:blipFill>
+          <a:blip r:embed="rId2">
+            <a:extLst>
+              <a:ext uri="{28A0092B-C50C-407E-A947-70E740481C1C}">
+                <a14:useLocalDpi xmlns:a14="http://schemas.microsoft.com/office/drawing/2010/main" val="0"/>
+              </a:ext>
+            </a:extLst>
+          </a:blip>
+          <a:stretch>
+            <a:fillRect/>
+          </a:stretch>
+        </p:blipFill>
+        <p:spPr>
+          <a:xfrm>
+            <a:off x="838200" y="3812550"/>
+            <a:ext cx="6745474" cy="2452900"/>
+          </a:xfrm>
+          <a:prstGeom prst="rect">
+            <a:avLst/>
+          </a:prstGeom>
+        </p:spPr>
+      </p:pic>
+      <p:pic>
+        <p:nvPicPr>
+          <p:cNvPr id="35" name="Grafik 34" descr="Ein Bild, das Text, Screenshot, Software, Schrift enthält.&#10;&#10;KI-generierte Inhalte können fehlerhaft sein.">
+            <a:extLst>
+              <a:ext uri="{FF2B5EF4-FFF2-40B4-BE49-F238E27FC236}">
+                <a16:creationId xmlns:a16="http://schemas.microsoft.com/office/drawing/2014/main" id="{CC675AC4-1CA5-8CA7-1015-F47AF164203F}"/>
+              </a:ext>
+            </a:extLst>
+          </p:cNvPr>
+          <p:cNvPicPr>
+            <a:picLocks noChangeAspect="1"/>
+          </p:cNvPicPr>
+          <p:nvPr/>
+        </p:nvPicPr>
+        <p:blipFill>
+          <a:blip r:embed="rId3">
+            <a:extLst>
+              <a:ext uri="{28A0092B-C50C-407E-A947-70E740481C1C}">
+                <a14:useLocalDpi xmlns:a14="http://schemas.microsoft.com/office/drawing/2010/main" val="0"/>
+              </a:ext>
+            </a:extLst>
+          </a:blip>
+          <a:stretch>
+            <a:fillRect/>
+          </a:stretch>
+        </p:blipFill>
+        <p:spPr>
+          <a:xfrm>
+            <a:off x="838200" y="3812550"/>
+            <a:ext cx="6745474" cy="2452900"/>
+          </a:xfrm>
+          <a:prstGeom prst="rect">
+            <a:avLst/>
+          </a:prstGeom>
+        </p:spPr>
+      </p:pic>
+      <p:pic>
+        <p:nvPicPr>
+          <p:cNvPr id="33" name="Grafik 32" descr="Ein Bild, das Text, Screenshot, Software, Schrift enthält.&#10;&#10;KI-generierte Inhalte können fehlerhaft sein.">
+            <a:extLst>
+              <a:ext uri="{FF2B5EF4-FFF2-40B4-BE49-F238E27FC236}">
+                <a16:creationId xmlns:a16="http://schemas.microsoft.com/office/drawing/2014/main" id="{A8E14C6D-8DEF-1B4D-E2D9-27A6C0763465}"/>
+              </a:ext>
+            </a:extLst>
+          </p:cNvPr>
+          <p:cNvPicPr>
+            <a:picLocks noChangeAspect="1"/>
+          </p:cNvPicPr>
+          <p:nvPr/>
+        </p:nvPicPr>
+        <p:blipFill>
+          <a:blip r:embed="rId4">
+            <a:extLst>
+              <a:ext uri="{28A0092B-C50C-407E-A947-70E740481C1C}">
+                <a14:useLocalDpi xmlns:a14="http://schemas.microsoft.com/office/drawing/2010/main" val="0"/>
+              </a:ext>
+            </a:extLst>
+          </a:blip>
+          <a:stretch>
+            <a:fillRect/>
+          </a:stretch>
+        </p:blipFill>
+        <p:spPr>
+          <a:xfrm>
+            <a:off x="838200" y="3812550"/>
+            <a:ext cx="6745474" cy="2452900"/>
+          </a:xfrm>
+          <a:prstGeom prst="rect">
+            <a:avLst/>
+          </a:prstGeom>
+        </p:spPr>
+      </p:pic>
+      <p:pic>
+        <p:nvPicPr>
+          <p:cNvPr id="37" name="Grafik 36" descr="Ein Bild, das Text, Screenshot, Software, Computersymbol enthält.&#10;&#10;KI-generierte Inhalte können fehlerhaft sein.">
+            <a:extLst>
+              <a:ext uri="{FF2B5EF4-FFF2-40B4-BE49-F238E27FC236}">
+                <a16:creationId xmlns:a16="http://schemas.microsoft.com/office/drawing/2014/main" id="{19336577-A2A4-1B24-6AD6-73E48FE8A3D5}"/>
+              </a:ext>
+            </a:extLst>
+          </p:cNvPr>
+          <p:cNvPicPr>
+            <a:picLocks noChangeAspect="1"/>
+          </p:cNvPicPr>
+          <p:nvPr/>
+        </p:nvPicPr>
+        <p:blipFill>
+          <a:blip r:embed="rId5">
+            <a:extLst>
+              <a:ext uri="{28A0092B-C50C-407E-A947-70E740481C1C}">
+                <a14:useLocalDpi xmlns:a14="http://schemas.microsoft.com/office/drawing/2010/main" val="0"/>
+              </a:ext>
+            </a:extLst>
+          </a:blip>
+          <a:stretch>
+            <a:fillRect/>
+          </a:stretch>
+        </p:blipFill>
+        <p:spPr>
+          <a:xfrm>
+            <a:off x="838200" y="3812551"/>
+            <a:ext cx="6745474" cy="2452899"/>
+          </a:xfrm>
+          <a:prstGeom prst="rect">
+            <a:avLst/>
+          </a:prstGeom>
+        </p:spPr>
+      </p:pic>
+    </p:spTree>
+    <p:extLst>
+      <p:ext uri="{BB962C8B-B14F-4D97-AF65-F5344CB8AC3E}">
+        <p14:creationId xmlns:p14="http://schemas.microsoft.com/office/powerpoint/2010/main" val="2673720107"/>
+      </p:ext>
+    </p:extLst>
+  </p:cSld>
+  <p:clrMapOvr>
+    <a:masterClrMapping/>
+  </p:clrMapOvr>
+  <p:timing>
+    <p:tnLst>
+      <p:par>
+        <p:cTn id="1" dur="indefinite" restart="never" nodeType="tmRoot">
+          <p:childTnLst>
+            <p:seq concurrent="1" nextAc="seek">
+              <p:cTn id="2" dur="indefinite" nodeType="mainSeq">
+                <p:childTnLst>
+                  <p:par>
+                    <p:cTn id="3" fill="hold">
+                      <p:stCondLst>
+                        <p:cond delay="indefinite"/>
+                      </p:stCondLst>
+                      <p:childTnLst>
+                        <p:par>
+                          <p:cTn id="4" fill="hold">
+                            <p:stCondLst>
+                              <p:cond delay="0"/>
+                            </p:stCondLst>
+                            <p:childTnLst>
+                              <p:par>
+                                <p:cTn id="5" presetID="1" presetClass="entr" presetSubtype="0" fill="hold" nodeType="clickEffect">
+                                  <p:stCondLst>
+                                    <p:cond delay="0"/>
+                                  </p:stCondLst>
+                                  <p:childTnLst>
+                                    <p:set>
+                                      <p:cBhvr>
+                                        <p:cTn id="6" dur="1" fill="hold">
+                                          <p:stCondLst>
+                                            <p:cond delay="0"/>
+                                          </p:stCondLst>
+                                        </p:cTn>
+                                        <p:tgtEl>
+                                          <p:spTgt spid="3">
+                                            <p:txEl>
+                                              <p:pRg st="2" end="2"/>
+                                            </p:txEl>
+                                          </p:spTgt>
+                                        </p:tgtEl>
+                                        <p:attrNameLst>
+                                          <p:attrName>style.visibility</p:attrName>
+                                        </p:attrNameLst>
+                                      </p:cBhvr>
+                                      <p:to>
+                                        <p:strVal val="visible"/>
+                                      </p:to>
+                                    </p:set>
+                                  </p:childTnLst>
+                                </p:cTn>
+                              </p:par>
+                              <p:par>
+                                <p:cTn id="7" presetID="1" presetClass="entr" presetSubtype="0" fill="hold" nodeType="withEffect">
+                                  <p:stCondLst>
+                                    <p:cond delay="0"/>
+                                  </p:stCondLst>
+                                  <p:childTnLst>
+                                    <p:set>
+                                      <p:cBhvr>
+                                        <p:cTn id="8" dur="1" fill="hold">
+                                          <p:stCondLst>
+                                            <p:cond delay="0"/>
+                                          </p:stCondLst>
+                                        </p:cTn>
+                                        <p:tgtEl>
+                                          <p:spTgt spid="35"/>
+                                        </p:tgtEl>
+                                        <p:attrNameLst>
+                                          <p:attrName>style.visibility</p:attrName>
+                                        </p:attrNameLst>
+                                      </p:cBhvr>
+                                      <p:to>
+                                        <p:strVal val="visible"/>
+                                      </p:to>
+                                    </p:set>
+                                  </p:childTnLst>
+                                </p:cTn>
+                              </p:par>
+                            </p:childTnLst>
+                          </p:cTn>
+                        </p:par>
+                      </p:childTnLst>
+                    </p:cTn>
+                  </p:par>
+                  <p:par>
+                    <p:cTn id="9" fill="hold">
+                      <p:stCondLst>
+                        <p:cond delay="indefinite"/>
+                      </p:stCondLst>
+                      <p:childTnLst>
+                        <p:par>
+                          <p:cTn id="10" fill="hold">
+                            <p:stCondLst>
+                              <p:cond delay="0"/>
+                            </p:stCondLst>
+                            <p:childTnLst>
+                              <p:par>
+                                <p:cTn id="11" presetID="1" presetClass="entr" presetSubtype="0" fill="hold" nodeType="clickEffect">
+                                  <p:stCondLst>
+                                    <p:cond delay="0"/>
+                                  </p:stCondLst>
+                                  <p:childTnLst>
+                                    <p:set>
+                                      <p:cBhvr>
+                                        <p:cTn id="12" dur="1" fill="hold">
+                                          <p:stCondLst>
+                                            <p:cond delay="0"/>
+                                          </p:stCondLst>
+                                        </p:cTn>
+                                        <p:tgtEl>
+                                          <p:spTgt spid="3">
+                                            <p:txEl>
+                                              <p:pRg st="3" end="3"/>
+                                            </p:txEl>
+                                          </p:spTgt>
+                                        </p:tgtEl>
+                                        <p:attrNameLst>
+                                          <p:attrName>style.visibility</p:attrName>
+                                        </p:attrNameLst>
+                                      </p:cBhvr>
+                                      <p:to>
+                                        <p:strVal val="visible"/>
+                                      </p:to>
+                                    </p:set>
+                                  </p:childTnLst>
+                                </p:cTn>
+                              </p:par>
+                              <p:par>
+                                <p:cTn id="13" presetID="1" presetClass="entr" presetSubtype="0" fill="hold" nodeType="withEffect">
+                                  <p:stCondLst>
+                                    <p:cond delay="0"/>
+                                  </p:stCondLst>
+                                  <p:childTnLst>
+                                    <p:set>
+                                      <p:cBhvr>
+                                        <p:cTn id="14" dur="1" fill="hold">
+                                          <p:stCondLst>
+                                            <p:cond delay="0"/>
+                                          </p:stCondLst>
+                                        </p:cTn>
+                                        <p:tgtEl>
+                                          <p:spTgt spid="33"/>
+                                        </p:tgtEl>
+                                        <p:attrNameLst>
+                                          <p:attrName>style.visibility</p:attrName>
+                                        </p:attrNameLst>
+                                      </p:cBhvr>
+                                      <p:to>
+                                        <p:strVal val="visible"/>
+                                      </p:to>
+                                    </p:set>
+                                  </p:childTnLst>
+                                </p:cTn>
+                              </p:par>
+                            </p:childTnLst>
+                          </p:cTn>
+                        </p:par>
+                      </p:childTnLst>
+                    </p:cTn>
+                  </p:par>
+                  <p:par>
+                    <p:cTn id="15" fill="hold">
+                      <p:stCondLst>
+                        <p:cond delay="indefinite"/>
+                      </p:stCondLst>
+                      <p:childTnLst>
+                        <p:par>
+                          <p:cTn id="16" fill="hold">
+                            <p:stCondLst>
+                              <p:cond delay="0"/>
+                            </p:stCondLst>
+                            <p:childTnLst>
+                              <p:par>
+                                <p:cTn id="17" presetID="1" presetClass="entr" presetSubtype="0" fill="hold" nodeType="clickEffect">
+                                  <p:stCondLst>
+                                    <p:cond delay="0"/>
+                                  </p:stCondLst>
+                                  <p:childTnLst>
+                                    <p:set>
+                                      <p:cBhvr>
+                                        <p:cTn id="18" dur="1" fill="hold">
+                                          <p:stCondLst>
+                                            <p:cond delay="0"/>
+                                          </p:stCondLst>
+                                        </p:cTn>
+                                        <p:tgtEl>
+                                          <p:spTgt spid="3">
+                                            <p:txEl>
+                                              <p:pRg st="4" end="4"/>
+                                            </p:txEl>
+                                          </p:spTgt>
+                                        </p:tgtEl>
+                                        <p:attrNameLst>
+                                          <p:attrName>style.visibility</p:attrName>
+                                        </p:attrNameLst>
+                                      </p:cBhvr>
+                                      <p:to>
+                                        <p:strVal val="visible"/>
+                                      </p:to>
+                                    </p:set>
+                                  </p:childTnLst>
+                                </p:cTn>
+                              </p:par>
+                              <p:par>
+                                <p:cTn id="19" presetID="1" presetClass="entr" presetSubtype="0" fill="hold" nodeType="withEffect">
+                                  <p:stCondLst>
+                                    <p:cond delay="0"/>
+                                  </p:stCondLst>
+                                  <p:childTnLst>
+                                    <p:set>
+                                      <p:cBhvr>
+                                        <p:cTn id="20" dur="1" fill="hold">
+                                          <p:stCondLst>
+                                            <p:cond delay="0"/>
+                                          </p:stCondLst>
+                                        </p:cTn>
+                                        <p:tgtEl>
+                                          <p:spTgt spid="37"/>
+                                        </p:tgtEl>
+                                        <p:attrNameLst>
+                                          <p:attrName>style.visibility</p:attrName>
+                                        </p:attrNameLst>
+                                      </p:cBhvr>
+                                      <p:to>
+                                        <p:strVal val="visible"/>
+                                      </p:to>
+                                    </p:set>
+                                  </p:childTnLst>
+                                </p:cTn>
+                              </p:par>
+                            </p:childTnLst>
+                          </p:cTn>
+                        </p:par>
+                      </p:childTnLst>
+                    </p:cTn>
+                  </p:par>
+                </p:childTnLst>
+              </p:cTn>
+              <p:prevCondLst>
+                <p:cond evt="onPrev" delay="0">
+                  <p:tgtEl>
+                    <p:sldTgt/>
+                  </p:tgtEl>
+                </p:cond>
+              </p:prevCondLst>
+              <p:nextCondLst>
+                <p:cond evt="onNext" delay="0">
+                  <p:tgtEl>
+                    <p:sldTgt/>
+                  </p:tgtEl>
+                </p:cond>
+              </p:nextCondLst>
+            </p:seq>
+          </p:childTnLst>
+        </p:cTn>
+      </p:par>
+    </p:tnLst>
+  </p:timing>
+</p:sld>
+</file>
+
+<file path=ppt/slides/slide8.xml><?xml version="1.0" encoding="utf-8"?>
+<p:sld xmlns:a="http://schemas.openxmlformats.org/drawingml/2006/main" xmlns:r="http://schemas.openxmlformats.org/officeDocument/2006/relationships" xmlns:p="http://schemas.openxmlformats.org/presentationml/2006/main">
+  <p:cSld>
+    <p:spTree>
+      <p:nvGrpSpPr>
         <p:cNvPr id="1" name=""/>
         <p:cNvGrpSpPr/>
         <p:nvPr/>
@@ -6408,43 +7142,55 @@
           <a:lstStyle/>
           <a:p>
             <a:r>
-              <a:rPr lang="de-DE" dirty="0" err="1"/>
-              <a:t>Lessions</a:t>
-            </a:r>
+              <a:rPr lang="de-DE" b="1" dirty="0">
+                <a:effectLst>
+                  <a:outerShdw blurRad="38100" dist="38100" dir="2700000" algn="tl">
+                    <a:srgbClr val="000000">
+                      <a:alpha val="43137"/>
+                    </a:srgbClr>
+                  </a:outerShdw>
+                </a:effectLst>
+              </a:rPr>
+              <a:t>Lessions Learned</a:t>
+            </a:r>
+          </a:p>
+        </p:txBody>
+      </p:sp>
+      <p:sp>
+        <p:nvSpPr>
+          <p:cNvPr id="3" name="Inhaltsplatzhalter 2">
+            <a:extLst>
+              <a:ext uri="{FF2B5EF4-FFF2-40B4-BE49-F238E27FC236}">
+                <a16:creationId xmlns:a16="http://schemas.microsoft.com/office/drawing/2014/main" id="{70B24FDD-F401-C7A6-98F6-6469FF9DFDB2}"/>
+              </a:ext>
+            </a:extLst>
+          </p:cNvPr>
+          <p:cNvSpPr>
+            <a:spLocks noGrp="1"/>
+          </p:cNvSpPr>
+          <p:nvPr>
+            <p:ph idx="1"/>
+          </p:nvPr>
+        </p:nvSpPr>
+        <p:spPr/>
+        <p:txBody>
+          <a:bodyPr/>
+          <a:lstStyle/>
+          <a:p>
             <a:r>
               <a:rPr lang="de-DE" dirty="0"/>
-              <a:t> </a:t>
-            </a:r>
-            <a:r>
-              <a:rPr lang="de-DE" dirty="0" err="1"/>
-              <a:t>Learned</a:t>
-            </a:r>
-            <a:endParaRPr lang="de-DE" dirty="0"/>
-          </a:p>
-        </p:txBody>
-      </p:sp>
-      <p:sp>
-        <p:nvSpPr>
-          <p:cNvPr id="3" name="Inhaltsplatzhalter 2">
-            <a:extLst>
-              <a:ext uri="{FF2B5EF4-FFF2-40B4-BE49-F238E27FC236}">
-                <a16:creationId xmlns:a16="http://schemas.microsoft.com/office/drawing/2014/main" id="{70B24FDD-F401-C7A6-98F6-6469FF9DFDB2}"/>
-              </a:ext>
-            </a:extLst>
-          </p:cNvPr>
-          <p:cNvSpPr>
-            <a:spLocks noGrp="1"/>
-          </p:cNvSpPr>
-          <p:nvPr>
-            <p:ph idx="1"/>
-          </p:nvPr>
-        </p:nvSpPr>
-        <p:spPr/>
-        <p:txBody>
-          <a:bodyPr/>
-          <a:lstStyle/>
-          <a:p>
-            <a:endParaRPr lang="de-DE"/>
+              <a:t>Vor dem Start überlegen</a:t>
+            </a:r>
+          </a:p>
+          <a:p>
+            <a:pPr lvl="1">
+              <a:buFont typeface="Wingdings" panose="05000000000000000000" pitchFamily="2" charset="2"/>
+              <a:buChar char="Ø"/>
+            </a:pPr>
+            <a:r>
+              <a:rPr lang="de-DE" dirty="0"/>
+              <a:t>Aufwändiger Umbau von Passwort-Speicherung in JSON-Datei als Klartext zu Binär Dateien</a:t>
+            </a:r>
           </a:p>
         </p:txBody>
       </p:sp>

--- a/pp/Presentation.pptx
+++ b/pp/Presentation.pptx
@@ -12,7 +12,8 @@
     <p:sldId id="259" r:id="rId6"/>
     <p:sldId id="263" r:id="rId7"/>
     <p:sldId id="262" r:id="rId8"/>
-    <p:sldId id="260" r:id="rId9"/>
+    <p:sldId id="264" r:id="rId9"/>
+    <p:sldId id="260" r:id="rId10"/>
   </p:sldIdLst>
   <p:sldSz cx="12192000" cy="6858000"/>
   <p:notesSz cx="6858000" cy="9144000"/>
@@ -4772,7 +4773,7 @@
           <a:lstStyle/>
           <a:p>
             <a:r>
-              <a:rPr lang="de-DE" sz="2000" dirty="0"/>
+              <a:rPr lang="de-DE" sz="2000" b="1" dirty="0"/>
               <a:t>Anmelde Maske:</a:t>
             </a:r>
           </a:p>
@@ -5144,7 +5145,7 @@
           <a:lstStyle/>
           <a:p>
             <a:r>
-              <a:rPr lang="de-DE" sz="2000" dirty="0"/>
+              <a:rPr lang="de-DE" sz="2000" b="1" dirty="0"/>
               <a:t>Hauptfenster:</a:t>
             </a:r>
           </a:p>
@@ -6532,10 +6533,10 @@
           <a:lstStyle/>
           <a:p>
             <a:r>
-              <a:rPr lang="de-DE" sz="1800" b="1" dirty="0"/>
+              <a:rPr lang="de-DE" sz="2000" b="1" dirty="0"/>
               <a:t>Allgemein:</a:t>
             </a:r>
-            <a:endParaRPr lang="de-DE" sz="2000" b="1" dirty="0"/>
+            <a:endParaRPr lang="de-DE" sz="2400" b="1" dirty="0"/>
           </a:p>
         </p:txBody>
       </p:sp>
@@ -6654,35 +6655,35 @@
           <a:lstStyle/>
           <a:p>
             <a:r>
-              <a:rPr lang="de-DE" sz="1800" b="1" dirty="0"/>
+              <a:rPr lang="de-DE" sz="2000" b="1" dirty="0"/>
               <a:t>Allgemein:</a:t>
             </a:r>
           </a:p>
           <a:p>
             <a:pPr lvl="1"/>
             <a:r>
-              <a:rPr lang="de-DE" sz="1400" b="1" dirty="0"/>
+              <a:rPr lang="de-DE" sz="1600" b="1" dirty="0"/>
               <a:t>Passwörter werden als Binär Datei abgespeichert</a:t>
             </a:r>
           </a:p>
           <a:p>
             <a:pPr lvl="1"/>
             <a:r>
-              <a:rPr lang="de-DE" sz="1400" b="1" dirty="0"/>
+              <a:rPr lang="de-DE" sz="1600" b="1" dirty="0"/>
               <a:t>Ersten 16 Byte = Salt</a:t>
             </a:r>
           </a:p>
           <a:p>
             <a:pPr lvl="1"/>
             <a:r>
-              <a:rPr lang="de-DE" sz="1400" b="1" dirty="0"/>
+              <a:rPr lang="de-DE" sz="1600" b="1" dirty="0"/>
               <a:t>Zweiten 16 Byte = IV (Initialisierungsvektor)</a:t>
             </a:r>
           </a:p>
           <a:p>
             <a:pPr lvl="1"/>
             <a:r>
-              <a:rPr lang="de-DE" sz="1400" b="1" dirty="0"/>
+              <a:rPr lang="de-DE" sz="1600" b="1" dirty="0"/>
               <a:t>Rest = Daten (Passwörter)</a:t>
             </a:r>
           </a:p>
@@ -7104,6 +7105,134 @@
 </file>
 
 <file path=ppt/slides/slide8.xml><?xml version="1.0" encoding="utf-8"?>
+<p:sld xmlns:a="http://schemas.openxmlformats.org/drawingml/2006/main" xmlns:r="http://schemas.openxmlformats.org/officeDocument/2006/relationships" xmlns:p="http://schemas.openxmlformats.org/presentationml/2006/main">
+  <p:cSld>
+    <p:spTree>
+      <p:nvGrpSpPr>
+        <p:cNvPr id="1" name="">
+          <a:extLst>
+            <a:ext uri="{FF2B5EF4-FFF2-40B4-BE49-F238E27FC236}">
+              <a16:creationId xmlns:a16="http://schemas.microsoft.com/office/drawing/2014/main" id="{ACE2E954-15E9-E447-34AD-12C92502B7ED}"/>
+            </a:ext>
+          </a:extLst>
+        </p:cNvPr>
+        <p:cNvGrpSpPr/>
+        <p:nvPr/>
+      </p:nvGrpSpPr>
+      <p:grpSpPr>
+        <a:xfrm>
+          <a:off x="0" y="0"/>
+          <a:ext cx="0" cy="0"/>
+          <a:chOff x="0" y="0"/>
+          <a:chExt cx="0" cy="0"/>
+        </a:xfrm>
+      </p:grpSpPr>
+      <p:sp>
+        <p:nvSpPr>
+          <p:cNvPr id="2" name="Titel 1">
+            <a:extLst>
+              <a:ext uri="{FF2B5EF4-FFF2-40B4-BE49-F238E27FC236}">
+                <a16:creationId xmlns:a16="http://schemas.microsoft.com/office/drawing/2014/main" id="{8FC10906-ACDD-7AFE-8BA3-325E4297E194}"/>
+              </a:ext>
+            </a:extLst>
+          </p:cNvPr>
+          <p:cNvSpPr>
+            <a:spLocks noGrp="1"/>
+          </p:cNvSpPr>
+          <p:nvPr>
+            <p:ph type="title"/>
+          </p:nvPr>
+        </p:nvSpPr>
+        <p:spPr/>
+        <p:txBody>
+          <a:bodyPr/>
+          <a:lstStyle/>
+          <a:p>
+            <a:r>
+              <a:rPr lang="de-DE" b="1" dirty="0">
+                <a:effectLst>
+                  <a:outerShdw blurRad="38100" dist="38100" dir="2700000" algn="tl">
+                    <a:srgbClr val="000000">
+                      <a:alpha val="43137"/>
+                    </a:srgbClr>
+                  </a:outerShdw>
+                </a:effectLst>
+              </a:rPr>
+              <a:t>Umsetzung </a:t>
+            </a:r>
+            <a:r>
+              <a:rPr lang="de-DE" dirty="0">
+                <a:effectLst>
+                  <a:outerShdw blurRad="38100" dist="38100" dir="2700000" algn="tl">
+                    <a:srgbClr val="000000">
+                      <a:alpha val="43137"/>
+                    </a:srgbClr>
+                  </a:outerShdw>
+                </a:effectLst>
+              </a:rPr>
+              <a:t>- Probleme</a:t>
+            </a:r>
+            <a:endParaRPr lang="de-DE" b="1" dirty="0">
+              <a:effectLst>
+                <a:outerShdw blurRad="38100" dist="38100" dir="2700000" algn="tl">
+                  <a:srgbClr val="000000">
+                    <a:alpha val="43137"/>
+                  </a:srgbClr>
+                </a:outerShdw>
+              </a:effectLst>
+            </a:endParaRPr>
+          </a:p>
+        </p:txBody>
+      </p:sp>
+      <p:sp>
+        <p:nvSpPr>
+          <p:cNvPr id="3" name="Inhaltsplatzhalter 2">
+            <a:extLst>
+              <a:ext uri="{FF2B5EF4-FFF2-40B4-BE49-F238E27FC236}">
+                <a16:creationId xmlns:a16="http://schemas.microsoft.com/office/drawing/2014/main" id="{56BFDCF3-FFA4-1EA1-D381-2110A1905742}"/>
+              </a:ext>
+            </a:extLst>
+          </p:cNvPr>
+          <p:cNvSpPr>
+            <a:spLocks noGrp="1"/>
+          </p:cNvSpPr>
+          <p:nvPr>
+            <p:ph idx="1"/>
+          </p:nvPr>
+        </p:nvSpPr>
+        <p:spPr/>
+        <p:txBody>
+          <a:bodyPr>
+            <a:normAutofit/>
+          </a:bodyPr>
+          <a:lstStyle/>
+          <a:p>
+            <a:r>
+              <a:rPr lang="de-DE" sz="2000" dirty="0"/>
+              <a:t>Implementierung von Buttons (Bearbeiten, Kopieren, Anzeigen) in eine </a:t>
+            </a:r>
+            <a:r>
+              <a:rPr lang="de-DE" sz="2000" dirty="0" err="1"/>
+              <a:t>JTable</a:t>
+            </a:r>
+            <a:endParaRPr lang="de-DE" sz="2000" dirty="0"/>
+          </a:p>
+        </p:txBody>
+      </p:sp>
+    </p:spTree>
+    <p:extLst>
+      <p:ext uri="{BB962C8B-B14F-4D97-AF65-F5344CB8AC3E}">
+        <p14:creationId xmlns:p14="http://schemas.microsoft.com/office/powerpoint/2010/main" val="3903202141"/>
+      </p:ext>
+    </p:extLst>
+  </p:cSld>
+  <p:clrMapOvr>
+    <a:masterClrMapping/>
+  </p:clrMapOvr>
+</p:sld>
+</file>
+
+<file path=ppt/slides/slide9.xml><?xml version="1.0" encoding="utf-8"?>
 <p:sld xmlns:a="http://schemas.openxmlformats.org/drawingml/2006/main" xmlns:r="http://schemas.openxmlformats.org/officeDocument/2006/relationships" xmlns:p="http://schemas.openxmlformats.org/presentationml/2006/main">
   <p:cSld>
     <p:spTree>

--- a/pp/Presentation.pptx
+++ b/pp/Presentation.pptx
@@ -4605,7 +4605,7 @@
         <p:spPr/>
         <p:txBody>
           <a:bodyPr>
-            <a:normAutofit/>
+            <a:normAutofit lnSpcReduction="10000"/>
           </a:bodyPr>
           <a:lstStyle/>
           <a:p>
@@ -4639,6 +4639,12 @@
             <a:r>
               <a:rPr lang="de-DE" sz="2000" dirty="0"/>
               <a:t>Lombok Getter/Setter</a:t>
+            </a:r>
+          </a:p>
+          <a:p>
+            <a:r>
+              <a:rPr lang="de-DE" sz="2000" dirty="0"/>
+              <a:t>MySQL-Connector (JDBC-Driver)</a:t>
             </a:r>
           </a:p>
           <a:p>

--- a/pp/Presentation.pptx
+++ b/pp/Presentation.pptx
@@ -9,11 +9,12 @@
     <p:sldId id="257" r:id="rId3"/>
     <p:sldId id="258" r:id="rId4"/>
     <p:sldId id="261" r:id="rId5"/>
-    <p:sldId id="259" r:id="rId6"/>
-    <p:sldId id="263" r:id="rId7"/>
-    <p:sldId id="262" r:id="rId8"/>
-    <p:sldId id="264" r:id="rId9"/>
-    <p:sldId id="260" r:id="rId10"/>
+    <p:sldId id="265" r:id="rId6"/>
+    <p:sldId id="259" r:id="rId7"/>
+    <p:sldId id="263" r:id="rId8"/>
+    <p:sldId id="262" r:id="rId9"/>
+    <p:sldId id="264" r:id="rId10"/>
+    <p:sldId id="260" r:id="rId11"/>
   </p:sldIdLst>
   <p:sldSz cx="12192000" cy="6858000"/>
   <p:notesSz cx="6858000" cy="9144000"/>
@@ -4533,6 +4534,110 @@
 </p:sld>
 </file>
 
+<file path=ppt/slides/slide10.xml><?xml version="1.0" encoding="utf-8"?>
+<p:sld xmlns:a="http://schemas.openxmlformats.org/drawingml/2006/main" xmlns:r="http://schemas.openxmlformats.org/officeDocument/2006/relationships" xmlns:p="http://schemas.openxmlformats.org/presentationml/2006/main">
+  <p:cSld>
+    <p:spTree>
+      <p:nvGrpSpPr>
+        <p:cNvPr id="1" name=""/>
+        <p:cNvGrpSpPr/>
+        <p:nvPr/>
+      </p:nvGrpSpPr>
+      <p:grpSpPr>
+        <a:xfrm>
+          <a:off x="0" y="0"/>
+          <a:ext cx="0" cy="0"/>
+          <a:chOff x="0" y="0"/>
+          <a:chExt cx="0" cy="0"/>
+        </a:xfrm>
+      </p:grpSpPr>
+      <p:sp>
+        <p:nvSpPr>
+          <p:cNvPr id="2" name="Titel 1">
+            <a:extLst>
+              <a:ext uri="{FF2B5EF4-FFF2-40B4-BE49-F238E27FC236}">
+                <a16:creationId xmlns:a16="http://schemas.microsoft.com/office/drawing/2014/main" id="{4777BA2B-6314-C13E-8020-90F8CA35B0C6}"/>
+              </a:ext>
+            </a:extLst>
+          </p:cNvPr>
+          <p:cNvSpPr>
+            <a:spLocks noGrp="1"/>
+          </p:cNvSpPr>
+          <p:nvPr>
+            <p:ph type="title"/>
+          </p:nvPr>
+        </p:nvSpPr>
+        <p:spPr/>
+        <p:txBody>
+          <a:bodyPr/>
+          <a:lstStyle/>
+          <a:p>
+            <a:r>
+              <a:rPr lang="de-DE" b="1" dirty="0">
+                <a:effectLst>
+                  <a:outerShdw blurRad="38100" dist="38100" dir="2700000" algn="tl">
+                    <a:srgbClr val="000000">
+                      <a:alpha val="43137"/>
+                    </a:srgbClr>
+                  </a:outerShdw>
+                </a:effectLst>
+              </a:rPr>
+              <a:t>Lessions Learned</a:t>
+            </a:r>
+          </a:p>
+        </p:txBody>
+      </p:sp>
+      <p:sp>
+        <p:nvSpPr>
+          <p:cNvPr id="3" name="Inhaltsplatzhalter 2">
+            <a:extLst>
+              <a:ext uri="{FF2B5EF4-FFF2-40B4-BE49-F238E27FC236}">
+                <a16:creationId xmlns:a16="http://schemas.microsoft.com/office/drawing/2014/main" id="{70B24FDD-F401-C7A6-98F6-6469FF9DFDB2}"/>
+              </a:ext>
+            </a:extLst>
+          </p:cNvPr>
+          <p:cNvSpPr>
+            <a:spLocks noGrp="1"/>
+          </p:cNvSpPr>
+          <p:nvPr>
+            <p:ph idx="1"/>
+          </p:nvPr>
+        </p:nvSpPr>
+        <p:spPr/>
+        <p:txBody>
+          <a:bodyPr/>
+          <a:lstStyle/>
+          <a:p>
+            <a:r>
+              <a:rPr lang="de-DE" dirty="0"/>
+              <a:t>Vor dem Start überlegen</a:t>
+            </a:r>
+          </a:p>
+          <a:p>
+            <a:pPr lvl="1">
+              <a:buFont typeface="Wingdings" panose="05000000000000000000" pitchFamily="2" charset="2"/>
+              <a:buChar char="Ø"/>
+            </a:pPr>
+            <a:r>
+              <a:rPr lang="de-DE" dirty="0"/>
+              <a:t>Aufwändiger Umbau von Passwort-Speicherung in JSON-Datei als Klartext zu Binär Dateien</a:t>
+            </a:r>
+          </a:p>
+        </p:txBody>
+      </p:sp>
+    </p:spTree>
+    <p:extLst>
+      <p:ext uri="{BB962C8B-B14F-4D97-AF65-F5344CB8AC3E}">
+        <p14:creationId xmlns:p14="http://schemas.microsoft.com/office/powerpoint/2010/main" val="3553515808"/>
+      </p:ext>
+    </p:extLst>
+  </p:cSld>
+  <p:clrMapOvr>
+    <a:masterClrMapping/>
+  </p:clrMapOvr>
+</p:sld>
+</file>
+
 <file path=ppt/slides/slide2.xml><?xml version="1.0" encoding="utf-8"?>
 <p:sld xmlns:a="http://schemas.openxmlformats.org/drawingml/2006/main" xmlns:r="http://schemas.openxmlformats.org/officeDocument/2006/relationships" xmlns:p="http://schemas.openxmlformats.org/presentationml/2006/main">
   <p:cSld>
@@ -6337,6 +6442,138 @@
   <p:cSld>
     <p:spTree>
       <p:nvGrpSpPr>
+        <p:cNvPr id="1" name="">
+          <a:extLst>
+            <a:ext uri="{FF2B5EF4-FFF2-40B4-BE49-F238E27FC236}">
+              <a16:creationId xmlns:a16="http://schemas.microsoft.com/office/drawing/2014/main" id="{E5802E7C-6FFF-C082-1FFE-A4950742F91B}"/>
+            </a:ext>
+          </a:extLst>
+        </p:cNvPr>
+        <p:cNvGrpSpPr/>
+        <p:nvPr/>
+      </p:nvGrpSpPr>
+      <p:grpSpPr>
+        <a:xfrm>
+          <a:off x="0" y="0"/>
+          <a:ext cx="0" cy="0"/>
+          <a:chOff x="0" y="0"/>
+          <a:chExt cx="0" cy="0"/>
+        </a:xfrm>
+      </p:grpSpPr>
+      <p:sp>
+        <p:nvSpPr>
+          <p:cNvPr id="2" name="Titel 1">
+            <a:extLst>
+              <a:ext uri="{FF2B5EF4-FFF2-40B4-BE49-F238E27FC236}">
+                <a16:creationId xmlns:a16="http://schemas.microsoft.com/office/drawing/2014/main" id="{23CFA9F2-8837-E5B6-8425-5CC48C8FD2BD}"/>
+              </a:ext>
+            </a:extLst>
+          </p:cNvPr>
+          <p:cNvSpPr>
+            <a:spLocks noGrp="1"/>
+          </p:cNvSpPr>
+          <p:nvPr>
+            <p:ph type="title"/>
+          </p:nvPr>
+        </p:nvSpPr>
+        <p:spPr/>
+        <p:txBody>
+          <a:bodyPr/>
+          <a:lstStyle/>
+          <a:p>
+            <a:r>
+              <a:rPr lang="de-DE" b="1" dirty="0">
+                <a:effectLst>
+                  <a:outerShdw blurRad="38100" dist="38100" dir="2700000" algn="tl">
+                    <a:srgbClr val="000000">
+                      <a:alpha val="43137"/>
+                    </a:srgbClr>
+                  </a:outerShdw>
+                </a:effectLst>
+              </a:rPr>
+              <a:t>Technischer Hintergrund</a:t>
+            </a:r>
+          </a:p>
+        </p:txBody>
+      </p:sp>
+      <p:sp>
+        <p:nvSpPr>
+          <p:cNvPr id="3" name="Inhaltsplatzhalter 2">
+            <a:extLst>
+              <a:ext uri="{FF2B5EF4-FFF2-40B4-BE49-F238E27FC236}">
+                <a16:creationId xmlns:a16="http://schemas.microsoft.com/office/drawing/2014/main" id="{06038C3A-873E-3845-090C-C8FA4418AB6E}"/>
+              </a:ext>
+            </a:extLst>
+          </p:cNvPr>
+          <p:cNvSpPr>
+            <a:spLocks noGrp="1"/>
+          </p:cNvSpPr>
+          <p:nvPr>
+            <p:ph idx="1"/>
+          </p:nvPr>
+        </p:nvSpPr>
+        <p:spPr/>
+        <p:txBody>
+          <a:bodyPr>
+            <a:normAutofit/>
+          </a:bodyPr>
+          <a:lstStyle/>
+          <a:p>
+            <a:r>
+              <a:rPr lang="de-DE" sz="2000" b="1" dirty="0"/>
+              <a:t>Einstellungen:</a:t>
+            </a:r>
+          </a:p>
+        </p:txBody>
+      </p:sp>
+      <p:pic>
+        <p:nvPicPr>
+          <p:cNvPr id="5" name="Grafik 4">
+            <a:extLst>
+              <a:ext uri="{FF2B5EF4-FFF2-40B4-BE49-F238E27FC236}">
+                <a16:creationId xmlns:a16="http://schemas.microsoft.com/office/drawing/2014/main" id="{38204D75-5CF4-B051-2DCA-7269A90283A6}"/>
+              </a:ext>
+            </a:extLst>
+          </p:cNvPr>
+          <p:cNvPicPr>
+            <a:picLocks noChangeAspect="1"/>
+          </p:cNvPicPr>
+          <p:nvPr/>
+        </p:nvPicPr>
+        <p:blipFill>
+          <a:blip r:embed="rId2"/>
+          <a:stretch>
+            <a:fillRect/>
+          </a:stretch>
+        </p:blipFill>
+        <p:spPr>
+          <a:xfrm>
+            <a:off x="6096000" y="2636707"/>
+            <a:ext cx="4069454" cy="2729173"/>
+          </a:xfrm>
+          <a:prstGeom prst="rect">
+            <a:avLst/>
+          </a:prstGeom>
+        </p:spPr>
+      </p:pic>
+    </p:spTree>
+    <p:extLst>
+      <p:ext uri="{BB962C8B-B14F-4D97-AF65-F5344CB8AC3E}">
+        <p14:creationId xmlns:p14="http://schemas.microsoft.com/office/powerpoint/2010/main" val="2816906569"/>
+      </p:ext>
+    </p:extLst>
+  </p:cSld>
+  <p:clrMapOvr>
+    <a:masterClrMapping/>
+  </p:clrMapOvr>
+</p:sld>
+</file>
+
+<file path=ppt/slides/slide6.xml><?xml version="1.0" encoding="utf-8"?>
+<p:sld xmlns:a="http://schemas.openxmlformats.org/drawingml/2006/main" xmlns:r="http://schemas.openxmlformats.org/officeDocument/2006/relationships" xmlns:p="http://schemas.openxmlformats.org/presentationml/2006/main">
+  <p:cSld>
+    <p:spTree>
+      <p:nvGrpSpPr>
         <p:cNvPr id="1" name=""/>
         <p:cNvGrpSpPr/>
         <p:nvPr/>
@@ -6444,7 +6681,7 @@
 </p:sld>
 </file>
 
-<file path=ppt/slides/slide6.xml><?xml version="1.0" encoding="utf-8"?>
+<file path=ppt/slides/slide7.xml><?xml version="1.0" encoding="utf-8"?>
 <p:sld xmlns:a="http://schemas.openxmlformats.org/drawingml/2006/main" xmlns:r="http://schemas.openxmlformats.org/officeDocument/2006/relationships" xmlns:p="http://schemas.openxmlformats.org/presentationml/2006/main">
   <p:cSld>
     <p:spTree>
@@ -6559,7 +6796,7 @@
 </p:sld>
 </file>
 
-<file path=ppt/slides/slide7.xml><?xml version="1.0" encoding="utf-8"?>
+<file path=ppt/slides/slide8.xml><?xml version="1.0" encoding="utf-8"?>
 <p:sld xmlns:a="http://schemas.openxmlformats.org/drawingml/2006/main" xmlns:r="http://schemas.openxmlformats.org/officeDocument/2006/relationships" xmlns:p="http://schemas.openxmlformats.org/presentationml/2006/main">
   <p:cSld>
     <p:spTree>
@@ -7110,7 +7347,7 @@
 </p:sld>
 </file>
 
-<file path=ppt/slides/slide8.xml><?xml version="1.0" encoding="utf-8"?>
+<file path=ppt/slides/slide9.xml><?xml version="1.0" encoding="utf-8"?>
 <p:sld xmlns:a="http://schemas.openxmlformats.org/drawingml/2006/main" xmlns:r="http://schemas.openxmlformats.org/officeDocument/2006/relationships" xmlns:p="http://schemas.openxmlformats.org/presentationml/2006/main">
   <p:cSld>
     <p:spTree>
@@ -7229,110 +7466,6 @@
     <p:extLst>
       <p:ext uri="{BB962C8B-B14F-4D97-AF65-F5344CB8AC3E}">
         <p14:creationId xmlns:p14="http://schemas.microsoft.com/office/powerpoint/2010/main" val="3903202141"/>
-      </p:ext>
-    </p:extLst>
-  </p:cSld>
-  <p:clrMapOvr>
-    <a:masterClrMapping/>
-  </p:clrMapOvr>
-</p:sld>
-</file>
-
-<file path=ppt/slides/slide9.xml><?xml version="1.0" encoding="utf-8"?>
-<p:sld xmlns:a="http://schemas.openxmlformats.org/drawingml/2006/main" xmlns:r="http://schemas.openxmlformats.org/officeDocument/2006/relationships" xmlns:p="http://schemas.openxmlformats.org/presentationml/2006/main">
-  <p:cSld>
-    <p:spTree>
-      <p:nvGrpSpPr>
-        <p:cNvPr id="1" name=""/>
-        <p:cNvGrpSpPr/>
-        <p:nvPr/>
-      </p:nvGrpSpPr>
-      <p:grpSpPr>
-        <a:xfrm>
-          <a:off x="0" y="0"/>
-          <a:ext cx="0" cy="0"/>
-          <a:chOff x="0" y="0"/>
-          <a:chExt cx="0" cy="0"/>
-        </a:xfrm>
-      </p:grpSpPr>
-      <p:sp>
-        <p:nvSpPr>
-          <p:cNvPr id="2" name="Titel 1">
-            <a:extLst>
-              <a:ext uri="{FF2B5EF4-FFF2-40B4-BE49-F238E27FC236}">
-                <a16:creationId xmlns:a16="http://schemas.microsoft.com/office/drawing/2014/main" id="{4777BA2B-6314-C13E-8020-90F8CA35B0C6}"/>
-              </a:ext>
-            </a:extLst>
-          </p:cNvPr>
-          <p:cNvSpPr>
-            <a:spLocks noGrp="1"/>
-          </p:cNvSpPr>
-          <p:nvPr>
-            <p:ph type="title"/>
-          </p:nvPr>
-        </p:nvSpPr>
-        <p:spPr/>
-        <p:txBody>
-          <a:bodyPr/>
-          <a:lstStyle/>
-          <a:p>
-            <a:r>
-              <a:rPr lang="de-DE" b="1" dirty="0">
-                <a:effectLst>
-                  <a:outerShdw blurRad="38100" dist="38100" dir="2700000" algn="tl">
-                    <a:srgbClr val="000000">
-                      <a:alpha val="43137"/>
-                    </a:srgbClr>
-                  </a:outerShdw>
-                </a:effectLst>
-              </a:rPr>
-              <a:t>Lessions Learned</a:t>
-            </a:r>
-          </a:p>
-        </p:txBody>
-      </p:sp>
-      <p:sp>
-        <p:nvSpPr>
-          <p:cNvPr id="3" name="Inhaltsplatzhalter 2">
-            <a:extLst>
-              <a:ext uri="{FF2B5EF4-FFF2-40B4-BE49-F238E27FC236}">
-                <a16:creationId xmlns:a16="http://schemas.microsoft.com/office/drawing/2014/main" id="{70B24FDD-F401-C7A6-98F6-6469FF9DFDB2}"/>
-              </a:ext>
-            </a:extLst>
-          </p:cNvPr>
-          <p:cNvSpPr>
-            <a:spLocks noGrp="1"/>
-          </p:cNvSpPr>
-          <p:nvPr>
-            <p:ph idx="1"/>
-          </p:nvPr>
-        </p:nvSpPr>
-        <p:spPr/>
-        <p:txBody>
-          <a:bodyPr/>
-          <a:lstStyle/>
-          <a:p>
-            <a:r>
-              <a:rPr lang="de-DE" dirty="0"/>
-              <a:t>Vor dem Start überlegen</a:t>
-            </a:r>
-          </a:p>
-          <a:p>
-            <a:pPr lvl="1">
-              <a:buFont typeface="Wingdings" panose="05000000000000000000" pitchFamily="2" charset="2"/>
-              <a:buChar char="Ø"/>
-            </a:pPr>
-            <a:r>
-              <a:rPr lang="de-DE" dirty="0"/>
-              <a:t>Aufwändiger Umbau von Passwort-Speicherung in JSON-Datei als Klartext zu Binär Dateien</a:t>
-            </a:r>
-          </a:p>
-        </p:txBody>
-      </p:sp>
-    </p:spTree>
-    <p:extLst>
-      <p:ext uri="{BB962C8B-B14F-4D97-AF65-F5344CB8AC3E}">
-        <p14:creationId xmlns:p14="http://schemas.microsoft.com/office/powerpoint/2010/main" val="3553515808"/>
       </p:ext>
     </p:extLst>
   </p:cSld>

--- a/pp/Presentation.pptx
+++ b/pp/Presentation.pptx
@@ -11,10 +11,12 @@
     <p:sldId id="261" r:id="rId5"/>
     <p:sldId id="265" r:id="rId6"/>
     <p:sldId id="259" r:id="rId7"/>
-    <p:sldId id="263" r:id="rId8"/>
-    <p:sldId id="262" r:id="rId9"/>
-    <p:sldId id="264" r:id="rId10"/>
-    <p:sldId id="260" r:id="rId11"/>
+    <p:sldId id="266" r:id="rId8"/>
+    <p:sldId id="263" r:id="rId9"/>
+    <p:sldId id="267" r:id="rId10"/>
+    <p:sldId id="262" r:id="rId11"/>
+    <p:sldId id="264" r:id="rId12"/>
+    <p:sldId id="260" r:id="rId13"/>
   </p:sldIdLst>
   <p:sldSz cx="12192000" cy="6858000"/>
   <p:notesSz cx="6858000" cy="9144000"/>
@@ -4539,6 +4541,835 @@
   <p:cSld>
     <p:spTree>
       <p:nvGrpSpPr>
+        <p:cNvPr id="1" name="">
+          <a:extLst>
+            <a:ext uri="{FF2B5EF4-FFF2-40B4-BE49-F238E27FC236}">
+              <a16:creationId xmlns:a16="http://schemas.microsoft.com/office/drawing/2014/main" id="{64007FDD-F578-96F3-717C-B2F13D303536}"/>
+            </a:ext>
+          </a:extLst>
+        </p:cNvPr>
+        <p:cNvGrpSpPr/>
+        <p:nvPr/>
+      </p:nvGrpSpPr>
+      <p:grpSpPr>
+        <a:xfrm>
+          <a:off x="0" y="0"/>
+          <a:ext cx="0" cy="0"/>
+          <a:chOff x="0" y="0"/>
+          <a:chExt cx="0" cy="0"/>
+        </a:xfrm>
+      </p:grpSpPr>
+      <p:sp>
+        <p:nvSpPr>
+          <p:cNvPr id="25" name="Rechteck 24">
+            <a:extLst>
+              <a:ext uri="{FF2B5EF4-FFF2-40B4-BE49-F238E27FC236}">
+                <a16:creationId xmlns:a16="http://schemas.microsoft.com/office/drawing/2014/main" id="{55A0F817-D821-373B-0FB5-9512CEE84DF7}"/>
+              </a:ext>
+            </a:extLst>
+          </p:cNvPr>
+          <p:cNvSpPr/>
+          <p:nvPr/>
+        </p:nvSpPr>
+        <p:spPr>
+          <a:xfrm>
+            <a:off x="448310" y="1734710"/>
+            <a:ext cx="4237990" cy="5024230"/>
+          </a:xfrm>
+          <a:prstGeom prst="rect">
+            <a:avLst/>
+          </a:prstGeom>
+          <a:solidFill>
+            <a:schemeClr val="accent4">
+              <a:lumMod val="40000"/>
+              <a:lumOff val="60000"/>
+            </a:schemeClr>
+          </a:solidFill>
+        </p:spPr>
+        <p:style>
+          <a:lnRef idx="2">
+            <a:schemeClr val="accent4">
+              <a:shade val="15000"/>
+            </a:schemeClr>
+          </a:lnRef>
+          <a:fillRef idx="1">
+            <a:schemeClr val="accent4"/>
+          </a:fillRef>
+          <a:effectRef idx="0">
+            <a:schemeClr val="accent4"/>
+          </a:effectRef>
+          <a:fontRef idx="minor">
+            <a:schemeClr val="lt1"/>
+          </a:fontRef>
+        </p:style>
+        <p:txBody>
+          <a:bodyPr rtlCol="0" anchor="t"/>
+          <a:lstStyle/>
+          <a:p>
+            <a:r>
+              <a:rPr lang="de-DE" dirty="0">
+                <a:solidFill>
+                  <a:schemeClr val="tx2">
+                    <a:lumMod val="75000"/>
+                    <a:lumOff val="25000"/>
+                  </a:schemeClr>
+                </a:solidFill>
+              </a:rPr>
+              <a:t>Passwortmanager</a:t>
+            </a:r>
+          </a:p>
+        </p:txBody>
+      </p:sp>
+      <p:sp>
+        <p:nvSpPr>
+          <p:cNvPr id="2" name="Titel 1">
+            <a:extLst>
+              <a:ext uri="{FF2B5EF4-FFF2-40B4-BE49-F238E27FC236}">
+                <a16:creationId xmlns:a16="http://schemas.microsoft.com/office/drawing/2014/main" id="{2A3703A7-369E-1A90-7ABC-1FDCE42AF615}"/>
+              </a:ext>
+            </a:extLst>
+          </p:cNvPr>
+          <p:cNvSpPr>
+            <a:spLocks noGrp="1"/>
+          </p:cNvSpPr>
+          <p:nvPr>
+            <p:ph type="title"/>
+          </p:nvPr>
+        </p:nvSpPr>
+        <p:spPr/>
+        <p:txBody>
+          <a:bodyPr/>
+          <a:lstStyle/>
+          <a:p>
+            <a:r>
+              <a:rPr lang="de-DE" b="1" dirty="0">
+                <a:effectLst>
+                  <a:outerShdw blurRad="38100" dist="38100" dir="2700000" algn="tl">
+                    <a:srgbClr val="000000">
+                      <a:alpha val="43137"/>
+                    </a:srgbClr>
+                  </a:outerShdw>
+                </a:effectLst>
+              </a:rPr>
+              <a:t>Umsetzung</a:t>
+            </a:r>
+            <a:r>
+              <a:rPr lang="de-DE" dirty="0">
+                <a:effectLst>
+                  <a:outerShdw blurRad="38100" dist="38100" dir="2700000" algn="tl">
+                    <a:srgbClr val="000000">
+                      <a:alpha val="43137"/>
+                    </a:srgbClr>
+                  </a:outerShdw>
+                </a:effectLst>
+              </a:rPr>
+              <a:t> - Speicherung der Passwörter (Server)</a:t>
+            </a:r>
+            <a:endParaRPr lang="de-DE" u="sng" dirty="0">
+              <a:effectLst>
+                <a:outerShdw blurRad="38100" dist="38100" dir="2700000" algn="tl">
+                  <a:srgbClr val="000000">
+                    <a:alpha val="43137"/>
+                  </a:srgbClr>
+                </a:outerShdw>
+              </a:effectLst>
+            </a:endParaRPr>
+          </a:p>
+        </p:txBody>
+      </p:sp>
+      <p:sp>
+        <p:nvSpPr>
+          <p:cNvPr id="5" name="Rechteck 4">
+            <a:extLst>
+              <a:ext uri="{FF2B5EF4-FFF2-40B4-BE49-F238E27FC236}">
+                <a16:creationId xmlns:a16="http://schemas.microsoft.com/office/drawing/2014/main" id="{7E894043-D3EA-9303-9B47-B297F2DC5D72}"/>
+              </a:ext>
+            </a:extLst>
+          </p:cNvPr>
+          <p:cNvSpPr/>
+          <p:nvPr/>
+        </p:nvSpPr>
+        <p:spPr>
+          <a:xfrm>
+            <a:off x="844550" y="2933700"/>
+            <a:ext cx="2287270" cy="3765550"/>
+          </a:xfrm>
+          <a:prstGeom prst="rect">
+            <a:avLst/>
+          </a:prstGeom>
+        </p:spPr>
+        <p:style>
+          <a:lnRef idx="2">
+            <a:schemeClr val="accent4">
+              <a:shade val="15000"/>
+            </a:schemeClr>
+          </a:lnRef>
+          <a:fillRef idx="1">
+            <a:schemeClr val="accent4"/>
+          </a:fillRef>
+          <a:effectRef idx="0">
+            <a:schemeClr val="accent4"/>
+          </a:effectRef>
+          <a:fontRef idx="minor">
+            <a:schemeClr val="lt1"/>
+          </a:fontRef>
+        </p:style>
+        <p:txBody>
+          <a:bodyPr rtlCol="0" anchor="t"/>
+          <a:lstStyle/>
+          <a:p>
+            <a:r>
+              <a:rPr lang="de-DE" dirty="0"/>
+              <a:t>Datei / BLOB</a:t>
+            </a:r>
+          </a:p>
+        </p:txBody>
+      </p:sp>
+      <p:sp>
+        <p:nvSpPr>
+          <p:cNvPr id="6" name="Rechteck 5">
+            <a:extLst>
+              <a:ext uri="{FF2B5EF4-FFF2-40B4-BE49-F238E27FC236}">
+                <a16:creationId xmlns:a16="http://schemas.microsoft.com/office/drawing/2014/main" id="{BF8534E5-71D2-F6C8-77D7-696964BB819D}"/>
+              </a:ext>
+            </a:extLst>
+          </p:cNvPr>
+          <p:cNvSpPr/>
+          <p:nvPr/>
+        </p:nvSpPr>
+        <p:spPr>
+          <a:xfrm>
+            <a:off x="1201762" y="3310066"/>
+            <a:ext cx="1692069" cy="343462"/>
+          </a:xfrm>
+          <a:prstGeom prst="rect">
+            <a:avLst/>
+          </a:prstGeom>
+        </p:spPr>
+        <p:style>
+          <a:lnRef idx="2">
+            <a:schemeClr val="accent1">
+              <a:shade val="15000"/>
+            </a:schemeClr>
+          </a:lnRef>
+          <a:fillRef idx="1">
+            <a:schemeClr val="accent1"/>
+          </a:fillRef>
+          <a:effectRef idx="0">
+            <a:schemeClr val="accent1"/>
+          </a:effectRef>
+          <a:fontRef idx="minor">
+            <a:schemeClr val="lt1"/>
+          </a:fontRef>
+        </p:style>
+        <p:txBody>
+          <a:bodyPr rtlCol="0" anchor="ctr"/>
+          <a:lstStyle/>
+          <a:p>
+            <a:pPr algn="ctr"/>
+            <a:r>
+              <a:rPr lang="de-DE" dirty="0"/>
+              <a:t>Salt</a:t>
+            </a:r>
+          </a:p>
+        </p:txBody>
+      </p:sp>
+      <p:sp>
+        <p:nvSpPr>
+          <p:cNvPr id="7" name="Rechteck 6">
+            <a:extLst>
+              <a:ext uri="{FF2B5EF4-FFF2-40B4-BE49-F238E27FC236}">
+                <a16:creationId xmlns:a16="http://schemas.microsoft.com/office/drawing/2014/main" id="{B08F3FCA-539C-5F26-6BC3-B6907F9643DA}"/>
+              </a:ext>
+            </a:extLst>
+          </p:cNvPr>
+          <p:cNvSpPr/>
+          <p:nvPr/>
+        </p:nvSpPr>
+        <p:spPr>
+          <a:xfrm>
+            <a:off x="1200150" y="3760805"/>
+            <a:ext cx="1693682" cy="343462"/>
+          </a:xfrm>
+          <a:prstGeom prst="rect">
+            <a:avLst/>
+          </a:prstGeom>
+        </p:spPr>
+        <p:style>
+          <a:lnRef idx="2">
+            <a:schemeClr val="accent1">
+              <a:shade val="15000"/>
+            </a:schemeClr>
+          </a:lnRef>
+          <a:fillRef idx="1">
+            <a:schemeClr val="accent1"/>
+          </a:fillRef>
+          <a:effectRef idx="0">
+            <a:schemeClr val="accent1"/>
+          </a:effectRef>
+          <a:fontRef idx="minor">
+            <a:schemeClr val="lt1"/>
+          </a:fontRef>
+        </p:style>
+        <p:txBody>
+          <a:bodyPr rtlCol="0" anchor="ctr"/>
+          <a:lstStyle/>
+          <a:p>
+            <a:pPr algn="ctr"/>
+            <a:r>
+              <a:rPr lang="de-DE" dirty="0"/>
+              <a:t>IV</a:t>
+            </a:r>
+          </a:p>
+        </p:txBody>
+      </p:sp>
+      <p:sp>
+        <p:nvSpPr>
+          <p:cNvPr id="8" name="Rechteck 7">
+            <a:extLst>
+              <a:ext uri="{FF2B5EF4-FFF2-40B4-BE49-F238E27FC236}">
+                <a16:creationId xmlns:a16="http://schemas.microsoft.com/office/drawing/2014/main" id="{43A3DAAC-5BB9-26F6-1080-3F52015CE3C5}"/>
+              </a:ext>
+            </a:extLst>
+          </p:cNvPr>
+          <p:cNvSpPr/>
+          <p:nvPr/>
+        </p:nvSpPr>
+        <p:spPr>
+          <a:xfrm>
+            <a:off x="1200150" y="4247388"/>
+            <a:ext cx="1693682" cy="2280411"/>
+          </a:xfrm>
+          <a:prstGeom prst="rect">
+            <a:avLst/>
+          </a:prstGeom>
+        </p:spPr>
+        <p:style>
+          <a:lnRef idx="2">
+            <a:schemeClr val="accent1">
+              <a:shade val="15000"/>
+            </a:schemeClr>
+          </a:lnRef>
+          <a:fillRef idx="1">
+            <a:schemeClr val="accent1"/>
+          </a:fillRef>
+          <a:effectRef idx="0">
+            <a:schemeClr val="accent1"/>
+          </a:effectRef>
+          <a:fontRef idx="minor">
+            <a:schemeClr val="lt1"/>
+          </a:fontRef>
+        </p:style>
+        <p:txBody>
+          <a:bodyPr rtlCol="0" anchor="ctr"/>
+          <a:lstStyle/>
+          <a:p>
+            <a:pPr algn="ctr"/>
+            <a:r>
+              <a:rPr lang="de-DE" dirty="0"/>
+              <a:t>Verschlüsselte</a:t>
+            </a:r>
+          </a:p>
+          <a:p>
+            <a:pPr algn="ctr"/>
+            <a:r>
+              <a:rPr lang="de-DE" dirty="0"/>
+              <a:t>Daten</a:t>
+            </a:r>
+          </a:p>
+        </p:txBody>
+      </p:sp>
+      <p:cxnSp>
+        <p:nvCxnSpPr>
+          <p:cNvPr id="11" name="Gerade Verbindung mit Pfeil 10">
+            <a:extLst>
+              <a:ext uri="{FF2B5EF4-FFF2-40B4-BE49-F238E27FC236}">
+                <a16:creationId xmlns:a16="http://schemas.microsoft.com/office/drawing/2014/main" id="{620EF59F-733A-4D24-E3C7-632F07E51557}"/>
+              </a:ext>
+            </a:extLst>
+          </p:cNvPr>
+          <p:cNvCxnSpPr>
+            <a:cxnSpLocks/>
+          </p:cNvCxnSpPr>
+          <p:nvPr/>
+        </p:nvCxnSpPr>
+        <p:spPr>
+          <a:xfrm>
+            <a:off x="4686300" y="4254166"/>
+            <a:ext cx="2689860" cy="0"/>
+          </a:xfrm>
+          <a:prstGeom prst="straightConnector1">
+            <a:avLst/>
+          </a:prstGeom>
+          <a:ln w="57150">
+            <a:tailEnd type="triangle"/>
+          </a:ln>
+        </p:spPr>
+        <p:style>
+          <a:lnRef idx="2">
+            <a:schemeClr val="accent6"/>
+          </a:lnRef>
+          <a:fillRef idx="0">
+            <a:schemeClr val="accent6"/>
+          </a:fillRef>
+          <a:effectRef idx="1">
+            <a:schemeClr val="accent6"/>
+          </a:effectRef>
+          <a:fontRef idx="minor">
+            <a:schemeClr val="tx1"/>
+          </a:fontRef>
+        </p:style>
+      </p:cxnSp>
+      <p:sp>
+        <p:nvSpPr>
+          <p:cNvPr id="13" name="Textfeld 12">
+            <a:extLst>
+              <a:ext uri="{FF2B5EF4-FFF2-40B4-BE49-F238E27FC236}">
+                <a16:creationId xmlns:a16="http://schemas.microsoft.com/office/drawing/2014/main" id="{E2C27403-A117-1793-4E41-CDD43497EBDC}"/>
+              </a:ext>
+            </a:extLst>
+          </p:cNvPr>
+          <p:cNvSpPr txBox="1"/>
+          <p:nvPr/>
+        </p:nvSpPr>
+        <p:spPr>
+          <a:xfrm>
+            <a:off x="5583692" y="3853751"/>
+            <a:ext cx="720069" cy="369332"/>
+          </a:xfrm>
+          <a:prstGeom prst="rect">
+            <a:avLst/>
+          </a:prstGeom>
+          <a:noFill/>
+        </p:spPr>
+        <p:txBody>
+          <a:bodyPr wrap="none" rtlCol="0">
+            <a:spAutoFit/>
+          </a:bodyPr>
+          <a:lstStyle/>
+          <a:p>
+            <a:r>
+              <a:rPr lang="de-DE" dirty="0"/>
+              <a:t>JDBC</a:t>
+            </a:r>
+          </a:p>
+        </p:txBody>
+      </p:sp>
+      <p:sp>
+        <p:nvSpPr>
+          <p:cNvPr id="14" name="Flussdiagramm: Magnetplattenspeicher 13">
+            <a:extLst>
+              <a:ext uri="{FF2B5EF4-FFF2-40B4-BE49-F238E27FC236}">
+                <a16:creationId xmlns:a16="http://schemas.microsoft.com/office/drawing/2014/main" id="{71EDC17B-7B70-6BCA-7F9D-07F55F7EEDDD}"/>
+              </a:ext>
+            </a:extLst>
+          </p:cNvPr>
+          <p:cNvSpPr/>
+          <p:nvPr/>
+        </p:nvSpPr>
+        <p:spPr>
+          <a:xfrm>
+            <a:off x="7376160" y="2061371"/>
+            <a:ext cx="3421380" cy="4583709"/>
+          </a:xfrm>
+          <a:prstGeom prst="flowChartMagneticDisk">
+            <a:avLst/>
+          </a:prstGeom>
+        </p:spPr>
+        <p:style>
+          <a:lnRef idx="2">
+            <a:schemeClr val="accent1">
+              <a:shade val="15000"/>
+            </a:schemeClr>
+          </a:lnRef>
+          <a:fillRef idx="1">
+            <a:schemeClr val="accent1"/>
+          </a:fillRef>
+          <a:effectRef idx="0">
+            <a:schemeClr val="accent1"/>
+          </a:effectRef>
+          <a:fontRef idx="minor">
+            <a:schemeClr val="lt1"/>
+          </a:fontRef>
+        </p:style>
+        <p:txBody>
+          <a:bodyPr rtlCol="0" anchor="ctr"/>
+          <a:lstStyle/>
+          <a:p>
+            <a:pPr algn="ctr"/>
+            <a:endParaRPr lang="de-DE"/>
+          </a:p>
+        </p:txBody>
+      </p:sp>
+      <p:sp>
+        <p:nvSpPr>
+          <p:cNvPr id="22" name="Textfeld 21">
+            <a:extLst>
+              <a:ext uri="{FF2B5EF4-FFF2-40B4-BE49-F238E27FC236}">
+                <a16:creationId xmlns:a16="http://schemas.microsoft.com/office/drawing/2014/main" id="{8ADD7C2C-765C-79DA-7F9B-D779BAA6C795}"/>
+              </a:ext>
+            </a:extLst>
+          </p:cNvPr>
+          <p:cNvSpPr txBox="1"/>
+          <p:nvPr/>
+        </p:nvSpPr>
+        <p:spPr>
+          <a:xfrm>
+            <a:off x="7772400" y="2355959"/>
+            <a:ext cx="2362200" cy="954107"/>
+          </a:xfrm>
+          <a:prstGeom prst="rect">
+            <a:avLst/>
+          </a:prstGeom>
+          <a:noFill/>
+        </p:spPr>
+        <p:txBody>
+          <a:bodyPr wrap="square" rtlCol="0">
+            <a:spAutoFit/>
+          </a:bodyPr>
+          <a:lstStyle/>
+          <a:p>
+            <a:pPr algn="ctr"/>
+            <a:r>
+              <a:rPr lang="de-DE" sz="2800" dirty="0">
+                <a:solidFill>
+                  <a:schemeClr val="bg1"/>
+                </a:solidFill>
+              </a:rPr>
+              <a:t>MySQL</a:t>
+            </a:r>
+          </a:p>
+          <a:p>
+            <a:pPr algn="ctr"/>
+            <a:r>
+              <a:rPr lang="de-DE" sz="2800" dirty="0">
+                <a:solidFill>
+                  <a:schemeClr val="bg1"/>
+                </a:solidFill>
+              </a:rPr>
+              <a:t>Datenbank</a:t>
+            </a:r>
+          </a:p>
+        </p:txBody>
+      </p:sp>
+      <p:sp>
+        <p:nvSpPr>
+          <p:cNvPr id="26" name="Rechteck 25">
+            <a:extLst>
+              <a:ext uri="{FF2B5EF4-FFF2-40B4-BE49-F238E27FC236}">
+                <a16:creationId xmlns:a16="http://schemas.microsoft.com/office/drawing/2014/main" id="{4D3DA021-4323-8D2C-C58F-1BD5D3E9DDFC}"/>
+              </a:ext>
+            </a:extLst>
+          </p:cNvPr>
+          <p:cNvSpPr/>
+          <p:nvPr/>
+        </p:nvSpPr>
+        <p:spPr>
+          <a:xfrm>
+            <a:off x="1209924" y="2152811"/>
+            <a:ext cx="1693681" cy="636109"/>
+          </a:xfrm>
+          <a:prstGeom prst="rect">
+            <a:avLst/>
+          </a:prstGeom>
+        </p:spPr>
+        <p:style>
+          <a:lnRef idx="2">
+            <a:schemeClr val="accent1">
+              <a:shade val="15000"/>
+            </a:schemeClr>
+          </a:lnRef>
+          <a:fillRef idx="1">
+            <a:schemeClr val="accent1"/>
+          </a:fillRef>
+          <a:effectRef idx="0">
+            <a:schemeClr val="accent1"/>
+          </a:effectRef>
+          <a:fontRef idx="minor">
+            <a:schemeClr val="lt1"/>
+          </a:fontRef>
+        </p:style>
+        <p:txBody>
+          <a:bodyPr rtlCol="0" anchor="ctr"/>
+          <a:lstStyle/>
+          <a:p>
+            <a:pPr algn="ctr"/>
+            <a:r>
+              <a:rPr lang="de-DE" dirty="0"/>
+              <a:t>Username / </a:t>
+            </a:r>
+            <a:br>
+              <a:rPr lang="de-DE" dirty="0"/>
+            </a:br>
+            <a:r>
+              <a:rPr lang="de-DE" dirty="0"/>
+              <a:t>accountName</a:t>
+            </a:r>
+          </a:p>
+        </p:txBody>
+      </p:sp>
+      <p:cxnSp>
+        <p:nvCxnSpPr>
+          <p:cNvPr id="29" name="Verbinder: gewinkelt 28">
+            <a:extLst>
+              <a:ext uri="{FF2B5EF4-FFF2-40B4-BE49-F238E27FC236}">
+                <a16:creationId xmlns:a16="http://schemas.microsoft.com/office/drawing/2014/main" id="{85A640F8-4D05-1792-BCE8-48BD3130FB2A}"/>
+              </a:ext>
+            </a:extLst>
+          </p:cNvPr>
+          <p:cNvCxnSpPr>
+            <a:cxnSpLocks/>
+            <a:stCxn id="26" idx="3"/>
+            <a:endCxn id="25" idx="3"/>
+          </p:cNvCxnSpPr>
+          <p:nvPr/>
+        </p:nvCxnSpPr>
+        <p:spPr>
+          <a:xfrm>
+            <a:off x="2903605" y="2470866"/>
+            <a:ext cx="1782695" cy="1775959"/>
+          </a:xfrm>
+          <a:prstGeom prst="bentConnector3">
+            <a:avLst>
+              <a:gd name="adj1" fmla="val 46997"/>
+            </a:avLst>
+          </a:prstGeom>
+          <a:ln w="57150">
+            <a:headEnd type="none" w="med" len="med"/>
+            <a:tailEnd type="none" w="med" len="med"/>
+          </a:ln>
+        </p:spPr>
+        <p:style>
+          <a:lnRef idx="2">
+            <a:schemeClr val="accent6"/>
+          </a:lnRef>
+          <a:fillRef idx="0">
+            <a:schemeClr val="accent6"/>
+          </a:fillRef>
+          <a:effectRef idx="1">
+            <a:schemeClr val="accent6"/>
+          </a:effectRef>
+          <a:fontRef idx="minor">
+            <a:schemeClr val="tx1"/>
+          </a:fontRef>
+        </p:style>
+      </p:cxnSp>
+      <p:cxnSp>
+        <p:nvCxnSpPr>
+          <p:cNvPr id="41" name="Verbinder: gewinkelt 40">
+            <a:extLst>
+              <a:ext uri="{FF2B5EF4-FFF2-40B4-BE49-F238E27FC236}">
+                <a16:creationId xmlns:a16="http://schemas.microsoft.com/office/drawing/2014/main" id="{E0ECE4DD-FADD-B5F5-391B-973FE936E7FA}"/>
+              </a:ext>
+            </a:extLst>
+          </p:cNvPr>
+          <p:cNvCxnSpPr>
+            <a:cxnSpLocks/>
+            <a:endCxn id="25" idx="3"/>
+          </p:cNvCxnSpPr>
+          <p:nvPr/>
+        </p:nvCxnSpPr>
+        <p:spPr>
+          <a:xfrm flipV="1">
+            <a:off x="3131820" y="4246825"/>
+            <a:ext cx="1554480" cy="476110"/>
+          </a:xfrm>
+          <a:prstGeom prst="bentConnector3">
+            <a:avLst>
+              <a:gd name="adj1" fmla="val 39216"/>
+            </a:avLst>
+          </a:prstGeom>
+          <a:ln w="57150">
+            <a:headEnd type="none" w="med" len="med"/>
+            <a:tailEnd type="none" w="med" len="med"/>
+          </a:ln>
+        </p:spPr>
+        <p:style>
+          <a:lnRef idx="2">
+            <a:schemeClr val="accent6"/>
+          </a:lnRef>
+          <a:fillRef idx="0">
+            <a:schemeClr val="accent6"/>
+          </a:fillRef>
+          <a:effectRef idx="1">
+            <a:schemeClr val="accent6"/>
+          </a:effectRef>
+          <a:fontRef idx="minor">
+            <a:schemeClr val="tx1"/>
+          </a:fontRef>
+        </p:style>
+      </p:cxnSp>
+      <p:pic>
+        <p:nvPicPr>
+          <p:cNvPr id="49" name="Grafik 48">
+            <a:extLst>
+              <a:ext uri="{FF2B5EF4-FFF2-40B4-BE49-F238E27FC236}">
+                <a16:creationId xmlns:a16="http://schemas.microsoft.com/office/drawing/2014/main" id="{164D5E9D-96AB-9A05-469E-B17A18E031CB}"/>
+              </a:ext>
+            </a:extLst>
+          </p:cNvPr>
+          <p:cNvPicPr>
+            <a:picLocks noChangeAspect="1"/>
+          </p:cNvPicPr>
+          <p:nvPr/>
+        </p:nvPicPr>
+        <p:blipFill>
+          <a:blip r:embed="rId2"/>
+          <a:stretch>
+            <a:fillRect/>
+          </a:stretch>
+        </p:blipFill>
+        <p:spPr>
+          <a:xfrm>
+            <a:off x="7642859" y="3760805"/>
+            <a:ext cx="2877773" cy="1712625"/>
+          </a:xfrm>
+          <a:prstGeom prst="rect">
+            <a:avLst/>
+          </a:prstGeom>
+        </p:spPr>
+      </p:pic>
+    </p:spTree>
+    <p:extLst>
+      <p:ext uri="{BB962C8B-B14F-4D97-AF65-F5344CB8AC3E}">
+        <p14:creationId xmlns:p14="http://schemas.microsoft.com/office/powerpoint/2010/main" val="2673720107"/>
+      </p:ext>
+    </p:extLst>
+  </p:cSld>
+  <p:clrMapOvr>
+    <a:masterClrMapping/>
+  </p:clrMapOvr>
+</p:sld>
+</file>
+
+<file path=ppt/slides/slide11.xml><?xml version="1.0" encoding="utf-8"?>
+<p:sld xmlns:a="http://schemas.openxmlformats.org/drawingml/2006/main" xmlns:r="http://schemas.openxmlformats.org/officeDocument/2006/relationships" xmlns:p="http://schemas.openxmlformats.org/presentationml/2006/main">
+  <p:cSld>
+    <p:spTree>
+      <p:nvGrpSpPr>
+        <p:cNvPr id="1" name="">
+          <a:extLst>
+            <a:ext uri="{FF2B5EF4-FFF2-40B4-BE49-F238E27FC236}">
+              <a16:creationId xmlns:a16="http://schemas.microsoft.com/office/drawing/2014/main" id="{ACE2E954-15E9-E447-34AD-12C92502B7ED}"/>
+            </a:ext>
+          </a:extLst>
+        </p:cNvPr>
+        <p:cNvGrpSpPr/>
+        <p:nvPr/>
+      </p:nvGrpSpPr>
+      <p:grpSpPr>
+        <a:xfrm>
+          <a:off x="0" y="0"/>
+          <a:ext cx="0" cy="0"/>
+          <a:chOff x="0" y="0"/>
+          <a:chExt cx="0" cy="0"/>
+        </a:xfrm>
+      </p:grpSpPr>
+      <p:sp>
+        <p:nvSpPr>
+          <p:cNvPr id="2" name="Titel 1">
+            <a:extLst>
+              <a:ext uri="{FF2B5EF4-FFF2-40B4-BE49-F238E27FC236}">
+                <a16:creationId xmlns:a16="http://schemas.microsoft.com/office/drawing/2014/main" id="{8FC10906-ACDD-7AFE-8BA3-325E4297E194}"/>
+              </a:ext>
+            </a:extLst>
+          </p:cNvPr>
+          <p:cNvSpPr>
+            <a:spLocks noGrp="1"/>
+          </p:cNvSpPr>
+          <p:nvPr>
+            <p:ph type="title"/>
+          </p:nvPr>
+        </p:nvSpPr>
+        <p:spPr/>
+        <p:txBody>
+          <a:bodyPr/>
+          <a:lstStyle/>
+          <a:p>
+            <a:r>
+              <a:rPr lang="de-DE" b="1" dirty="0">
+                <a:effectLst>
+                  <a:outerShdw blurRad="38100" dist="38100" dir="2700000" algn="tl">
+                    <a:srgbClr val="000000">
+                      <a:alpha val="43137"/>
+                    </a:srgbClr>
+                  </a:outerShdw>
+                </a:effectLst>
+              </a:rPr>
+              <a:t>Umsetzung </a:t>
+            </a:r>
+            <a:r>
+              <a:rPr lang="de-DE" dirty="0">
+                <a:effectLst>
+                  <a:outerShdw blurRad="38100" dist="38100" dir="2700000" algn="tl">
+                    <a:srgbClr val="000000">
+                      <a:alpha val="43137"/>
+                    </a:srgbClr>
+                  </a:outerShdw>
+                </a:effectLst>
+              </a:rPr>
+              <a:t>- Probleme</a:t>
+            </a:r>
+            <a:endParaRPr lang="de-DE" b="1" dirty="0">
+              <a:effectLst>
+                <a:outerShdw blurRad="38100" dist="38100" dir="2700000" algn="tl">
+                  <a:srgbClr val="000000">
+                    <a:alpha val="43137"/>
+                  </a:srgbClr>
+                </a:outerShdw>
+              </a:effectLst>
+            </a:endParaRPr>
+          </a:p>
+        </p:txBody>
+      </p:sp>
+      <p:sp>
+        <p:nvSpPr>
+          <p:cNvPr id="3" name="Inhaltsplatzhalter 2">
+            <a:extLst>
+              <a:ext uri="{FF2B5EF4-FFF2-40B4-BE49-F238E27FC236}">
+                <a16:creationId xmlns:a16="http://schemas.microsoft.com/office/drawing/2014/main" id="{56BFDCF3-FFA4-1EA1-D381-2110A1905742}"/>
+              </a:ext>
+            </a:extLst>
+          </p:cNvPr>
+          <p:cNvSpPr>
+            <a:spLocks noGrp="1"/>
+          </p:cNvSpPr>
+          <p:nvPr>
+            <p:ph idx="1"/>
+          </p:nvPr>
+        </p:nvSpPr>
+        <p:spPr/>
+        <p:txBody>
+          <a:bodyPr>
+            <a:normAutofit/>
+          </a:bodyPr>
+          <a:lstStyle/>
+          <a:p>
+            <a:r>
+              <a:rPr lang="de-DE" sz="2000" dirty="0"/>
+              <a:t>Implementierung von Buttons (Bearbeiten, Kopieren, Anzeigen) in eine JTable</a:t>
+            </a:r>
+          </a:p>
+        </p:txBody>
+      </p:sp>
+    </p:spTree>
+    <p:extLst>
+      <p:ext uri="{BB962C8B-B14F-4D97-AF65-F5344CB8AC3E}">
+        <p14:creationId xmlns:p14="http://schemas.microsoft.com/office/powerpoint/2010/main" val="3903202141"/>
+      </p:ext>
+    </p:extLst>
+  </p:cSld>
+  <p:clrMapOvr>
+    <a:masterClrMapping/>
+  </p:clrMapOvr>
+</p:sld>
+</file>
+
+<file path=ppt/slides/slide12.xml><?xml version="1.0" encoding="utf-8"?>
+<p:sld xmlns:a="http://schemas.openxmlformats.org/drawingml/2006/main" xmlns:r="http://schemas.openxmlformats.org/officeDocument/2006/relationships" xmlns:p="http://schemas.openxmlformats.org/presentationml/2006/main">
+  <p:cSld>
+    <p:spTree>
+      <p:nvGrpSpPr>
         <p:cNvPr id="1" name=""/>
         <p:cNvGrpSpPr/>
         <p:nvPr/>
@@ -4725,7 +5556,7 @@
           <a:p>
             <a:r>
               <a:rPr lang="de-DE" sz="2000" dirty="0"/>
-              <a:t>AES-256 (für Verschlüsselung der Passwörter)</a:t>
+              <a:t>AES-256-GCM (für Verschlüsselung der Passwörter)</a:t>
             </a:r>
           </a:p>
           <a:p>
@@ -6689,7 +7520,7 @@
         <p:cNvPr id="1" name="">
           <a:extLst>
             <a:ext uri="{FF2B5EF4-FFF2-40B4-BE49-F238E27FC236}">
-              <a16:creationId xmlns:a16="http://schemas.microsoft.com/office/drawing/2014/main" id="{D47F335A-FDF6-4F22-13CA-08ED29DA569C}"/>
+              <a16:creationId xmlns:a16="http://schemas.microsoft.com/office/drawing/2014/main" id="{5254532F-50B0-3C8E-A519-894B989F50BA}"/>
             </a:ext>
           </a:extLst>
         </p:cNvPr>
@@ -6709,7 +7540,7 @@
           <p:cNvPr id="2" name="Titel 1">
             <a:extLst>
               <a:ext uri="{FF2B5EF4-FFF2-40B4-BE49-F238E27FC236}">
-                <a16:creationId xmlns:a16="http://schemas.microsoft.com/office/drawing/2014/main" id="{6C3531C2-260F-3E4A-71D3-613883B29F3F}"/>
+                <a16:creationId xmlns:a16="http://schemas.microsoft.com/office/drawing/2014/main" id="{6705FA3B-82EF-9F9C-6B48-7B00C9A567CC}"/>
               </a:ext>
             </a:extLst>
           </p:cNvPr>
@@ -6747,122 +7578,7 @@
                   </a:outerShdw>
                 </a:effectLst>
               </a:rPr>
-              <a:t> - Verschlüsselung</a:t>
-            </a:r>
-          </a:p>
-        </p:txBody>
-      </p:sp>
-      <p:sp>
-        <p:nvSpPr>
-          <p:cNvPr id="3" name="Inhaltsplatzhalter 2">
-            <a:extLst>
-              <a:ext uri="{FF2B5EF4-FFF2-40B4-BE49-F238E27FC236}">
-                <a16:creationId xmlns:a16="http://schemas.microsoft.com/office/drawing/2014/main" id="{68F71C22-1CEE-7C61-96C3-081EEC5F2B92}"/>
-              </a:ext>
-            </a:extLst>
-          </p:cNvPr>
-          <p:cNvSpPr>
-            <a:spLocks noGrp="1"/>
-          </p:cNvSpPr>
-          <p:nvPr>
-            <p:ph idx="1"/>
-          </p:nvPr>
-        </p:nvSpPr>
-        <p:spPr/>
-        <p:txBody>
-          <a:bodyPr>
-            <a:normAutofit/>
-          </a:bodyPr>
-          <a:lstStyle/>
-          <a:p>
-            <a:r>
-              <a:rPr lang="de-DE" sz="2000" b="1" dirty="0"/>
-              <a:t>Allgemein:</a:t>
-            </a:r>
-            <a:endParaRPr lang="de-DE" sz="2400" b="1" dirty="0"/>
-          </a:p>
-        </p:txBody>
-      </p:sp>
-    </p:spTree>
-    <p:extLst>
-      <p:ext uri="{BB962C8B-B14F-4D97-AF65-F5344CB8AC3E}">
-        <p14:creationId xmlns:p14="http://schemas.microsoft.com/office/powerpoint/2010/main" val="2950061998"/>
-      </p:ext>
-    </p:extLst>
-  </p:cSld>
-  <p:clrMapOvr>
-    <a:masterClrMapping/>
-  </p:clrMapOvr>
-</p:sld>
-</file>
-
-<file path=ppt/slides/slide8.xml><?xml version="1.0" encoding="utf-8"?>
-<p:sld xmlns:a="http://schemas.openxmlformats.org/drawingml/2006/main" xmlns:r="http://schemas.openxmlformats.org/officeDocument/2006/relationships" xmlns:p="http://schemas.openxmlformats.org/presentationml/2006/main">
-  <p:cSld>
-    <p:spTree>
-      <p:nvGrpSpPr>
-        <p:cNvPr id="1" name="">
-          <a:extLst>
-            <a:ext uri="{FF2B5EF4-FFF2-40B4-BE49-F238E27FC236}">
-              <a16:creationId xmlns:a16="http://schemas.microsoft.com/office/drawing/2014/main" id="{64007FDD-F578-96F3-717C-B2F13D303536}"/>
-            </a:ext>
-          </a:extLst>
-        </p:cNvPr>
-        <p:cNvGrpSpPr/>
-        <p:nvPr/>
-      </p:nvGrpSpPr>
-      <p:grpSpPr>
-        <a:xfrm>
-          <a:off x="0" y="0"/>
-          <a:ext cx="0" cy="0"/>
-          <a:chOff x="0" y="0"/>
-          <a:chExt cx="0" cy="0"/>
-        </a:xfrm>
-      </p:grpSpPr>
-      <p:sp>
-        <p:nvSpPr>
-          <p:cNvPr id="2" name="Titel 1">
-            <a:extLst>
-              <a:ext uri="{FF2B5EF4-FFF2-40B4-BE49-F238E27FC236}">
-                <a16:creationId xmlns:a16="http://schemas.microsoft.com/office/drawing/2014/main" id="{2A3703A7-369E-1A90-7ABC-1FDCE42AF615}"/>
-              </a:ext>
-            </a:extLst>
-          </p:cNvPr>
-          <p:cNvSpPr>
-            <a:spLocks noGrp="1"/>
-          </p:cNvSpPr>
-          <p:nvPr>
-            <p:ph type="title"/>
-          </p:nvPr>
-        </p:nvSpPr>
-        <p:spPr/>
-        <p:txBody>
-          <a:bodyPr/>
-          <a:lstStyle/>
-          <a:p>
-            <a:r>
-              <a:rPr lang="de-DE" b="1" dirty="0">
-                <a:effectLst>
-                  <a:outerShdw blurRad="38100" dist="38100" dir="2700000" algn="tl">
-                    <a:srgbClr val="000000">
-                      <a:alpha val="43137"/>
-                    </a:srgbClr>
-                  </a:outerShdw>
-                </a:effectLst>
-              </a:rPr>
-              <a:t>Umsetzung</a:t>
-            </a:r>
-            <a:r>
-              <a:rPr lang="de-DE" dirty="0">
-                <a:effectLst>
-                  <a:outerShdw blurRad="38100" dist="38100" dir="2700000" algn="tl">
-                    <a:srgbClr val="000000">
-                      <a:alpha val="43137"/>
-                    </a:srgbClr>
-                  </a:outerShdw>
-                </a:effectLst>
-              </a:rPr>
-              <a:t> - Speicherung der Passwörter</a:t>
+              <a:t> - Speicherung der Passwörter (Lokal)</a:t>
             </a:r>
             <a:endParaRPr lang="de-DE" u="sng" dirty="0">
               <a:effectLst>
@@ -6881,7 +7597,7 @@
           <p:cNvPr id="3" name="Inhaltsplatzhalter 2">
             <a:extLst>
               <a:ext uri="{FF2B5EF4-FFF2-40B4-BE49-F238E27FC236}">
-                <a16:creationId xmlns:a16="http://schemas.microsoft.com/office/drawing/2014/main" id="{99E85B5E-D0BE-DD00-27B5-D23F7A822FFA}"/>
+                <a16:creationId xmlns:a16="http://schemas.microsoft.com/office/drawing/2014/main" id="{FAD2D4F3-D0CC-8FEE-A212-B4DF45B6B9C9}"/>
               </a:ext>
             </a:extLst>
           </p:cNvPr>
@@ -6906,7 +7622,7 @@
             <a:pPr lvl="1"/>
             <a:r>
               <a:rPr lang="de-DE" sz="1600" b="1" dirty="0"/>
-              <a:t>Passwörter werden als Binär Datei abgespeichert</a:t>
+              <a:t>Passwörter werden als eine Binär Datei pro Benutzer abgespeichert</a:t>
             </a:r>
           </a:p>
           <a:p>
@@ -6937,7 +7653,7 @@
           <p:cNvPr id="31" name="Grafik 30" descr="Ein Bild, das Text, Screenshot, Schrift, Software enthält.&#10;&#10;KI-generierte Inhalte können fehlerhaft sein.">
             <a:extLst>
               <a:ext uri="{FF2B5EF4-FFF2-40B4-BE49-F238E27FC236}">
-                <a16:creationId xmlns:a16="http://schemas.microsoft.com/office/drawing/2014/main" id="{0CF0FEA1-D368-CF83-65CD-110854CC019E}"/>
+                <a16:creationId xmlns:a16="http://schemas.microsoft.com/office/drawing/2014/main" id="{71C76BD5-5211-E302-7C5D-DE550874CBFD}"/>
               </a:ext>
             </a:extLst>
           </p:cNvPr>
@@ -6973,7 +7689,7 @@
           <p:cNvPr id="35" name="Grafik 34" descr="Ein Bild, das Text, Screenshot, Software, Schrift enthält.&#10;&#10;KI-generierte Inhalte können fehlerhaft sein.">
             <a:extLst>
               <a:ext uri="{FF2B5EF4-FFF2-40B4-BE49-F238E27FC236}">
-                <a16:creationId xmlns:a16="http://schemas.microsoft.com/office/drawing/2014/main" id="{CC675AC4-1CA5-8CA7-1015-F47AF164203F}"/>
+                <a16:creationId xmlns:a16="http://schemas.microsoft.com/office/drawing/2014/main" id="{F6D92926-AF1B-A23B-975F-1FAED6904655}"/>
               </a:ext>
             </a:extLst>
           </p:cNvPr>
@@ -7009,7 +7725,7 @@
           <p:cNvPr id="33" name="Grafik 32" descr="Ein Bild, das Text, Screenshot, Software, Schrift enthält.&#10;&#10;KI-generierte Inhalte können fehlerhaft sein.">
             <a:extLst>
               <a:ext uri="{FF2B5EF4-FFF2-40B4-BE49-F238E27FC236}">
-                <a16:creationId xmlns:a16="http://schemas.microsoft.com/office/drawing/2014/main" id="{A8E14C6D-8DEF-1B4D-E2D9-27A6C0763465}"/>
+                <a16:creationId xmlns:a16="http://schemas.microsoft.com/office/drawing/2014/main" id="{BB48BBA6-685D-4364-5EF0-C6044D63E5D7}"/>
               </a:ext>
             </a:extLst>
           </p:cNvPr>
@@ -7045,7 +7761,7 @@
           <p:cNvPr id="37" name="Grafik 36" descr="Ein Bild, das Text, Screenshot, Software, Computersymbol enthält.&#10;&#10;KI-generierte Inhalte können fehlerhaft sein.">
             <a:extLst>
               <a:ext uri="{FF2B5EF4-FFF2-40B4-BE49-F238E27FC236}">
-                <a16:creationId xmlns:a16="http://schemas.microsoft.com/office/drawing/2014/main" id="{19336577-A2A4-1B24-6AD6-73E48FE8A3D5}"/>
+                <a16:creationId xmlns:a16="http://schemas.microsoft.com/office/drawing/2014/main" id="{90766113-DCFE-67B2-BE8F-C622B6D9ABB6}"/>
               </a:ext>
             </a:extLst>
           </p:cNvPr>
@@ -7079,7 +7795,7 @@
     </p:spTree>
     <p:extLst>
       <p:ext uri="{BB962C8B-B14F-4D97-AF65-F5344CB8AC3E}">
-        <p14:creationId xmlns:p14="http://schemas.microsoft.com/office/powerpoint/2010/main" val="2673720107"/>
+        <p14:creationId xmlns:p14="http://schemas.microsoft.com/office/powerpoint/2010/main" val="2043039090"/>
       </p:ext>
     </p:extLst>
   </p:cSld>
@@ -7347,7 +8063,7 @@
 </p:sld>
 </file>
 
-<file path=ppt/slides/slide9.xml><?xml version="1.0" encoding="utf-8"?>
+<file path=ppt/slides/slide8.xml><?xml version="1.0" encoding="utf-8"?>
 <p:sld xmlns:a="http://schemas.openxmlformats.org/drawingml/2006/main" xmlns:r="http://schemas.openxmlformats.org/officeDocument/2006/relationships" xmlns:p="http://schemas.openxmlformats.org/presentationml/2006/main">
   <p:cSld>
     <p:spTree>
@@ -7355,7 +8071,7 @@
         <p:cNvPr id="1" name="">
           <a:extLst>
             <a:ext uri="{FF2B5EF4-FFF2-40B4-BE49-F238E27FC236}">
-              <a16:creationId xmlns:a16="http://schemas.microsoft.com/office/drawing/2014/main" id="{ACE2E954-15E9-E447-34AD-12C92502B7ED}"/>
+              <a16:creationId xmlns:a16="http://schemas.microsoft.com/office/drawing/2014/main" id="{D47F335A-FDF6-4F22-13CA-08ED29DA569C}"/>
             </a:ext>
           </a:extLst>
         </p:cNvPr>
@@ -7372,10 +8088,154 @@
       </p:grpSpPr>
       <p:sp>
         <p:nvSpPr>
+          <p:cNvPr id="43" name="Rechteck 42">
+            <a:extLst>
+              <a:ext uri="{FF2B5EF4-FFF2-40B4-BE49-F238E27FC236}">
+                <a16:creationId xmlns:a16="http://schemas.microsoft.com/office/drawing/2014/main" id="{55442D66-9D20-BED2-65CE-AF06167F338A}"/>
+              </a:ext>
+            </a:extLst>
+          </p:cNvPr>
+          <p:cNvSpPr/>
+          <p:nvPr/>
+        </p:nvSpPr>
+        <p:spPr>
+          <a:xfrm>
+            <a:off x="9448803" y="3345180"/>
+            <a:ext cx="2080258" cy="3147694"/>
+          </a:xfrm>
+          <a:prstGeom prst="rect">
+            <a:avLst/>
+          </a:prstGeom>
+        </p:spPr>
+        <p:style>
+          <a:lnRef idx="2">
+            <a:schemeClr val="accent4">
+              <a:shade val="15000"/>
+            </a:schemeClr>
+          </a:lnRef>
+          <a:fillRef idx="1">
+            <a:schemeClr val="accent4"/>
+          </a:fillRef>
+          <a:effectRef idx="0">
+            <a:schemeClr val="accent4"/>
+          </a:effectRef>
+          <a:fontRef idx="minor">
+            <a:schemeClr val="lt1"/>
+          </a:fontRef>
+        </p:style>
+        <p:txBody>
+          <a:bodyPr rtlCol="0" anchor="t"/>
+          <a:lstStyle/>
+          <a:p>
+            <a:r>
+              <a:rPr lang="de-DE" dirty="0"/>
+              <a:t>Hauptfenster</a:t>
+            </a:r>
+          </a:p>
+        </p:txBody>
+      </p:sp>
+      <p:sp>
+        <p:nvSpPr>
+          <p:cNvPr id="14" name="Rechteck 13">
+            <a:extLst>
+              <a:ext uri="{FF2B5EF4-FFF2-40B4-BE49-F238E27FC236}">
+                <a16:creationId xmlns:a16="http://schemas.microsoft.com/office/drawing/2014/main" id="{C6E42FAA-740A-F474-5731-C146C9DE1E1E}"/>
+              </a:ext>
+            </a:extLst>
+          </p:cNvPr>
+          <p:cNvSpPr/>
+          <p:nvPr/>
+        </p:nvSpPr>
+        <p:spPr>
+          <a:xfrm>
+            <a:off x="4838700" y="1531621"/>
+            <a:ext cx="4419600" cy="1293020"/>
+          </a:xfrm>
+          <a:prstGeom prst="rect">
+            <a:avLst/>
+          </a:prstGeom>
+        </p:spPr>
+        <p:style>
+          <a:lnRef idx="2">
+            <a:schemeClr val="accent4">
+              <a:shade val="15000"/>
+            </a:schemeClr>
+          </a:lnRef>
+          <a:fillRef idx="1">
+            <a:schemeClr val="accent4"/>
+          </a:fillRef>
+          <a:effectRef idx="0">
+            <a:schemeClr val="accent4"/>
+          </a:effectRef>
+          <a:fontRef idx="minor">
+            <a:schemeClr val="lt1"/>
+          </a:fontRef>
+        </p:style>
+        <p:txBody>
+          <a:bodyPr rtlCol="0" anchor="t"/>
+          <a:lstStyle/>
+          <a:p>
+            <a:r>
+              <a:rPr lang="de-DE" dirty="0"/>
+              <a:t>Anmelde Maske</a:t>
+            </a:r>
+          </a:p>
+        </p:txBody>
+      </p:sp>
+      <p:sp>
+        <p:nvSpPr>
+          <p:cNvPr id="13" name="Rechteck 12">
+            <a:extLst>
+              <a:ext uri="{FF2B5EF4-FFF2-40B4-BE49-F238E27FC236}">
+                <a16:creationId xmlns:a16="http://schemas.microsoft.com/office/drawing/2014/main" id="{4B11FFC5-91C5-0BA4-1BD8-6BAA5617AF0F}"/>
+              </a:ext>
+            </a:extLst>
+          </p:cNvPr>
+          <p:cNvSpPr/>
+          <p:nvPr/>
+        </p:nvSpPr>
+        <p:spPr>
+          <a:xfrm>
+            <a:off x="844550" y="1992791"/>
+            <a:ext cx="2622550" cy="4706459"/>
+          </a:xfrm>
+          <a:prstGeom prst="rect">
+            <a:avLst/>
+          </a:prstGeom>
+        </p:spPr>
+        <p:style>
+          <a:lnRef idx="2">
+            <a:schemeClr val="accent4">
+              <a:shade val="15000"/>
+            </a:schemeClr>
+          </a:lnRef>
+          <a:fillRef idx="1">
+            <a:schemeClr val="accent4"/>
+          </a:fillRef>
+          <a:effectRef idx="0">
+            <a:schemeClr val="accent4"/>
+          </a:effectRef>
+          <a:fontRef idx="minor">
+            <a:schemeClr val="lt1"/>
+          </a:fontRef>
+        </p:style>
+        <p:txBody>
+          <a:bodyPr rtlCol="0" anchor="t"/>
+          <a:lstStyle/>
+          <a:p>
+            <a:r>
+              <a:rPr lang="de-DE" dirty="0"/>
+              <a:t>Datei</a:t>
+            </a:r>
+          </a:p>
+        </p:txBody>
+      </p:sp>
+      <p:sp>
+        <p:nvSpPr>
           <p:cNvPr id="2" name="Titel 1">
             <a:extLst>
               <a:ext uri="{FF2B5EF4-FFF2-40B4-BE49-F238E27FC236}">
-                <a16:creationId xmlns:a16="http://schemas.microsoft.com/office/drawing/2014/main" id="{8FC10906-ACDD-7AFE-8BA3-325E4297E194}"/>
+                <a16:creationId xmlns:a16="http://schemas.microsoft.com/office/drawing/2014/main" id="{6C3531C2-260F-3E4A-71D3-613883B29F3F}"/>
               </a:ext>
             </a:extLst>
           </p:cNvPr>
@@ -7401,7 +8261,7 @@
                   </a:outerShdw>
                 </a:effectLst>
               </a:rPr>
-              <a:t>Umsetzung </a:t>
+              <a:t>Umsetzung</a:t>
             </a:r>
             <a:r>
               <a:rPr lang="de-DE" dirty="0">
@@ -7413,26 +8273,1288 @@
                   </a:outerShdw>
                 </a:effectLst>
               </a:rPr>
-              <a:t>- Probleme</a:t>
-            </a:r>
-            <a:endParaRPr lang="de-DE" b="1" dirty="0">
-              <a:effectLst>
-                <a:outerShdw blurRad="38100" dist="38100" dir="2700000" algn="tl">
-                  <a:srgbClr val="000000">
-                    <a:alpha val="43137"/>
-                  </a:srgbClr>
-                </a:outerShdw>
-              </a:effectLst>
-            </a:endParaRPr>
-          </a:p>
-        </p:txBody>
-      </p:sp>
-      <p:sp>
-        <p:nvSpPr>
-          <p:cNvPr id="3" name="Inhaltsplatzhalter 2">
-            <a:extLst>
-              <a:ext uri="{FF2B5EF4-FFF2-40B4-BE49-F238E27FC236}">
-                <a16:creationId xmlns:a16="http://schemas.microsoft.com/office/drawing/2014/main" id="{56BFDCF3-FFA4-1EA1-D381-2110A1905742}"/>
+              <a:t> - Verschlüsselung</a:t>
+            </a:r>
+          </a:p>
+        </p:txBody>
+      </p:sp>
+      <p:sp>
+        <p:nvSpPr>
+          <p:cNvPr id="4" name="Rechteck 3">
+            <a:extLst>
+              <a:ext uri="{FF2B5EF4-FFF2-40B4-BE49-F238E27FC236}">
+                <a16:creationId xmlns:a16="http://schemas.microsoft.com/office/drawing/2014/main" id="{6A4FFCB1-7B71-2568-52FD-19DDB9FDCD2F}"/>
+              </a:ext>
+            </a:extLst>
+          </p:cNvPr>
+          <p:cNvSpPr/>
+          <p:nvPr/>
+        </p:nvSpPr>
+        <p:spPr>
+          <a:xfrm>
+            <a:off x="4373562" y="4052888"/>
+            <a:ext cx="4624388" cy="1166811"/>
+          </a:xfrm>
+          <a:custGeom>
+            <a:avLst/>
+            <a:gdLst>
+              <a:gd name="connsiteX0" fmla="*/ 0 w 4622800"/>
+              <a:gd name="connsiteY0" fmla="*/ 0 h 1166811"/>
+              <a:gd name="connsiteX1" fmla="*/ 4622800 w 4622800"/>
+              <a:gd name="connsiteY1" fmla="*/ 0 h 1166811"/>
+              <a:gd name="connsiteX2" fmla="*/ 4622800 w 4622800"/>
+              <a:gd name="connsiteY2" fmla="*/ 1166811 h 1166811"/>
+              <a:gd name="connsiteX3" fmla="*/ 0 w 4622800"/>
+              <a:gd name="connsiteY3" fmla="*/ 1166811 h 1166811"/>
+              <a:gd name="connsiteX4" fmla="*/ 0 w 4622800"/>
+              <a:gd name="connsiteY4" fmla="*/ 0 h 1166811"/>
+              <a:gd name="connsiteX0" fmla="*/ 6350 w 4629150"/>
+              <a:gd name="connsiteY0" fmla="*/ 0 h 1166811"/>
+              <a:gd name="connsiteX1" fmla="*/ 4629150 w 4629150"/>
+              <a:gd name="connsiteY1" fmla="*/ 0 h 1166811"/>
+              <a:gd name="connsiteX2" fmla="*/ 4629150 w 4629150"/>
+              <a:gd name="connsiteY2" fmla="*/ 1166811 h 1166811"/>
+              <a:gd name="connsiteX3" fmla="*/ 6350 w 4629150"/>
+              <a:gd name="connsiteY3" fmla="*/ 1166811 h 1166811"/>
+              <a:gd name="connsiteX4" fmla="*/ 0 w 4629150"/>
+              <a:gd name="connsiteY4" fmla="*/ 931862 h 1166811"/>
+              <a:gd name="connsiteX5" fmla="*/ 6350 w 4629150"/>
+              <a:gd name="connsiteY5" fmla="*/ 0 h 1166811"/>
+              <a:gd name="connsiteX0" fmla="*/ 6350 w 4629150"/>
+              <a:gd name="connsiteY0" fmla="*/ 0 h 1166811"/>
+              <a:gd name="connsiteX1" fmla="*/ 4629150 w 4629150"/>
+              <a:gd name="connsiteY1" fmla="*/ 0 h 1166811"/>
+              <a:gd name="connsiteX2" fmla="*/ 4629150 w 4629150"/>
+              <a:gd name="connsiteY2" fmla="*/ 1166811 h 1166811"/>
+              <a:gd name="connsiteX3" fmla="*/ 6350 w 4629150"/>
+              <a:gd name="connsiteY3" fmla="*/ 1166811 h 1166811"/>
+              <a:gd name="connsiteX4" fmla="*/ 0 w 4629150"/>
+              <a:gd name="connsiteY4" fmla="*/ 341312 h 1166811"/>
+              <a:gd name="connsiteX5" fmla="*/ 6350 w 4629150"/>
+              <a:gd name="connsiteY5" fmla="*/ 0 h 1166811"/>
+              <a:gd name="connsiteX0" fmla="*/ 1588 w 4624388"/>
+              <a:gd name="connsiteY0" fmla="*/ 0 h 1166811"/>
+              <a:gd name="connsiteX1" fmla="*/ 4624388 w 4624388"/>
+              <a:gd name="connsiteY1" fmla="*/ 0 h 1166811"/>
+              <a:gd name="connsiteX2" fmla="*/ 4624388 w 4624388"/>
+              <a:gd name="connsiteY2" fmla="*/ 1166811 h 1166811"/>
+              <a:gd name="connsiteX3" fmla="*/ 1588 w 4624388"/>
+              <a:gd name="connsiteY3" fmla="*/ 1166811 h 1166811"/>
+              <a:gd name="connsiteX4" fmla="*/ 0 w 4624388"/>
+              <a:gd name="connsiteY4" fmla="*/ 341312 h 1166811"/>
+              <a:gd name="connsiteX5" fmla="*/ 1588 w 4624388"/>
+              <a:gd name="connsiteY5" fmla="*/ 0 h 1166811"/>
+            </a:gdLst>
+            <a:ahLst/>
+            <a:cxnLst>
+              <a:cxn ang="0">
+                <a:pos x="connsiteX0" y="connsiteY0"/>
+              </a:cxn>
+              <a:cxn ang="0">
+                <a:pos x="connsiteX1" y="connsiteY1"/>
+              </a:cxn>
+              <a:cxn ang="0">
+                <a:pos x="connsiteX2" y="connsiteY2"/>
+              </a:cxn>
+              <a:cxn ang="0">
+                <a:pos x="connsiteX3" y="connsiteY3"/>
+              </a:cxn>
+              <a:cxn ang="0">
+                <a:pos x="connsiteX4" y="connsiteY4"/>
+              </a:cxn>
+              <a:cxn ang="0">
+                <a:pos x="connsiteX5" y="connsiteY5"/>
+              </a:cxn>
+            </a:cxnLst>
+            <a:rect l="l" t="t" r="r" b="b"/>
+            <a:pathLst>
+              <a:path w="4624388" h="1166811">
+                <a:moveTo>
+                  <a:pt x="1588" y="0"/>
+                </a:moveTo>
+                <a:lnTo>
+                  <a:pt x="4624388" y="0"/>
+                </a:lnTo>
+                <a:lnTo>
+                  <a:pt x="4624388" y="1166811"/>
+                </a:lnTo>
+                <a:lnTo>
+                  <a:pt x="1588" y="1166811"/>
+                </a:lnTo>
+                <a:cubicBezTo>
+                  <a:pt x="-529" y="891645"/>
+                  <a:pt x="2117" y="616478"/>
+                  <a:pt x="0" y="341312"/>
+                </a:cubicBezTo>
+                <a:cubicBezTo>
+                  <a:pt x="2117" y="30691"/>
+                  <a:pt x="-529" y="310621"/>
+                  <a:pt x="1588" y="0"/>
+                </a:cubicBezTo>
+                <a:close/>
+              </a:path>
+            </a:pathLst>
+          </a:custGeom>
+        </p:spPr>
+        <p:style>
+          <a:lnRef idx="2">
+            <a:schemeClr val="accent1">
+              <a:shade val="15000"/>
+            </a:schemeClr>
+          </a:lnRef>
+          <a:fillRef idx="1">
+            <a:schemeClr val="accent1"/>
+          </a:fillRef>
+          <a:effectRef idx="0">
+            <a:schemeClr val="accent1"/>
+          </a:effectRef>
+          <a:fontRef idx="minor">
+            <a:schemeClr val="lt1"/>
+          </a:fontRef>
+        </p:style>
+        <p:txBody>
+          <a:bodyPr rtlCol="0" anchor="ctr"/>
+          <a:lstStyle/>
+          <a:p>
+            <a:pPr algn="ctr"/>
+            <a:r>
+              <a:rPr lang="de-DE" dirty="0"/>
+              <a:t>Verschlüsselung mittels</a:t>
+            </a:r>
+          </a:p>
+          <a:p>
+            <a:pPr algn="ctr"/>
+            <a:r>
+              <a:rPr lang="de-DE" dirty="0"/>
+              <a:t>AES256-GCM</a:t>
+            </a:r>
+          </a:p>
+        </p:txBody>
+      </p:sp>
+      <p:sp>
+        <p:nvSpPr>
+          <p:cNvPr id="5" name="Rechteck 4">
+            <a:extLst>
+              <a:ext uri="{FF2B5EF4-FFF2-40B4-BE49-F238E27FC236}">
+                <a16:creationId xmlns:a16="http://schemas.microsoft.com/office/drawing/2014/main" id="{5B5B6B37-D552-6555-AA15-7D01359DDAAD}"/>
+              </a:ext>
+            </a:extLst>
+          </p:cNvPr>
+          <p:cNvSpPr/>
+          <p:nvPr/>
+        </p:nvSpPr>
+        <p:spPr>
+          <a:xfrm>
+            <a:off x="1200150" y="2501900"/>
+            <a:ext cx="1803400" cy="438150"/>
+          </a:xfrm>
+          <a:prstGeom prst="rect">
+            <a:avLst/>
+          </a:prstGeom>
+        </p:spPr>
+        <p:style>
+          <a:lnRef idx="2">
+            <a:schemeClr val="accent1">
+              <a:shade val="15000"/>
+            </a:schemeClr>
+          </a:lnRef>
+          <a:fillRef idx="1">
+            <a:schemeClr val="accent1"/>
+          </a:fillRef>
+          <a:effectRef idx="0">
+            <a:schemeClr val="accent1"/>
+          </a:effectRef>
+          <a:fontRef idx="minor">
+            <a:schemeClr val="lt1"/>
+          </a:fontRef>
+        </p:style>
+        <p:txBody>
+          <a:bodyPr rtlCol="0" anchor="ctr"/>
+          <a:lstStyle/>
+          <a:p>
+            <a:pPr algn="ctr"/>
+            <a:r>
+              <a:rPr lang="de-DE" dirty="0"/>
+              <a:t>Salt</a:t>
+            </a:r>
+          </a:p>
+        </p:txBody>
+      </p:sp>
+      <p:sp>
+        <p:nvSpPr>
+          <p:cNvPr id="6" name="Rechteck 5">
+            <a:extLst>
+              <a:ext uri="{FF2B5EF4-FFF2-40B4-BE49-F238E27FC236}">
+                <a16:creationId xmlns:a16="http://schemas.microsoft.com/office/drawing/2014/main" id="{CB22EE3A-4E53-C6A4-9036-0FDC4596957B}"/>
+              </a:ext>
+            </a:extLst>
+          </p:cNvPr>
+          <p:cNvSpPr/>
+          <p:nvPr/>
+        </p:nvSpPr>
+        <p:spPr>
+          <a:xfrm>
+            <a:off x="1200150" y="3061494"/>
+            <a:ext cx="1803400" cy="438150"/>
+          </a:xfrm>
+          <a:prstGeom prst="rect">
+            <a:avLst/>
+          </a:prstGeom>
+        </p:spPr>
+        <p:style>
+          <a:lnRef idx="2">
+            <a:schemeClr val="accent1">
+              <a:shade val="15000"/>
+            </a:schemeClr>
+          </a:lnRef>
+          <a:fillRef idx="1">
+            <a:schemeClr val="accent1"/>
+          </a:fillRef>
+          <a:effectRef idx="0">
+            <a:schemeClr val="accent1"/>
+          </a:effectRef>
+          <a:fontRef idx="minor">
+            <a:schemeClr val="lt1"/>
+          </a:fontRef>
+        </p:style>
+        <p:txBody>
+          <a:bodyPr rtlCol="0" anchor="ctr"/>
+          <a:lstStyle/>
+          <a:p>
+            <a:pPr algn="ctr"/>
+            <a:r>
+              <a:rPr lang="de-DE" dirty="0"/>
+              <a:t>IV</a:t>
+            </a:r>
+          </a:p>
+        </p:txBody>
+      </p:sp>
+      <p:sp>
+        <p:nvSpPr>
+          <p:cNvPr id="7" name="Rechteck 6">
+            <a:extLst>
+              <a:ext uri="{FF2B5EF4-FFF2-40B4-BE49-F238E27FC236}">
+                <a16:creationId xmlns:a16="http://schemas.microsoft.com/office/drawing/2014/main" id="{14210BBF-EEA9-6490-B445-193CBD322B55}"/>
+              </a:ext>
+            </a:extLst>
+          </p:cNvPr>
+          <p:cNvSpPr/>
+          <p:nvPr/>
+        </p:nvSpPr>
+        <p:spPr>
+          <a:xfrm>
+            <a:off x="1200150" y="3618706"/>
+            <a:ext cx="1803400" cy="2909093"/>
+          </a:xfrm>
+          <a:prstGeom prst="rect">
+            <a:avLst/>
+          </a:prstGeom>
+        </p:spPr>
+        <p:style>
+          <a:lnRef idx="2">
+            <a:schemeClr val="accent1">
+              <a:shade val="15000"/>
+            </a:schemeClr>
+          </a:lnRef>
+          <a:fillRef idx="1">
+            <a:schemeClr val="accent1"/>
+          </a:fillRef>
+          <a:effectRef idx="0">
+            <a:schemeClr val="accent1"/>
+          </a:effectRef>
+          <a:fontRef idx="minor">
+            <a:schemeClr val="lt1"/>
+          </a:fontRef>
+        </p:style>
+        <p:txBody>
+          <a:bodyPr rtlCol="0" anchor="ctr"/>
+          <a:lstStyle/>
+          <a:p>
+            <a:pPr algn="ctr"/>
+            <a:r>
+              <a:rPr lang="de-DE" dirty="0"/>
+              <a:t>Verschlüsselte</a:t>
+            </a:r>
+          </a:p>
+          <a:p>
+            <a:pPr algn="ctr"/>
+            <a:r>
+              <a:rPr lang="de-DE" dirty="0"/>
+              <a:t>Daten</a:t>
+            </a:r>
+          </a:p>
+        </p:txBody>
+      </p:sp>
+      <p:sp>
+        <p:nvSpPr>
+          <p:cNvPr id="8" name="Rechteck 7">
+            <a:extLst>
+              <a:ext uri="{FF2B5EF4-FFF2-40B4-BE49-F238E27FC236}">
+                <a16:creationId xmlns:a16="http://schemas.microsoft.com/office/drawing/2014/main" id="{9B83E9CE-2092-21E9-3B48-06142B90B997}"/>
+              </a:ext>
+            </a:extLst>
+          </p:cNvPr>
+          <p:cNvSpPr/>
+          <p:nvPr/>
+        </p:nvSpPr>
+        <p:spPr>
+          <a:xfrm>
+            <a:off x="7239000" y="2003901"/>
+            <a:ext cx="1758950" cy="671512"/>
+          </a:xfrm>
+          <a:prstGeom prst="rect">
+            <a:avLst/>
+          </a:prstGeom>
+        </p:spPr>
+        <p:style>
+          <a:lnRef idx="2">
+            <a:schemeClr val="accent1">
+              <a:shade val="15000"/>
+            </a:schemeClr>
+          </a:lnRef>
+          <a:fillRef idx="1">
+            <a:schemeClr val="accent1"/>
+          </a:fillRef>
+          <a:effectRef idx="0">
+            <a:schemeClr val="accent1"/>
+          </a:effectRef>
+          <a:fontRef idx="minor">
+            <a:schemeClr val="lt1"/>
+          </a:fontRef>
+        </p:style>
+        <p:txBody>
+          <a:bodyPr rtlCol="0" anchor="ctr"/>
+          <a:lstStyle/>
+          <a:p>
+            <a:pPr algn="ctr"/>
+            <a:r>
+              <a:rPr lang="de-DE" dirty="0"/>
+              <a:t>Master</a:t>
+            </a:r>
+          </a:p>
+          <a:p>
+            <a:pPr algn="ctr"/>
+            <a:r>
+              <a:rPr lang="de-DE" dirty="0"/>
+              <a:t>Passwort</a:t>
+            </a:r>
+          </a:p>
+        </p:txBody>
+      </p:sp>
+      <p:sp>
+        <p:nvSpPr>
+          <p:cNvPr id="9" name="Rechteck 8">
+            <a:extLst>
+              <a:ext uri="{FF2B5EF4-FFF2-40B4-BE49-F238E27FC236}">
+                <a16:creationId xmlns:a16="http://schemas.microsoft.com/office/drawing/2014/main" id="{FED52332-0F5E-4EE6-0EE9-46F8A824BF04}"/>
+              </a:ext>
+            </a:extLst>
+          </p:cNvPr>
+          <p:cNvSpPr/>
+          <p:nvPr/>
+        </p:nvSpPr>
+        <p:spPr>
+          <a:xfrm>
+            <a:off x="5791200" y="3066257"/>
+            <a:ext cx="3206750" cy="673100"/>
+          </a:xfrm>
+          <a:prstGeom prst="rect">
+            <a:avLst/>
+          </a:prstGeom>
+        </p:spPr>
+        <p:style>
+          <a:lnRef idx="2">
+            <a:schemeClr val="accent1">
+              <a:shade val="15000"/>
+            </a:schemeClr>
+          </a:lnRef>
+          <a:fillRef idx="1">
+            <a:schemeClr val="accent1"/>
+          </a:fillRef>
+          <a:effectRef idx="0">
+            <a:schemeClr val="accent1"/>
+          </a:effectRef>
+          <a:fontRef idx="minor">
+            <a:schemeClr val="lt1"/>
+          </a:fontRef>
+        </p:style>
+        <p:txBody>
+          <a:bodyPr rtlCol="0" anchor="ctr"/>
+          <a:lstStyle/>
+          <a:p>
+            <a:pPr algn="ctr"/>
+            <a:r>
+              <a:rPr lang="de-DE" dirty="0"/>
+              <a:t>Key Ableitung mittels</a:t>
+            </a:r>
+          </a:p>
+          <a:p>
+            <a:pPr algn="ctr"/>
+            <a:r>
+              <a:rPr lang="de-DE" dirty="0"/>
+              <a:t>PBKDF2-HMAC-SHA256</a:t>
+            </a:r>
+          </a:p>
+        </p:txBody>
+      </p:sp>
+      <p:sp>
+        <p:nvSpPr>
+          <p:cNvPr id="12" name="Rechteck 11">
+            <a:extLst>
+              <a:ext uri="{FF2B5EF4-FFF2-40B4-BE49-F238E27FC236}">
+                <a16:creationId xmlns:a16="http://schemas.microsoft.com/office/drawing/2014/main" id="{BEDC6B56-3A3C-58F9-2397-24E63B04E08D}"/>
+              </a:ext>
+            </a:extLst>
+          </p:cNvPr>
+          <p:cNvSpPr/>
+          <p:nvPr/>
+        </p:nvSpPr>
+        <p:spPr>
+          <a:xfrm>
+            <a:off x="9969500" y="4052888"/>
+            <a:ext cx="1111250" cy="2124075"/>
+          </a:xfrm>
+          <a:prstGeom prst="rect">
+            <a:avLst/>
+          </a:prstGeom>
+        </p:spPr>
+        <p:style>
+          <a:lnRef idx="2">
+            <a:schemeClr val="accent1">
+              <a:shade val="15000"/>
+            </a:schemeClr>
+          </a:lnRef>
+          <a:fillRef idx="1">
+            <a:schemeClr val="accent1"/>
+          </a:fillRef>
+          <a:effectRef idx="0">
+            <a:schemeClr val="accent1"/>
+          </a:effectRef>
+          <a:fontRef idx="minor">
+            <a:schemeClr val="lt1"/>
+          </a:fontRef>
+        </p:style>
+        <p:txBody>
+          <a:bodyPr rtlCol="0" anchor="ctr"/>
+          <a:lstStyle/>
+          <a:p>
+            <a:pPr algn="ctr"/>
+            <a:r>
+              <a:rPr lang="de-DE" dirty="0"/>
+              <a:t>Klartext</a:t>
+            </a:r>
+          </a:p>
+          <a:p>
+            <a:pPr algn="ctr"/>
+            <a:r>
+              <a:rPr lang="de-DE" dirty="0"/>
+              <a:t>Daten</a:t>
+            </a:r>
+          </a:p>
+        </p:txBody>
+      </p:sp>
+      <p:cxnSp>
+        <p:nvCxnSpPr>
+          <p:cNvPr id="16" name="Verbinder: gewinkelt 15">
+            <a:extLst>
+              <a:ext uri="{FF2B5EF4-FFF2-40B4-BE49-F238E27FC236}">
+                <a16:creationId xmlns:a16="http://schemas.microsoft.com/office/drawing/2014/main" id="{2F36659F-4F1B-5679-40DC-E2568ED209DF}"/>
+              </a:ext>
+            </a:extLst>
+          </p:cNvPr>
+          <p:cNvCxnSpPr>
+            <a:cxnSpLocks/>
+            <a:stCxn id="5" idx="3"/>
+          </p:cNvCxnSpPr>
+          <p:nvPr/>
+        </p:nvCxnSpPr>
+        <p:spPr>
+          <a:xfrm>
+            <a:off x="3003550" y="2720975"/>
+            <a:ext cx="1182688" cy="506414"/>
+          </a:xfrm>
+          <a:prstGeom prst="bentConnector3">
+            <a:avLst>
+              <a:gd name="adj1" fmla="val 61597"/>
+            </a:avLst>
+          </a:prstGeom>
+          <a:ln w="57150">
+            <a:solidFill>
+              <a:srgbClr val="FF0000"/>
+            </a:solidFill>
+            <a:headEnd type="triangle" w="med" len="med"/>
+            <a:tailEnd type="none" w="med" len="med"/>
+          </a:ln>
+        </p:spPr>
+        <p:style>
+          <a:lnRef idx="2">
+            <a:schemeClr val="accent6"/>
+          </a:lnRef>
+          <a:fillRef idx="0">
+            <a:schemeClr val="accent6"/>
+          </a:fillRef>
+          <a:effectRef idx="1">
+            <a:schemeClr val="accent6"/>
+          </a:effectRef>
+          <a:fontRef idx="minor">
+            <a:schemeClr val="tx1"/>
+          </a:fontRef>
+        </p:style>
+      </p:cxnSp>
+      <p:cxnSp>
+        <p:nvCxnSpPr>
+          <p:cNvPr id="29" name="Verbinder: gewinkelt 28">
+            <a:extLst>
+              <a:ext uri="{FF2B5EF4-FFF2-40B4-BE49-F238E27FC236}">
+                <a16:creationId xmlns:a16="http://schemas.microsoft.com/office/drawing/2014/main" id="{26082CC4-49B8-8B7F-8EE6-50D815B71D2D}"/>
+              </a:ext>
+            </a:extLst>
+          </p:cNvPr>
+          <p:cNvCxnSpPr>
+            <a:cxnSpLocks/>
+            <a:stCxn id="6" idx="3"/>
+            <a:endCxn id="56" idx="1"/>
+          </p:cNvCxnSpPr>
+          <p:nvPr/>
+        </p:nvCxnSpPr>
+        <p:spPr>
+          <a:xfrm>
+            <a:off x="3003550" y="3280569"/>
+            <a:ext cx="1177929" cy="117475"/>
+          </a:xfrm>
+          <a:prstGeom prst="bentConnector3">
+            <a:avLst/>
+          </a:prstGeom>
+          <a:ln w="57150">
+            <a:solidFill>
+              <a:srgbClr val="FF0000"/>
+            </a:solidFill>
+            <a:headEnd type="triangle" w="med" len="med"/>
+            <a:tailEnd type="none" w="med" len="med"/>
+          </a:ln>
+        </p:spPr>
+        <p:style>
+          <a:lnRef idx="2">
+            <a:schemeClr val="accent6"/>
+          </a:lnRef>
+          <a:fillRef idx="0">
+            <a:schemeClr val="accent6"/>
+          </a:fillRef>
+          <a:effectRef idx="1">
+            <a:schemeClr val="accent6"/>
+          </a:effectRef>
+          <a:fontRef idx="minor">
+            <a:schemeClr val="tx1"/>
+          </a:fontRef>
+        </p:style>
+      </p:cxnSp>
+      <p:cxnSp>
+        <p:nvCxnSpPr>
+          <p:cNvPr id="31" name="Verbinder: gewinkelt 30">
+            <a:extLst>
+              <a:ext uri="{FF2B5EF4-FFF2-40B4-BE49-F238E27FC236}">
+                <a16:creationId xmlns:a16="http://schemas.microsoft.com/office/drawing/2014/main" id="{6E27F0B3-0E02-675C-E99F-2D807275383A}"/>
+              </a:ext>
+            </a:extLst>
+          </p:cNvPr>
+          <p:cNvCxnSpPr>
+            <a:cxnSpLocks/>
+            <a:stCxn id="7" idx="3"/>
+          </p:cNvCxnSpPr>
+          <p:nvPr/>
+        </p:nvCxnSpPr>
+        <p:spPr>
+          <a:xfrm flipV="1">
+            <a:off x="3003550" y="4855368"/>
+            <a:ext cx="1365250" cy="217885"/>
+          </a:xfrm>
+          <a:prstGeom prst="bentConnector3">
+            <a:avLst/>
+          </a:prstGeom>
+          <a:ln w="57150">
+            <a:headEnd type="triangle" w="med" len="med"/>
+            <a:tailEnd type="none" w="med" len="med"/>
+          </a:ln>
+        </p:spPr>
+        <p:style>
+          <a:lnRef idx="2">
+            <a:schemeClr val="accent6"/>
+          </a:lnRef>
+          <a:fillRef idx="0">
+            <a:schemeClr val="accent6"/>
+          </a:fillRef>
+          <a:effectRef idx="1">
+            <a:schemeClr val="accent6"/>
+          </a:effectRef>
+          <a:fontRef idx="minor">
+            <a:schemeClr val="tx1"/>
+          </a:fontRef>
+        </p:style>
+      </p:cxnSp>
+      <p:cxnSp>
+        <p:nvCxnSpPr>
+          <p:cNvPr id="38" name="Gerade Verbindung mit Pfeil 37">
+            <a:extLst>
+              <a:ext uri="{FF2B5EF4-FFF2-40B4-BE49-F238E27FC236}">
+                <a16:creationId xmlns:a16="http://schemas.microsoft.com/office/drawing/2014/main" id="{744C0A11-B705-C721-D27D-DA7719E39C20}"/>
+              </a:ext>
+            </a:extLst>
+          </p:cNvPr>
+          <p:cNvCxnSpPr>
+            <a:cxnSpLocks/>
+            <a:stCxn id="8" idx="2"/>
+          </p:cNvCxnSpPr>
+          <p:nvPr/>
+        </p:nvCxnSpPr>
+        <p:spPr>
+          <a:xfrm>
+            <a:off x="8118475" y="2675413"/>
+            <a:ext cx="0" cy="386081"/>
+          </a:xfrm>
+          <a:prstGeom prst="straightConnector1">
+            <a:avLst/>
+          </a:prstGeom>
+          <a:ln w="57150">
+            <a:tailEnd type="triangle"/>
+          </a:ln>
+        </p:spPr>
+        <p:style>
+          <a:lnRef idx="2">
+            <a:schemeClr val="accent6"/>
+          </a:lnRef>
+          <a:fillRef idx="0">
+            <a:schemeClr val="accent6"/>
+          </a:fillRef>
+          <a:effectRef idx="1">
+            <a:schemeClr val="accent6"/>
+          </a:effectRef>
+          <a:fontRef idx="minor">
+            <a:schemeClr val="tx1"/>
+          </a:fontRef>
+        </p:style>
+      </p:cxnSp>
+      <p:cxnSp>
+        <p:nvCxnSpPr>
+          <p:cNvPr id="40" name="Gerade Verbindung mit Pfeil 39">
+            <a:extLst>
+              <a:ext uri="{FF2B5EF4-FFF2-40B4-BE49-F238E27FC236}">
+                <a16:creationId xmlns:a16="http://schemas.microsoft.com/office/drawing/2014/main" id="{2A7D50FC-0369-A4A9-5474-818F88DFED03}"/>
+              </a:ext>
+            </a:extLst>
+          </p:cNvPr>
+          <p:cNvCxnSpPr>
+            <a:stCxn id="9" idx="2"/>
+          </p:cNvCxnSpPr>
+          <p:nvPr/>
+        </p:nvCxnSpPr>
+        <p:spPr>
+          <a:xfrm>
+            <a:off x="7394575" y="3739357"/>
+            <a:ext cx="0" cy="313531"/>
+          </a:xfrm>
+          <a:prstGeom prst="straightConnector1">
+            <a:avLst/>
+          </a:prstGeom>
+          <a:ln w="57150">
+            <a:tailEnd type="triangle"/>
+          </a:ln>
+        </p:spPr>
+        <p:style>
+          <a:lnRef idx="2">
+            <a:schemeClr val="accent6"/>
+          </a:lnRef>
+          <a:fillRef idx="0">
+            <a:schemeClr val="accent6"/>
+          </a:fillRef>
+          <a:effectRef idx="1">
+            <a:schemeClr val="accent6"/>
+          </a:effectRef>
+          <a:fontRef idx="minor">
+            <a:schemeClr val="tx1"/>
+          </a:fontRef>
+        </p:style>
+      </p:cxnSp>
+      <p:cxnSp>
+        <p:nvCxnSpPr>
+          <p:cNvPr id="42" name="Gerade Verbindung mit Pfeil 41">
+            <a:extLst>
+              <a:ext uri="{FF2B5EF4-FFF2-40B4-BE49-F238E27FC236}">
+                <a16:creationId xmlns:a16="http://schemas.microsoft.com/office/drawing/2014/main" id="{DE5B91FB-EAFB-D760-0DF8-7694B2F84516}"/>
+              </a:ext>
+            </a:extLst>
+          </p:cNvPr>
+          <p:cNvCxnSpPr/>
+          <p:nvPr/>
+        </p:nvCxnSpPr>
+        <p:spPr>
+          <a:xfrm>
+            <a:off x="8997950" y="4636293"/>
+            <a:ext cx="971550" cy="0"/>
+          </a:xfrm>
+          <a:prstGeom prst="straightConnector1">
+            <a:avLst/>
+          </a:prstGeom>
+          <a:ln w="57150">
+            <a:headEnd type="triangle" w="med" len="med"/>
+            <a:tailEnd type="none" w="med" len="med"/>
+          </a:ln>
+        </p:spPr>
+        <p:style>
+          <a:lnRef idx="2">
+            <a:schemeClr val="accent6"/>
+          </a:lnRef>
+          <a:fillRef idx="0">
+            <a:schemeClr val="accent6"/>
+          </a:fillRef>
+          <a:effectRef idx="1">
+            <a:schemeClr val="accent6"/>
+          </a:effectRef>
+          <a:fontRef idx="minor">
+            <a:schemeClr val="tx1"/>
+          </a:fontRef>
+        </p:style>
+      </p:cxnSp>
+      <p:sp>
+        <p:nvSpPr>
+          <p:cNvPr id="49" name="Rechteck 48">
+            <a:extLst>
+              <a:ext uri="{FF2B5EF4-FFF2-40B4-BE49-F238E27FC236}">
+                <a16:creationId xmlns:a16="http://schemas.microsoft.com/office/drawing/2014/main" id="{F525E0AF-05BA-4D6E-2752-F2FF14AEECC7}"/>
+              </a:ext>
+            </a:extLst>
+          </p:cNvPr>
+          <p:cNvSpPr/>
+          <p:nvPr/>
+        </p:nvSpPr>
+        <p:spPr>
+          <a:xfrm>
+            <a:off x="5219700" y="1992791"/>
+            <a:ext cx="1758950" cy="671512"/>
+          </a:xfrm>
+          <a:prstGeom prst="rect">
+            <a:avLst/>
+          </a:prstGeom>
+        </p:spPr>
+        <p:style>
+          <a:lnRef idx="2">
+            <a:schemeClr val="accent1">
+              <a:shade val="15000"/>
+            </a:schemeClr>
+          </a:lnRef>
+          <a:fillRef idx="1">
+            <a:schemeClr val="accent1"/>
+          </a:fillRef>
+          <a:effectRef idx="0">
+            <a:schemeClr val="accent1"/>
+          </a:effectRef>
+          <a:fontRef idx="minor">
+            <a:schemeClr val="lt1"/>
+          </a:fontRef>
+        </p:style>
+        <p:txBody>
+          <a:bodyPr rtlCol="0" anchor="ctr"/>
+          <a:lstStyle/>
+          <a:p>
+            <a:pPr algn="ctr"/>
+            <a:r>
+              <a:rPr lang="de-DE" dirty="0"/>
+              <a:t>Username</a:t>
+            </a:r>
+          </a:p>
+        </p:txBody>
+      </p:sp>
+      <p:cxnSp>
+        <p:nvCxnSpPr>
+          <p:cNvPr id="51" name="Gerade Verbindung mit Pfeil 50">
+            <a:extLst>
+              <a:ext uri="{FF2B5EF4-FFF2-40B4-BE49-F238E27FC236}">
+                <a16:creationId xmlns:a16="http://schemas.microsoft.com/office/drawing/2014/main" id="{E0094C3E-561E-1E15-E56C-83A4A9724F4F}"/>
+              </a:ext>
+            </a:extLst>
+          </p:cNvPr>
+          <p:cNvCxnSpPr>
+            <a:stCxn id="49" idx="1"/>
+          </p:cNvCxnSpPr>
+          <p:nvPr/>
+        </p:nvCxnSpPr>
+        <p:spPr>
+          <a:xfrm flipH="1">
+            <a:off x="3467100" y="2328547"/>
+            <a:ext cx="1752600" cy="11110"/>
+          </a:xfrm>
+          <a:prstGeom prst="straightConnector1">
+            <a:avLst/>
+          </a:prstGeom>
+          <a:ln w="57150">
+            <a:tailEnd type="triangle"/>
+          </a:ln>
+        </p:spPr>
+        <p:style>
+          <a:lnRef idx="2">
+            <a:schemeClr val="accent6"/>
+          </a:lnRef>
+          <a:fillRef idx="0">
+            <a:schemeClr val="accent6"/>
+          </a:fillRef>
+          <a:effectRef idx="1">
+            <a:schemeClr val="accent6"/>
+          </a:effectRef>
+          <a:fontRef idx="minor">
+            <a:schemeClr val="tx1"/>
+          </a:fontRef>
+        </p:style>
+      </p:cxnSp>
+      <p:sp>
+        <p:nvSpPr>
+          <p:cNvPr id="52" name="Textfeld 51">
+            <a:extLst>
+              <a:ext uri="{FF2B5EF4-FFF2-40B4-BE49-F238E27FC236}">
+                <a16:creationId xmlns:a16="http://schemas.microsoft.com/office/drawing/2014/main" id="{4FEADF0C-8A4A-FB74-E91A-29514645F116}"/>
+              </a:ext>
+            </a:extLst>
+          </p:cNvPr>
+          <p:cNvSpPr txBox="1"/>
+          <p:nvPr/>
+        </p:nvSpPr>
+        <p:spPr>
+          <a:xfrm>
+            <a:off x="3658569" y="1796515"/>
+            <a:ext cx="1180131" cy="523220"/>
+          </a:xfrm>
+          <a:prstGeom prst="rect">
+            <a:avLst/>
+          </a:prstGeom>
+          <a:noFill/>
+        </p:spPr>
+        <p:txBody>
+          <a:bodyPr wrap="none" rtlCol="0">
+            <a:spAutoFit/>
+          </a:bodyPr>
+          <a:lstStyle/>
+          <a:p>
+            <a:pPr algn="ctr"/>
+            <a:r>
+              <a:rPr lang="de-DE" sz="1400" dirty="0"/>
+              <a:t>Generierung </a:t>
+            </a:r>
+          </a:p>
+          <a:p>
+            <a:pPr algn="ctr"/>
+            <a:r>
+              <a:rPr lang="de-DE" sz="1400" dirty="0"/>
+              <a:t>Datei</a:t>
+            </a:r>
+          </a:p>
+        </p:txBody>
+      </p:sp>
+      <p:sp>
+        <p:nvSpPr>
+          <p:cNvPr id="56" name="Rechteck 55">
+            <a:extLst>
+              <a:ext uri="{FF2B5EF4-FFF2-40B4-BE49-F238E27FC236}">
+                <a16:creationId xmlns:a16="http://schemas.microsoft.com/office/drawing/2014/main" id="{0D16D9BC-85B3-2266-047B-5166E862DEBA}"/>
+              </a:ext>
+            </a:extLst>
+          </p:cNvPr>
+          <p:cNvSpPr/>
+          <p:nvPr/>
+        </p:nvSpPr>
+        <p:spPr>
+          <a:xfrm>
+            <a:off x="4181479" y="3061494"/>
+            <a:ext cx="1335087" cy="673100"/>
+          </a:xfrm>
+          <a:prstGeom prst="rect">
+            <a:avLst/>
+          </a:prstGeom>
+        </p:spPr>
+        <p:style>
+          <a:lnRef idx="2">
+            <a:schemeClr val="accent1">
+              <a:shade val="15000"/>
+            </a:schemeClr>
+          </a:lnRef>
+          <a:fillRef idx="1">
+            <a:schemeClr val="accent1"/>
+          </a:fillRef>
+          <a:effectRef idx="0">
+            <a:schemeClr val="accent1"/>
+          </a:effectRef>
+          <a:fontRef idx="minor">
+            <a:schemeClr val="lt1"/>
+          </a:fontRef>
+        </p:style>
+        <p:txBody>
+          <a:bodyPr rtlCol="0" anchor="ctr"/>
+          <a:lstStyle/>
+          <a:p>
+            <a:pPr algn="ctr"/>
+            <a:r>
+              <a:rPr lang="de-DE" dirty="0"/>
+              <a:t>Generiere</a:t>
+            </a:r>
+          </a:p>
+          <a:p>
+            <a:pPr algn="ctr"/>
+            <a:r>
+              <a:rPr lang="de-DE" dirty="0"/>
+              <a:t>IV + Salt</a:t>
+            </a:r>
+          </a:p>
+        </p:txBody>
+      </p:sp>
+      <p:cxnSp>
+        <p:nvCxnSpPr>
+          <p:cNvPr id="61" name="Gerade Verbindung mit Pfeil 60">
+            <a:extLst>
+              <a:ext uri="{FF2B5EF4-FFF2-40B4-BE49-F238E27FC236}">
+                <a16:creationId xmlns:a16="http://schemas.microsoft.com/office/drawing/2014/main" id="{B5966B15-5481-24DC-73BB-0A04D53D6366}"/>
+              </a:ext>
+            </a:extLst>
+          </p:cNvPr>
+          <p:cNvCxnSpPr/>
+          <p:nvPr/>
+        </p:nvCxnSpPr>
+        <p:spPr>
+          <a:xfrm>
+            <a:off x="4579620" y="3751265"/>
+            <a:ext cx="0" cy="301623"/>
+          </a:xfrm>
+          <a:prstGeom prst="straightConnector1">
+            <a:avLst/>
+          </a:prstGeom>
+          <a:ln w="57150">
+            <a:tailEnd type="triangle"/>
+          </a:ln>
+        </p:spPr>
+        <p:style>
+          <a:lnRef idx="2">
+            <a:schemeClr val="accent6"/>
+          </a:lnRef>
+          <a:fillRef idx="0">
+            <a:schemeClr val="accent6"/>
+          </a:fillRef>
+          <a:effectRef idx="1">
+            <a:schemeClr val="accent6"/>
+          </a:effectRef>
+          <a:fontRef idx="minor">
+            <a:schemeClr val="tx1"/>
+          </a:fontRef>
+        </p:style>
+      </p:cxnSp>
+      <p:cxnSp>
+        <p:nvCxnSpPr>
+          <p:cNvPr id="63" name="Gerade Verbindung mit Pfeil 62">
+            <a:extLst>
+              <a:ext uri="{FF2B5EF4-FFF2-40B4-BE49-F238E27FC236}">
+                <a16:creationId xmlns:a16="http://schemas.microsoft.com/office/drawing/2014/main" id="{71D6C7FC-B508-0E39-D8F5-561DFED9FA6B}"/>
+              </a:ext>
+            </a:extLst>
+          </p:cNvPr>
+          <p:cNvCxnSpPr>
+            <a:cxnSpLocks/>
+          </p:cNvCxnSpPr>
+          <p:nvPr/>
+        </p:nvCxnSpPr>
+        <p:spPr>
+          <a:xfrm>
+            <a:off x="5516566" y="3550444"/>
+            <a:ext cx="274634" cy="4763"/>
+          </a:xfrm>
+          <a:prstGeom prst="straightConnector1">
+            <a:avLst/>
+          </a:prstGeom>
+          <a:ln w="57150">
+            <a:tailEnd type="triangle"/>
+          </a:ln>
+        </p:spPr>
+        <p:style>
+          <a:lnRef idx="2">
+            <a:schemeClr val="accent6"/>
+          </a:lnRef>
+          <a:fillRef idx="0">
+            <a:schemeClr val="accent6"/>
+          </a:fillRef>
+          <a:effectRef idx="1">
+            <a:schemeClr val="accent6"/>
+          </a:effectRef>
+          <a:fontRef idx="minor">
+            <a:schemeClr val="tx1"/>
+          </a:fontRef>
+        </p:style>
+      </p:cxnSp>
+      <p:sp>
+        <p:nvSpPr>
+          <p:cNvPr id="64" name="Textfeld 63">
+            <a:extLst>
+              <a:ext uri="{FF2B5EF4-FFF2-40B4-BE49-F238E27FC236}">
+                <a16:creationId xmlns:a16="http://schemas.microsoft.com/office/drawing/2014/main" id="{86388E3E-0F6E-7F4C-537E-C7FA18E4A972}"/>
+              </a:ext>
+            </a:extLst>
+          </p:cNvPr>
+          <p:cNvSpPr txBox="1"/>
+          <p:nvPr/>
+        </p:nvSpPr>
+        <p:spPr>
+          <a:xfrm>
+            <a:off x="3686175" y="2813214"/>
+            <a:ext cx="790601" cy="261610"/>
+          </a:xfrm>
+          <a:prstGeom prst="rect">
+            <a:avLst/>
+          </a:prstGeom>
+          <a:noFill/>
+        </p:spPr>
+        <p:txBody>
+          <a:bodyPr wrap="none" rtlCol="0">
+            <a:spAutoFit/>
+          </a:bodyPr>
+          <a:lstStyle/>
+          <a:p>
+            <a:pPr algn="ctr"/>
+            <a:r>
+              <a:rPr lang="de-DE" sz="1100" dirty="0">
+                <a:solidFill>
+                  <a:srgbClr val="FF0000"/>
+                </a:solidFill>
+              </a:rPr>
+              <a:t>speichern</a:t>
+            </a:r>
+          </a:p>
+        </p:txBody>
+      </p:sp>
+      <p:sp>
+        <p:nvSpPr>
+          <p:cNvPr id="66" name="Pfeil: nach links 65">
+            <a:extLst>
+              <a:ext uri="{FF2B5EF4-FFF2-40B4-BE49-F238E27FC236}">
+                <a16:creationId xmlns:a16="http://schemas.microsoft.com/office/drawing/2014/main" id="{BEE5362A-9925-4F43-C915-2512281AA4FB}"/>
+              </a:ext>
+            </a:extLst>
+          </p:cNvPr>
+          <p:cNvSpPr/>
+          <p:nvPr/>
+        </p:nvSpPr>
+        <p:spPr>
+          <a:xfrm>
+            <a:off x="4541520" y="5768340"/>
+            <a:ext cx="3576955" cy="759459"/>
+          </a:xfrm>
+          <a:prstGeom prst="leftArrow">
+            <a:avLst/>
+          </a:prstGeom>
+        </p:spPr>
+        <p:style>
+          <a:lnRef idx="2">
+            <a:schemeClr val="accent2">
+              <a:shade val="15000"/>
+            </a:schemeClr>
+          </a:lnRef>
+          <a:fillRef idx="1">
+            <a:schemeClr val="accent2"/>
+          </a:fillRef>
+          <a:effectRef idx="0">
+            <a:schemeClr val="accent2"/>
+          </a:effectRef>
+          <a:fontRef idx="minor">
+            <a:schemeClr val="lt1"/>
+          </a:fontRef>
+        </p:style>
+        <p:txBody>
+          <a:bodyPr rtlCol="0" anchor="ctr"/>
+          <a:lstStyle/>
+          <a:p>
+            <a:pPr algn="ctr"/>
+            <a:endParaRPr lang="de-DE"/>
+          </a:p>
+        </p:txBody>
+      </p:sp>
+    </p:spTree>
+    <p:extLst>
+      <p:ext uri="{BB962C8B-B14F-4D97-AF65-F5344CB8AC3E}">
+        <p14:creationId xmlns:p14="http://schemas.microsoft.com/office/powerpoint/2010/main" val="2950061998"/>
+      </p:ext>
+    </p:extLst>
+  </p:cSld>
+  <p:clrMapOvr>
+    <a:masterClrMapping/>
+  </p:clrMapOvr>
+</p:sld>
+</file>
+
+<file path=ppt/slides/slide9.xml><?xml version="1.0" encoding="utf-8"?>
+<p:sld xmlns:a="http://schemas.openxmlformats.org/drawingml/2006/main" xmlns:r="http://schemas.openxmlformats.org/officeDocument/2006/relationships" xmlns:p="http://schemas.openxmlformats.org/presentationml/2006/main">
+  <p:cSld>
+    <p:spTree>
+      <p:nvGrpSpPr>
+        <p:cNvPr id="1" name="">
+          <a:extLst>
+            <a:ext uri="{FF2B5EF4-FFF2-40B4-BE49-F238E27FC236}">
+              <a16:creationId xmlns:a16="http://schemas.microsoft.com/office/drawing/2014/main" id="{5124A14F-97E0-08F0-1B77-53C3145F150E}"/>
+            </a:ext>
+          </a:extLst>
+        </p:cNvPr>
+        <p:cNvGrpSpPr/>
+        <p:nvPr/>
+      </p:nvGrpSpPr>
+      <p:grpSpPr>
+        <a:xfrm>
+          <a:off x="0" y="0"/>
+          <a:ext cx="0" cy="0"/>
+          <a:chOff x="0" y="0"/>
+          <a:chExt cx="0" cy="0"/>
+        </a:xfrm>
+      </p:grpSpPr>
+      <p:sp>
+        <p:nvSpPr>
+          <p:cNvPr id="43" name="Rechteck 42">
+            <a:extLst>
+              <a:ext uri="{FF2B5EF4-FFF2-40B4-BE49-F238E27FC236}">
+                <a16:creationId xmlns:a16="http://schemas.microsoft.com/office/drawing/2014/main" id="{BDA02AB1-3F59-293B-85D1-01AD8553B367}"/>
+              </a:ext>
+            </a:extLst>
+          </p:cNvPr>
+          <p:cNvSpPr/>
+          <p:nvPr/>
+        </p:nvSpPr>
+        <p:spPr>
+          <a:xfrm>
+            <a:off x="9448803" y="3345180"/>
+            <a:ext cx="2080258" cy="3147694"/>
+          </a:xfrm>
+          <a:prstGeom prst="rect">
+            <a:avLst/>
+          </a:prstGeom>
+        </p:spPr>
+        <p:style>
+          <a:lnRef idx="2">
+            <a:schemeClr val="accent4">
+              <a:shade val="15000"/>
+            </a:schemeClr>
+          </a:lnRef>
+          <a:fillRef idx="1">
+            <a:schemeClr val="accent4"/>
+          </a:fillRef>
+          <a:effectRef idx="0">
+            <a:schemeClr val="accent4"/>
+          </a:effectRef>
+          <a:fontRef idx="minor">
+            <a:schemeClr val="lt1"/>
+          </a:fontRef>
+        </p:style>
+        <p:txBody>
+          <a:bodyPr rtlCol="0" anchor="t"/>
+          <a:lstStyle/>
+          <a:p>
+            <a:r>
+              <a:rPr lang="de-DE" dirty="0"/>
+              <a:t>Hauptfenster</a:t>
+            </a:r>
+          </a:p>
+        </p:txBody>
+      </p:sp>
+      <p:sp>
+        <p:nvSpPr>
+          <p:cNvPr id="14" name="Rechteck 13">
+            <a:extLst>
+              <a:ext uri="{FF2B5EF4-FFF2-40B4-BE49-F238E27FC236}">
+                <a16:creationId xmlns:a16="http://schemas.microsoft.com/office/drawing/2014/main" id="{919C10EA-F66D-425E-36C5-7D5308790281}"/>
+              </a:ext>
+            </a:extLst>
+          </p:cNvPr>
+          <p:cNvSpPr/>
+          <p:nvPr/>
+        </p:nvSpPr>
+        <p:spPr>
+          <a:xfrm>
+            <a:off x="4838700" y="1531621"/>
+            <a:ext cx="4419600" cy="1293020"/>
+          </a:xfrm>
+          <a:prstGeom prst="rect">
+            <a:avLst/>
+          </a:prstGeom>
+        </p:spPr>
+        <p:style>
+          <a:lnRef idx="2">
+            <a:schemeClr val="accent4">
+              <a:shade val="15000"/>
+            </a:schemeClr>
+          </a:lnRef>
+          <a:fillRef idx="1">
+            <a:schemeClr val="accent4"/>
+          </a:fillRef>
+          <a:effectRef idx="0">
+            <a:schemeClr val="accent4"/>
+          </a:effectRef>
+          <a:fontRef idx="minor">
+            <a:schemeClr val="lt1"/>
+          </a:fontRef>
+        </p:style>
+        <p:txBody>
+          <a:bodyPr rtlCol="0" anchor="t"/>
+          <a:lstStyle/>
+          <a:p>
+            <a:r>
+              <a:rPr lang="de-DE" dirty="0"/>
+              <a:t>Anmelde Maske</a:t>
+            </a:r>
+          </a:p>
+        </p:txBody>
+      </p:sp>
+      <p:sp>
+        <p:nvSpPr>
+          <p:cNvPr id="13" name="Rechteck 12">
+            <a:extLst>
+              <a:ext uri="{FF2B5EF4-FFF2-40B4-BE49-F238E27FC236}">
+                <a16:creationId xmlns:a16="http://schemas.microsoft.com/office/drawing/2014/main" id="{18C6B5CE-4283-5D9A-23D8-F16431C0AB85}"/>
+              </a:ext>
+            </a:extLst>
+          </p:cNvPr>
+          <p:cNvSpPr/>
+          <p:nvPr/>
+        </p:nvSpPr>
+        <p:spPr>
+          <a:xfrm>
+            <a:off x="844550" y="1992791"/>
+            <a:ext cx="2622550" cy="4706459"/>
+          </a:xfrm>
+          <a:prstGeom prst="rect">
+            <a:avLst/>
+          </a:prstGeom>
+        </p:spPr>
+        <p:style>
+          <a:lnRef idx="2">
+            <a:schemeClr val="accent4">
+              <a:shade val="15000"/>
+            </a:schemeClr>
+          </a:lnRef>
+          <a:fillRef idx="1">
+            <a:schemeClr val="accent4"/>
+          </a:fillRef>
+          <a:effectRef idx="0">
+            <a:schemeClr val="accent4"/>
+          </a:effectRef>
+          <a:fontRef idx="minor">
+            <a:schemeClr val="lt1"/>
+          </a:fontRef>
+        </p:style>
+        <p:txBody>
+          <a:bodyPr rtlCol="0" anchor="t"/>
+          <a:lstStyle/>
+          <a:p>
+            <a:r>
+              <a:rPr lang="de-DE" dirty="0"/>
+              <a:t>Datei</a:t>
+            </a:r>
+          </a:p>
+        </p:txBody>
+      </p:sp>
+      <p:sp>
+        <p:nvSpPr>
+          <p:cNvPr id="2" name="Titel 1">
+            <a:extLst>
+              <a:ext uri="{FF2B5EF4-FFF2-40B4-BE49-F238E27FC236}">
+                <a16:creationId xmlns:a16="http://schemas.microsoft.com/office/drawing/2014/main" id="{C214F00C-BEB9-D006-DCA7-BAEE271924B2}"/>
               </a:ext>
             </a:extLst>
           </p:cNvPr>
@@ -7440,32 +9562,941 @@
             <a:spLocks noGrp="1"/>
           </p:cNvSpPr>
           <p:nvPr>
-            <p:ph idx="1"/>
+            <p:ph type="title"/>
           </p:nvPr>
         </p:nvSpPr>
         <p:spPr/>
         <p:txBody>
-          <a:bodyPr>
-            <a:normAutofit/>
+          <a:bodyPr/>
+          <a:lstStyle/>
+          <a:p>
+            <a:r>
+              <a:rPr lang="de-DE" b="1" dirty="0">
+                <a:effectLst>
+                  <a:outerShdw blurRad="38100" dist="38100" dir="2700000" algn="tl">
+                    <a:srgbClr val="000000">
+                      <a:alpha val="43137"/>
+                    </a:srgbClr>
+                  </a:outerShdw>
+                </a:effectLst>
+              </a:rPr>
+              <a:t>Umsetzung</a:t>
+            </a:r>
+            <a:r>
+              <a:rPr lang="de-DE" dirty="0">
+                <a:effectLst>
+                  <a:outerShdw blurRad="38100" dist="38100" dir="2700000" algn="tl">
+                    <a:srgbClr val="000000">
+                      <a:alpha val="43137"/>
+                    </a:srgbClr>
+                  </a:outerShdw>
+                </a:effectLst>
+              </a:rPr>
+              <a:t> - Entschlüsselung</a:t>
+            </a:r>
+          </a:p>
+        </p:txBody>
+      </p:sp>
+      <p:sp>
+        <p:nvSpPr>
+          <p:cNvPr id="4" name="Rechteck 3">
+            <a:extLst>
+              <a:ext uri="{FF2B5EF4-FFF2-40B4-BE49-F238E27FC236}">
+                <a16:creationId xmlns:a16="http://schemas.microsoft.com/office/drawing/2014/main" id="{2849438B-27BD-3705-A1BB-2677A865DA37}"/>
+              </a:ext>
+            </a:extLst>
+          </p:cNvPr>
+          <p:cNvSpPr/>
+          <p:nvPr/>
+        </p:nvSpPr>
+        <p:spPr>
+          <a:xfrm>
+            <a:off x="4373562" y="4052888"/>
+            <a:ext cx="4624388" cy="1166811"/>
+          </a:xfrm>
+          <a:custGeom>
+            <a:avLst/>
+            <a:gdLst>
+              <a:gd name="connsiteX0" fmla="*/ 0 w 4622800"/>
+              <a:gd name="connsiteY0" fmla="*/ 0 h 1166811"/>
+              <a:gd name="connsiteX1" fmla="*/ 4622800 w 4622800"/>
+              <a:gd name="connsiteY1" fmla="*/ 0 h 1166811"/>
+              <a:gd name="connsiteX2" fmla="*/ 4622800 w 4622800"/>
+              <a:gd name="connsiteY2" fmla="*/ 1166811 h 1166811"/>
+              <a:gd name="connsiteX3" fmla="*/ 0 w 4622800"/>
+              <a:gd name="connsiteY3" fmla="*/ 1166811 h 1166811"/>
+              <a:gd name="connsiteX4" fmla="*/ 0 w 4622800"/>
+              <a:gd name="connsiteY4" fmla="*/ 0 h 1166811"/>
+              <a:gd name="connsiteX0" fmla="*/ 6350 w 4629150"/>
+              <a:gd name="connsiteY0" fmla="*/ 0 h 1166811"/>
+              <a:gd name="connsiteX1" fmla="*/ 4629150 w 4629150"/>
+              <a:gd name="connsiteY1" fmla="*/ 0 h 1166811"/>
+              <a:gd name="connsiteX2" fmla="*/ 4629150 w 4629150"/>
+              <a:gd name="connsiteY2" fmla="*/ 1166811 h 1166811"/>
+              <a:gd name="connsiteX3" fmla="*/ 6350 w 4629150"/>
+              <a:gd name="connsiteY3" fmla="*/ 1166811 h 1166811"/>
+              <a:gd name="connsiteX4" fmla="*/ 0 w 4629150"/>
+              <a:gd name="connsiteY4" fmla="*/ 931862 h 1166811"/>
+              <a:gd name="connsiteX5" fmla="*/ 6350 w 4629150"/>
+              <a:gd name="connsiteY5" fmla="*/ 0 h 1166811"/>
+              <a:gd name="connsiteX0" fmla="*/ 6350 w 4629150"/>
+              <a:gd name="connsiteY0" fmla="*/ 0 h 1166811"/>
+              <a:gd name="connsiteX1" fmla="*/ 4629150 w 4629150"/>
+              <a:gd name="connsiteY1" fmla="*/ 0 h 1166811"/>
+              <a:gd name="connsiteX2" fmla="*/ 4629150 w 4629150"/>
+              <a:gd name="connsiteY2" fmla="*/ 1166811 h 1166811"/>
+              <a:gd name="connsiteX3" fmla="*/ 6350 w 4629150"/>
+              <a:gd name="connsiteY3" fmla="*/ 1166811 h 1166811"/>
+              <a:gd name="connsiteX4" fmla="*/ 0 w 4629150"/>
+              <a:gd name="connsiteY4" fmla="*/ 341312 h 1166811"/>
+              <a:gd name="connsiteX5" fmla="*/ 6350 w 4629150"/>
+              <a:gd name="connsiteY5" fmla="*/ 0 h 1166811"/>
+              <a:gd name="connsiteX0" fmla="*/ 1588 w 4624388"/>
+              <a:gd name="connsiteY0" fmla="*/ 0 h 1166811"/>
+              <a:gd name="connsiteX1" fmla="*/ 4624388 w 4624388"/>
+              <a:gd name="connsiteY1" fmla="*/ 0 h 1166811"/>
+              <a:gd name="connsiteX2" fmla="*/ 4624388 w 4624388"/>
+              <a:gd name="connsiteY2" fmla="*/ 1166811 h 1166811"/>
+              <a:gd name="connsiteX3" fmla="*/ 1588 w 4624388"/>
+              <a:gd name="connsiteY3" fmla="*/ 1166811 h 1166811"/>
+              <a:gd name="connsiteX4" fmla="*/ 0 w 4624388"/>
+              <a:gd name="connsiteY4" fmla="*/ 341312 h 1166811"/>
+              <a:gd name="connsiteX5" fmla="*/ 1588 w 4624388"/>
+              <a:gd name="connsiteY5" fmla="*/ 0 h 1166811"/>
+            </a:gdLst>
+            <a:ahLst/>
+            <a:cxnLst>
+              <a:cxn ang="0">
+                <a:pos x="connsiteX0" y="connsiteY0"/>
+              </a:cxn>
+              <a:cxn ang="0">
+                <a:pos x="connsiteX1" y="connsiteY1"/>
+              </a:cxn>
+              <a:cxn ang="0">
+                <a:pos x="connsiteX2" y="connsiteY2"/>
+              </a:cxn>
+              <a:cxn ang="0">
+                <a:pos x="connsiteX3" y="connsiteY3"/>
+              </a:cxn>
+              <a:cxn ang="0">
+                <a:pos x="connsiteX4" y="connsiteY4"/>
+              </a:cxn>
+              <a:cxn ang="0">
+                <a:pos x="connsiteX5" y="connsiteY5"/>
+              </a:cxn>
+            </a:cxnLst>
+            <a:rect l="l" t="t" r="r" b="b"/>
+            <a:pathLst>
+              <a:path w="4624388" h="1166811">
+                <a:moveTo>
+                  <a:pt x="1588" y="0"/>
+                </a:moveTo>
+                <a:lnTo>
+                  <a:pt x="4624388" y="0"/>
+                </a:lnTo>
+                <a:lnTo>
+                  <a:pt x="4624388" y="1166811"/>
+                </a:lnTo>
+                <a:lnTo>
+                  <a:pt x="1588" y="1166811"/>
+                </a:lnTo>
+                <a:cubicBezTo>
+                  <a:pt x="-529" y="891645"/>
+                  <a:pt x="2117" y="616478"/>
+                  <a:pt x="0" y="341312"/>
+                </a:cubicBezTo>
+                <a:cubicBezTo>
+                  <a:pt x="2117" y="30691"/>
+                  <a:pt x="-529" y="310621"/>
+                  <a:pt x="1588" y="0"/>
+                </a:cubicBezTo>
+                <a:close/>
+              </a:path>
+            </a:pathLst>
+          </a:custGeom>
+        </p:spPr>
+        <p:style>
+          <a:lnRef idx="2">
+            <a:schemeClr val="accent1">
+              <a:shade val="15000"/>
+            </a:schemeClr>
+          </a:lnRef>
+          <a:fillRef idx="1">
+            <a:schemeClr val="accent1"/>
+          </a:fillRef>
+          <a:effectRef idx="0">
+            <a:schemeClr val="accent1"/>
+          </a:effectRef>
+          <a:fontRef idx="minor">
+            <a:schemeClr val="lt1"/>
+          </a:fontRef>
+        </p:style>
+        <p:txBody>
+          <a:bodyPr rtlCol="0" anchor="ctr"/>
+          <a:lstStyle/>
+          <a:p>
+            <a:pPr algn="ctr"/>
+            <a:r>
+              <a:rPr lang="de-DE" dirty="0"/>
+              <a:t>Entschlüsselung mittels</a:t>
+            </a:r>
+          </a:p>
+          <a:p>
+            <a:pPr algn="ctr"/>
+            <a:r>
+              <a:rPr lang="de-DE" dirty="0"/>
+              <a:t>AES256-GCM</a:t>
+            </a:r>
+          </a:p>
+        </p:txBody>
+      </p:sp>
+      <p:sp>
+        <p:nvSpPr>
+          <p:cNvPr id="5" name="Rechteck 4">
+            <a:extLst>
+              <a:ext uri="{FF2B5EF4-FFF2-40B4-BE49-F238E27FC236}">
+                <a16:creationId xmlns:a16="http://schemas.microsoft.com/office/drawing/2014/main" id="{06F2827B-8297-F0EA-FD45-9B886500F5DF}"/>
+              </a:ext>
+            </a:extLst>
+          </p:cNvPr>
+          <p:cNvSpPr/>
+          <p:nvPr/>
+        </p:nvSpPr>
+        <p:spPr>
+          <a:xfrm>
+            <a:off x="1200150" y="2501900"/>
+            <a:ext cx="1803400" cy="438150"/>
+          </a:xfrm>
+          <a:prstGeom prst="rect">
+            <a:avLst/>
+          </a:prstGeom>
+        </p:spPr>
+        <p:style>
+          <a:lnRef idx="2">
+            <a:schemeClr val="accent1">
+              <a:shade val="15000"/>
+            </a:schemeClr>
+          </a:lnRef>
+          <a:fillRef idx="1">
+            <a:schemeClr val="accent1"/>
+          </a:fillRef>
+          <a:effectRef idx="0">
+            <a:schemeClr val="accent1"/>
+          </a:effectRef>
+          <a:fontRef idx="minor">
+            <a:schemeClr val="lt1"/>
+          </a:fontRef>
+        </p:style>
+        <p:txBody>
+          <a:bodyPr rtlCol="0" anchor="ctr"/>
+          <a:lstStyle/>
+          <a:p>
+            <a:pPr algn="ctr"/>
+            <a:r>
+              <a:rPr lang="de-DE" dirty="0"/>
+              <a:t>Salt</a:t>
+            </a:r>
+          </a:p>
+        </p:txBody>
+      </p:sp>
+      <p:sp>
+        <p:nvSpPr>
+          <p:cNvPr id="6" name="Rechteck 5">
+            <a:extLst>
+              <a:ext uri="{FF2B5EF4-FFF2-40B4-BE49-F238E27FC236}">
+                <a16:creationId xmlns:a16="http://schemas.microsoft.com/office/drawing/2014/main" id="{994389CE-32AA-1628-DD75-6BBFF8EED003}"/>
+              </a:ext>
+            </a:extLst>
+          </p:cNvPr>
+          <p:cNvSpPr/>
+          <p:nvPr/>
+        </p:nvSpPr>
+        <p:spPr>
+          <a:xfrm>
+            <a:off x="1200150" y="3061494"/>
+            <a:ext cx="1803400" cy="438150"/>
+          </a:xfrm>
+          <a:prstGeom prst="rect">
+            <a:avLst/>
+          </a:prstGeom>
+        </p:spPr>
+        <p:style>
+          <a:lnRef idx="2">
+            <a:schemeClr val="accent1">
+              <a:shade val="15000"/>
+            </a:schemeClr>
+          </a:lnRef>
+          <a:fillRef idx="1">
+            <a:schemeClr val="accent1"/>
+          </a:fillRef>
+          <a:effectRef idx="0">
+            <a:schemeClr val="accent1"/>
+          </a:effectRef>
+          <a:fontRef idx="minor">
+            <a:schemeClr val="lt1"/>
+          </a:fontRef>
+        </p:style>
+        <p:txBody>
+          <a:bodyPr rtlCol="0" anchor="ctr"/>
+          <a:lstStyle/>
+          <a:p>
+            <a:pPr algn="ctr"/>
+            <a:r>
+              <a:rPr lang="de-DE" dirty="0"/>
+              <a:t>IV</a:t>
+            </a:r>
+          </a:p>
+        </p:txBody>
+      </p:sp>
+      <p:sp>
+        <p:nvSpPr>
+          <p:cNvPr id="7" name="Rechteck 6">
+            <a:extLst>
+              <a:ext uri="{FF2B5EF4-FFF2-40B4-BE49-F238E27FC236}">
+                <a16:creationId xmlns:a16="http://schemas.microsoft.com/office/drawing/2014/main" id="{ED833B69-5A20-83B1-0C6C-825B7D7D965B}"/>
+              </a:ext>
+            </a:extLst>
+          </p:cNvPr>
+          <p:cNvSpPr/>
+          <p:nvPr/>
+        </p:nvSpPr>
+        <p:spPr>
+          <a:xfrm>
+            <a:off x="1200150" y="3618706"/>
+            <a:ext cx="1803400" cy="2909093"/>
+          </a:xfrm>
+          <a:prstGeom prst="rect">
+            <a:avLst/>
+          </a:prstGeom>
+        </p:spPr>
+        <p:style>
+          <a:lnRef idx="2">
+            <a:schemeClr val="accent1">
+              <a:shade val="15000"/>
+            </a:schemeClr>
+          </a:lnRef>
+          <a:fillRef idx="1">
+            <a:schemeClr val="accent1"/>
+          </a:fillRef>
+          <a:effectRef idx="0">
+            <a:schemeClr val="accent1"/>
+          </a:effectRef>
+          <a:fontRef idx="minor">
+            <a:schemeClr val="lt1"/>
+          </a:fontRef>
+        </p:style>
+        <p:txBody>
+          <a:bodyPr rtlCol="0" anchor="ctr"/>
+          <a:lstStyle/>
+          <a:p>
+            <a:pPr algn="ctr"/>
+            <a:r>
+              <a:rPr lang="de-DE" dirty="0"/>
+              <a:t>Verschlüsselte</a:t>
+            </a:r>
+          </a:p>
+          <a:p>
+            <a:pPr algn="ctr"/>
+            <a:r>
+              <a:rPr lang="de-DE" dirty="0"/>
+              <a:t>Daten</a:t>
+            </a:r>
+          </a:p>
+        </p:txBody>
+      </p:sp>
+      <p:sp>
+        <p:nvSpPr>
+          <p:cNvPr id="8" name="Rechteck 7">
+            <a:extLst>
+              <a:ext uri="{FF2B5EF4-FFF2-40B4-BE49-F238E27FC236}">
+                <a16:creationId xmlns:a16="http://schemas.microsoft.com/office/drawing/2014/main" id="{1730D50A-D22C-1AA8-6759-71B9D20CED97}"/>
+              </a:ext>
+            </a:extLst>
+          </p:cNvPr>
+          <p:cNvSpPr/>
+          <p:nvPr/>
+        </p:nvSpPr>
+        <p:spPr>
+          <a:xfrm>
+            <a:off x="7239000" y="2003901"/>
+            <a:ext cx="1758950" cy="671512"/>
+          </a:xfrm>
+          <a:prstGeom prst="rect">
+            <a:avLst/>
+          </a:prstGeom>
+        </p:spPr>
+        <p:style>
+          <a:lnRef idx="2">
+            <a:schemeClr val="accent1">
+              <a:shade val="15000"/>
+            </a:schemeClr>
+          </a:lnRef>
+          <a:fillRef idx="1">
+            <a:schemeClr val="accent1"/>
+          </a:fillRef>
+          <a:effectRef idx="0">
+            <a:schemeClr val="accent1"/>
+          </a:effectRef>
+          <a:fontRef idx="minor">
+            <a:schemeClr val="lt1"/>
+          </a:fontRef>
+        </p:style>
+        <p:txBody>
+          <a:bodyPr rtlCol="0" anchor="ctr"/>
+          <a:lstStyle/>
+          <a:p>
+            <a:pPr algn="ctr"/>
+            <a:r>
+              <a:rPr lang="de-DE" dirty="0"/>
+              <a:t>Master</a:t>
+            </a:r>
+          </a:p>
+          <a:p>
+            <a:pPr algn="ctr"/>
+            <a:r>
+              <a:rPr lang="de-DE" dirty="0"/>
+              <a:t>Passwort</a:t>
+            </a:r>
+          </a:p>
+        </p:txBody>
+      </p:sp>
+      <p:sp>
+        <p:nvSpPr>
+          <p:cNvPr id="9" name="Rechteck 8">
+            <a:extLst>
+              <a:ext uri="{FF2B5EF4-FFF2-40B4-BE49-F238E27FC236}">
+                <a16:creationId xmlns:a16="http://schemas.microsoft.com/office/drawing/2014/main" id="{FFE069DD-118B-E4B3-33C9-A6604BC498FD}"/>
+              </a:ext>
+            </a:extLst>
+          </p:cNvPr>
+          <p:cNvSpPr/>
+          <p:nvPr/>
+        </p:nvSpPr>
+        <p:spPr>
+          <a:xfrm>
+            <a:off x="5791200" y="3066257"/>
+            <a:ext cx="3206750" cy="673100"/>
+          </a:xfrm>
+          <a:prstGeom prst="rect">
+            <a:avLst/>
+          </a:prstGeom>
+        </p:spPr>
+        <p:style>
+          <a:lnRef idx="2">
+            <a:schemeClr val="accent1">
+              <a:shade val="15000"/>
+            </a:schemeClr>
+          </a:lnRef>
+          <a:fillRef idx="1">
+            <a:schemeClr val="accent1"/>
+          </a:fillRef>
+          <a:effectRef idx="0">
+            <a:schemeClr val="accent1"/>
+          </a:effectRef>
+          <a:fontRef idx="minor">
+            <a:schemeClr val="lt1"/>
+          </a:fontRef>
+        </p:style>
+        <p:txBody>
+          <a:bodyPr rtlCol="0" anchor="ctr"/>
+          <a:lstStyle/>
+          <a:p>
+            <a:pPr algn="ctr"/>
+            <a:r>
+              <a:rPr lang="de-DE" dirty="0"/>
+              <a:t>Key Ableitung mittels</a:t>
+            </a:r>
+          </a:p>
+          <a:p>
+            <a:pPr algn="ctr"/>
+            <a:r>
+              <a:rPr lang="de-DE" dirty="0"/>
+              <a:t>PBKDF2-HMAC-SHA256</a:t>
+            </a:r>
+          </a:p>
+        </p:txBody>
+      </p:sp>
+      <p:sp>
+        <p:nvSpPr>
+          <p:cNvPr id="12" name="Rechteck 11">
+            <a:extLst>
+              <a:ext uri="{FF2B5EF4-FFF2-40B4-BE49-F238E27FC236}">
+                <a16:creationId xmlns:a16="http://schemas.microsoft.com/office/drawing/2014/main" id="{4DD0C6F4-E1A8-691E-1482-CE5626E2AA1A}"/>
+              </a:ext>
+            </a:extLst>
+          </p:cNvPr>
+          <p:cNvSpPr/>
+          <p:nvPr/>
+        </p:nvSpPr>
+        <p:spPr>
+          <a:xfrm>
+            <a:off x="9969500" y="4052888"/>
+            <a:ext cx="1111250" cy="2124075"/>
+          </a:xfrm>
+          <a:prstGeom prst="rect">
+            <a:avLst/>
+          </a:prstGeom>
+        </p:spPr>
+        <p:style>
+          <a:lnRef idx="2">
+            <a:schemeClr val="accent1">
+              <a:shade val="15000"/>
+            </a:schemeClr>
+          </a:lnRef>
+          <a:fillRef idx="1">
+            <a:schemeClr val="accent1"/>
+          </a:fillRef>
+          <a:effectRef idx="0">
+            <a:schemeClr val="accent1"/>
+          </a:effectRef>
+          <a:fontRef idx="minor">
+            <a:schemeClr val="lt1"/>
+          </a:fontRef>
+        </p:style>
+        <p:txBody>
+          <a:bodyPr rtlCol="0" anchor="ctr"/>
+          <a:lstStyle/>
+          <a:p>
+            <a:pPr algn="ctr"/>
+            <a:r>
+              <a:rPr lang="de-DE" dirty="0"/>
+              <a:t>Klartext</a:t>
+            </a:r>
+          </a:p>
+          <a:p>
+            <a:pPr algn="ctr"/>
+            <a:r>
+              <a:rPr lang="de-DE" dirty="0"/>
+              <a:t>Daten</a:t>
+            </a:r>
+          </a:p>
+        </p:txBody>
+      </p:sp>
+      <p:cxnSp>
+        <p:nvCxnSpPr>
+          <p:cNvPr id="16" name="Verbinder: gewinkelt 15">
+            <a:extLst>
+              <a:ext uri="{FF2B5EF4-FFF2-40B4-BE49-F238E27FC236}">
+                <a16:creationId xmlns:a16="http://schemas.microsoft.com/office/drawing/2014/main" id="{81234E06-A9F2-93EB-1CAE-E5A447A55000}"/>
+              </a:ext>
+            </a:extLst>
+          </p:cNvPr>
+          <p:cNvCxnSpPr>
+            <a:cxnSpLocks/>
+            <a:stCxn id="5" idx="3"/>
+            <a:endCxn id="9" idx="1"/>
+          </p:cNvCxnSpPr>
+          <p:nvPr/>
+        </p:nvCxnSpPr>
+        <p:spPr>
+          <a:xfrm>
+            <a:off x="3003550" y="2720975"/>
+            <a:ext cx="2787650" cy="681832"/>
+          </a:xfrm>
+          <a:prstGeom prst="bentConnector3">
+            <a:avLst>
+              <a:gd name="adj1" fmla="val 50000"/>
+            </a:avLst>
+          </a:prstGeom>
+          <a:ln w="57150">
+            <a:tailEnd type="triangle"/>
+          </a:ln>
+        </p:spPr>
+        <p:style>
+          <a:lnRef idx="2">
+            <a:schemeClr val="accent6"/>
+          </a:lnRef>
+          <a:fillRef idx="0">
+            <a:schemeClr val="accent6"/>
+          </a:fillRef>
+          <a:effectRef idx="1">
+            <a:schemeClr val="accent6"/>
+          </a:effectRef>
+          <a:fontRef idx="minor">
+            <a:schemeClr val="tx1"/>
+          </a:fontRef>
+        </p:style>
+      </p:cxnSp>
+      <p:cxnSp>
+        <p:nvCxnSpPr>
+          <p:cNvPr id="29" name="Verbinder: gewinkelt 28">
+            <a:extLst>
+              <a:ext uri="{FF2B5EF4-FFF2-40B4-BE49-F238E27FC236}">
+                <a16:creationId xmlns:a16="http://schemas.microsoft.com/office/drawing/2014/main" id="{D44191E1-B084-398A-7949-679C634281C4}"/>
+              </a:ext>
+            </a:extLst>
+          </p:cNvPr>
+          <p:cNvCxnSpPr>
+            <a:stCxn id="6" idx="3"/>
+          </p:cNvCxnSpPr>
+          <p:nvPr/>
+        </p:nvCxnSpPr>
+        <p:spPr>
+          <a:xfrm>
+            <a:off x="3003550" y="3280569"/>
+            <a:ext cx="1368425" cy="1355724"/>
+          </a:xfrm>
+          <a:prstGeom prst="bentConnector3">
+            <a:avLst/>
+          </a:prstGeom>
+          <a:ln w="57150">
+            <a:tailEnd type="triangle"/>
+          </a:ln>
+        </p:spPr>
+        <p:style>
+          <a:lnRef idx="2">
+            <a:schemeClr val="accent6"/>
+          </a:lnRef>
+          <a:fillRef idx="0">
+            <a:schemeClr val="accent6"/>
+          </a:fillRef>
+          <a:effectRef idx="1">
+            <a:schemeClr val="accent6"/>
+          </a:effectRef>
+          <a:fontRef idx="minor">
+            <a:schemeClr val="tx1"/>
+          </a:fontRef>
+        </p:style>
+      </p:cxnSp>
+      <p:cxnSp>
+        <p:nvCxnSpPr>
+          <p:cNvPr id="31" name="Verbinder: gewinkelt 30">
+            <a:extLst>
+              <a:ext uri="{FF2B5EF4-FFF2-40B4-BE49-F238E27FC236}">
+                <a16:creationId xmlns:a16="http://schemas.microsoft.com/office/drawing/2014/main" id="{0B22B8A4-404D-3D63-6BD2-B1B32A387D97}"/>
+              </a:ext>
+            </a:extLst>
+          </p:cNvPr>
+          <p:cNvCxnSpPr>
+            <a:cxnSpLocks/>
+            <a:stCxn id="7" idx="3"/>
+          </p:cNvCxnSpPr>
+          <p:nvPr/>
+        </p:nvCxnSpPr>
+        <p:spPr>
+          <a:xfrm flipV="1">
+            <a:off x="3003550" y="4855368"/>
+            <a:ext cx="1365250" cy="217885"/>
+          </a:xfrm>
+          <a:prstGeom prst="bentConnector3">
+            <a:avLst/>
+          </a:prstGeom>
+          <a:ln w="57150">
+            <a:tailEnd type="triangle"/>
+          </a:ln>
+        </p:spPr>
+        <p:style>
+          <a:lnRef idx="2">
+            <a:schemeClr val="accent6"/>
+          </a:lnRef>
+          <a:fillRef idx="0">
+            <a:schemeClr val="accent6"/>
+          </a:fillRef>
+          <a:effectRef idx="1">
+            <a:schemeClr val="accent6"/>
+          </a:effectRef>
+          <a:fontRef idx="minor">
+            <a:schemeClr val="tx1"/>
+          </a:fontRef>
+        </p:style>
+      </p:cxnSp>
+      <p:cxnSp>
+        <p:nvCxnSpPr>
+          <p:cNvPr id="38" name="Gerade Verbindung mit Pfeil 37">
+            <a:extLst>
+              <a:ext uri="{FF2B5EF4-FFF2-40B4-BE49-F238E27FC236}">
+                <a16:creationId xmlns:a16="http://schemas.microsoft.com/office/drawing/2014/main" id="{62ADD9B0-7CD7-0A15-9DA8-5A4BC61251D6}"/>
+              </a:ext>
+            </a:extLst>
+          </p:cNvPr>
+          <p:cNvCxnSpPr>
+            <a:cxnSpLocks/>
+            <a:stCxn id="8" idx="2"/>
+          </p:cNvCxnSpPr>
+          <p:nvPr/>
+        </p:nvCxnSpPr>
+        <p:spPr>
+          <a:xfrm>
+            <a:off x="8118475" y="2675413"/>
+            <a:ext cx="0" cy="386081"/>
+          </a:xfrm>
+          <a:prstGeom prst="straightConnector1">
+            <a:avLst/>
+          </a:prstGeom>
+          <a:ln w="57150">
+            <a:tailEnd type="triangle"/>
+          </a:ln>
+        </p:spPr>
+        <p:style>
+          <a:lnRef idx="2">
+            <a:schemeClr val="accent6"/>
+          </a:lnRef>
+          <a:fillRef idx="0">
+            <a:schemeClr val="accent6"/>
+          </a:fillRef>
+          <a:effectRef idx="1">
+            <a:schemeClr val="accent6"/>
+          </a:effectRef>
+          <a:fontRef idx="minor">
+            <a:schemeClr val="tx1"/>
+          </a:fontRef>
+        </p:style>
+      </p:cxnSp>
+      <p:cxnSp>
+        <p:nvCxnSpPr>
+          <p:cNvPr id="40" name="Gerade Verbindung mit Pfeil 39">
+            <a:extLst>
+              <a:ext uri="{FF2B5EF4-FFF2-40B4-BE49-F238E27FC236}">
+                <a16:creationId xmlns:a16="http://schemas.microsoft.com/office/drawing/2014/main" id="{D415F915-8103-B9D5-4BFF-3C661F683CE2}"/>
+              </a:ext>
+            </a:extLst>
+          </p:cNvPr>
+          <p:cNvCxnSpPr>
+            <a:stCxn id="9" idx="2"/>
+          </p:cNvCxnSpPr>
+          <p:nvPr/>
+        </p:nvCxnSpPr>
+        <p:spPr>
+          <a:xfrm>
+            <a:off x="7394575" y="3739357"/>
+            <a:ext cx="0" cy="313531"/>
+          </a:xfrm>
+          <a:prstGeom prst="straightConnector1">
+            <a:avLst/>
+          </a:prstGeom>
+          <a:ln w="57150">
+            <a:tailEnd type="triangle"/>
+          </a:ln>
+        </p:spPr>
+        <p:style>
+          <a:lnRef idx="2">
+            <a:schemeClr val="accent6"/>
+          </a:lnRef>
+          <a:fillRef idx="0">
+            <a:schemeClr val="accent6"/>
+          </a:fillRef>
+          <a:effectRef idx="1">
+            <a:schemeClr val="accent6"/>
+          </a:effectRef>
+          <a:fontRef idx="minor">
+            <a:schemeClr val="tx1"/>
+          </a:fontRef>
+        </p:style>
+      </p:cxnSp>
+      <p:cxnSp>
+        <p:nvCxnSpPr>
+          <p:cNvPr id="42" name="Gerade Verbindung mit Pfeil 41">
+            <a:extLst>
+              <a:ext uri="{FF2B5EF4-FFF2-40B4-BE49-F238E27FC236}">
+                <a16:creationId xmlns:a16="http://schemas.microsoft.com/office/drawing/2014/main" id="{4442EB5E-B1C9-F03B-3C9A-C5248AB1BCAE}"/>
+              </a:ext>
+            </a:extLst>
+          </p:cNvPr>
+          <p:cNvCxnSpPr/>
+          <p:nvPr/>
+        </p:nvCxnSpPr>
+        <p:spPr>
+          <a:xfrm>
+            <a:off x="8997950" y="4636293"/>
+            <a:ext cx="971550" cy="0"/>
+          </a:xfrm>
+          <a:prstGeom prst="straightConnector1">
+            <a:avLst/>
+          </a:prstGeom>
+          <a:ln w="57150">
+            <a:tailEnd type="triangle"/>
+          </a:ln>
+        </p:spPr>
+        <p:style>
+          <a:lnRef idx="2">
+            <a:schemeClr val="accent6"/>
+          </a:lnRef>
+          <a:fillRef idx="0">
+            <a:schemeClr val="accent6"/>
+          </a:fillRef>
+          <a:effectRef idx="1">
+            <a:schemeClr val="accent6"/>
+          </a:effectRef>
+          <a:fontRef idx="minor">
+            <a:schemeClr val="tx1"/>
+          </a:fontRef>
+        </p:style>
+      </p:cxnSp>
+      <p:sp>
+        <p:nvSpPr>
+          <p:cNvPr id="49" name="Rechteck 48">
+            <a:extLst>
+              <a:ext uri="{FF2B5EF4-FFF2-40B4-BE49-F238E27FC236}">
+                <a16:creationId xmlns:a16="http://schemas.microsoft.com/office/drawing/2014/main" id="{1A6FB173-7311-233C-B84E-D45721B41DCE}"/>
+              </a:ext>
+            </a:extLst>
+          </p:cNvPr>
+          <p:cNvSpPr/>
+          <p:nvPr/>
+        </p:nvSpPr>
+        <p:spPr>
+          <a:xfrm>
+            <a:off x="5219700" y="1992791"/>
+            <a:ext cx="1758950" cy="671512"/>
+          </a:xfrm>
+          <a:prstGeom prst="rect">
+            <a:avLst/>
+          </a:prstGeom>
+        </p:spPr>
+        <p:style>
+          <a:lnRef idx="2">
+            <a:schemeClr val="accent1">
+              <a:shade val="15000"/>
+            </a:schemeClr>
+          </a:lnRef>
+          <a:fillRef idx="1">
+            <a:schemeClr val="accent1"/>
+          </a:fillRef>
+          <a:effectRef idx="0">
+            <a:schemeClr val="accent1"/>
+          </a:effectRef>
+          <a:fontRef idx="minor">
+            <a:schemeClr val="lt1"/>
+          </a:fontRef>
+        </p:style>
+        <p:txBody>
+          <a:bodyPr rtlCol="0" anchor="ctr"/>
+          <a:lstStyle/>
+          <a:p>
+            <a:pPr algn="ctr"/>
+            <a:r>
+              <a:rPr lang="de-DE" dirty="0"/>
+              <a:t>Username</a:t>
+            </a:r>
+          </a:p>
+        </p:txBody>
+      </p:sp>
+      <p:cxnSp>
+        <p:nvCxnSpPr>
+          <p:cNvPr id="51" name="Gerade Verbindung mit Pfeil 50">
+            <a:extLst>
+              <a:ext uri="{FF2B5EF4-FFF2-40B4-BE49-F238E27FC236}">
+                <a16:creationId xmlns:a16="http://schemas.microsoft.com/office/drawing/2014/main" id="{ECFDC101-25A0-E13E-C092-B9F02CCFBEB8}"/>
+              </a:ext>
+            </a:extLst>
+          </p:cNvPr>
+          <p:cNvCxnSpPr>
+            <a:stCxn id="49" idx="1"/>
+          </p:cNvCxnSpPr>
+          <p:nvPr/>
+        </p:nvCxnSpPr>
+        <p:spPr>
+          <a:xfrm flipH="1">
+            <a:off x="3467100" y="2328547"/>
+            <a:ext cx="1752600" cy="11110"/>
+          </a:xfrm>
+          <a:prstGeom prst="straightConnector1">
+            <a:avLst/>
+          </a:prstGeom>
+          <a:ln w="57150">
+            <a:tailEnd type="triangle"/>
+          </a:ln>
+        </p:spPr>
+        <p:style>
+          <a:lnRef idx="2">
+            <a:schemeClr val="accent6"/>
+          </a:lnRef>
+          <a:fillRef idx="0">
+            <a:schemeClr val="accent6"/>
+          </a:fillRef>
+          <a:effectRef idx="1">
+            <a:schemeClr val="accent6"/>
+          </a:effectRef>
+          <a:fontRef idx="minor">
+            <a:schemeClr val="tx1"/>
+          </a:fontRef>
+        </p:style>
+      </p:cxnSp>
+      <p:sp>
+        <p:nvSpPr>
+          <p:cNvPr id="52" name="Textfeld 51">
+            <a:extLst>
+              <a:ext uri="{FF2B5EF4-FFF2-40B4-BE49-F238E27FC236}">
+                <a16:creationId xmlns:a16="http://schemas.microsoft.com/office/drawing/2014/main" id="{8ABF5ADD-F6A1-B199-ED18-FBABCDA7B561}"/>
+              </a:ext>
+            </a:extLst>
+          </p:cNvPr>
+          <p:cNvSpPr txBox="1"/>
+          <p:nvPr/>
+        </p:nvSpPr>
+        <p:spPr>
+          <a:xfrm>
+            <a:off x="3602990" y="2010270"/>
+            <a:ext cx="1296445" cy="307777"/>
+          </a:xfrm>
+          <a:prstGeom prst="rect">
+            <a:avLst/>
+          </a:prstGeom>
+          <a:noFill/>
+        </p:spPr>
+        <p:txBody>
+          <a:bodyPr wrap="none" rtlCol="0">
+            <a:spAutoFit/>
           </a:bodyPr>
           <a:lstStyle/>
           <a:p>
             <a:r>
-              <a:rPr lang="de-DE" sz="2000" dirty="0"/>
-              <a:t>Implementierung von Buttons (Bearbeiten, Kopieren, Anzeigen) in eine </a:t>
-            </a:r>
-            <a:r>
-              <a:rPr lang="de-DE" sz="2000" dirty="0" err="1"/>
-              <a:t>JTable</a:t>
-            </a:r>
-            <a:endParaRPr lang="de-DE" sz="2000" dirty="0"/>
+              <a:rPr lang="de-DE" sz="1400" dirty="0"/>
+              <a:t>Auswahl Datei</a:t>
+            </a:r>
+          </a:p>
+        </p:txBody>
+      </p:sp>
+      <p:sp>
+        <p:nvSpPr>
+          <p:cNvPr id="3" name="Pfeil: nach links 2">
+            <a:extLst>
+              <a:ext uri="{FF2B5EF4-FFF2-40B4-BE49-F238E27FC236}">
+                <a16:creationId xmlns:a16="http://schemas.microsoft.com/office/drawing/2014/main" id="{328B096A-B49E-A1E5-D4CE-E9B3F6A30548}"/>
+              </a:ext>
+            </a:extLst>
+          </p:cNvPr>
+          <p:cNvSpPr/>
+          <p:nvPr/>
+        </p:nvSpPr>
+        <p:spPr>
+          <a:xfrm rot="10800000">
+            <a:off x="4541520" y="5768340"/>
+            <a:ext cx="3576955" cy="759459"/>
+          </a:xfrm>
+          <a:prstGeom prst="leftArrow">
+            <a:avLst/>
+          </a:prstGeom>
+        </p:spPr>
+        <p:style>
+          <a:lnRef idx="2">
+            <a:schemeClr val="accent2">
+              <a:shade val="15000"/>
+            </a:schemeClr>
+          </a:lnRef>
+          <a:fillRef idx="1">
+            <a:schemeClr val="accent2"/>
+          </a:fillRef>
+          <a:effectRef idx="0">
+            <a:schemeClr val="accent2"/>
+          </a:effectRef>
+          <a:fontRef idx="minor">
+            <a:schemeClr val="lt1"/>
+          </a:fontRef>
+        </p:style>
+        <p:txBody>
+          <a:bodyPr rtlCol="0" anchor="ctr"/>
+          <a:lstStyle/>
+          <a:p>
+            <a:pPr algn="ctr"/>
+            <a:endParaRPr lang="de-DE"/>
           </a:p>
         </p:txBody>
       </p:sp>
     </p:spTree>
     <p:extLst>
       <p:ext uri="{BB962C8B-B14F-4D97-AF65-F5344CB8AC3E}">
-        <p14:creationId xmlns:p14="http://schemas.microsoft.com/office/powerpoint/2010/main" val="3903202141"/>
+        <p14:creationId xmlns:p14="http://schemas.microsoft.com/office/powerpoint/2010/main" val="290165874"/>
       </p:ext>
     </p:extLst>
   </p:cSld>

--- a/pp/Presentation.pptx
+++ b/pp/Presentation.pptx
@@ -270,7 +270,7 @@
           <a:p>
             <a:fld id="{F5C0AC7C-E257-4BDA-94CB-CB11724BB9D3}" type="datetimeFigureOut">
               <a:rPr lang="de-DE" smtClean="0"/>
-              <a:t>26.04.2025</a:t>
+              <a:t>01.06.2025</a:t>
             </a:fld>
             <a:endParaRPr lang="de-DE"/>
           </a:p>
@@ -468,7 +468,7 @@
           <a:p>
             <a:fld id="{F5C0AC7C-E257-4BDA-94CB-CB11724BB9D3}" type="datetimeFigureOut">
               <a:rPr lang="de-DE" smtClean="0"/>
-              <a:t>26.04.2025</a:t>
+              <a:t>01.06.2025</a:t>
             </a:fld>
             <a:endParaRPr lang="de-DE"/>
           </a:p>
@@ -676,7 +676,7 @@
           <a:p>
             <a:fld id="{F5C0AC7C-E257-4BDA-94CB-CB11724BB9D3}" type="datetimeFigureOut">
               <a:rPr lang="de-DE" smtClean="0"/>
-              <a:t>26.04.2025</a:t>
+              <a:t>01.06.2025</a:t>
             </a:fld>
             <a:endParaRPr lang="de-DE"/>
           </a:p>
@@ -874,7 +874,7 @@
           <a:p>
             <a:fld id="{F5C0AC7C-E257-4BDA-94CB-CB11724BB9D3}" type="datetimeFigureOut">
               <a:rPr lang="de-DE" smtClean="0"/>
-              <a:t>26.04.2025</a:t>
+              <a:t>01.06.2025</a:t>
             </a:fld>
             <a:endParaRPr lang="de-DE"/>
           </a:p>
@@ -1149,7 +1149,7 @@
           <a:p>
             <a:fld id="{F5C0AC7C-E257-4BDA-94CB-CB11724BB9D3}" type="datetimeFigureOut">
               <a:rPr lang="de-DE" smtClean="0"/>
-              <a:t>26.04.2025</a:t>
+              <a:t>01.06.2025</a:t>
             </a:fld>
             <a:endParaRPr lang="de-DE"/>
           </a:p>
@@ -1414,7 +1414,7 @@
           <a:p>
             <a:fld id="{F5C0AC7C-E257-4BDA-94CB-CB11724BB9D3}" type="datetimeFigureOut">
               <a:rPr lang="de-DE" smtClean="0"/>
-              <a:t>26.04.2025</a:t>
+              <a:t>01.06.2025</a:t>
             </a:fld>
             <a:endParaRPr lang="de-DE"/>
           </a:p>
@@ -1826,7 +1826,7 @@
           <a:p>
             <a:fld id="{F5C0AC7C-E257-4BDA-94CB-CB11724BB9D3}" type="datetimeFigureOut">
               <a:rPr lang="de-DE" smtClean="0"/>
-              <a:t>26.04.2025</a:t>
+              <a:t>01.06.2025</a:t>
             </a:fld>
             <a:endParaRPr lang="de-DE"/>
           </a:p>
@@ -1967,7 +1967,7 @@
           <a:p>
             <a:fld id="{F5C0AC7C-E257-4BDA-94CB-CB11724BB9D3}" type="datetimeFigureOut">
               <a:rPr lang="de-DE" smtClean="0"/>
-              <a:t>26.04.2025</a:t>
+              <a:t>01.06.2025</a:t>
             </a:fld>
             <a:endParaRPr lang="de-DE"/>
           </a:p>
@@ -2080,7 +2080,7 @@
           <a:p>
             <a:fld id="{F5C0AC7C-E257-4BDA-94CB-CB11724BB9D3}" type="datetimeFigureOut">
               <a:rPr lang="de-DE" smtClean="0"/>
-              <a:t>26.04.2025</a:t>
+              <a:t>01.06.2025</a:t>
             </a:fld>
             <a:endParaRPr lang="de-DE"/>
           </a:p>
@@ -2391,7 +2391,7 @@
           <a:p>
             <a:fld id="{F5C0AC7C-E257-4BDA-94CB-CB11724BB9D3}" type="datetimeFigureOut">
               <a:rPr lang="de-DE" smtClean="0"/>
-              <a:t>26.04.2025</a:t>
+              <a:t>01.06.2025</a:t>
             </a:fld>
             <a:endParaRPr lang="de-DE"/>
           </a:p>
@@ -2679,7 +2679,7 @@
           <a:p>
             <a:fld id="{F5C0AC7C-E257-4BDA-94CB-CB11724BB9D3}" type="datetimeFigureOut">
               <a:rPr lang="de-DE" smtClean="0"/>
-              <a:t>26.04.2025</a:t>
+              <a:t>01.06.2025</a:t>
             </a:fld>
             <a:endParaRPr lang="de-DE"/>
           </a:p>
@@ -2920,7 +2920,7 @@
           <a:p>
             <a:fld id="{F5C0AC7C-E257-4BDA-94CB-CB11724BB9D3}" type="datetimeFigureOut">
               <a:rPr lang="de-DE" smtClean="0"/>
-              <a:t>26.04.2025</a:t>
+              <a:t>01.06.2025</a:t>
             </a:fld>
             <a:endParaRPr lang="de-DE"/>
           </a:p>
@@ -5346,8 +5346,25 @@
           <a:lstStyle/>
           <a:p>
             <a:r>
-              <a:rPr lang="de-DE" sz="2000" dirty="0"/>
-              <a:t>Implementierung von Buttons (Bearbeiten, Kopieren, Anzeigen) in eine JTable</a:t>
+              <a:rPr lang="de-DE" dirty="0"/>
+              <a:t>Implementierung von Buttons (Bearbeiten, Kopieren, Anzeigen) in eine </a:t>
+            </a:r>
+            <a:r>
+              <a:rPr lang="de-DE" dirty="0" err="1"/>
+              <a:t>JTable</a:t>
+            </a:r>
+            <a:endParaRPr lang="de-DE" dirty="0"/>
+          </a:p>
+          <a:p>
+            <a:r>
+              <a:rPr lang="de-DE" dirty="0"/>
+              <a:t>Generell Dark Mode</a:t>
+            </a:r>
+          </a:p>
+          <a:p>
+            <a:r>
+              <a:rPr lang="de-DE" dirty="0"/>
+              <a:t>Aufteilung von Code in mehrere Files</a:t>
             </a:r>
           </a:p>
         </p:txBody>
@@ -5450,12 +5467,79 @@
               <a:buChar char="Ø"/>
             </a:pPr>
             <a:r>
+              <a:rPr lang="de-DE" sz="2000" dirty="0"/>
+              <a:t>Aufwändiger Umbau von Passwort-Speicherung in JSON-Datei als Klartext zu Binär Dateien</a:t>
+            </a:r>
+          </a:p>
+          <a:p>
+            <a:r>
               <a:rPr lang="de-DE" dirty="0"/>
-              <a:t>Aufwändiger Umbau von Passwort-Speicherung in JSON-Datei als Klartext zu Binär Dateien</a:t>
-            </a:r>
-          </a:p>
-        </p:txBody>
-      </p:sp>
+              <a:t>Alles, was mehrmals verwendet wird in Funktionen packen</a:t>
+            </a:r>
+          </a:p>
+          <a:p>
+            <a:pPr lvl="1">
+              <a:buFont typeface="Wingdings" panose="05000000000000000000" pitchFamily="2" charset="2"/>
+              <a:buChar char="Ø"/>
+            </a:pPr>
+            <a:r>
+              <a:rPr lang="de-DE" sz="2000" dirty="0"/>
+              <a:t>beim benutzen des Dateinamens beim speichern/laden </a:t>
+            </a:r>
+            <a:r>
+              <a:rPr lang="de-DE" sz="2000" dirty="0">
+                <a:sym typeface="Wingdings" panose="05000000000000000000" pitchFamily="2" charset="2"/>
+              </a:rPr>
+              <a:t> jede Funktion musste geändert werden bei der Umstellung von JSON </a:t>
+            </a:r>
+            <a:r>
+              <a:rPr lang="de-DE" sz="2000">
+                <a:sym typeface="Wingdings" panose="05000000000000000000" pitchFamily="2" charset="2"/>
+              </a:rPr>
+              <a:t>zu Binär</a:t>
+            </a:r>
+            <a:endParaRPr lang="de-DE" sz="2000" dirty="0">
+              <a:sym typeface="Wingdings" panose="05000000000000000000" pitchFamily="2" charset="2"/>
+            </a:endParaRPr>
+          </a:p>
+          <a:p>
+            <a:pPr marL="457200" lvl="1" indent="0">
+              <a:buNone/>
+            </a:pPr>
+            <a:endParaRPr lang="de-DE" dirty="0"/>
+          </a:p>
+        </p:txBody>
+      </p:sp>
+      <p:pic>
+        <p:nvPicPr>
+          <p:cNvPr id="5" name="Grafik 4">
+            <a:extLst>
+              <a:ext uri="{FF2B5EF4-FFF2-40B4-BE49-F238E27FC236}">
+                <a16:creationId xmlns:a16="http://schemas.microsoft.com/office/drawing/2014/main" id="{45C9BF98-93C5-432E-75D6-4F604DC2AA09}"/>
+              </a:ext>
+            </a:extLst>
+          </p:cNvPr>
+          <p:cNvPicPr>
+            <a:picLocks noChangeAspect="1"/>
+          </p:cNvPicPr>
+          <p:nvPr/>
+        </p:nvPicPr>
+        <p:blipFill>
+          <a:blip r:embed="rId2"/>
+          <a:stretch>
+            <a:fillRect/>
+          </a:stretch>
+        </p:blipFill>
+        <p:spPr>
+          <a:xfrm>
+            <a:off x="1609388" y="4081418"/>
+            <a:ext cx="6582112" cy="871544"/>
+          </a:xfrm>
+          <a:prstGeom prst="rect">
+            <a:avLst/>
+          </a:prstGeom>
+        </p:spPr>
+      </p:pic>
     </p:spTree>
     <p:extLst>
       <p:ext uri="{BB962C8B-B14F-4D97-AF65-F5344CB8AC3E}">

--- a/pp/Presentation.pptx
+++ b/pp/Presentation.pptx
@@ -4,14 +4,17 @@
   <p:sldMasterIdLst>
     <p:sldMasterId id="2147483648" r:id="rId1"/>
   </p:sldMasterIdLst>
+  <p:notesMasterIdLst>
+    <p:notesMasterId r:id="rId14"/>
+  </p:notesMasterIdLst>
   <p:sldIdLst>
     <p:sldId id="256" r:id="rId2"/>
     <p:sldId id="257" r:id="rId3"/>
     <p:sldId id="258" r:id="rId4"/>
     <p:sldId id="261" r:id="rId5"/>
     <p:sldId id="265" r:id="rId6"/>
-    <p:sldId id="259" r:id="rId7"/>
-    <p:sldId id="266" r:id="rId8"/>
+    <p:sldId id="266" r:id="rId7"/>
+    <p:sldId id="268" r:id="rId8"/>
     <p:sldId id="263" r:id="rId9"/>
     <p:sldId id="267" r:id="rId10"/>
     <p:sldId id="262" r:id="rId11"/>
@@ -123,6 +126,447 @@
 </p:presentation>
 </file>
 
+<file path=ppt/notesMasters/notesMaster1.xml><?xml version="1.0" encoding="utf-8"?>
+<p:notesMaster xmlns:a="http://schemas.openxmlformats.org/drawingml/2006/main" xmlns:r="http://schemas.openxmlformats.org/officeDocument/2006/relationships" xmlns:p="http://schemas.openxmlformats.org/presentationml/2006/main">
+  <p:cSld>
+    <p:bg>
+      <p:bgRef idx="1001">
+        <a:schemeClr val="bg1"/>
+      </p:bgRef>
+    </p:bg>
+    <p:spTree>
+      <p:nvGrpSpPr>
+        <p:cNvPr id="1" name=""/>
+        <p:cNvGrpSpPr/>
+        <p:nvPr/>
+      </p:nvGrpSpPr>
+      <p:grpSpPr>
+        <a:xfrm>
+          <a:off x="0" y="0"/>
+          <a:ext cx="0" cy="0"/>
+          <a:chOff x="0" y="0"/>
+          <a:chExt cx="0" cy="0"/>
+        </a:xfrm>
+      </p:grpSpPr>
+      <p:sp>
+        <p:nvSpPr>
+          <p:cNvPr id="2" name="Kopfzeilenplatzhalter 1"/>
+          <p:cNvSpPr>
+            <a:spLocks noGrp="1"/>
+          </p:cNvSpPr>
+          <p:nvPr>
+            <p:ph type="hdr" sz="quarter"/>
+          </p:nvPr>
+        </p:nvSpPr>
+        <p:spPr>
+          <a:xfrm>
+            <a:off x="0" y="0"/>
+            <a:ext cx="2971800" cy="458788"/>
+          </a:xfrm>
+          <a:prstGeom prst="rect">
+            <a:avLst/>
+          </a:prstGeom>
+        </p:spPr>
+        <p:txBody>
+          <a:bodyPr vert="horz" lIns="91440" tIns="45720" rIns="91440" bIns="45720" rtlCol="0"/>
+          <a:lstStyle>
+            <a:lvl1pPr algn="l">
+              <a:defRPr sz="1200"/>
+            </a:lvl1pPr>
+          </a:lstStyle>
+          <a:p>
+            <a:endParaRPr lang="de-DE"/>
+          </a:p>
+        </p:txBody>
+      </p:sp>
+      <p:sp>
+        <p:nvSpPr>
+          <p:cNvPr id="3" name="Datumsplatzhalter 2"/>
+          <p:cNvSpPr>
+            <a:spLocks noGrp="1"/>
+          </p:cNvSpPr>
+          <p:nvPr>
+            <p:ph type="dt" idx="1"/>
+          </p:nvPr>
+        </p:nvSpPr>
+        <p:spPr>
+          <a:xfrm>
+            <a:off x="3884613" y="0"/>
+            <a:ext cx="2971800" cy="458788"/>
+          </a:xfrm>
+          <a:prstGeom prst="rect">
+            <a:avLst/>
+          </a:prstGeom>
+        </p:spPr>
+        <p:txBody>
+          <a:bodyPr vert="horz" lIns="91440" tIns="45720" rIns="91440" bIns="45720" rtlCol="0"/>
+          <a:lstStyle>
+            <a:lvl1pPr algn="r">
+              <a:defRPr sz="1200"/>
+            </a:lvl1pPr>
+          </a:lstStyle>
+          <a:p>
+            <a:fld id="{DDD49E97-71FD-4B93-A92A-9821E4151A6C}" type="datetimeFigureOut">
+              <a:rPr lang="de-DE" smtClean="0"/>
+              <a:t>03.06.2025</a:t>
+            </a:fld>
+            <a:endParaRPr lang="de-DE"/>
+          </a:p>
+        </p:txBody>
+      </p:sp>
+      <p:sp>
+        <p:nvSpPr>
+          <p:cNvPr id="4" name="Folienbildplatzhalter 3"/>
+          <p:cNvSpPr>
+            <a:spLocks noGrp="1" noRot="1" noChangeAspect="1"/>
+          </p:cNvSpPr>
+          <p:nvPr>
+            <p:ph type="sldImg" idx="2"/>
+          </p:nvPr>
+        </p:nvSpPr>
+        <p:spPr>
+          <a:xfrm>
+            <a:off x="685800" y="1143000"/>
+            <a:ext cx="5486400" cy="3086100"/>
+          </a:xfrm>
+          <a:prstGeom prst="rect">
+            <a:avLst/>
+          </a:prstGeom>
+          <a:noFill/>
+          <a:ln w="12700">
+            <a:solidFill>
+              <a:prstClr val="black"/>
+            </a:solidFill>
+          </a:ln>
+        </p:spPr>
+        <p:txBody>
+          <a:bodyPr vert="horz" lIns="91440" tIns="45720" rIns="91440" bIns="45720" rtlCol="0" anchor="ctr"/>
+          <a:lstStyle/>
+          <a:p>
+            <a:endParaRPr lang="de-DE"/>
+          </a:p>
+        </p:txBody>
+      </p:sp>
+      <p:sp>
+        <p:nvSpPr>
+          <p:cNvPr id="5" name="Notizenplatzhalter 4"/>
+          <p:cNvSpPr>
+            <a:spLocks noGrp="1"/>
+          </p:cNvSpPr>
+          <p:nvPr>
+            <p:ph type="body" sz="quarter" idx="3"/>
+          </p:nvPr>
+        </p:nvSpPr>
+        <p:spPr>
+          <a:xfrm>
+            <a:off x="685800" y="4400550"/>
+            <a:ext cx="5486400" cy="3600450"/>
+          </a:xfrm>
+          <a:prstGeom prst="rect">
+            <a:avLst/>
+          </a:prstGeom>
+        </p:spPr>
+        <p:txBody>
+          <a:bodyPr vert="horz" lIns="91440" tIns="45720" rIns="91440" bIns="45720" rtlCol="0"/>
+          <a:lstStyle/>
+          <a:p>
+            <a:pPr lvl="0"/>
+            <a:r>
+              <a:rPr lang="de-DE"/>
+              <a:t>Mastertextformat bearbeiten</a:t>
+            </a:r>
+          </a:p>
+          <a:p>
+            <a:pPr lvl="1"/>
+            <a:r>
+              <a:rPr lang="de-DE"/>
+              <a:t>Zweite Ebene</a:t>
+            </a:r>
+          </a:p>
+          <a:p>
+            <a:pPr lvl="2"/>
+            <a:r>
+              <a:rPr lang="de-DE"/>
+              <a:t>Dritte Ebene</a:t>
+            </a:r>
+          </a:p>
+          <a:p>
+            <a:pPr lvl="3"/>
+            <a:r>
+              <a:rPr lang="de-DE"/>
+              <a:t>Vierte Ebene</a:t>
+            </a:r>
+          </a:p>
+          <a:p>
+            <a:pPr lvl="4"/>
+            <a:r>
+              <a:rPr lang="de-DE"/>
+              <a:t>Fünfte Ebene</a:t>
+            </a:r>
+          </a:p>
+        </p:txBody>
+      </p:sp>
+      <p:sp>
+        <p:nvSpPr>
+          <p:cNvPr id="6" name="Fußzeilenplatzhalter 5"/>
+          <p:cNvSpPr>
+            <a:spLocks noGrp="1"/>
+          </p:cNvSpPr>
+          <p:nvPr>
+            <p:ph type="ftr" sz="quarter" idx="4"/>
+          </p:nvPr>
+        </p:nvSpPr>
+        <p:spPr>
+          <a:xfrm>
+            <a:off x="0" y="8685213"/>
+            <a:ext cx="2971800" cy="458787"/>
+          </a:xfrm>
+          <a:prstGeom prst="rect">
+            <a:avLst/>
+          </a:prstGeom>
+        </p:spPr>
+        <p:txBody>
+          <a:bodyPr vert="horz" lIns="91440" tIns="45720" rIns="91440" bIns="45720" rtlCol="0" anchor="b"/>
+          <a:lstStyle>
+            <a:lvl1pPr algn="l">
+              <a:defRPr sz="1200"/>
+            </a:lvl1pPr>
+          </a:lstStyle>
+          <a:p>
+            <a:endParaRPr lang="de-DE"/>
+          </a:p>
+        </p:txBody>
+      </p:sp>
+      <p:sp>
+        <p:nvSpPr>
+          <p:cNvPr id="7" name="Foliennummernplatzhalter 6"/>
+          <p:cNvSpPr>
+            <a:spLocks noGrp="1"/>
+          </p:cNvSpPr>
+          <p:nvPr>
+            <p:ph type="sldNum" sz="quarter" idx="5"/>
+          </p:nvPr>
+        </p:nvSpPr>
+        <p:spPr>
+          <a:xfrm>
+            <a:off x="3884613" y="8685213"/>
+            <a:ext cx="2971800" cy="458787"/>
+          </a:xfrm>
+          <a:prstGeom prst="rect">
+            <a:avLst/>
+          </a:prstGeom>
+        </p:spPr>
+        <p:txBody>
+          <a:bodyPr vert="horz" lIns="91440" tIns="45720" rIns="91440" bIns="45720" rtlCol="0" anchor="b"/>
+          <a:lstStyle>
+            <a:lvl1pPr algn="r">
+              <a:defRPr sz="1200"/>
+            </a:lvl1pPr>
+          </a:lstStyle>
+          <a:p>
+            <a:fld id="{8C0078F9-8374-48A3-B3BA-E95D6F4ADC3F}" type="slidenum">
+              <a:rPr lang="de-DE" smtClean="0"/>
+              <a:t>‹Nr.›</a:t>
+            </a:fld>
+            <a:endParaRPr lang="de-DE"/>
+          </a:p>
+        </p:txBody>
+      </p:sp>
+    </p:spTree>
+    <p:extLst>
+      <p:ext uri="{BB962C8B-B14F-4D97-AF65-F5344CB8AC3E}">
+        <p14:creationId xmlns:p14="http://schemas.microsoft.com/office/powerpoint/2010/main" val="2912305739"/>
+      </p:ext>
+    </p:extLst>
+  </p:cSld>
+  <p:clrMap bg1="lt1" tx1="dk1" bg2="lt2" tx2="dk2" accent1="accent1" accent2="accent2" accent3="accent3" accent4="accent4" accent5="accent5" accent6="accent6" hlink="hlink" folHlink="folHlink"/>
+  <p:notesStyle>
+    <a:lvl1pPr marL="0" algn="l" defTabSz="914400" rtl="0" eaLnBrk="1" latinLnBrk="0" hangingPunct="1">
+      <a:defRPr sz="1200" kern="1200">
+        <a:solidFill>
+          <a:schemeClr val="tx1"/>
+        </a:solidFill>
+        <a:latin typeface="+mn-lt"/>
+        <a:ea typeface="+mn-ea"/>
+        <a:cs typeface="+mn-cs"/>
+      </a:defRPr>
+    </a:lvl1pPr>
+    <a:lvl2pPr marL="457200" algn="l" defTabSz="914400" rtl="0" eaLnBrk="1" latinLnBrk="0" hangingPunct="1">
+      <a:defRPr sz="1200" kern="1200">
+        <a:solidFill>
+          <a:schemeClr val="tx1"/>
+        </a:solidFill>
+        <a:latin typeface="+mn-lt"/>
+        <a:ea typeface="+mn-ea"/>
+        <a:cs typeface="+mn-cs"/>
+      </a:defRPr>
+    </a:lvl2pPr>
+    <a:lvl3pPr marL="914400" algn="l" defTabSz="914400" rtl="0" eaLnBrk="1" latinLnBrk="0" hangingPunct="1">
+      <a:defRPr sz="1200" kern="1200">
+        <a:solidFill>
+          <a:schemeClr val="tx1"/>
+        </a:solidFill>
+        <a:latin typeface="+mn-lt"/>
+        <a:ea typeface="+mn-ea"/>
+        <a:cs typeface="+mn-cs"/>
+      </a:defRPr>
+    </a:lvl3pPr>
+    <a:lvl4pPr marL="1371600" algn="l" defTabSz="914400" rtl="0" eaLnBrk="1" latinLnBrk="0" hangingPunct="1">
+      <a:defRPr sz="1200" kern="1200">
+        <a:solidFill>
+          <a:schemeClr val="tx1"/>
+        </a:solidFill>
+        <a:latin typeface="+mn-lt"/>
+        <a:ea typeface="+mn-ea"/>
+        <a:cs typeface="+mn-cs"/>
+      </a:defRPr>
+    </a:lvl4pPr>
+    <a:lvl5pPr marL="1828800" algn="l" defTabSz="914400" rtl="0" eaLnBrk="1" latinLnBrk="0" hangingPunct="1">
+      <a:defRPr sz="1200" kern="1200">
+        <a:solidFill>
+          <a:schemeClr val="tx1"/>
+        </a:solidFill>
+        <a:latin typeface="+mn-lt"/>
+        <a:ea typeface="+mn-ea"/>
+        <a:cs typeface="+mn-cs"/>
+      </a:defRPr>
+    </a:lvl5pPr>
+    <a:lvl6pPr marL="2286000" algn="l" defTabSz="914400" rtl="0" eaLnBrk="1" latinLnBrk="0" hangingPunct="1">
+      <a:defRPr sz="1200" kern="1200">
+        <a:solidFill>
+          <a:schemeClr val="tx1"/>
+        </a:solidFill>
+        <a:latin typeface="+mn-lt"/>
+        <a:ea typeface="+mn-ea"/>
+        <a:cs typeface="+mn-cs"/>
+      </a:defRPr>
+    </a:lvl6pPr>
+    <a:lvl7pPr marL="2743200" algn="l" defTabSz="914400" rtl="0" eaLnBrk="1" latinLnBrk="0" hangingPunct="1">
+      <a:defRPr sz="1200" kern="1200">
+        <a:solidFill>
+          <a:schemeClr val="tx1"/>
+        </a:solidFill>
+        <a:latin typeface="+mn-lt"/>
+        <a:ea typeface="+mn-ea"/>
+        <a:cs typeface="+mn-cs"/>
+      </a:defRPr>
+    </a:lvl7pPr>
+    <a:lvl8pPr marL="3200400" algn="l" defTabSz="914400" rtl="0" eaLnBrk="1" latinLnBrk="0" hangingPunct="1">
+      <a:defRPr sz="1200" kern="1200">
+        <a:solidFill>
+          <a:schemeClr val="tx1"/>
+        </a:solidFill>
+        <a:latin typeface="+mn-lt"/>
+        <a:ea typeface="+mn-ea"/>
+        <a:cs typeface="+mn-cs"/>
+      </a:defRPr>
+    </a:lvl8pPr>
+    <a:lvl9pPr marL="3657600" algn="l" defTabSz="914400" rtl="0" eaLnBrk="1" latinLnBrk="0" hangingPunct="1">
+      <a:defRPr sz="1200" kern="1200">
+        <a:solidFill>
+          <a:schemeClr val="tx1"/>
+        </a:solidFill>
+        <a:latin typeface="+mn-lt"/>
+        <a:ea typeface="+mn-ea"/>
+        <a:cs typeface="+mn-cs"/>
+      </a:defRPr>
+    </a:lvl9pPr>
+  </p:notesStyle>
+</p:notesMaster>
+</file>
+
+<file path=ppt/notesSlides/notesSlide1.xml><?xml version="1.0" encoding="utf-8"?>
+<p:notes xmlns:a="http://schemas.openxmlformats.org/drawingml/2006/main" xmlns:r="http://schemas.openxmlformats.org/officeDocument/2006/relationships" xmlns:p="http://schemas.openxmlformats.org/presentationml/2006/main">
+  <p:cSld>
+    <p:spTree>
+      <p:nvGrpSpPr>
+        <p:cNvPr id="1" name=""/>
+        <p:cNvGrpSpPr/>
+        <p:nvPr/>
+      </p:nvGrpSpPr>
+      <p:grpSpPr>
+        <a:xfrm>
+          <a:off x="0" y="0"/>
+          <a:ext cx="0" cy="0"/>
+          <a:chOff x="0" y="0"/>
+          <a:chExt cx="0" cy="0"/>
+        </a:xfrm>
+      </p:grpSpPr>
+      <p:sp>
+        <p:nvSpPr>
+          <p:cNvPr id="2" name="Folienbildplatzhalter 1"/>
+          <p:cNvSpPr>
+            <a:spLocks noGrp="1" noRot="1" noChangeAspect="1"/>
+          </p:cNvSpPr>
+          <p:nvPr>
+            <p:ph type="sldImg"/>
+          </p:nvPr>
+        </p:nvSpPr>
+        <p:spPr/>
+      </p:sp>
+      <p:sp>
+        <p:nvSpPr>
+          <p:cNvPr id="3" name="Notizenplatzhalter 2"/>
+          <p:cNvSpPr>
+            <a:spLocks noGrp="1"/>
+          </p:cNvSpPr>
+          <p:nvPr>
+            <p:ph type="body" idx="1"/>
+          </p:nvPr>
+        </p:nvSpPr>
+        <p:spPr/>
+        <p:txBody>
+          <a:bodyPr/>
+          <a:lstStyle/>
+          <a:p>
+            <a:r>
+              <a:rPr lang="de-DE" dirty="0"/>
+              <a:t>Lokale Version ist </a:t>
+            </a:r>
+            <a:r>
+              <a:rPr lang="de-DE" dirty="0" err="1"/>
+              <a:t>akuteller</a:t>
+            </a:r>
+            <a:endParaRPr lang="de-DE" dirty="0"/>
+          </a:p>
+        </p:txBody>
+      </p:sp>
+      <p:sp>
+        <p:nvSpPr>
+          <p:cNvPr id="4" name="Foliennummernplatzhalter 3"/>
+          <p:cNvSpPr>
+            <a:spLocks noGrp="1"/>
+          </p:cNvSpPr>
+          <p:nvPr>
+            <p:ph type="sldNum" sz="quarter" idx="5"/>
+          </p:nvPr>
+        </p:nvSpPr>
+        <p:spPr/>
+        <p:txBody>
+          <a:bodyPr/>
+          <a:lstStyle/>
+          <a:p>
+            <a:fld id="{8C0078F9-8374-48A3-B3BA-E95D6F4ADC3F}" type="slidenum">
+              <a:rPr lang="de-DE" smtClean="0"/>
+              <a:t>4</a:t>
+            </a:fld>
+            <a:endParaRPr lang="de-DE"/>
+          </a:p>
+        </p:txBody>
+      </p:sp>
+    </p:spTree>
+    <p:extLst>
+      <p:ext uri="{BB962C8B-B14F-4D97-AF65-F5344CB8AC3E}">
+        <p14:creationId xmlns:p14="http://schemas.microsoft.com/office/powerpoint/2010/main" val="2483607580"/>
+      </p:ext>
+    </p:extLst>
+  </p:cSld>
+  <p:clrMapOvr>
+    <a:masterClrMapping/>
+  </p:clrMapOvr>
+</p:notes>
+</file>
+
 <file path=ppt/slideLayouts/slideLayout1.xml><?xml version="1.0" encoding="utf-8"?>
 <p:sldLayout xmlns:a="http://schemas.openxmlformats.org/drawingml/2006/main" xmlns:r="http://schemas.openxmlformats.org/officeDocument/2006/relationships" xmlns:p="http://schemas.openxmlformats.org/presentationml/2006/main" type="title" preserve="1">
   <p:cSld name="Titelfolie">
@@ -270,7 +714,7 @@
           <a:p>
             <a:fld id="{F5C0AC7C-E257-4BDA-94CB-CB11724BB9D3}" type="datetimeFigureOut">
               <a:rPr lang="de-DE" smtClean="0"/>
-              <a:t>01.06.2025</a:t>
+              <a:t>03.06.2025</a:t>
             </a:fld>
             <a:endParaRPr lang="de-DE"/>
           </a:p>
@@ -468,7 +912,7 @@
           <a:p>
             <a:fld id="{F5C0AC7C-E257-4BDA-94CB-CB11724BB9D3}" type="datetimeFigureOut">
               <a:rPr lang="de-DE" smtClean="0"/>
-              <a:t>01.06.2025</a:t>
+              <a:t>03.06.2025</a:t>
             </a:fld>
             <a:endParaRPr lang="de-DE"/>
           </a:p>
@@ -676,7 +1120,7 @@
           <a:p>
             <a:fld id="{F5C0AC7C-E257-4BDA-94CB-CB11724BB9D3}" type="datetimeFigureOut">
               <a:rPr lang="de-DE" smtClean="0"/>
-              <a:t>01.06.2025</a:t>
+              <a:t>03.06.2025</a:t>
             </a:fld>
             <a:endParaRPr lang="de-DE"/>
           </a:p>
@@ -874,7 +1318,7 @@
           <a:p>
             <a:fld id="{F5C0AC7C-E257-4BDA-94CB-CB11724BB9D3}" type="datetimeFigureOut">
               <a:rPr lang="de-DE" smtClean="0"/>
-              <a:t>01.06.2025</a:t>
+              <a:t>03.06.2025</a:t>
             </a:fld>
             <a:endParaRPr lang="de-DE"/>
           </a:p>
@@ -1149,7 +1593,7 @@
           <a:p>
             <a:fld id="{F5C0AC7C-E257-4BDA-94CB-CB11724BB9D3}" type="datetimeFigureOut">
               <a:rPr lang="de-DE" smtClean="0"/>
-              <a:t>01.06.2025</a:t>
+              <a:t>03.06.2025</a:t>
             </a:fld>
             <a:endParaRPr lang="de-DE"/>
           </a:p>
@@ -1414,7 +1858,7 @@
           <a:p>
             <a:fld id="{F5C0AC7C-E257-4BDA-94CB-CB11724BB9D3}" type="datetimeFigureOut">
               <a:rPr lang="de-DE" smtClean="0"/>
-              <a:t>01.06.2025</a:t>
+              <a:t>03.06.2025</a:t>
             </a:fld>
             <a:endParaRPr lang="de-DE"/>
           </a:p>
@@ -1826,7 +2270,7 @@
           <a:p>
             <a:fld id="{F5C0AC7C-E257-4BDA-94CB-CB11724BB9D3}" type="datetimeFigureOut">
               <a:rPr lang="de-DE" smtClean="0"/>
-              <a:t>01.06.2025</a:t>
+              <a:t>03.06.2025</a:t>
             </a:fld>
             <a:endParaRPr lang="de-DE"/>
           </a:p>
@@ -1967,7 +2411,7 @@
           <a:p>
             <a:fld id="{F5C0AC7C-E257-4BDA-94CB-CB11724BB9D3}" type="datetimeFigureOut">
               <a:rPr lang="de-DE" smtClean="0"/>
-              <a:t>01.06.2025</a:t>
+              <a:t>03.06.2025</a:t>
             </a:fld>
             <a:endParaRPr lang="de-DE"/>
           </a:p>
@@ -2080,7 +2524,7 @@
           <a:p>
             <a:fld id="{F5C0AC7C-E257-4BDA-94CB-CB11724BB9D3}" type="datetimeFigureOut">
               <a:rPr lang="de-DE" smtClean="0"/>
-              <a:t>01.06.2025</a:t>
+              <a:t>03.06.2025</a:t>
             </a:fld>
             <a:endParaRPr lang="de-DE"/>
           </a:p>
@@ -2391,7 +2835,7 @@
           <a:p>
             <a:fld id="{F5C0AC7C-E257-4BDA-94CB-CB11724BB9D3}" type="datetimeFigureOut">
               <a:rPr lang="de-DE" smtClean="0"/>
-              <a:t>01.06.2025</a:t>
+              <a:t>03.06.2025</a:t>
             </a:fld>
             <a:endParaRPr lang="de-DE"/>
           </a:p>
@@ -2679,7 +3123,7 @@
           <a:p>
             <a:fld id="{F5C0AC7C-E257-4BDA-94CB-CB11724BB9D3}" type="datetimeFigureOut">
               <a:rPr lang="de-DE" smtClean="0"/>
-              <a:t>01.06.2025</a:t>
+              <a:t>03.06.2025</a:t>
             </a:fld>
             <a:endParaRPr lang="de-DE"/>
           </a:p>
@@ -2920,7 +3364,7 @@
           <a:p>
             <a:fld id="{F5C0AC7C-E257-4BDA-94CB-CB11724BB9D3}" type="datetimeFigureOut">
               <a:rPr lang="de-DE" smtClean="0"/>
-              <a:t>01.06.2025</a:t>
+              <a:t>03.06.2025</a:t>
             </a:fld>
             <a:endParaRPr lang="de-DE"/>
           </a:p>
@@ -5739,78 +6183,12 @@
           <a:chExt cx="0" cy="0"/>
         </a:xfrm>
       </p:grpSpPr>
-      <p:sp>
-        <p:nvSpPr>
-          <p:cNvPr id="2" name="Titel 1">
-            <a:extLst>
-              <a:ext uri="{FF2B5EF4-FFF2-40B4-BE49-F238E27FC236}">
-                <a16:creationId xmlns:a16="http://schemas.microsoft.com/office/drawing/2014/main" id="{7EA0D1DA-378D-202D-A0E0-57A2F7D3CEB7}"/>
-              </a:ext>
-            </a:extLst>
-          </p:cNvPr>
-          <p:cNvSpPr>
-            <a:spLocks noGrp="1"/>
-          </p:cNvSpPr>
-          <p:nvPr>
-            <p:ph type="title"/>
-          </p:nvPr>
-        </p:nvSpPr>
-        <p:spPr/>
-        <p:txBody>
-          <a:bodyPr/>
-          <a:lstStyle/>
-          <a:p>
-            <a:r>
-              <a:rPr lang="de-DE" b="1" dirty="0">
-                <a:effectLst>
-                  <a:outerShdw blurRad="38100" dist="38100" dir="2700000" algn="tl">
-                    <a:srgbClr val="000000">
-                      <a:alpha val="43137"/>
-                    </a:srgbClr>
-                  </a:outerShdw>
-                </a:effectLst>
-              </a:rPr>
-              <a:t>Technischer Hintergrund</a:t>
-            </a:r>
-          </a:p>
-        </p:txBody>
-      </p:sp>
-      <p:sp>
-        <p:nvSpPr>
-          <p:cNvPr id="3" name="Inhaltsplatzhalter 2">
-            <a:extLst>
-              <a:ext uri="{FF2B5EF4-FFF2-40B4-BE49-F238E27FC236}">
-                <a16:creationId xmlns:a16="http://schemas.microsoft.com/office/drawing/2014/main" id="{FF873ED8-0668-62AF-967F-7D83EDF53375}"/>
-              </a:ext>
-            </a:extLst>
-          </p:cNvPr>
-          <p:cNvSpPr>
-            <a:spLocks noGrp="1"/>
-          </p:cNvSpPr>
-          <p:nvPr>
-            <p:ph idx="1"/>
-          </p:nvPr>
-        </p:nvSpPr>
-        <p:spPr/>
-        <p:txBody>
-          <a:bodyPr>
-            <a:normAutofit/>
-          </a:bodyPr>
-          <a:lstStyle/>
-          <a:p>
-            <a:r>
-              <a:rPr lang="de-DE" sz="2000" b="1" dirty="0"/>
-              <a:t>Anmelde Maske:</a:t>
-            </a:r>
-          </a:p>
-        </p:txBody>
-      </p:sp>
       <p:pic>
         <p:nvPicPr>
-          <p:cNvPr id="8" name="Inhaltsplatzhalter 6">
-            <a:extLst>
-              <a:ext uri="{FF2B5EF4-FFF2-40B4-BE49-F238E27FC236}">
-                <a16:creationId xmlns:a16="http://schemas.microsoft.com/office/drawing/2014/main" id="{90AADBD4-0B5D-76CF-3B6C-1E4D6CD01AC6}"/>
+          <p:cNvPr id="5" name="Grafik 4">
+            <a:extLst>
+              <a:ext uri="{FF2B5EF4-FFF2-40B4-BE49-F238E27FC236}">
+                <a16:creationId xmlns:a16="http://schemas.microsoft.com/office/drawing/2014/main" id="{80076AE0-7121-27DB-9408-5D7365318E9F}"/>
               </a:ext>
             </a:extLst>
           </p:cNvPr>
@@ -5827,8 +6205,8 @@
         </p:blipFill>
         <p:spPr>
           <a:xfrm>
-            <a:off x="7423575" y="2143863"/>
-            <a:ext cx="2729652" cy="3405727"/>
+            <a:off x="3656679" y="2272266"/>
+            <a:ext cx="2776792" cy="3458055"/>
           </a:xfrm>
           <a:prstGeom prst="rect">
             <a:avLst/>
@@ -5837,6 +6215,72 @@
       </p:pic>
       <p:sp>
         <p:nvSpPr>
+          <p:cNvPr id="2" name="Titel 1">
+            <a:extLst>
+              <a:ext uri="{FF2B5EF4-FFF2-40B4-BE49-F238E27FC236}">
+                <a16:creationId xmlns:a16="http://schemas.microsoft.com/office/drawing/2014/main" id="{7EA0D1DA-378D-202D-A0E0-57A2F7D3CEB7}"/>
+              </a:ext>
+            </a:extLst>
+          </p:cNvPr>
+          <p:cNvSpPr>
+            <a:spLocks noGrp="1"/>
+          </p:cNvSpPr>
+          <p:nvPr>
+            <p:ph type="title"/>
+          </p:nvPr>
+        </p:nvSpPr>
+        <p:spPr/>
+        <p:txBody>
+          <a:bodyPr/>
+          <a:lstStyle/>
+          <a:p>
+            <a:r>
+              <a:rPr lang="de-DE" b="1" dirty="0">
+                <a:effectLst>
+                  <a:outerShdw blurRad="38100" dist="38100" dir="2700000" algn="tl">
+                    <a:srgbClr val="000000">
+                      <a:alpha val="43137"/>
+                    </a:srgbClr>
+                  </a:outerShdw>
+                </a:effectLst>
+              </a:rPr>
+              <a:t>Technischer Hintergrund</a:t>
+            </a:r>
+          </a:p>
+        </p:txBody>
+      </p:sp>
+      <p:sp>
+        <p:nvSpPr>
+          <p:cNvPr id="3" name="Inhaltsplatzhalter 2">
+            <a:extLst>
+              <a:ext uri="{FF2B5EF4-FFF2-40B4-BE49-F238E27FC236}">
+                <a16:creationId xmlns:a16="http://schemas.microsoft.com/office/drawing/2014/main" id="{FF873ED8-0668-62AF-967F-7D83EDF53375}"/>
+              </a:ext>
+            </a:extLst>
+          </p:cNvPr>
+          <p:cNvSpPr>
+            <a:spLocks noGrp="1"/>
+          </p:cNvSpPr>
+          <p:nvPr>
+            <p:ph idx="1"/>
+          </p:nvPr>
+        </p:nvSpPr>
+        <p:spPr/>
+        <p:txBody>
+          <a:bodyPr>
+            <a:normAutofit/>
+          </a:bodyPr>
+          <a:lstStyle/>
+          <a:p>
+            <a:r>
+              <a:rPr lang="de-DE" sz="2000" b="1" dirty="0"/>
+              <a:t>Anmelde Maske:</a:t>
+            </a:r>
+          </a:p>
+        </p:txBody>
+      </p:sp>
+      <p:sp>
+        <p:nvSpPr>
           <p:cNvPr id="9" name="Rechteck 8">
             <a:extLst>
               <a:ext uri="{FF2B5EF4-FFF2-40B4-BE49-F238E27FC236}">
@@ -5849,7 +6293,7 @@
         </p:nvSpPr>
         <p:spPr>
           <a:xfrm>
-            <a:off x="8477250" y="4654550"/>
+            <a:off x="4730750" y="4837667"/>
             <a:ext cx="635000" cy="273050"/>
           </a:xfrm>
           <a:prstGeom prst="rect">
@@ -5896,7 +6340,7 @@
         </p:nvSpPr>
         <p:spPr>
           <a:xfrm>
-            <a:off x="8420100" y="4960088"/>
+            <a:off x="4673600" y="5143205"/>
             <a:ext cx="742949" cy="273050"/>
           </a:xfrm>
           <a:prstGeom prst="rect">
@@ -5946,7 +6390,7 @@
         </p:nvCxnSpPr>
         <p:spPr>
           <a:xfrm flipH="1">
-            <a:off x="6800850" y="4791075"/>
+            <a:off x="3054350" y="4974192"/>
             <a:ext cx="1676400" cy="0"/>
           </a:xfrm>
           <a:prstGeom prst="line">
@@ -5982,7 +6426,7 @@
         </p:nvCxnSpPr>
         <p:spPr>
           <a:xfrm flipH="1" flipV="1">
-            <a:off x="6800850" y="5093438"/>
+            <a:off x="3054350" y="5276555"/>
             <a:ext cx="1619250" cy="3175"/>
           </a:xfrm>
           <a:prstGeom prst="line">
@@ -6018,7 +6462,7 @@
         </p:nvSpPr>
         <p:spPr>
           <a:xfrm>
-            <a:off x="5943601" y="4672709"/>
+            <a:off x="2197101" y="4855826"/>
             <a:ext cx="857250" cy="261610"/>
           </a:xfrm>
           <a:prstGeom prst="rect">
@@ -6054,7 +6498,7 @@
         </p:nvSpPr>
         <p:spPr>
           <a:xfrm>
-            <a:off x="5816600" y="4971528"/>
+            <a:off x="2070100" y="5154645"/>
             <a:ext cx="984250" cy="261610"/>
           </a:xfrm>
           <a:prstGeom prst="rect">
@@ -6111,6 +6555,36 @@
           <a:chExt cx="0" cy="0"/>
         </a:xfrm>
       </p:grpSpPr>
+      <p:pic>
+        <p:nvPicPr>
+          <p:cNvPr id="5" name="Grafik 4">
+            <a:extLst>
+              <a:ext uri="{FF2B5EF4-FFF2-40B4-BE49-F238E27FC236}">
+                <a16:creationId xmlns:a16="http://schemas.microsoft.com/office/drawing/2014/main" id="{AB05AD9E-CAED-E793-70BD-248190EAA396}"/>
+              </a:ext>
+            </a:extLst>
+          </p:cNvPr>
+          <p:cNvPicPr>
+            <a:picLocks noChangeAspect="1"/>
+          </p:cNvPicPr>
+          <p:nvPr/>
+        </p:nvPicPr>
+        <p:blipFill>
+          <a:blip r:embed="rId3"/>
+          <a:stretch>
+            <a:fillRect/>
+          </a:stretch>
+        </p:blipFill>
+        <p:spPr>
+          <a:xfrm>
+            <a:off x="6090050" y="1617741"/>
+            <a:ext cx="3679807" cy="4964034"/>
+          </a:xfrm>
+          <a:prstGeom prst="rect">
+            <a:avLst/>
+          </a:prstGeom>
+        </p:spPr>
+      </p:pic>
       <p:sp>
         <p:nvSpPr>
           <p:cNvPr id="2" name="Titel 1">
@@ -6177,36 +6651,6 @@
           </a:p>
         </p:txBody>
       </p:sp>
-      <p:pic>
-        <p:nvPicPr>
-          <p:cNvPr id="7" name="Grafik 6">
-            <a:extLst>
-              <a:ext uri="{FF2B5EF4-FFF2-40B4-BE49-F238E27FC236}">
-                <a16:creationId xmlns:a16="http://schemas.microsoft.com/office/drawing/2014/main" id="{A412E9BC-BB5C-5053-870C-F48350CCC04C}"/>
-              </a:ext>
-            </a:extLst>
-          </p:cNvPr>
-          <p:cNvPicPr>
-            <a:picLocks noChangeAspect="1"/>
-          </p:cNvPicPr>
-          <p:nvPr/>
-        </p:nvPicPr>
-        <p:blipFill>
-          <a:blip r:embed="rId2"/>
-          <a:stretch>
-            <a:fillRect/>
-          </a:stretch>
-        </p:blipFill>
-        <p:spPr>
-          <a:xfrm>
-            <a:off x="5665047" y="1515977"/>
-            <a:ext cx="3712634" cy="4970634"/>
-          </a:xfrm>
-          <a:prstGeom prst="rect">
-            <a:avLst/>
-          </a:prstGeom>
-        </p:spPr>
-      </p:pic>
       <p:grpSp>
         <p:nvGrpSpPr>
           <p:cNvPr id="18" name="Gruppieren 17">
@@ -6221,7 +6665,7 @@
         </p:nvGrpSpPr>
         <p:grpSpPr>
           <a:xfrm>
-            <a:off x="4977553" y="2757488"/>
+            <a:off x="5389225" y="2846388"/>
             <a:ext cx="2699597" cy="277812"/>
             <a:chOff x="6349153" y="2411307"/>
             <a:chExt cx="2699597" cy="331893"/>
@@ -6337,7 +6781,7 @@
         </p:nvGrpSpPr>
         <p:grpSpPr>
           <a:xfrm>
-            <a:off x="4977553" y="2446479"/>
+            <a:off x="5389225" y="2535379"/>
             <a:ext cx="2699597" cy="277812"/>
             <a:chOff x="6349153" y="2411307"/>
             <a:chExt cx="2699597" cy="331893"/>
@@ -6453,7 +6897,7 @@
         </p:nvGrpSpPr>
         <p:grpSpPr>
           <a:xfrm>
-            <a:off x="4977553" y="3060983"/>
+            <a:off x="5389225" y="3149883"/>
             <a:ext cx="2699597" cy="277812"/>
             <a:chOff x="6349153" y="2411307"/>
             <a:chExt cx="2699597" cy="331893"/>
@@ -6569,7 +7013,7 @@
         </p:nvSpPr>
         <p:spPr>
           <a:xfrm>
-            <a:off x="3008419" y="2318913"/>
+            <a:off x="3420091" y="2407813"/>
             <a:ext cx="2052109" cy="430887"/>
           </a:xfrm>
           <a:prstGeom prst="rect">
@@ -6619,7 +7063,7 @@
         </p:nvSpPr>
         <p:spPr>
           <a:xfrm>
-            <a:off x="3008419" y="2705241"/>
+            <a:off x="3420091" y="2794141"/>
             <a:ext cx="2102484" cy="430887"/>
           </a:xfrm>
           <a:prstGeom prst="rect">
@@ -6672,7 +7116,7 @@
         </p:nvSpPr>
         <p:spPr>
           <a:xfrm>
-            <a:off x="3008419" y="3060133"/>
+            <a:off x="3420091" y="3149033"/>
             <a:ext cx="2102484" cy="430887"/>
           </a:xfrm>
           <a:prstGeom prst="rect">
@@ -6725,7 +7169,7 @@
         </p:nvSpPr>
         <p:spPr>
           <a:xfrm>
-            <a:off x="5753100" y="3368107"/>
+            <a:off x="6164772" y="3457007"/>
             <a:ext cx="533400" cy="373120"/>
           </a:xfrm>
           <a:prstGeom prst="rect">
@@ -6779,7 +7223,7 @@
         </p:nvCxnSpPr>
         <p:spPr>
           <a:xfrm rot="10800000" flipV="1">
-            <a:off x="4229100" y="3554666"/>
+            <a:off x="4640772" y="3643566"/>
             <a:ext cx="1524000" cy="687133"/>
           </a:xfrm>
           <a:prstGeom prst="bentConnector3">
@@ -6815,7 +7259,7 @@
         </p:nvSpPr>
         <p:spPr>
           <a:xfrm>
-            <a:off x="2762247" y="4108776"/>
+            <a:off x="3173919" y="4197676"/>
             <a:ext cx="1524002" cy="261610"/>
           </a:xfrm>
           <a:prstGeom prst="rect">
@@ -6851,7 +7295,7 @@
         </p:nvSpPr>
         <p:spPr>
           <a:xfrm>
-            <a:off x="6922348" y="3367439"/>
+            <a:off x="7334020" y="3456339"/>
             <a:ext cx="533400" cy="373120"/>
           </a:xfrm>
           <a:prstGeom prst="rect">
@@ -6905,7 +7349,7 @@
         </p:nvCxnSpPr>
         <p:spPr>
           <a:xfrm rot="5400000">
-            <a:off x="5217154" y="2752505"/>
+            <a:off x="5628826" y="2841405"/>
             <a:ext cx="983841" cy="2959949"/>
           </a:xfrm>
           <a:prstGeom prst="bentConnector2">
@@ -6941,7 +7385,7 @@
         </p:nvSpPr>
         <p:spPr>
           <a:xfrm>
-            <a:off x="2762247" y="4523159"/>
+            <a:off x="3173919" y="4612059"/>
             <a:ext cx="1524002" cy="430887"/>
           </a:xfrm>
           <a:prstGeom prst="rect">
@@ -6976,7 +7420,7 @@
         </p:nvSpPr>
         <p:spPr>
           <a:xfrm>
-            <a:off x="8100910" y="3367439"/>
+            <a:off x="8512582" y="3456339"/>
             <a:ext cx="533400" cy="373120"/>
           </a:xfrm>
           <a:prstGeom prst="rect">
@@ -7030,7 +7474,7 @@
         </p:nvCxnSpPr>
         <p:spPr>
           <a:xfrm rot="5400000">
-            <a:off x="5460359" y="2509298"/>
+            <a:off x="5872031" y="2598198"/>
             <a:ext cx="1675991" cy="4138512"/>
           </a:xfrm>
           <a:prstGeom prst="bentConnector2">
@@ -7066,7 +7510,7 @@
         </p:nvSpPr>
         <p:spPr>
           <a:xfrm>
-            <a:off x="2762247" y="5269763"/>
+            <a:off x="3173919" y="5358663"/>
             <a:ext cx="1524002" cy="261610"/>
           </a:xfrm>
           <a:prstGeom prst="rect">
@@ -7101,7 +7545,7 @@
         </p:nvSpPr>
         <p:spPr>
           <a:xfrm>
-            <a:off x="8754960" y="1781555"/>
+            <a:off x="9166632" y="1870455"/>
             <a:ext cx="533400" cy="373120"/>
           </a:xfrm>
           <a:prstGeom prst="rect">
@@ -7155,7 +7599,7 @@
         </p:nvCxnSpPr>
         <p:spPr>
           <a:xfrm>
-            <a:off x="9288360" y="1968115"/>
+            <a:off x="9700032" y="2057015"/>
             <a:ext cx="630340" cy="1823"/>
           </a:xfrm>
           <a:prstGeom prst="line">
@@ -7191,8 +7635,8 @@
         </p:nvSpPr>
         <p:spPr>
           <a:xfrm>
-            <a:off x="9906210" y="1828871"/>
-            <a:ext cx="2052109" cy="261610"/>
+            <a:off x="10317882" y="1917771"/>
+            <a:ext cx="1603393" cy="261610"/>
           </a:xfrm>
           <a:prstGeom prst="rect">
             <a:avLst/>
@@ -7227,7 +7671,7 @@
         </p:nvSpPr>
         <p:spPr>
           <a:xfrm>
-            <a:off x="8754960" y="2145865"/>
+            <a:off x="9166632" y="2234765"/>
             <a:ext cx="533400" cy="220862"/>
           </a:xfrm>
           <a:prstGeom prst="rect">
@@ -7281,7 +7725,7 @@
         </p:nvCxnSpPr>
         <p:spPr>
           <a:xfrm flipV="1">
-            <a:off x="9288360" y="2254250"/>
+            <a:off x="9700032" y="2343150"/>
             <a:ext cx="630340" cy="2046"/>
           </a:xfrm>
           <a:prstGeom prst="line">
@@ -7317,8 +7761,8 @@
         </p:nvSpPr>
         <p:spPr>
           <a:xfrm>
-            <a:off x="9918700" y="2109253"/>
-            <a:ext cx="2052109" cy="261610"/>
+            <a:off x="10330373" y="2198153"/>
+            <a:ext cx="1556828" cy="261610"/>
           </a:xfrm>
           <a:prstGeom prst="rect">
             <a:avLst/>
@@ -7339,6 +7783,324 @@
           </a:p>
         </p:txBody>
       </p:sp>
+      <p:pic>
+        <p:nvPicPr>
+          <p:cNvPr id="8" name="Grafik 7">
+            <a:extLst>
+              <a:ext uri="{FF2B5EF4-FFF2-40B4-BE49-F238E27FC236}">
+                <a16:creationId xmlns:a16="http://schemas.microsoft.com/office/drawing/2014/main" id="{A328697A-5361-5743-C649-5327230C510A}"/>
+              </a:ext>
+            </a:extLst>
+          </p:cNvPr>
+          <p:cNvPicPr>
+            <a:picLocks noChangeAspect="1"/>
+          </p:cNvPicPr>
+          <p:nvPr/>
+        </p:nvPicPr>
+        <p:blipFill>
+          <a:blip r:embed="rId4"/>
+          <a:srcRect l="-1" r="348"/>
+          <a:stretch/>
+        </p:blipFill>
+        <p:spPr>
+          <a:xfrm>
+            <a:off x="6096000" y="1620955"/>
+            <a:ext cx="3679807" cy="4954470"/>
+          </a:xfrm>
+          <a:prstGeom prst="rect">
+            <a:avLst/>
+          </a:prstGeom>
+        </p:spPr>
+      </p:pic>
+      <p:sp>
+        <p:nvSpPr>
+          <p:cNvPr id="9" name="Textfeld 8">
+            <a:extLst>
+              <a:ext uri="{FF2B5EF4-FFF2-40B4-BE49-F238E27FC236}">
+                <a16:creationId xmlns:a16="http://schemas.microsoft.com/office/drawing/2014/main" id="{42DFE33D-AF1B-FF7B-1E37-E4EDCFF56738}"/>
+              </a:ext>
+            </a:extLst>
+          </p:cNvPr>
+          <p:cNvSpPr txBox="1"/>
+          <p:nvPr/>
+        </p:nvSpPr>
+        <p:spPr>
+          <a:xfrm>
+            <a:off x="3173919" y="1692248"/>
+            <a:ext cx="2627632" cy="600164"/>
+          </a:xfrm>
+          <a:prstGeom prst="rect">
+            <a:avLst/>
+          </a:prstGeom>
+          <a:noFill/>
+        </p:spPr>
+        <p:txBody>
+          <a:bodyPr wrap="square" rtlCol="0">
+            <a:spAutoFit/>
+          </a:bodyPr>
+          <a:lstStyle/>
+          <a:p>
+            <a:r>
+              <a:rPr lang="de-DE" sz="1100" b="1" dirty="0"/>
+              <a:t>Wenn die Lokale Version aktueller ist</a:t>
+            </a:r>
+          </a:p>
+          <a:p>
+            <a:r>
+              <a:rPr lang="de-DE" sz="1100" dirty="0">
+                <a:sym typeface="Wingdings" panose="05000000000000000000" pitchFamily="2" charset="2"/>
+              </a:rPr>
+              <a:t> Meldung wird angezeigt + Button zum </a:t>
+            </a:r>
+            <a:r>
+              <a:rPr lang="de-DE" sz="1100" dirty="0" err="1">
+                <a:sym typeface="Wingdings" panose="05000000000000000000" pitchFamily="2" charset="2"/>
+              </a:rPr>
+              <a:t>Sync</a:t>
+            </a:r>
+            <a:r>
+              <a:rPr lang="de-DE" sz="1100" dirty="0">
+                <a:sym typeface="Wingdings" panose="05000000000000000000" pitchFamily="2" charset="2"/>
+              </a:rPr>
+              <a:t>/Push auf Server</a:t>
+            </a:r>
+            <a:endParaRPr lang="de-DE" sz="1100" dirty="0"/>
+          </a:p>
+        </p:txBody>
+      </p:sp>
+      <p:grpSp>
+        <p:nvGrpSpPr>
+          <p:cNvPr id="56" name="Gruppieren 55">
+            <a:extLst>
+              <a:ext uri="{FF2B5EF4-FFF2-40B4-BE49-F238E27FC236}">
+                <a16:creationId xmlns:a16="http://schemas.microsoft.com/office/drawing/2014/main" id="{18BC7408-4842-EFF6-FD5D-877C2CD5A1F4}"/>
+              </a:ext>
+            </a:extLst>
+          </p:cNvPr>
+          <p:cNvGrpSpPr/>
+          <p:nvPr/>
+        </p:nvGrpSpPr>
+        <p:grpSpPr>
+          <a:xfrm>
+            <a:off x="5801551" y="1992330"/>
+            <a:ext cx="3244431" cy="1837128"/>
+            <a:chOff x="5801551" y="1992330"/>
+            <a:chExt cx="3244431" cy="1837128"/>
+          </a:xfrm>
+        </p:grpSpPr>
+        <p:grpSp>
+          <p:nvGrpSpPr>
+            <p:cNvPr id="52" name="Gruppieren 51">
+              <a:extLst>
+                <a:ext uri="{FF2B5EF4-FFF2-40B4-BE49-F238E27FC236}">
+                  <a16:creationId xmlns:a16="http://schemas.microsoft.com/office/drawing/2014/main" id="{CF32FD1A-5226-F689-F43B-C2863D64066E}"/>
+                </a:ext>
+              </a:extLst>
+            </p:cNvPr>
+            <p:cNvGrpSpPr/>
+            <p:nvPr/>
+          </p:nvGrpSpPr>
+          <p:grpSpPr>
+            <a:xfrm>
+              <a:off x="5801551" y="1992330"/>
+              <a:ext cx="1532469" cy="463296"/>
+              <a:chOff x="5801551" y="1992330"/>
+              <a:chExt cx="1532469" cy="463296"/>
+            </a:xfrm>
+          </p:grpSpPr>
+          <p:cxnSp>
+            <p:nvCxnSpPr>
+              <p:cNvPr id="45" name="Verbinder: gewinkelt 44">
+                <a:extLst>
+                  <a:ext uri="{FF2B5EF4-FFF2-40B4-BE49-F238E27FC236}">
+                    <a16:creationId xmlns:a16="http://schemas.microsoft.com/office/drawing/2014/main" id="{18FA68F0-B7D3-23BC-B9FD-D8458B03A5F1}"/>
+                  </a:ext>
+                </a:extLst>
+              </p:cNvPr>
+              <p:cNvCxnSpPr>
+                <a:stCxn id="9" idx="3"/>
+              </p:cNvCxnSpPr>
+              <p:nvPr/>
+            </p:nvCxnSpPr>
+            <p:spPr>
+              <a:xfrm>
+                <a:off x="5801551" y="1992330"/>
+                <a:ext cx="363221" cy="350820"/>
+              </a:xfrm>
+              <a:prstGeom prst="bentConnector3">
+                <a:avLst/>
+              </a:prstGeom>
+              <a:ln>
+                <a:solidFill>
+                  <a:srgbClr val="FF0000"/>
+                </a:solidFill>
+              </a:ln>
+            </p:spPr>
+            <p:style>
+              <a:lnRef idx="2">
+                <a:schemeClr val="dk1"/>
+              </a:lnRef>
+              <a:fillRef idx="0">
+                <a:schemeClr val="dk1"/>
+              </a:fillRef>
+              <a:effectRef idx="1">
+                <a:schemeClr val="dk1"/>
+              </a:effectRef>
+              <a:fontRef idx="minor">
+                <a:schemeClr val="tx1"/>
+              </a:fontRef>
+            </p:style>
+          </p:cxnSp>
+          <p:sp>
+            <p:nvSpPr>
+              <p:cNvPr id="49" name="Rechteck 48">
+                <a:extLst>
+                  <a:ext uri="{FF2B5EF4-FFF2-40B4-BE49-F238E27FC236}">
+                    <a16:creationId xmlns:a16="http://schemas.microsoft.com/office/drawing/2014/main" id="{9D68DAA8-FB6F-6393-1842-4260728A7BDB}"/>
+                  </a:ext>
+                </a:extLst>
+              </p:cNvPr>
+              <p:cNvSpPr/>
+              <p:nvPr/>
+            </p:nvSpPr>
+            <p:spPr>
+              <a:xfrm>
+                <a:off x="6164772" y="2203023"/>
+                <a:ext cx="1169248" cy="252603"/>
+              </a:xfrm>
+              <a:prstGeom prst="rect">
+                <a:avLst/>
+              </a:prstGeom>
+              <a:noFill/>
+              <a:ln>
+                <a:solidFill>
+                  <a:srgbClr val="FF0000"/>
+                </a:solidFill>
+              </a:ln>
+            </p:spPr>
+            <p:style>
+              <a:lnRef idx="2">
+                <a:schemeClr val="dk1">
+                  <a:shade val="15000"/>
+                </a:schemeClr>
+              </a:lnRef>
+              <a:fillRef idx="1">
+                <a:schemeClr val="dk1"/>
+              </a:fillRef>
+              <a:effectRef idx="0">
+                <a:schemeClr val="dk1"/>
+              </a:effectRef>
+              <a:fontRef idx="minor">
+                <a:schemeClr val="lt1"/>
+              </a:fontRef>
+            </p:style>
+            <p:txBody>
+              <a:bodyPr rtlCol="0" anchor="ctr"/>
+              <a:lstStyle/>
+              <a:p>
+                <a:pPr algn="ctr"/>
+                <a:endParaRPr lang="de-DE"/>
+              </a:p>
+            </p:txBody>
+          </p:sp>
+        </p:grpSp>
+        <p:sp>
+          <p:nvSpPr>
+            <p:cNvPr id="53" name="Rechteck 52">
+              <a:extLst>
+                <a:ext uri="{FF2B5EF4-FFF2-40B4-BE49-F238E27FC236}">
+                  <a16:creationId xmlns:a16="http://schemas.microsoft.com/office/drawing/2014/main" id="{E63AA309-BDBB-CBF7-8659-68F5FC4904C3}"/>
+                </a:ext>
+              </a:extLst>
+            </p:cNvPr>
+            <p:cNvSpPr/>
+            <p:nvPr/>
+          </p:nvSpPr>
+          <p:spPr>
+            <a:xfrm>
+              <a:off x="8512582" y="3456339"/>
+              <a:ext cx="533400" cy="373119"/>
+            </a:xfrm>
+            <a:prstGeom prst="rect">
+              <a:avLst/>
+            </a:prstGeom>
+            <a:noFill/>
+            <a:ln>
+              <a:solidFill>
+                <a:srgbClr val="FF0000"/>
+              </a:solidFill>
+            </a:ln>
+          </p:spPr>
+          <p:style>
+            <a:lnRef idx="2">
+              <a:schemeClr val="accent1">
+                <a:shade val="15000"/>
+              </a:schemeClr>
+            </a:lnRef>
+            <a:fillRef idx="1">
+              <a:schemeClr val="accent1"/>
+            </a:fillRef>
+            <a:effectRef idx="0">
+              <a:schemeClr val="accent1"/>
+            </a:effectRef>
+            <a:fontRef idx="minor">
+              <a:schemeClr val="lt1"/>
+            </a:fontRef>
+          </p:style>
+          <p:txBody>
+            <a:bodyPr rtlCol="0" anchor="ctr"/>
+            <a:lstStyle/>
+            <a:p>
+              <a:pPr algn="ctr"/>
+              <a:endParaRPr lang="de-DE"/>
+            </a:p>
+          </p:txBody>
+        </p:sp>
+        <p:cxnSp>
+          <p:nvCxnSpPr>
+            <p:cNvPr id="55" name="Verbinder: gewinkelt 54">
+              <a:extLst>
+                <a:ext uri="{FF2B5EF4-FFF2-40B4-BE49-F238E27FC236}">
+                  <a16:creationId xmlns:a16="http://schemas.microsoft.com/office/drawing/2014/main" id="{D8BCA1AE-5BC4-747F-4CFD-E271C899E347}"/>
+                </a:ext>
+              </a:extLst>
+            </p:cNvPr>
+            <p:cNvCxnSpPr>
+              <a:stCxn id="49" idx="3"/>
+              <a:endCxn id="53" idx="0"/>
+            </p:cNvCxnSpPr>
+            <p:nvPr/>
+          </p:nvCxnSpPr>
+          <p:spPr>
+            <a:xfrm>
+              <a:off x="7334020" y="2329325"/>
+              <a:ext cx="1445262" cy="1127014"/>
+            </a:xfrm>
+            <a:prstGeom prst="bentConnector2">
+              <a:avLst/>
+            </a:prstGeom>
+            <a:ln>
+              <a:solidFill>
+                <a:srgbClr val="FF0000"/>
+              </a:solidFill>
+            </a:ln>
+          </p:spPr>
+          <p:style>
+            <a:lnRef idx="2">
+              <a:schemeClr val="dk1"/>
+            </a:lnRef>
+            <a:fillRef idx="0">
+              <a:schemeClr val="dk1"/>
+            </a:fillRef>
+            <a:effectRef idx="1">
+              <a:schemeClr val="dk1"/>
+            </a:effectRef>
+            <a:fontRef idx="minor">
+              <a:schemeClr val="tx1"/>
+            </a:fontRef>
+          </p:style>
+        </p:cxnSp>
+      </p:grpSp>
     </p:spTree>
     <p:extLst>
       <p:ext uri="{BB962C8B-B14F-4D97-AF65-F5344CB8AC3E}">
@@ -7349,6 +8111,138 @@
   <p:clrMapOvr>
     <a:masterClrMapping/>
   </p:clrMapOvr>
+  <p:timing>
+    <p:tnLst>
+      <p:par>
+        <p:cTn id="1" dur="indefinite" restart="never" nodeType="tmRoot">
+          <p:childTnLst>
+            <p:seq concurrent="1" nextAc="seek">
+              <p:cTn id="2" dur="indefinite" nodeType="mainSeq">
+                <p:childTnLst>
+                  <p:par>
+                    <p:cTn id="3" fill="hold">
+                      <p:stCondLst>
+                        <p:cond delay="indefinite"/>
+                      </p:stCondLst>
+                      <p:childTnLst>
+                        <p:par>
+                          <p:cTn id="4" fill="hold">
+                            <p:stCondLst>
+                              <p:cond delay="0"/>
+                            </p:stCondLst>
+                            <p:childTnLst>
+                              <p:par>
+                                <p:cTn id="5" presetID="1" presetClass="entr" presetSubtype="0" fill="hold" nodeType="clickEffect">
+                                  <p:stCondLst>
+                                    <p:cond delay="0"/>
+                                  </p:stCondLst>
+                                  <p:childTnLst>
+                                    <p:set>
+                                      <p:cBhvr>
+                                        <p:cTn id="6" dur="1" fill="hold">
+                                          <p:stCondLst>
+                                            <p:cond delay="0"/>
+                                          </p:stCondLst>
+                                        </p:cTn>
+                                        <p:tgtEl>
+                                          <p:spTgt spid="8"/>
+                                        </p:tgtEl>
+                                        <p:attrNameLst>
+                                          <p:attrName>style.visibility</p:attrName>
+                                        </p:attrNameLst>
+                                      </p:cBhvr>
+                                      <p:to>
+                                        <p:strVal val="visible"/>
+                                      </p:to>
+                                    </p:set>
+                                  </p:childTnLst>
+                                </p:cTn>
+                              </p:par>
+                              <p:par>
+                                <p:cTn id="7" presetID="1" presetClass="entr" presetSubtype="0" fill="hold" grpId="0" nodeType="withEffect">
+                                  <p:stCondLst>
+                                    <p:cond delay="0"/>
+                                  </p:stCondLst>
+                                  <p:childTnLst>
+                                    <p:set>
+                                      <p:cBhvr>
+                                        <p:cTn id="8" dur="1" fill="hold">
+                                          <p:stCondLst>
+                                            <p:cond delay="0"/>
+                                          </p:stCondLst>
+                                        </p:cTn>
+                                        <p:tgtEl>
+                                          <p:spTgt spid="9"/>
+                                        </p:tgtEl>
+                                        <p:attrNameLst>
+                                          <p:attrName>style.visibility</p:attrName>
+                                        </p:attrNameLst>
+                                      </p:cBhvr>
+                                      <p:to>
+                                        <p:strVal val="visible"/>
+                                      </p:to>
+                                    </p:set>
+                                  </p:childTnLst>
+                                </p:cTn>
+                              </p:par>
+                              <p:par>
+                                <p:cTn id="9" presetID="1" presetClass="entr" presetSubtype="0" fill="hold" nodeType="withEffect">
+                                  <p:stCondLst>
+                                    <p:cond delay="0"/>
+                                  </p:stCondLst>
+                                  <p:childTnLst>
+                                    <p:set>
+                                      <p:cBhvr>
+                                        <p:cTn id="10" dur="1" fill="hold">
+                                          <p:stCondLst>
+                                            <p:cond delay="0"/>
+                                          </p:stCondLst>
+                                        </p:cTn>
+                                        <p:tgtEl>
+                                          <p:spTgt spid="56"/>
+                                        </p:tgtEl>
+                                        <p:attrNameLst>
+                                          <p:attrName>style.visibility</p:attrName>
+                                        </p:attrNameLst>
+                                      </p:cBhvr>
+                                      <p:to>
+                                        <p:strVal val="visible"/>
+                                      </p:to>
+                                    </p:set>
+                                  </p:childTnLst>
+                                </p:cTn>
+                              </p:par>
+                            </p:childTnLst>
+                          </p:cTn>
+                        </p:par>
+                      </p:childTnLst>
+                    </p:cTn>
+                  </p:par>
+                </p:childTnLst>
+              </p:cTn>
+              <p:prevCondLst>
+                <p:cond evt="onPrev" delay="0">
+                  <p:tgtEl>
+                    <p:sldTgt/>
+                  </p:tgtEl>
+                </p:cond>
+              </p:prevCondLst>
+              <p:nextCondLst>
+                <p:cond evt="onNext" delay="0">
+                  <p:tgtEl>
+                    <p:sldTgt/>
+                  </p:tgtEl>
+                </p:cond>
+              </p:nextCondLst>
+            </p:seq>
+          </p:childTnLst>
+        </p:cTn>
+      </p:par>
+    </p:tnLst>
+    <p:bldLst>
+      <p:bldP spid="9" grpId="0"/>
+    </p:bldLst>
+  </p:timing>
 </p:sld>
 </file>
 
@@ -7436,17 +8330,17 @@
           <a:p>
             <a:r>
               <a:rPr lang="de-DE" sz="2000" b="1" dirty="0"/>
-              <a:t>Einstellungen:</a:t>
+              <a:t>Menüs:</a:t>
             </a:r>
           </a:p>
         </p:txBody>
       </p:sp>
       <p:pic>
         <p:nvPicPr>
-          <p:cNvPr id="5" name="Grafik 4">
-            <a:extLst>
-              <a:ext uri="{FF2B5EF4-FFF2-40B4-BE49-F238E27FC236}">
-                <a16:creationId xmlns:a16="http://schemas.microsoft.com/office/drawing/2014/main" id="{38204D75-5CF4-B051-2DCA-7269A90283A6}"/>
+          <p:cNvPr id="6" name="Grafik 5">
+            <a:extLst>
+              <a:ext uri="{FF2B5EF4-FFF2-40B4-BE49-F238E27FC236}">
+                <a16:creationId xmlns:a16="http://schemas.microsoft.com/office/drawing/2014/main" id="{9B440944-E5DC-1BC6-D703-4F22D59C4348}"/>
               </a:ext>
             </a:extLst>
           </p:cNvPr>
@@ -7463,8 +8357,38 @@
         </p:blipFill>
         <p:spPr>
           <a:xfrm>
-            <a:off x="6096000" y="2636707"/>
-            <a:ext cx="4069454" cy="2729173"/>
+            <a:off x="7196499" y="2647925"/>
+            <a:ext cx="4157301" cy="2811463"/>
+          </a:xfrm>
+          <a:prstGeom prst="rect">
+            <a:avLst/>
+          </a:prstGeom>
+        </p:spPr>
+      </p:pic>
+      <p:pic>
+        <p:nvPicPr>
+          <p:cNvPr id="8" name="Grafik 7">
+            <a:extLst>
+              <a:ext uri="{FF2B5EF4-FFF2-40B4-BE49-F238E27FC236}">
+                <a16:creationId xmlns:a16="http://schemas.microsoft.com/office/drawing/2014/main" id="{09976416-CB38-BC47-5E4A-27EB4F6D3C27}"/>
+              </a:ext>
+            </a:extLst>
+          </p:cNvPr>
+          <p:cNvPicPr>
+            <a:picLocks noChangeAspect="1"/>
+          </p:cNvPicPr>
+          <p:nvPr/>
+        </p:nvPicPr>
+        <p:blipFill>
+          <a:blip r:embed="rId3"/>
+          <a:stretch>
+            <a:fillRect/>
+          </a:stretch>
+        </p:blipFill>
+        <p:spPr>
+          <a:xfrm>
+            <a:off x="1740754" y="3102185"/>
+            <a:ext cx="4553192" cy="1902941"/>
           </a:xfrm>
           <a:prstGeom prst="rect">
             <a:avLst/>
@@ -7485,118 +8409,6 @@
 </file>
 
 <file path=ppt/slides/slide6.xml><?xml version="1.0" encoding="utf-8"?>
-<p:sld xmlns:a="http://schemas.openxmlformats.org/drawingml/2006/main" xmlns:r="http://schemas.openxmlformats.org/officeDocument/2006/relationships" xmlns:p="http://schemas.openxmlformats.org/presentationml/2006/main">
-  <p:cSld>
-    <p:spTree>
-      <p:nvGrpSpPr>
-        <p:cNvPr id="1" name=""/>
-        <p:cNvGrpSpPr/>
-        <p:nvPr/>
-      </p:nvGrpSpPr>
-      <p:grpSpPr>
-        <a:xfrm>
-          <a:off x="0" y="0"/>
-          <a:ext cx="0" cy="0"/>
-          <a:chOff x="0" y="0"/>
-          <a:chExt cx="0" cy="0"/>
-        </a:xfrm>
-      </p:grpSpPr>
-      <p:sp>
-        <p:nvSpPr>
-          <p:cNvPr id="2" name="Titel 1">
-            <a:extLst>
-              <a:ext uri="{FF2B5EF4-FFF2-40B4-BE49-F238E27FC236}">
-                <a16:creationId xmlns:a16="http://schemas.microsoft.com/office/drawing/2014/main" id="{E798F738-6748-F9A3-D910-5F118C75696C}"/>
-              </a:ext>
-            </a:extLst>
-          </p:cNvPr>
-          <p:cNvSpPr>
-            <a:spLocks noGrp="1"/>
-          </p:cNvSpPr>
-          <p:nvPr>
-            <p:ph type="title"/>
-          </p:nvPr>
-        </p:nvSpPr>
-        <p:spPr/>
-        <p:txBody>
-          <a:bodyPr/>
-          <a:lstStyle/>
-          <a:p>
-            <a:r>
-              <a:rPr lang="de-DE" b="1" dirty="0">
-                <a:effectLst>
-                  <a:outerShdw blurRad="38100" dist="38100" dir="2700000" algn="tl">
-                    <a:srgbClr val="000000">
-                      <a:alpha val="43137"/>
-                    </a:srgbClr>
-                  </a:outerShdw>
-                </a:effectLst>
-              </a:rPr>
-              <a:t>Umsetzung </a:t>
-            </a:r>
-            <a:r>
-              <a:rPr lang="de-DE" dirty="0">
-                <a:effectLst>
-                  <a:outerShdw blurRad="38100" dist="38100" dir="2700000" algn="tl">
-                    <a:srgbClr val="000000">
-                      <a:alpha val="43137"/>
-                    </a:srgbClr>
-                  </a:outerShdw>
-                </a:effectLst>
-              </a:rPr>
-              <a:t>- </a:t>
-            </a:r>
-            <a:endParaRPr lang="de-DE" b="1" dirty="0">
-              <a:effectLst>
-                <a:outerShdw blurRad="38100" dist="38100" dir="2700000" algn="tl">
-                  <a:srgbClr val="000000">
-                    <a:alpha val="43137"/>
-                  </a:srgbClr>
-                </a:outerShdw>
-              </a:effectLst>
-            </a:endParaRPr>
-          </a:p>
-        </p:txBody>
-      </p:sp>
-      <p:sp>
-        <p:nvSpPr>
-          <p:cNvPr id="3" name="Inhaltsplatzhalter 2">
-            <a:extLst>
-              <a:ext uri="{FF2B5EF4-FFF2-40B4-BE49-F238E27FC236}">
-                <a16:creationId xmlns:a16="http://schemas.microsoft.com/office/drawing/2014/main" id="{9814F278-5A46-11EE-4BA2-1C4D52255852}"/>
-              </a:ext>
-            </a:extLst>
-          </p:cNvPr>
-          <p:cNvSpPr>
-            <a:spLocks noGrp="1"/>
-          </p:cNvSpPr>
-          <p:nvPr>
-            <p:ph idx="1"/>
-          </p:nvPr>
-        </p:nvSpPr>
-        <p:spPr/>
-        <p:txBody>
-          <a:bodyPr/>
-          <a:lstStyle/>
-          <a:p>
-            <a:endParaRPr lang="de-DE" dirty="0"/>
-          </a:p>
-        </p:txBody>
-      </p:sp>
-    </p:spTree>
-    <p:extLst>
-      <p:ext uri="{BB962C8B-B14F-4D97-AF65-F5344CB8AC3E}">
-        <p14:creationId xmlns:p14="http://schemas.microsoft.com/office/powerpoint/2010/main" val="2293322086"/>
-      </p:ext>
-    </p:extLst>
-  </p:cSld>
-  <p:clrMapOvr>
-    <a:masterClrMapping/>
-  </p:clrMapOvr>
-</p:sld>
-</file>
-
-<file path=ppt/slides/slide7.xml><?xml version="1.0" encoding="utf-8"?>
 <p:sld xmlns:a="http://schemas.openxmlformats.org/drawingml/2006/main" xmlns:r="http://schemas.openxmlformats.org/officeDocument/2006/relationships" xmlns:p="http://schemas.openxmlformats.org/presentationml/2006/main">
   <p:cSld>
     <p:spTree>
@@ -7662,7 +8474,7 @@
                   </a:outerShdw>
                 </a:effectLst>
               </a:rPr>
-              <a:t> - Speicherung der Passwörter (Lokal)</a:t>
+              <a:t> – Masterpasswort ändern</a:t>
             </a:r>
             <a:endParaRPr lang="de-DE" u="sng" dirty="0">
               <a:effectLst>
@@ -7676,12 +8488,134 @@
           </a:p>
         </p:txBody>
       </p:sp>
+      <p:pic>
+        <p:nvPicPr>
+          <p:cNvPr id="7" name="Inhaltsplatzhalter 6">
+            <a:extLst>
+              <a:ext uri="{FF2B5EF4-FFF2-40B4-BE49-F238E27FC236}">
+                <a16:creationId xmlns:a16="http://schemas.microsoft.com/office/drawing/2014/main" id="{79E0B17C-7A64-964E-73A8-82FB686227AF}"/>
+              </a:ext>
+            </a:extLst>
+          </p:cNvPr>
+          <p:cNvPicPr>
+            <a:picLocks noGrp="1" noChangeAspect="1"/>
+          </p:cNvPicPr>
+          <p:nvPr>
+            <p:ph idx="1"/>
+          </p:nvPr>
+        </p:nvPicPr>
+        <p:blipFill>
+          <a:blip r:embed="rId2"/>
+          <a:stretch>
+            <a:fillRect/>
+          </a:stretch>
+        </p:blipFill>
+        <p:spPr>
+          <a:xfrm>
+            <a:off x="2584450" y="1690688"/>
+            <a:ext cx="7023100" cy="4598970"/>
+          </a:xfrm>
+        </p:spPr>
+      </p:pic>
+    </p:spTree>
+    <p:extLst>
+      <p:ext uri="{BB962C8B-B14F-4D97-AF65-F5344CB8AC3E}">
+        <p14:creationId xmlns:p14="http://schemas.microsoft.com/office/powerpoint/2010/main" val="2043039090"/>
+      </p:ext>
+    </p:extLst>
+  </p:cSld>
+  <p:clrMapOvr>
+    <a:masterClrMapping/>
+  </p:clrMapOvr>
+</p:sld>
+</file>
+
+<file path=ppt/slides/slide7.xml><?xml version="1.0" encoding="utf-8"?>
+<p:sld xmlns:a="http://schemas.openxmlformats.org/drawingml/2006/main" xmlns:r="http://schemas.openxmlformats.org/officeDocument/2006/relationships" xmlns:p="http://schemas.openxmlformats.org/presentationml/2006/main">
+  <p:cSld>
+    <p:spTree>
+      <p:nvGrpSpPr>
+        <p:cNvPr id="1" name="">
+          <a:extLst>
+            <a:ext uri="{FF2B5EF4-FFF2-40B4-BE49-F238E27FC236}">
+              <a16:creationId xmlns:a16="http://schemas.microsoft.com/office/drawing/2014/main" id="{424C856B-C94A-8659-2E9E-13F4DCAF2C44}"/>
+            </a:ext>
+          </a:extLst>
+        </p:cNvPr>
+        <p:cNvGrpSpPr/>
+        <p:nvPr/>
+      </p:nvGrpSpPr>
+      <p:grpSpPr>
+        <a:xfrm>
+          <a:off x="0" y="0"/>
+          <a:ext cx="0" cy="0"/>
+          <a:chOff x="0" y="0"/>
+          <a:chExt cx="0" cy="0"/>
+        </a:xfrm>
+      </p:grpSpPr>
+      <p:sp>
+        <p:nvSpPr>
+          <p:cNvPr id="2" name="Titel 1">
+            <a:extLst>
+              <a:ext uri="{FF2B5EF4-FFF2-40B4-BE49-F238E27FC236}">
+                <a16:creationId xmlns:a16="http://schemas.microsoft.com/office/drawing/2014/main" id="{E8BAB5E7-B0B9-1F07-CD2F-3DB95654AB1F}"/>
+              </a:ext>
+            </a:extLst>
+          </p:cNvPr>
+          <p:cNvSpPr>
+            <a:spLocks noGrp="1"/>
+          </p:cNvSpPr>
+          <p:nvPr>
+            <p:ph type="title"/>
+          </p:nvPr>
+        </p:nvSpPr>
+        <p:spPr/>
+        <p:txBody>
+          <a:bodyPr/>
+          <a:lstStyle/>
+          <a:p>
+            <a:r>
+              <a:rPr lang="de-DE" b="1" dirty="0">
+                <a:effectLst>
+                  <a:outerShdw blurRad="38100" dist="38100" dir="2700000" algn="tl">
+                    <a:srgbClr val="000000">
+                      <a:alpha val="43137"/>
+                    </a:srgbClr>
+                  </a:outerShdw>
+                </a:effectLst>
+              </a:rPr>
+              <a:t>Umsetzung</a:t>
+            </a:r>
+            <a:r>
+              <a:rPr lang="de-DE" dirty="0">
+                <a:effectLst>
+                  <a:outerShdw blurRad="38100" dist="38100" dir="2700000" algn="tl">
+                    <a:srgbClr val="000000">
+                      <a:alpha val="43137"/>
+                    </a:srgbClr>
+                  </a:outerShdw>
+                </a:effectLst>
+              </a:rPr>
+              <a:t> - Speicherung der Passwörter (Lokal)</a:t>
+            </a:r>
+            <a:endParaRPr lang="de-DE" u="sng" dirty="0">
+              <a:effectLst>
+                <a:outerShdw blurRad="38100" dist="38100" dir="2700000" algn="tl">
+                  <a:srgbClr val="000000">
+                    <a:alpha val="43137"/>
+                  </a:srgbClr>
+                </a:outerShdw>
+              </a:effectLst>
+            </a:endParaRPr>
+          </a:p>
+        </p:txBody>
+      </p:sp>
       <p:sp>
         <p:nvSpPr>
           <p:cNvPr id="3" name="Inhaltsplatzhalter 2">
             <a:extLst>
               <a:ext uri="{FF2B5EF4-FFF2-40B4-BE49-F238E27FC236}">
-                <a16:creationId xmlns:a16="http://schemas.microsoft.com/office/drawing/2014/main" id="{FAD2D4F3-D0CC-8FEE-A212-B4DF45B6B9C9}"/>
+                <a16:creationId xmlns:a16="http://schemas.microsoft.com/office/drawing/2014/main" id="{6CE3C59E-41A5-6182-4152-63CC4FC1CF47}"/>
               </a:ext>
             </a:extLst>
           </p:cNvPr>
@@ -7737,7 +8671,7 @@
           <p:cNvPr id="31" name="Grafik 30" descr="Ein Bild, das Text, Screenshot, Schrift, Software enthält.&#10;&#10;KI-generierte Inhalte können fehlerhaft sein.">
             <a:extLst>
               <a:ext uri="{FF2B5EF4-FFF2-40B4-BE49-F238E27FC236}">
-                <a16:creationId xmlns:a16="http://schemas.microsoft.com/office/drawing/2014/main" id="{71C76BD5-5211-E302-7C5D-DE550874CBFD}"/>
+                <a16:creationId xmlns:a16="http://schemas.microsoft.com/office/drawing/2014/main" id="{921E9BFB-BD00-B3F0-E368-6188D922F594}"/>
               </a:ext>
             </a:extLst>
           </p:cNvPr>
@@ -7773,7 +8707,7 @@
           <p:cNvPr id="35" name="Grafik 34" descr="Ein Bild, das Text, Screenshot, Software, Schrift enthält.&#10;&#10;KI-generierte Inhalte können fehlerhaft sein.">
             <a:extLst>
               <a:ext uri="{FF2B5EF4-FFF2-40B4-BE49-F238E27FC236}">
-                <a16:creationId xmlns:a16="http://schemas.microsoft.com/office/drawing/2014/main" id="{F6D92926-AF1B-A23B-975F-1FAED6904655}"/>
+                <a16:creationId xmlns:a16="http://schemas.microsoft.com/office/drawing/2014/main" id="{9A23F0DC-5C2C-7941-DB40-D4DC5A70B052}"/>
               </a:ext>
             </a:extLst>
           </p:cNvPr>
@@ -7809,7 +8743,7 @@
           <p:cNvPr id="33" name="Grafik 32" descr="Ein Bild, das Text, Screenshot, Software, Schrift enthält.&#10;&#10;KI-generierte Inhalte können fehlerhaft sein.">
             <a:extLst>
               <a:ext uri="{FF2B5EF4-FFF2-40B4-BE49-F238E27FC236}">
-                <a16:creationId xmlns:a16="http://schemas.microsoft.com/office/drawing/2014/main" id="{BB48BBA6-685D-4364-5EF0-C6044D63E5D7}"/>
+                <a16:creationId xmlns:a16="http://schemas.microsoft.com/office/drawing/2014/main" id="{28E12E63-17DD-BFF8-23EF-9B0509ED27C0}"/>
               </a:ext>
             </a:extLst>
           </p:cNvPr>
@@ -7845,7 +8779,7 @@
           <p:cNvPr id="37" name="Grafik 36" descr="Ein Bild, das Text, Screenshot, Software, Computersymbol enthält.&#10;&#10;KI-generierte Inhalte können fehlerhaft sein.">
             <a:extLst>
               <a:ext uri="{FF2B5EF4-FFF2-40B4-BE49-F238E27FC236}">
-                <a16:creationId xmlns:a16="http://schemas.microsoft.com/office/drawing/2014/main" id="{90766113-DCFE-67B2-BE8F-C622B6D9ABB6}"/>
+                <a16:creationId xmlns:a16="http://schemas.microsoft.com/office/drawing/2014/main" id="{B4E23959-F7B7-B118-2481-D82CDBF0410B}"/>
               </a:ext>
             </a:extLst>
           </p:cNvPr>
@@ -7879,7 +8813,7 @@
     </p:spTree>
     <p:extLst>
       <p:ext uri="{BB962C8B-B14F-4D97-AF65-F5344CB8AC3E}">
-        <p14:creationId xmlns:p14="http://schemas.microsoft.com/office/powerpoint/2010/main" val="2043039090"/>
+        <p14:creationId xmlns:p14="http://schemas.microsoft.com/office/powerpoint/2010/main" val="1746340310"/>
       </p:ext>
     </p:extLst>
   </p:cSld>
@@ -10903,4 +11837,319 @@
     </a:ext>
   </a:extLst>
 </a:theme>
+</file>
+
+<file path=ppt/theme/theme2.xml><?xml version="1.0" encoding="utf-8"?>
+<a:theme xmlns:a="http://schemas.openxmlformats.org/drawingml/2006/main" name="Office">
+  <a:themeElements>
+    <a:clrScheme name="Office">
+      <a:dk1>
+        <a:sysClr val="windowText" lastClr="000000"/>
+      </a:dk1>
+      <a:lt1>
+        <a:sysClr val="window" lastClr="FFFFFF"/>
+      </a:lt1>
+      <a:dk2>
+        <a:srgbClr val="0E2841"/>
+      </a:dk2>
+      <a:lt2>
+        <a:srgbClr val="E8E8E8"/>
+      </a:lt2>
+      <a:accent1>
+        <a:srgbClr val="156082"/>
+      </a:accent1>
+      <a:accent2>
+        <a:srgbClr val="E97132"/>
+      </a:accent2>
+      <a:accent3>
+        <a:srgbClr val="196B24"/>
+      </a:accent3>
+      <a:accent4>
+        <a:srgbClr val="0F9ED5"/>
+      </a:accent4>
+      <a:accent5>
+        <a:srgbClr val="A02B93"/>
+      </a:accent5>
+      <a:accent6>
+        <a:srgbClr val="4EA72E"/>
+      </a:accent6>
+      <a:hlink>
+        <a:srgbClr val="467886"/>
+      </a:hlink>
+      <a:folHlink>
+        <a:srgbClr val="96607D"/>
+      </a:folHlink>
+    </a:clrScheme>
+    <a:fontScheme name="Office">
+      <a:majorFont>
+        <a:latin typeface="Aptos Display" panose="02110004020202020204"/>
+        <a:ea typeface=""/>
+        <a:cs typeface=""/>
+        <a:font script="Jpan" typeface="游ゴシック Light"/>
+        <a:font script="Hang" typeface="맑은 고딕"/>
+        <a:font script="Hans" typeface="等线 Light"/>
+        <a:font script="Hant" typeface="新細明體"/>
+        <a:font script="Arab" typeface="Times New Roman"/>
+        <a:font script="Hebr" typeface="Times New Roman"/>
+        <a:font script="Thai" typeface="Angsana New"/>
+        <a:font script="Ethi" typeface="Nyala"/>
+        <a:font script="Beng" typeface="Vrinda"/>
+        <a:font script="Gujr" typeface="Shruti"/>
+        <a:font script="Khmr" typeface="MoolBoran"/>
+        <a:font script="Knda" typeface="Tunga"/>
+        <a:font script="Guru" typeface="Raavi"/>
+        <a:font script="Cans" typeface="Euphemia"/>
+        <a:font script="Cher" typeface="Plantagenet Cherokee"/>
+        <a:font script="Yiii" typeface="Microsoft Yi Baiti"/>
+        <a:font script="Tibt" typeface="Microsoft Himalaya"/>
+        <a:font script="Thaa" typeface="MV Boli"/>
+        <a:font script="Deva" typeface="Mangal"/>
+        <a:font script="Telu" typeface="Gautami"/>
+        <a:font script="Taml" typeface="Latha"/>
+        <a:font script="Syrc" typeface="Estrangelo Edessa"/>
+        <a:font script="Orya" typeface="Kalinga"/>
+        <a:font script="Mlym" typeface="Kartika"/>
+        <a:font script="Laoo" typeface="DokChampa"/>
+        <a:font script="Sinh" typeface="Iskoola Pota"/>
+        <a:font script="Mong" typeface="Mongolian Baiti"/>
+        <a:font script="Viet" typeface="Times New Roman"/>
+        <a:font script="Uigh" typeface="Microsoft Uighur"/>
+        <a:font script="Geor" typeface="Sylfaen"/>
+        <a:font script="Armn" typeface="Arial"/>
+        <a:font script="Bugi" typeface="Leelawadee UI"/>
+        <a:font script="Bopo" typeface="Microsoft JhengHei"/>
+        <a:font script="Java" typeface="Javanese Text"/>
+        <a:font script="Lisu" typeface="Segoe UI"/>
+        <a:font script="Mymr" typeface="Myanmar Text"/>
+        <a:font script="Nkoo" typeface="Ebrima"/>
+        <a:font script="Olck" typeface="Nirmala UI"/>
+        <a:font script="Osma" typeface="Ebrima"/>
+        <a:font script="Phag" typeface="Phagspa"/>
+        <a:font script="Syrn" typeface="Estrangelo Edessa"/>
+        <a:font script="Syrj" typeface="Estrangelo Edessa"/>
+        <a:font script="Syre" typeface="Estrangelo Edessa"/>
+        <a:font script="Sora" typeface="Nirmala UI"/>
+        <a:font script="Tale" typeface="Microsoft Tai Le"/>
+        <a:font script="Talu" typeface="Microsoft New Tai Lue"/>
+        <a:font script="Tfng" typeface="Ebrima"/>
+      </a:majorFont>
+      <a:minorFont>
+        <a:latin typeface="Aptos" panose="02110004020202020204"/>
+        <a:ea typeface=""/>
+        <a:cs typeface=""/>
+        <a:font script="Jpan" typeface="游ゴシック"/>
+        <a:font script="Hang" typeface="맑은 고딕"/>
+        <a:font script="Hans" typeface="等线"/>
+        <a:font script="Hant" typeface="新細明體"/>
+        <a:font script="Arab" typeface="Arial"/>
+        <a:font script="Hebr" typeface="Arial"/>
+        <a:font script="Thai" typeface="Cordia New"/>
+        <a:font script="Ethi" typeface="Nyala"/>
+        <a:font script="Beng" typeface="Vrinda"/>
+        <a:font script="Gujr" typeface="Shruti"/>
+        <a:font script="Khmr" typeface="DaunPenh"/>
+        <a:font script="Knda" typeface="Tunga"/>
+        <a:font script="Guru" typeface="Raavi"/>
+        <a:font script="Cans" typeface="Euphemia"/>
+        <a:font script="Cher" typeface="Plantagenet Cherokee"/>
+        <a:font script="Yiii" typeface="Microsoft Yi Baiti"/>
+        <a:font script="Tibt" typeface="Microsoft Himalaya"/>
+        <a:font script="Thaa" typeface="MV Boli"/>
+        <a:font script="Deva" typeface="Mangal"/>
+        <a:font script="Telu" typeface="Gautami"/>
+        <a:font script="Taml" typeface="Latha"/>
+        <a:font script="Syrc" typeface="Estrangelo Edessa"/>
+        <a:font script="Orya" typeface="Kalinga"/>
+        <a:font script="Mlym" typeface="Kartika"/>
+        <a:font script="Laoo" typeface="DokChampa"/>
+        <a:font script="Sinh" typeface="Iskoola Pota"/>
+        <a:font script="Mong" typeface="Mongolian Baiti"/>
+        <a:font script="Viet" typeface="Arial"/>
+        <a:font script="Uigh" typeface="Microsoft Uighur"/>
+        <a:font script="Geor" typeface="Sylfaen"/>
+        <a:font script="Armn" typeface="Arial"/>
+        <a:font script="Bugi" typeface="Leelawadee UI"/>
+        <a:font script="Bopo" typeface="Microsoft JhengHei"/>
+        <a:font script="Java" typeface="Javanese Text"/>
+        <a:font script="Lisu" typeface="Segoe UI"/>
+        <a:font script="Mymr" typeface="Myanmar Text"/>
+        <a:font script="Nkoo" typeface="Ebrima"/>
+        <a:font script="Olck" typeface="Nirmala UI"/>
+        <a:font script="Osma" typeface="Ebrima"/>
+        <a:font script="Phag" typeface="Phagspa"/>
+        <a:font script="Syrn" typeface="Estrangelo Edessa"/>
+        <a:font script="Syrj" typeface="Estrangelo Edessa"/>
+        <a:font script="Syre" typeface="Estrangelo Edessa"/>
+        <a:font script="Sora" typeface="Nirmala UI"/>
+        <a:font script="Tale" typeface="Microsoft Tai Le"/>
+        <a:font script="Talu" typeface="Microsoft New Tai Lue"/>
+        <a:font script="Tfng" typeface="Ebrima"/>
+      </a:minorFont>
+    </a:fontScheme>
+    <a:fmtScheme name="Office">
+      <a:fillStyleLst>
+        <a:solidFill>
+          <a:schemeClr val="phClr"/>
+        </a:solidFill>
+        <a:gradFill rotWithShape="1">
+          <a:gsLst>
+            <a:gs pos="0">
+              <a:schemeClr val="phClr">
+                <a:lumMod val="110000"/>
+                <a:satMod val="105000"/>
+                <a:tint val="67000"/>
+              </a:schemeClr>
+            </a:gs>
+            <a:gs pos="50000">
+              <a:schemeClr val="phClr">
+                <a:lumMod val="105000"/>
+                <a:satMod val="103000"/>
+                <a:tint val="73000"/>
+              </a:schemeClr>
+            </a:gs>
+            <a:gs pos="100000">
+              <a:schemeClr val="phClr">
+                <a:lumMod val="105000"/>
+                <a:satMod val="109000"/>
+                <a:tint val="81000"/>
+              </a:schemeClr>
+            </a:gs>
+          </a:gsLst>
+          <a:lin ang="5400000" scaled="0"/>
+        </a:gradFill>
+        <a:gradFill rotWithShape="1">
+          <a:gsLst>
+            <a:gs pos="0">
+              <a:schemeClr val="phClr">
+                <a:satMod val="103000"/>
+                <a:lumMod val="102000"/>
+                <a:tint val="94000"/>
+              </a:schemeClr>
+            </a:gs>
+            <a:gs pos="50000">
+              <a:schemeClr val="phClr">
+                <a:satMod val="110000"/>
+                <a:lumMod val="100000"/>
+                <a:shade val="100000"/>
+              </a:schemeClr>
+            </a:gs>
+            <a:gs pos="100000">
+              <a:schemeClr val="phClr">
+                <a:lumMod val="99000"/>
+                <a:satMod val="120000"/>
+                <a:shade val="78000"/>
+              </a:schemeClr>
+            </a:gs>
+          </a:gsLst>
+          <a:lin ang="5400000" scaled="0"/>
+        </a:gradFill>
+      </a:fillStyleLst>
+      <a:lnStyleLst>
+        <a:ln w="12700" cap="flat" cmpd="sng" algn="ctr">
+          <a:solidFill>
+            <a:schemeClr val="phClr"/>
+          </a:solidFill>
+          <a:prstDash val="solid"/>
+          <a:miter lim="800000"/>
+        </a:ln>
+        <a:ln w="19050" cap="flat" cmpd="sng" algn="ctr">
+          <a:solidFill>
+            <a:schemeClr val="phClr"/>
+          </a:solidFill>
+          <a:prstDash val="solid"/>
+          <a:miter lim="800000"/>
+        </a:ln>
+        <a:ln w="25400" cap="flat" cmpd="sng" algn="ctr">
+          <a:solidFill>
+            <a:schemeClr val="phClr"/>
+          </a:solidFill>
+          <a:prstDash val="solid"/>
+          <a:miter lim="800000"/>
+        </a:ln>
+      </a:lnStyleLst>
+      <a:effectStyleLst>
+        <a:effectStyle>
+          <a:effectLst/>
+        </a:effectStyle>
+        <a:effectStyle>
+          <a:effectLst/>
+        </a:effectStyle>
+        <a:effectStyle>
+          <a:effectLst>
+            <a:outerShdw blurRad="57150" dist="19050" dir="5400000" algn="ctr" rotWithShape="0">
+              <a:srgbClr val="000000">
+                <a:alpha val="63000"/>
+              </a:srgbClr>
+            </a:outerShdw>
+          </a:effectLst>
+        </a:effectStyle>
+      </a:effectStyleLst>
+      <a:bgFillStyleLst>
+        <a:solidFill>
+          <a:schemeClr val="phClr"/>
+        </a:solidFill>
+        <a:solidFill>
+          <a:schemeClr val="phClr">
+            <a:tint val="95000"/>
+            <a:satMod val="170000"/>
+          </a:schemeClr>
+        </a:solidFill>
+        <a:gradFill rotWithShape="1">
+          <a:gsLst>
+            <a:gs pos="0">
+              <a:schemeClr val="phClr">
+                <a:tint val="93000"/>
+                <a:satMod val="150000"/>
+                <a:shade val="98000"/>
+                <a:lumMod val="102000"/>
+              </a:schemeClr>
+            </a:gs>
+            <a:gs pos="50000">
+              <a:schemeClr val="phClr">
+                <a:tint val="98000"/>
+                <a:satMod val="130000"/>
+                <a:shade val="90000"/>
+                <a:lumMod val="103000"/>
+              </a:schemeClr>
+            </a:gs>
+            <a:gs pos="100000">
+              <a:schemeClr val="phClr">
+                <a:shade val="63000"/>
+                <a:satMod val="120000"/>
+              </a:schemeClr>
+            </a:gs>
+          </a:gsLst>
+          <a:lin ang="5400000" scaled="0"/>
+        </a:gradFill>
+      </a:bgFillStyleLst>
+    </a:fmtScheme>
+  </a:themeElements>
+  <a:objectDefaults>
+    <a:lnDef>
+      <a:spPr/>
+      <a:bodyPr/>
+      <a:lstStyle/>
+      <a:style>
+        <a:lnRef idx="2">
+          <a:schemeClr val="accent1"/>
+        </a:lnRef>
+        <a:fillRef idx="0">
+          <a:schemeClr val="accent1"/>
+        </a:fillRef>
+        <a:effectRef idx="1">
+          <a:schemeClr val="accent1"/>
+        </a:effectRef>
+        <a:fontRef idx="minor">
+          <a:schemeClr val="tx1"/>
+        </a:fontRef>
+      </a:style>
+    </a:lnDef>
+  </a:objectDefaults>
+  <a:extraClrSchemeLst/>
+  <a:extLst>
+    <a:ext uri="{05A4C25C-085E-4340-85A3-A5531E510DB2}">
+      <thm15:themeFamily xmlns:thm15="http://schemas.microsoft.com/office/thememl/2012/main" name="Office Theme" id="{2E142A2C-CD16-42D6-873A-C26D2A0506FA}" vid="{1BDDFF52-6CD6-40A5-AB3C-68EB2F1E4D0A}"/>
+    </a:ext>
+  </a:extLst>
+</a:theme>
 </file>
--- a/pp/Presentation.pptx
+++ b/pp/Presentation.pptx
@@ -9,10 +9,10 @@
   </p:notesMasterIdLst>
   <p:sldIdLst>
     <p:sldId id="256" r:id="rId2"/>
-    <p:sldId id="257" r:id="rId3"/>
-    <p:sldId id="258" r:id="rId4"/>
-    <p:sldId id="261" r:id="rId5"/>
-    <p:sldId id="265" r:id="rId6"/>
+    <p:sldId id="258" r:id="rId3"/>
+    <p:sldId id="261" r:id="rId4"/>
+    <p:sldId id="265" r:id="rId5"/>
+    <p:sldId id="257" r:id="rId6"/>
     <p:sldId id="266" r:id="rId7"/>
     <p:sldId id="268" r:id="rId8"/>
     <p:sldId id="263" r:id="rId9"/>
@@ -548,7 +548,7 @@
           <a:p>
             <a:fld id="{8C0078F9-8374-48A3-B3BA-E95D6F4ADC3F}" type="slidenum">
               <a:rPr lang="de-DE" smtClean="0"/>
-              <a:t>4</a:t>
+              <a:t>3</a:t>
             </a:fld>
             <a:endParaRPr lang="de-DE"/>
           </a:p>
@@ -5802,17 +5802,47 @@
           <a:p>
             <a:r>
               <a:rPr lang="de-DE" dirty="0"/>
-              <a:t>Generell Dark Mode</a:t>
+              <a:t>Aufteilung von Code in mehrere Files (Packages)</a:t>
             </a:r>
           </a:p>
           <a:p>
             <a:r>
               <a:rPr lang="de-DE" dirty="0"/>
-              <a:t>Aufteilung von Code in mehrere Files</a:t>
-            </a:r>
-          </a:p>
-        </p:txBody>
-      </p:sp>
+              <a:t>Dark Mode unter Tabelle</a:t>
+            </a:r>
+          </a:p>
+        </p:txBody>
+      </p:sp>
+      <p:pic>
+        <p:nvPicPr>
+          <p:cNvPr id="5" name="Grafik 4">
+            <a:extLst>
+              <a:ext uri="{FF2B5EF4-FFF2-40B4-BE49-F238E27FC236}">
+                <a16:creationId xmlns:a16="http://schemas.microsoft.com/office/drawing/2014/main" id="{0EC9DCDC-3402-E811-36E5-5DAB9501DAC7}"/>
+              </a:ext>
+            </a:extLst>
+          </p:cNvPr>
+          <p:cNvPicPr>
+            <a:picLocks noChangeAspect="1"/>
+          </p:cNvPicPr>
+          <p:nvPr/>
+        </p:nvPicPr>
+        <p:blipFill>
+          <a:blip r:embed="rId2"/>
+          <a:stretch>
+            <a:fillRect/>
+          </a:stretch>
+        </p:blipFill>
+        <p:spPr>
+          <a:xfrm>
+            <a:off x="5181600" y="3141344"/>
+            <a:ext cx="2714459" cy="3669547"/>
+          </a:xfrm>
+          <a:prstGeom prst="rect">
+            <a:avLst/>
+          </a:prstGeom>
+        </p:spPr>
+      </p:pic>
     </p:spTree>
     <p:extLst>
       <p:ext uri="{BB962C8B-B14F-4D97-AF65-F5344CB8AC3E}">
@@ -6014,175 +6044,6 @@
           <a:chExt cx="0" cy="0"/>
         </a:xfrm>
       </p:grpSpPr>
-      <p:sp>
-        <p:nvSpPr>
-          <p:cNvPr id="2" name="Titel 1">
-            <a:extLst>
-              <a:ext uri="{FF2B5EF4-FFF2-40B4-BE49-F238E27FC236}">
-                <a16:creationId xmlns:a16="http://schemas.microsoft.com/office/drawing/2014/main" id="{B6DFF170-3071-5173-9F09-40F84F10475A}"/>
-              </a:ext>
-            </a:extLst>
-          </p:cNvPr>
-          <p:cNvSpPr>
-            <a:spLocks noGrp="1"/>
-          </p:cNvSpPr>
-          <p:nvPr>
-            <p:ph type="title"/>
-          </p:nvPr>
-        </p:nvSpPr>
-        <p:spPr/>
-        <p:txBody>
-          <a:bodyPr/>
-          <a:lstStyle/>
-          <a:p>
-            <a:r>
-              <a:rPr lang="de-DE" b="1" dirty="0">
-                <a:effectLst>
-                  <a:outerShdw blurRad="38100" dist="38100" dir="2700000" algn="tl">
-                    <a:srgbClr val="000000">
-                      <a:alpha val="43137"/>
-                    </a:srgbClr>
-                  </a:outerShdw>
-                </a:effectLst>
-              </a:rPr>
-              <a:t>Verwendete Technologien</a:t>
-            </a:r>
-          </a:p>
-        </p:txBody>
-      </p:sp>
-      <p:sp>
-        <p:nvSpPr>
-          <p:cNvPr id="3" name="Inhaltsplatzhalter 2">
-            <a:extLst>
-              <a:ext uri="{FF2B5EF4-FFF2-40B4-BE49-F238E27FC236}">
-                <a16:creationId xmlns:a16="http://schemas.microsoft.com/office/drawing/2014/main" id="{5FBE8B52-E3A3-85D1-350C-8B5D563DCA0D}"/>
-              </a:ext>
-            </a:extLst>
-          </p:cNvPr>
-          <p:cNvSpPr>
-            <a:spLocks noGrp="1"/>
-          </p:cNvSpPr>
-          <p:nvPr>
-            <p:ph idx="1"/>
-          </p:nvPr>
-        </p:nvSpPr>
-        <p:spPr/>
-        <p:txBody>
-          <a:bodyPr>
-            <a:normAutofit lnSpcReduction="10000"/>
-          </a:bodyPr>
-          <a:lstStyle/>
-          <a:p>
-            <a:pPr marL="0" indent="0">
-              <a:buNone/>
-            </a:pPr>
-            <a:r>
-              <a:rPr lang="de-DE" sz="2400" b="1" u="sng" dirty="0"/>
-              <a:t>Client:</a:t>
-            </a:r>
-          </a:p>
-          <a:p>
-            <a:r>
-              <a:rPr lang="de-DE" sz="2000" dirty="0"/>
-              <a:t>AES-256-GCM (für Verschlüsselung der Passwörter)</a:t>
-            </a:r>
-          </a:p>
-          <a:p>
-            <a:r>
-              <a:rPr lang="de-DE" sz="2000" dirty="0"/>
-              <a:t>JSON (zum Speichern der Settings)</a:t>
-            </a:r>
-          </a:p>
-          <a:p>
-            <a:r>
-              <a:rPr lang="de-DE" sz="2000" dirty="0"/>
-              <a:t>Swing UI Designer</a:t>
-            </a:r>
-          </a:p>
-          <a:p>
-            <a:r>
-              <a:rPr lang="de-DE" sz="2000" dirty="0"/>
-              <a:t>Lombok Getter/Setter</a:t>
-            </a:r>
-          </a:p>
-          <a:p>
-            <a:r>
-              <a:rPr lang="de-DE" sz="2000" dirty="0"/>
-              <a:t>MySQL-Connector (JDBC-Driver)</a:t>
-            </a:r>
-          </a:p>
-          <a:p>
-            <a:endParaRPr lang="de-DE" sz="2000" dirty="0"/>
-          </a:p>
-          <a:p>
-            <a:pPr marL="0" indent="0">
-              <a:buNone/>
-            </a:pPr>
-            <a:r>
-              <a:rPr lang="de-DE" sz="2400" b="1" u="sng" dirty="0"/>
-              <a:t>Server:</a:t>
-            </a:r>
-          </a:p>
-          <a:p>
-            <a:r>
-              <a:rPr lang="de-DE" sz="2000" dirty="0"/>
-              <a:t>MySQL Datenbank</a:t>
-            </a:r>
-          </a:p>
-          <a:p>
-            <a:r>
-              <a:rPr lang="de-DE" sz="2000" dirty="0"/>
-              <a:t>Docker Compose</a:t>
-            </a:r>
-          </a:p>
-          <a:p>
-            <a:r>
-              <a:rPr lang="de-DE" sz="2000" dirty="0"/>
-              <a:t>phpMyAdmin (optional </a:t>
-            </a:r>
-            <a:r>
-              <a:rPr lang="de-DE" sz="2000" dirty="0">
-                <a:sym typeface="Wingdings" panose="05000000000000000000" pitchFamily="2" charset="2"/>
-              </a:rPr>
-              <a:t> verwendet zum Debuggen</a:t>
-            </a:r>
-            <a:r>
-              <a:rPr lang="de-DE" sz="2000" dirty="0"/>
-              <a:t>)</a:t>
-            </a:r>
-          </a:p>
-        </p:txBody>
-      </p:sp>
-    </p:spTree>
-    <p:extLst>
-      <p:ext uri="{BB962C8B-B14F-4D97-AF65-F5344CB8AC3E}">
-        <p14:creationId xmlns:p14="http://schemas.microsoft.com/office/powerpoint/2010/main" val="2632948518"/>
-      </p:ext>
-    </p:extLst>
-  </p:cSld>
-  <p:clrMapOvr>
-    <a:masterClrMapping/>
-  </p:clrMapOvr>
-</p:sld>
-</file>
-
-<file path=ppt/slides/slide3.xml><?xml version="1.0" encoding="utf-8"?>
-<p:sld xmlns:a="http://schemas.openxmlformats.org/drawingml/2006/main" xmlns:r="http://schemas.openxmlformats.org/officeDocument/2006/relationships" xmlns:p="http://schemas.openxmlformats.org/presentationml/2006/main">
-  <p:cSld>
-    <p:spTree>
-      <p:nvGrpSpPr>
-        <p:cNvPr id="1" name=""/>
-        <p:cNvGrpSpPr/>
-        <p:nvPr/>
-      </p:nvGrpSpPr>
-      <p:grpSpPr>
-        <a:xfrm>
-          <a:off x="0" y="0"/>
-          <a:ext cx="0" cy="0"/>
-          <a:chOff x="0" y="0"/>
-          <a:chExt cx="0" cy="0"/>
-        </a:xfrm>
-      </p:grpSpPr>
       <p:pic>
         <p:nvPicPr>
           <p:cNvPr id="5" name="Grafik 4">
@@ -6532,7 +6393,7 @@
 </p:sld>
 </file>
 
-<file path=ppt/slides/slide4.xml><?xml version="1.0" encoding="utf-8"?>
+<file path=ppt/slides/slide3.xml><?xml version="1.0" encoding="utf-8"?>
 <p:sld xmlns:a="http://schemas.openxmlformats.org/drawingml/2006/main" xmlns:r="http://schemas.openxmlformats.org/officeDocument/2006/relationships" xmlns:p="http://schemas.openxmlformats.org/presentationml/2006/main">
   <p:cSld>
     <p:spTree>
@@ -8246,7 +8107,7 @@
 </p:sld>
 </file>
 
-<file path=ppt/slides/slide5.xml><?xml version="1.0" encoding="utf-8"?>
+<file path=ppt/slides/slide4.xml><?xml version="1.0" encoding="utf-8"?>
 <p:sld xmlns:a="http://schemas.openxmlformats.org/drawingml/2006/main" xmlns:r="http://schemas.openxmlformats.org/officeDocument/2006/relationships" xmlns:p="http://schemas.openxmlformats.org/presentationml/2006/main">
   <p:cSld>
     <p:spTree>
@@ -8399,6 +8260,175 @@
     <p:extLst>
       <p:ext uri="{BB962C8B-B14F-4D97-AF65-F5344CB8AC3E}">
         <p14:creationId xmlns:p14="http://schemas.microsoft.com/office/powerpoint/2010/main" val="2816906569"/>
+      </p:ext>
+    </p:extLst>
+  </p:cSld>
+  <p:clrMapOvr>
+    <a:masterClrMapping/>
+  </p:clrMapOvr>
+</p:sld>
+</file>
+
+<file path=ppt/slides/slide5.xml><?xml version="1.0" encoding="utf-8"?>
+<p:sld xmlns:a="http://schemas.openxmlformats.org/drawingml/2006/main" xmlns:r="http://schemas.openxmlformats.org/officeDocument/2006/relationships" xmlns:p="http://schemas.openxmlformats.org/presentationml/2006/main">
+  <p:cSld>
+    <p:spTree>
+      <p:nvGrpSpPr>
+        <p:cNvPr id="1" name=""/>
+        <p:cNvGrpSpPr/>
+        <p:nvPr/>
+      </p:nvGrpSpPr>
+      <p:grpSpPr>
+        <a:xfrm>
+          <a:off x="0" y="0"/>
+          <a:ext cx="0" cy="0"/>
+          <a:chOff x="0" y="0"/>
+          <a:chExt cx="0" cy="0"/>
+        </a:xfrm>
+      </p:grpSpPr>
+      <p:sp>
+        <p:nvSpPr>
+          <p:cNvPr id="2" name="Titel 1">
+            <a:extLst>
+              <a:ext uri="{FF2B5EF4-FFF2-40B4-BE49-F238E27FC236}">
+                <a16:creationId xmlns:a16="http://schemas.microsoft.com/office/drawing/2014/main" id="{B6DFF170-3071-5173-9F09-40F84F10475A}"/>
+              </a:ext>
+            </a:extLst>
+          </p:cNvPr>
+          <p:cNvSpPr>
+            <a:spLocks noGrp="1"/>
+          </p:cNvSpPr>
+          <p:nvPr>
+            <p:ph type="title"/>
+          </p:nvPr>
+        </p:nvSpPr>
+        <p:spPr/>
+        <p:txBody>
+          <a:bodyPr/>
+          <a:lstStyle/>
+          <a:p>
+            <a:r>
+              <a:rPr lang="de-DE" b="1" dirty="0">
+                <a:effectLst>
+                  <a:outerShdw blurRad="38100" dist="38100" dir="2700000" algn="tl">
+                    <a:srgbClr val="000000">
+                      <a:alpha val="43137"/>
+                    </a:srgbClr>
+                  </a:outerShdw>
+                </a:effectLst>
+              </a:rPr>
+              <a:t>Verwendete Technologien</a:t>
+            </a:r>
+          </a:p>
+        </p:txBody>
+      </p:sp>
+      <p:sp>
+        <p:nvSpPr>
+          <p:cNvPr id="3" name="Inhaltsplatzhalter 2">
+            <a:extLst>
+              <a:ext uri="{FF2B5EF4-FFF2-40B4-BE49-F238E27FC236}">
+                <a16:creationId xmlns:a16="http://schemas.microsoft.com/office/drawing/2014/main" id="{5FBE8B52-E3A3-85D1-350C-8B5D563DCA0D}"/>
+              </a:ext>
+            </a:extLst>
+          </p:cNvPr>
+          <p:cNvSpPr>
+            <a:spLocks noGrp="1"/>
+          </p:cNvSpPr>
+          <p:nvPr>
+            <p:ph idx="1"/>
+          </p:nvPr>
+        </p:nvSpPr>
+        <p:spPr/>
+        <p:txBody>
+          <a:bodyPr>
+            <a:normAutofit lnSpcReduction="10000"/>
+          </a:bodyPr>
+          <a:lstStyle/>
+          <a:p>
+            <a:pPr marL="0" indent="0">
+              <a:buNone/>
+            </a:pPr>
+            <a:r>
+              <a:rPr lang="de-DE" sz="2400" b="1" u="sng" dirty="0"/>
+              <a:t>Client:</a:t>
+            </a:r>
+          </a:p>
+          <a:p>
+            <a:r>
+              <a:rPr lang="de-DE" sz="2000" dirty="0"/>
+              <a:t>AES-256-GCM (für Verschlüsselung der Passwörter)</a:t>
+            </a:r>
+          </a:p>
+          <a:p>
+            <a:r>
+              <a:rPr lang="de-DE" sz="2000" dirty="0"/>
+              <a:t>JSON (zum Speichern der Settings)</a:t>
+            </a:r>
+          </a:p>
+          <a:p>
+            <a:r>
+              <a:rPr lang="de-DE" sz="2000" dirty="0"/>
+              <a:t>Swing UI Designer</a:t>
+            </a:r>
+          </a:p>
+          <a:p>
+            <a:r>
+              <a:rPr lang="de-DE" sz="2000" dirty="0"/>
+              <a:t>Lombok Getter/Setter</a:t>
+            </a:r>
+          </a:p>
+          <a:p>
+            <a:r>
+              <a:rPr lang="de-DE" sz="2000" dirty="0"/>
+              <a:t>MySQL-Connector (JDBC-Driver)</a:t>
+            </a:r>
+          </a:p>
+          <a:p>
+            <a:endParaRPr lang="de-DE" sz="2000" dirty="0"/>
+          </a:p>
+          <a:p>
+            <a:pPr marL="0" indent="0">
+              <a:buNone/>
+            </a:pPr>
+            <a:r>
+              <a:rPr lang="de-DE" sz="2400" b="1" u="sng" dirty="0"/>
+              <a:t>Server:</a:t>
+            </a:r>
+          </a:p>
+          <a:p>
+            <a:r>
+              <a:rPr lang="de-DE" sz="2000" dirty="0"/>
+              <a:t>MySQL Datenbank</a:t>
+            </a:r>
+          </a:p>
+          <a:p>
+            <a:r>
+              <a:rPr lang="de-DE" sz="2000" dirty="0"/>
+              <a:t>Docker Compose</a:t>
+            </a:r>
+          </a:p>
+          <a:p>
+            <a:r>
+              <a:rPr lang="de-DE" sz="2000" dirty="0"/>
+              <a:t>phpMyAdmin (optional </a:t>
+            </a:r>
+            <a:r>
+              <a:rPr lang="de-DE" sz="2000" dirty="0">
+                <a:sym typeface="Wingdings" panose="05000000000000000000" pitchFamily="2" charset="2"/>
+              </a:rPr>
+              <a:t> verwendet zum Debuggen</a:t>
+            </a:r>
+            <a:r>
+              <a:rPr lang="de-DE" sz="2000" dirty="0"/>
+              <a:t>)</a:t>
+            </a:r>
+          </a:p>
+        </p:txBody>
+      </p:sp>
+    </p:spTree>
+    <p:extLst>
+      <p:ext uri="{BB962C8B-B14F-4D97-AF65-F5344CB8AC3E}">
+        <p14:creationId xmlns:p14="http://schemas.microsoft.com/office/powerpoint/2010/main" val="2632948518"/>
       </p:ext>
     </p:extLst>
   </p:cSld>

--- a/pp/Presentation.pptx
+++ b/pp/Presentation.pptx
@@ -5811,6 +5811,33 @@
               <a:t>Dark Mode unter Tabelle</a:t>
             </a:r>
           </a:p>
+          <a:p>
+            <a:r>
+              <a:rPr lang="de-DE" dirty="0"/>
+              <a:t>Lombok Getter/Setter</a:t>
+            </a:r>
+            <a:br>
+              <a:rPr lang="de-DE" dirty="0"/>
+            </a:br>
+            <a:r>
+              <a:rPr lang="de-DE" dirty="0"/>
+              <a:t>Probleme mit</a:t>
+            </a:r>
+            <a:br>
+              <a:rPr lang="de-DE" dirty="0"/>
+            </a:br>
+            <a:r>
+              <a:rPr lang="de-DE" dirty="0"/>
+              <a:t>verschiedenen</a:t>
+            </a:r>
+            <a:br>
+              <a:rPr lang="de-DE" dirty="0"/>
+            </a:br>
+            <a:r>
+              <a:rPr lang="de-DE" dirty="0"/>
+              <a:t>Versionen</a:t>
+            </a:r>
+          </a:p>
         </p:txBody>
       </p:sp>
       <p:pic>
@@ -5835,8 +5862,37 @@
         </p:blipFill>
         <p:spPr>
           <a:xfrm>
-            <a:off x="5181600" y="3141344"/>
+            <a:off x="9245600" y="3027044"/>
             <a:ext cx="2714459" cy="3669547"/>
+          </a:xfrm>
+          <a:prstGeom prst="rect">
+            <a:avLst/>
+          </a:prstGeom>
+        </p:spPr>
+      </p:pic>
+      <p:pic>
+        <p:nvPicPr>
+          <p:cNvPr id="9" name="Grafik 8">
+            <a:extLst>
+              <a:ext uri="{FF2B5EF4-FFF2-40B4-BE49-F238E27FC236}">
+                <a16:creationId xmlns:a16="http://schemas.microsoft.com/office/drawing/2014/main" id="{039BE62A-7F14-EA51-A3FE-62C91CAF8337}"/>
+              </a:ext>
+            </a:extLst>
+          </p:cNvPr>
+          <p:cNvPicPr>
+            <a:picLocks noChangeAspect="1"/>
+          </p:cNvPicPr>
+          <p:nvPr/>
+        </p:nvPicPr>
+        <p:blipFill>
+          <a:blip r:embed="rId3"/>
+          <a:srcRect t="527"/>
+          <a:stretch/>
+        </p:blipFill>
+        <p:spPr>
+          <a:xfrm>
+            <a:off x="5211656" y="3282434"/>
+            <a:ext cx="3942086" cy="3210441"/>
           </a:xfrm>
           <a:prstGeom prst="rect">
             <a:avLst/>

--- a/pp/Presentation.pptx
+++ b/pp/Presentation.pptx
@@ -5998,13 +5998,7 @@
             </a:pPr>
             <a:r>
               <a:rPr lang="de-DE" sz="2000" dirty="0"/>
-              <a:t>Aufwändiger Umbau von Passwort-Speicherung in JSON-Datei als Klartext zu Binär Dateien</a:t>
-            </a:r>
-          </a:p>
-          <a:p>
-            <a:r>
-              <a:rPr lang="de-DE" dirty="0"/>
-              <a:t>Alles, was mehrmals verwendet wird in Funktionen packen</a:t>
+              <a:t>Struktur überlegen (Packages)</a:t>
             </a:r>
           </a:p>
           <a:p>
@@ -6014,23 +6008,36 @@
             </a:pPr>
             <a:r>
               <a:rPr lang="de-DE" sz="2000" dirty="0"/>
+              <a:t>Aufwändiger Umbau von Passwort-Speicherung in JSON-Datei als Klartext zu Binär Dateien</a:t>
+            </a:r>
+          </a:p>
+          <a:p>
+            <a:r>
+              <a:rPr lang="de-DE" dirty="0"/>
+              <a:t>Bei Verwendung von KI mehrmals das Ergebnis überprüfen und nochmal separat darüber informieren</a:t>
+            </a:r>
+          </a:p>
+          <a:p>
+            <a:r>
+              <a:rPr lang="de-DE" dirty="0"/>
+              <a:t>Alles, was mehrmals verwendet wird in Funktionen packen</a:t>
+            </a:r>
+          </a:p>
+          <a:p>
+            <a:pPr lvl="1">
+              <a:buFont typeface="Wingdings" panose="05000000000000000000" pitchFamily="2" charset="2"/>
+              <a:buChar char="Ø"/>
+            </a:pPr>
+            <a:r>
+              <a:rPr lang="de-DE" sz="2000" dirty="0"/>
               <a:t>beim benutzen des Dateinamens beim speichern/laden </a:t>
             </a:r>
             <a:r>
               <a:rPr lang="de-DE" sz="2000" dirty="0">
                 <a:sym typeface="Wingdings" panose="05000000000000000000" pitchFamily="2" charset="2"/>
               </a:rPr>
-              <a:t> jede Funktion musste geändert werden bei der Umstellung von JSON </a:t>
-            </a:r>
-            <a:r>
-              <a:rPr lang="de-DE" sz="2000">
-                <a:sym typeface="Wingdings" panose="05000000000000000000" pitchFamily="2" charset="2"/>
-              </a:rPr>
-              <a:t>zu Binär</a:t>
-            </a:r>
-            <a:endParaRPr lang="de-DE" sz="2000" dirty="0">
-              <a:sym typeface="Wingdings" panose="05000000000000000000" pitchFamily="2" charset="2"/>
-            </a:endParaRPr>
+              <a:t> jede Funktion musste geändert werden bei der Umstellung von JSON zu Binär</a:t>
+            </a:r>
           </a:p>
           <a:p>
             <a:pPr marL="457200" lvl="1" indent="0">
@@ -6062,7 +6069,7 @@
         </p:blipFill>
         <p:spPr>
           <a:xfrm>
-            <a:off x="1609388" y="4081418"/>
+            <a:off x="1158538" y="5305419"/>
             <a:ext cx="6582112" cy="871544"/>
           </a:xfrm>
           <a:prstGeom prst="rect">
@@ -8481,6 +8488,36 @@
           </a:p>
         </p:txBody>
       </p:sp>
+      <p:pic>
+        <p:nvPicPr>
+          <p:cNvPr id="5" name="Grafik 4">
+            <a:extLst>
+              <a:ext uri="{FF2B5EF4-FFF2-40B4-BE49-F238E27FC236}">
+                <a16:creationId xmlns:a16="http://schemas.microsoft.com/office/drawing/2014/main" id="{0087E34A-A403-1A60-5BB8-E2C7F31F9E6E}"/>
+              </a:ext>
+            </a:extLst>
+          </p:cNvPr>
+          <p:cNvPicPr>
+            <a:picLocks noChangeAspect="1"/>
+          </p:cNvPicPr>
+          <p:nvPr/>
+        </p:nvPicPr>
+        <p:blipFill>
+          <a:blip r:embed="rId2"/>
+          <a:stretch>
+            <a:fillRect/>
+          </a:stretch>
+        </p:blipFill>
+        <p:spPr>
+          <a:xfrm>
+            <a:off x="8738919" y="1486895"/>
+            <a:ext cx="3012814" cy="5028797"/>
+          </a:xfrm>
+          <a:prstGeom prst="rect">
+            <a:avLst/>
+          </a:prstGeom>
+        </p:spPr>
+      </p:pic>
     </p:spTree>
     <p:extLst>
       <p:ext uri="{BB962C8B-B14F-4D97-AF65-F5344CB8AC3E}">
